--- a/Project Submission Deck _ AMD Slingshot.pptx
+++ b/Project Submission Deck _ AMD Slingshot.pptx
@@ -1,42 +1,39 @@
 
 <file path=ppt/presentation.xml><?xml version="1.0" encoding="utf-8"?>
-<p:presentation xmlns:a="http://schemas.openxmlformats.org/drawingml/2006/main" xmlns:r="http://schemas.openxmlformats.org/officeDocument/2006/relationships" xmlns:mc="http://schemas.openxmlformats.org/markup-compatibility/2006" xmlns:mv="urn:schemas-microsoft-com:mac:vml" xmlns:p="http://schemas.openxmlformats.org/presentationml/2006/main" xmlns:c="http://schemas.openxmlformats.org/drawingml/2006/chart" xmlns:dgm="http://schemas.openxmlformats.org/drawingml/2006/diagram" xmlns:o="urn:schemas-microsoft-com:office:office" xmlns:v="urn:schemas-microsoft-com:vml" xmlns:pvml="urn:schemas-microsoft-com:office:powerpoint" xmlns:com="http://schemas.openxmlformats.org/drawingml/2006/compatibility" xmlns:p14="http://schemas.microsoft.com/office/powerpoint/2010/main" xmlns:p15="http://schemas.microsoft.com/office/powerpoint/2012/main" xmlns:ahyp="http://schemas.microsoft.com/office/drawing/2018/hyperlinkcolor" autoCompressPictures="0" embedTrueTypeFonts="1" strictFirstAndLastChars="0" saveSubsetFonts="1">
+<p:presentation xmlns:a="http://schemas.openxmlformats.org/drawingml/2006/main" xmlns:r="http://schemas.openxmlformats.org/officeDocument/2006/relationships" xmlns:p="http://schemas.openxmlformats.org/presentationml/2006/main" strictFirstAndLastChars="0" embedTrueTypeFonts="1" saveSubsetFonts="1" autoCompressPictures="0">
   <p:sldMasterIdLst>
-    <p:sldMasterId id="2147483659" r:id="rId4"/>
+    <p:sldMasterId id="2147483659" r:id="rId1"/>
   </p:sldMasterIdLst>
   <p:notesMasterIdLst>
-    <p:notesMasterId r:id="rId5"/>
+    <p:notesMasterId r:id="rId14"/>
   </p:notesMasterIdLst>
   <p:sldIdLst>
-    <p:sldId id="256" r:id="rId6"/>
-    <p:sldId id="257" r:id="rId7"/>
-    <p:sldId id="258" r:id="rId8"/>
-    <p:sldId id="259" r:id="rId9"/>
-    <p:sldId id="260" r:id="rId10"/>
-    <p:sldId id="261" r:id="rId11"/>
-    <p:sldId id="262" r:id="rId12"/>
-    <p:sldId id="263" r:id="rId13"/>
-    <p:sldId id="264" r:id="rId14"/>
-    <p:sldId id="265" r:id="rId15"/>
-    <p:sldId id="266" r:id="rId16"/>
-    <p:sldId id="267" r:id="rId17"/>
-    <p:sldId id="268" r:id="rId18"/>
-    <p:sldId id="269" r:id="rId19"/>
-    <p:sldId id="270" r:id="rId20"/>
+    <p:sldId id="256" r:id="rId2"/>
+    <p:sldId id="257" r:id="rId3"/>
+    <p:sldId id="258" r:id="rId4"/>
+    <p:sldId id="259" r:id="rId5"/>
+    <p:sldId id="260" r:id="rId6"/>
+    <p:sldId id="261" r:id="rId7"/>
+    <p:sldId id="262" r:id="rId8"/>
+    <p:sldId id="263" r:id="rId9"/>
+    <p:sldId id="264" r:id="rId10"/>
+    <p:sldId id="265" r:id="rId11"/>
+    <p:sldId id="266" r:id="rId12"/>
+    <p:sldId id="270" r:id="rId13"/>
   </p:sldIdLst>
-  <p:sldSz cy="5143500" cx="9144000"/>
+  <p:sldSz cx="9144000" cy="5143500" type="screen16x9"/>
   <p:notesSz cx="6858000" cy="9144000"/>
   <p:embeddedFontLst>
     <p:embeddedFont>
-      <p:font typeface="Poppins"/>
-      <p:regular r:id="rId21"/>
-      <p:bold r:id="rId22"/>
-      <p:italic r:id="rId23"/>
-      <p:boldItalic r:id="rId24"/>
+      <p:font typeface="Poppins" panose="00000500000000000000" pitchFamily="2" charset="0"/>
+      <p:regular r:id="rId15"/>
+      <p:bold r:id="rId16"/>
+      <p:italic r:id="rId17"/>
+      <p:boldItalic r:id="rId18"/>
     </p:embeddedFont>
   </p:embeddedFontLst>
   <p:defaultTextStyle>
-    <a:defPPr lvl="0" marR="0" rtl="0" algn="l">
+    <a:defPPr marR="0" lvl="0" algn="l" rtl="0">
       <a:lnSpc>
         <a:spcPct val="100000"/>
       </a:lnSpc>
@@ -47,7 +44,7 @@
         <a:spcPts val="0"/>
       </a:spcAft>
     </a:defPPr>
-    <a:lvl1pPr lvl="0" marR="0" rtl="0" algn="l">
+    <a:lvl1pPr marR="0" lvl="0" algn="l" rtl="0">
       <a:lnSpc>
         <a:spcPct val="100000"/>
       </a:lnSpc>
@@ -61,7 +58,7 @@
         <a:srgbClr val="000000"/>
       </a:buClr>
       <a:buFont typeface="Arial"/>
-      <a:defRPr b="0" i="0" sz="1400" u="none" cap="none" strike="noStrike">
+      <a:defRPr sz="1400" b="0" i="0" u="none" strike="noStrike" cap="none">
         <a:solidFill>
           <a:srgbClr val="000000"/>
         </a:solidFill>
@@ -71,7 +68,7 @@
         <a:sym typeface="Arial"/>
       </a:defRPr>
     </a:lvl1pPr>
-    <a:lvl2pPr lvl="1" marR="0" rtl="0" algn="l">
+    <a:lvl2pPr marR="0" lvl="1" algn="l" rtl="0">
       <a:lnSpc>
         <a:spcPct val="100000"/>
       </a:lnSpc>
@@ -85,7 +82,7 @@
         <a:srgbClr val="000000"/>
       </a:buClr>
       <a:buFont typeface="Arial"/>
-      <a:defRPr b="0" i="0" sz="1400" u="none" cap="none" strike="noStrike">
+      <a:defRPr sz="1400" b="0" i="0" u="none" strike="noStrike" cap="none">
         <a:solidFill>
           <a:srgbClr val="000000"/>
         </a:solidFill>
@@ -95,7 +92,7 @@
         <a:sym typeface="Arial"/>
       </a:defRPr>
     </a:lvl2pPr>
-    <a:lvl3pPr lvl="2" marR="0" rtl="0" algn="l">
+    <a:lvl3pPr marR="0" lvl="2" algn="l" rtl="0">
       <a:lnSpc>
         <a:spcPct val="100000"/>
       </a:lnSpc>
@@ -109,7 +106,7 @@
         <a:srgbClr val="000000"/>
       </a:buClr>
       <a:buFont typeface="Arial"/>
-      <a:defRPr b="0" i="0" sz="1400" u="none" cap="none" strike="noStrike">
+      <a:defRPr sz="1400" b="0" i="0" u="none" strike="noStrike" cap="none">
         <a:solidFill>
           <a:srgbClr val="000000"/>
         </a:solidFill>
@@ -119,7 +116,7 @@
         <a:sym typeface="Arial"/>
       </a:defRPr>
     </a:lvl3pPr>
-    <a:lvl4pPr lvl="3" marR="0" rtl="0" algn="l">
+    <a:lvl4pPr marR="0" lvl="3" algn="l" rtl="0">
       <a:lnSpc>
         <a:spcPct val="100000"/>
       </a:lnSpc>
@@ -133,7 +130,7 @@
         <a:srgbClr val="000000"/>
       </a:buClr>
       <a:buFont typeface="Arial"/>
-      <a:defRPr b="0" i="0" sz="1400" u="none" cap="none" strike="noStrike">
+      <a:defRPr sz="1400" b="0" i="0" u="none" strike="noStrike" cap="none">
         <a:solidFill>
           <a:srgbClr val="000000"/>
         </a:solidFill>
@@ -143,7 +140,7 @@
         <a:sym typeface="Arial"/>
       </a:defRPr>
     </a:lvl4pPr>
-    <a:lvl5pPr lvl="4" marR="0" rtl="0" algn="l">
+    <a:lvl5pPr marR="0" lvl="4" algn="l" rtl="0">
       <a:lnSpc>
         <a:spcPct val="100000"/>
       </a:lnSpc>
@@ -157,7 +154,7 @@
         <a:srgbClr val="000000"/>
       </a:buClr>
       <a:buFont typeface="Arial"/>
-      <a:defRPr b="0" i="0" sz="1400" u="none" cap="none" strike="noStrike">
+      <a:defRPr sz="1400" b="0" i="0" u="none" strike="noStrike" cap="none">
         <a:solidFill>
           <a:srgbClr val="000000"/>
         </a:solidFill>
@@ -167,7 +164,7 @@
         <a:sym typeface="Arial"/>
       </a:defRPr>
     </a:lvl5pPr>
-    <a:lvl6pPr lvl="5" marR="0" rtl="0" algn="l">
+    <a:lvl6pPr marR="0" lvl="5" algn="l" rtl="0">
       <a:lnSpc>
         <a:spcPct val="100000"/>
       </a:lnSpc>
@@ -181,7 +178,7 @@
         <a:srgbClr val="000000"/>
       </a:buClr>
       <a:buFont typeface="Arial"/>
-      <a:defRPr b="0" i="0" sz="1400" u="none" cap="none" strike="noStrike">
+      <a:defRPr sz="1400" b="0" i="0" u="none" strike="noStrike" cap="none">
         <a:solidFill>
           <a:srgbClr val="000000"/>
         </a:solidFill>
@@ -191,7 +188,7 @@
         <a:sym typeface="Arial"/>
       </a:defRPr>
     </a:lvl6pPr>
-    <a:lvl7pPr lvl="6" marR="0" rtl="0" algn="l">
+    <a:lvl7pPr marR="0" lvl="6" algn="l" rtl="0">
       <a:lnSpc>
         <a:spcPct val="100000"/>
       </a:lnSpc>
@@ -205,7 +202,7 @@
         <a:srgbClr val="000000"/>
       </a:buClr>
       <a:buFont typeface="Arial"/>
-      <a:defRPr b="0" i="0" sz="1400" u="none" cap="none" strike="noStrike">
+      <a:defRPr sz="1400" b="0" i="0" u="none" strike="noStrike" cap="none">
         <a:solidFill>
           <a:srgbClr val="000000"/>
         </a:solidFill>
@@ -215,7 +212,7 @@
         <a:sym typeface="Arial"/>
       </a:defRPr>
     </a:lvl7pPr>
-    <a:lvl8pPr lvl="7" marR="0" rtl="0" algn="l">
+    <a:lvl8pPr marR="0" lvl="7" algn="l" rtl="0">
       <a:lnSpc>
         <a:spcPct val="100000"/>
       </a:lnSpc>
@@ -229,7 +226,7 @@
         <a:srgbClr val="000000"/>
       </a:buClr>
       <a:buFont typeface="Arial"/>
-      <a:defRPr b="0" i="0" sz="1400" u="none" cap="none" strike="noStrike">
+      <a:defRPr sz="1400" b="0" i="0" u="none" strike="noStrike" cap="none">
         <a:solidFill>
           <a:srgbClr val="000000"/>
         </a:solidFill>
@@ -239,7 +236,7 @@
         <a:sym typeface="Arial"/>
       </a:defRPr>
     </a:lvl8pPr>
-    <a:lvl9pPr lvl="8" marR="0" rtl="0" algn="l">
+    <a:lvl9pPr marR="0" lvl="8" algn="l" rtl="0">
       <a:lnSpc>
         <a:spcPct val="100000"/>
       </a:lnSpc>
@@ -253,7 +250,7 @@
         <a:srgbClr val="000000"/>
       </a:buClr>
       <a:buFont typeface="Arial"/>
-      <a:defRPr b="0" i="0" sz="1400" u="none" cap="none" strike="noStrike">
+      <a:defRPr sz="1400" b="0" i="0" u="none" strike="noStrike" cap="none">
         <a:solidFill>
           <a:srgbClr val="000000"/>
         </a:solidFill>
@@ -266,7 +263,7 @@
   </p:defaultTextStyle>
   <p:extLst>
     <p:ext uri="{EFAFB233-063F-42B5-8137-9DF3F51BA10A}">
-      <p15:sldGuideLst>
+      <p15:sldGuideLst xmlns:p15="http://schemas.microsoft.com/office/powerpoint/2012/main">
         <p15:guide id="1" orient="horz" pos="1620">
           <p15:clr>
             <a:srgbClr val="747775"/>
@@ -284,11 +281,16 @@
 </file>
 
 <file path=ppt/notesMasters/notesMaster1.xml><?xml version="1.0" encoding="utf-8"?>
-<p:notesMaster xmlns:a="http://schemas.openxmlformats.org/drawingml/2006/main" xmlns:r="http://schemas.openxmlformats.org/officeDocument/2006/relationships" xmlns:mc="http://schemas.openxmlformats.org/markup-compatibility/2006" xmlns:mv="urn:schemas-microsoft-com:mac:vml" xmlns:p="http://schemas.openxmlformats.org/presentationml/2006/main" xmlns:c="http://schemas.openxmlformats.org/drawingml/2006/chart" xmlns:dgm="http://schemas.openxmlformats.org/drawingml/2006/diagram" xmlns:o="urn:schemas-microsoft-com:office:office" xmlns:v="urn:schemas-microsoft-com:vml" xmlns:pvml="urn:schemas-microsoft-com:office:powerpoint" xmlns:com="http://schemas.openxmlformats.org/drawingml/2006/compatibility" xmlns:p14="http://schemas.microsoft.com/office/powerpoint/2010/main" xmlns:p15="http://schemas.microsoft.com/office/powerpoint/2012/main" xmlns:ahyp="http://schemas.microsoft.com/office/drawing/2018/hyperlinkcolor">
+<p:notesMaster xmlns:a="http://schemas.openxmlformats.org/drawingml/2006/main" xmlns:r="http://schemas.openxmlformats.org/officeDocument/2006/relationships" xmlns:p="http://schemas.openxmlformats.org/presentationml/2006/main">
   <p:cSld>
+    <p:bg>
+      <p:bgRef idx="1001">
+        <a:schemeClr val="bg1"/>
+      </p:bgRef>
+    </p:bg>
     <p:spTree>
       <p:nvGrpSpPr>
-        <p:cNvPr id="2" name="Shape 2"/>
+        <p:cNvPr id="1" name="Shape 2"/>
         <p:cNvGrpSpPr/>
         <p:nvPr/>
       </p:nvGrpSpPr>
@@ -303,9 +305,11 @@
       <p:sp>
         <p:nvSpPr>
           <p:cNvPr id="3" name="Google Shape;3;n"/>
-          <p:cNvSpPr/>
+          <p:cNvSpPr>
+            <a:spLocks noGrp="1" noRot="1" noChangeAspect="1"/>
+          </p:cNvSpPr>
           <p:nvPr>
-            <p:ph idx="2" type="sldImg"/>
+            <p:ph type="sldImg" idx="2"/>
           </p:nvPr>
         </p:nvSpPr>
         <p:spPr>
@@ -314,9 +318,13 @@
             <a:ext cx="6096075" cy="3429000"/>
           </a:xfrm>
           <a:custGeom>
-            <a:rect b="b" l="l" r="r" t="t"/>
+            <a:avLst/>
+            <a:gdLst/>
+            <a:ahLst/>
+            <a:cxnLst/>
+            <a:rect l="l" t="t" r="r" b="b"/>
             <a:pathLst>
-              <a:path extrusionOk="0" h="120000" w="120000">
+              <a:path w="120000" h="120000" extrusionOk="0">
                 <a:moveTo>
                   <a:pt x="0" y="0"/>
                 </a:moveTo>
@@ -334,23 +342,25 @@
             </a:pathLst>
           </a:custGeom>
           <a:noFill/>
-          <a:ln cap="flat" cmpd="sng" w="9525">
+          <a:ln w="9525" cap="flat" cmpd="sng">
             <a:solidFill>
               <a:srgbClr val="000000"/>
             </a:solidFill>
             <a:prstDash val="solid"/>
             <a:round/>
-            <a:headEnd len="sm" w="sm" type="none"/>
-            <a:tailEnd len="sm" w="sm" type="none"/>
+            <a:headEnd type="none" w="sm" len="sm"/>
+            <a:tailEnd type="none" w="sm" len="sm"/>
           </a:ln>
         </p:spPr>
       </p:sp>
       <p:sp>
         <p:nvSpPr>
           <p:cNvPr id="4" name="Google Shape;4;n"/>
-          <p:cNvSpPr txBox="1"/>
+          <p:cNvSpPr txBox="1">
+            <a:spLocks noGrp="1"/>
+          </p:cNvSpPr>
           <p:nvPr>
-            <p:ph idx="1" type="body"/>
+            <p:ph type="body" idx="1"/>
           </p:nvPr>
         </p:nvSpPr>
         <p:spPr>
@@ -367,11 +377,11 @@
           </a:ln>
         </p:spPr>
         <p:txBody>
-          <a:bodyPr anchorCtr="0" anchor="t" bIns="91425" lIns="91425" spcFirstLastPara="1" rIns="91425" wrap="square" tIns="91425">
+          <a:bodyPr spcFirstLastPara="1" wrap="square" lIns="91425" tIns="91425" rIns="91425" bIns="91425" anchor="t" anchorCtr="0">
             <a:noAutofit/>
           </a:bodyPr>
           <a:lstStyle>
-            <a:lvl1pPr indent="-298450" lvl="0" marL="457200">
+            <a:lvl1pPr marL="457200" lvl="0" indent="-298450">
               <a:spcBef>
                 <a:spcPts val="0"/>
               </a:spcBef>
@@ -382,7 +392,7 @@
               <a:buChar char="●"/>
               <a:defRPr sz="1100"/>
             </a:lvl1pPr>
-            <a:lvl2pPr indent="-298450" lvl="1" marL="914400">
+            <a:lvl2pPr marL="914400" lvl="1" indent="-298450">
               <a:spcBef>
                 <a:spcPts val="0"/>
               </a:spcBef>
@@ -393,7 +403,7 @@
               <a:buChar char="○"/>
               <a:defRPr sz="1100"/>
             </a:lvl2pPr>
-            <a:lvl3pPr indent="-298450" lvl="2" marL="1371600">
+            <a:lvl3pPr marL="1371600" lvl="2" indent="-298450">
               <a:spcBef>
                 <a:spcPts val="0"/>
               </a:spcBef>
@@ -404,7 +414,7 @@
               <a:buChar char="■"/>
               <a:defRPr sz="1100"/>
             </a:lvl3pPr>
-            <a:lvl4pPr indent="-298450" lvl="3" marL="1828800">
+            <a:lvl4pPr marL="1828800" lvl="3" indent="-298450">
               <a:spcBef>
                 <a:spcPts val="0"/>
               </a:spcBef>
@@ -415,7 +425,7 @@
               <a:buChar char="●"/>
               <a:defRPr sz="1100"/>
             </a:lvl4pPr>
-            <a:lvl5pPr indent="-298450" lvl="4" marL="2286000">
+            <a:lvl5pPr marL="2286000" lvl="4" indent="-298450">
               <a:spcBef>
                 <a:spcPts val="0"/>
               </a:spcBef>
@@ -426,7 +436,7 @@
               <a:buChar char="○"/>
               <a:defRPr sz="1100"/>
             </a:lvl5pPr>
-            <a:lvl6pPr indent="-298450" lvl="5" marL="2743200">
+            <a:lvl6pPr marL="2743200" lvl="5" indent="-298450">
               <a:spcBef>
                 <a:spcPts val="0"/>
               </a:spcBef>
@@ -437,7 +447,7 @@
               <a:buChar char="■"/>
               <a:defRPr sz="1100"/>
             </a:lvl6pPr>
-            <a:lvl7pPr indent="-298450" lvl="6" marL="3200400">
+            <a:lvl7pPr marL="3200400" lvl="6" indent="-298450">
               <a:spcBef>
                 <a:spcPts val="0"/>
               </a:spcBef>
@@ -448,7 +458,7 @@
               <a:buChar char="●"/>
               <a:defRPr sz="1100"/>
             </a:lvl7pPr>
-            <a:lvl8pPr indent="-298450" lvl="7" marL="3657600">
+            <a:lvl8pPr marL="3657600" lvl="7" indent="-298450">
               <a:spcBef>
                 <a:spcPts val="0"/>
               </a:spcBef>
@@ -459,7 +469,7 @@
               <a:buChar char="○"/>
               <a:defRPr sz="1100"/>
             </a:lvl8pPr>
-            <a:lvl9pPr indent="-298450" lvl="8" marL="4114800">
+            <a:lvl9pPr marL="4114800" lvl="8" indent="-298450">
               <a:spcBef>
                 <a:spcPts val="0"/>
               </a:spcBef>
@@ -471,14 +481,16 @@
               <a:defRPr sz="1100"/>
             </a:lvl9pPr>
           </a:lstStyle>
-          <a:p/>
+          <a:p>
+            <a:endParaRPr/>
+          </a:p>
         </p:txBody>
       </p:sp>
     </p:spTree>
   </p:cSld>
-  <p:clrMap accent1="accent1" accent2="accent2" accent3="accent3" accent4="accent4" accent5="accent5" accent6="accent6" bg1="lt1" bg2="dk2" tx1="dk1" tx2="lt2" folHlink="folHlink" hlink="hlink"/>
+  <p:clrMap bg1="lt1" tx1="dk1" bg2="dk2" tx2="lt2" accent1="accent1" accent2="accent2" accent3="accent3" accent4="accent4" accent5="accent5" accent6="accent6" hlink="hlink" folHlink="folHlink"/>
   <p:notesStyle>
-    <a:defPPr lvl="0" marR="0" rtl="0" algn="l">
+    <a:defPPr marR="0" lvl="0" algn="l" rtl="0">
       <a:lnSpc>
         <a:spcPct val="100000"/>
       </a:lnSpc>
@@ -489,7 +501,7 @@
         <a:spcPts val="0"/>
       </a:spcAft>
     </a:defPPr>
-    <a:lvl1pPr lvl="0" marR="0" rtl="0" algn="l">
+    <a:lvl1pPr marR="0" lvl="0" algn="l" rtl="0">
       <a:lnSpc>
         <a:spcPct val="100000"/>
       </a:lnSpc>
@@ -503,7 +515,7 @@
         <a:srgbClr val="000000"/>
       </a:buClr>
       <a:buFont typeface="Arial"/>
-      <a:defRPr b="0" i="0" sz="1400" u="none" cap="none" strike="noStrike">
+      <a:defRPr sz="1400" b="0" i="0" u="none" strike="noStrike" cap="none">
         <a:solidFill>
           <a:srgbClr val="000000"/>
         </a:solidFill>
@@ -513,7 +525,7 @@
         <a:sym typeface="Arial"/>
       </a:defRPr>
     </a:lvl1pPr>
-    <a:lvl2pPr lvl="1" marR="0" rtl="0" algn="l">
+    <a:lvl2pPr marR="0" lvl="1" algn="l" rtl="0">
       <a:lnSpc>
         <a:spcPct val="100000"/>
       </a:lnSpc>
@@ -527,7 +539,7 @@
         <a:srgbClr val="000000"/>
       </a:buClr>
       <a:buFont typeface="Arial"/>
-      <a:defRPr b="0" i="0" sz="1400" u="none" cap="none" strike="noStrike">
+      <a:defRPr sz="1400" b="0" i="0" u="none" strike="noStrike" cap="none">
         <a:solidFill>
           <a:srgbClr val="000000"/>
         </a:solidFill>
@@ -537,7 +549,7 @@
         <a:sym typeface="Arial"/>
       </a:defRPr>
     </a:lvl2pPr>
-    <a:lvl3pPr lvl="2" marR="0" rtl="0" algn="l">
+    <a:lvl3pPr marR="0" lvl="2" algn="l" rtl="0">
       <a:lnSpc>
         <a:spcPct val="100000"/>
       </a:lnSpc>
@@ -551,7 +563,7 @@
         <a:srgbClr val="000000"/>
       </a:buClr>
       <a:buFont typeface="Arial"/>
-      <a:defRPr b="0" i="0" sz="1400" u="none" cap="none" strike="noStrike">
+      <a:defRPr sz="1400" b="0" i="0" u="none" strike="noStrike" cap="none">
         <a:solidFill>
           <a:srgbClr val="000000"/>
         </a:solidFill>
@@ -561,7 +573,7 @@
         <a:sym typeface="Arial"/>
       </a:defRPr>
     </a:lvl3pPr>
-    <a:lvl4pPr lvl="3" marR="0" rtl="0" algn="l">
+    <a:lvl4pPr marR="0" lvl="3" algn="l" rtl="0">
       <a:lnSpc>
         <a:spcPct val="100000"/>
       </a:lnSpc>
@@ -575,7 +587,7 @@
         <a:srgbClr val="000000"/>
       </a:buClr>
       <a:buFont typeface="Arial"/>
-      <a:defRPr b="0" i="0" sz="1400" u="none" cap="none" strike="noStrike">
+      <a:defRPr sz="1400" b="0" i="0" u="none" strike="noStrike" cap="none">
         <a:solidFill>
           <a:srgbClr val="000000"/>
         </a:solidFill>
@@ -585,7 +597,7 @@
         <a:sym typeface="Arial"/>
       </a:defRPr>
     </a:lvl4pPr>
-    <a:lvl5pPr lvl="4" marR="0" rtl="0" algn="l">
+    <a:lvl5pPr marR="0" lvl="4" algn="l" rtl="0">
       <a:lnSpc>
         <a:spcPct val="100000"/>
       </a:lnSpc>
@@ -599,7 +611,7 @@
         <a:srgbClr val="000000"/>
       </a:buClr>
       <a:buFont typeface="Arial"/>
-      <a:defRPr b="0" i="0" sz="1400" u="none" cap="none" strike="noStrike">
+      <a:defRPr sz="1400" b="0" i="0" u="none" strike="noStrike" cap="none">
         <a:solidFill>
           <a:srgbClr val="000000"/>
         </a:solidFill>
@@ -609,7 +621,7 @@
         <a:sym typeface="Arial"/>
       </a:defRPr>
     </a:lvl5pPr>
-    <a:lvl6pPr lvl="5" marR="0" rtl="0" algn="l">
+    <a:lvl6pPr marR="0" lvl="5" algn="l" rtl="0">
       <a:lnSpc>
         <a:spcPct val="100000"/>
       </a:lnSpc>
@@ -623,7 +635,7 @@
         <a:srgbClr val="000000"/>
       </a:buClr>
       <a:buFont typeface="Arial"/>
-      <a:defRPr b="0" i="0" sz="1400" u="none" cap="none" strike="noStrike">
+      <a:defRPr sz="1400" b="0" i="0" u="none" strike="noStrike" cap="none">
         <a:solidFill>
           <a:srgbClr val="000000"/>
         </a:solidFill>
@@ -633,7 +645,7 @@
         <a:sym typeface="Arial"/>
       </a:defRPr>
     </a:lvl6pPr>
-    <a:lvl7pPr lvl="6" marR="0" rtl="0" algn="l">
+    <a:lvl7pPr marR="0" lvl="6" algn="l" rtl="0">
       <a:lnSpc>
         <a:spcPct val="100000"/>
       </a:lnSpc>
@@ -647,7 +659,7 @@
         <a:srgbClr val="000000"/>
       </a:buClr>
       <a:buFont typeface="Arial"/>
-      <a:defRPr b="0" i="0" sz="1400" u="none" cap="none" strike="noStrike">
+      <a:defRPr sz="1400" b="0" i="0" u="none" strike="noStrike" cap="none">
         <a:solidFill>
           <a:srgbClr val="000000"/>
         </a:solidFill>
@@ -657,7 +669,7 @@
         <a:sym typeface="Arial"/>
       </a:defRPr>
     </a:lvl7pPr>
-    <a:lvl8pPr lvl="7" marR="0" rtl="0" algn="l">
+    <a:lvl8pPr marR="0" lvl="7" algn="l" rtl="0">
       <a:lnSpc>
         <a:spcPct val="100000"/>
       </a:lnSpc>
@@ -671,7 +683,7 @@
         <a:srgbClr val="000000"/>
       </a:buClr>
       <a:buFont typeface="Arial"/>
-      <a:defRPr b="0" i="0" sz="1400" u="none" cap="none" strike="noStrike">
+      <a:defRPr sz="1400" b="0" i="0" u="none" strike="noStrike" cap="none">
         <a:solidFill>
           <a:srgbClr val="000000"/>
         </a:solidFill>
@@ -681,7 +693,7 @@
         <a:sym typeface="Arial"/>
       </a:defRPr>
     </a:lvl8pPr>
-    <a:lvl9pPr lvl="8" marR="0" rtl="0" algn="l">
+    <a:lvl9pPr marR="0" lvl="8" algn="l" rtl="0">
       <a:lnSpc>
         <a:spcPct val="100000"/>
       </a:lnSpc>
@@ -695,7 +707,7 @@
         <a:srgbClr val="000000"/>
       </a:buClr>
       <a:buFont typeface="Arial"/>
-      <a:defRPr b="0" i="0" sz="1400" u="none" cap="none" strike="noStrike">
+      <a:defRPr sz="1400" b="0" i="0" u="none" strike="noStrike" cap="none">
         <a:solidFill>
           <a:srgbClr val="000000"/>
         </a:solidFill>
@@ -710,11 +722,11 @@
 </file>
 
 <file path=ppt/notesSlides/notesSlide1.xml><?xml version="1.0" encoding="utf-8"?>
-<p:notes xmlns:a="http://schemas.openxmlformats.org/drawingml/2006/main" xmlns:r="http://schemas.openxmlformats.org/officeDocument/2006/relationships" xmlns:mc="http://schemas.openxmlformats.org/markup-compatibility/2006" xmlns:mv="urn:schemas-microsoft-com:mac:vml" xmlns:p="http://schemas.openxmlformats.org/presentationml/2006/main" xmlns:c="http://schemas.openxmlformats.org/drawingml/2006/chart" xmlns:dgm="http://schemas.openxmlformats.org/drawingml/2006/diagram" xmlns:o="urn:schemas-microsoft-com:office:office" xmlns:v="urn:schemas-microsoft-com:vml" xmlns:pvml="urn:schemas-microsoft-com:office:powerpoint" xmlns:com="http://schemas.openxmlformats.org/drawingml/2006/compatibility" xmlns:p14="http://schemas.microsoft.com/office/powerpoint/2010/main" xmlns:p15="http://schemas.microsoft.com/office/powerpoint/2012/main" xmlns:ahyp="http://schemas.microsoft.com/office/drawing/2018/hyperlinkcolor" showMasterPhAnim="0" showMasterSp="0">
+<p:notes xmlns:a="http://schemas.openxmlformats.org/drawingml/2006/main" xmlns:r="http://schemas.openxmlformats.org/officeDocument/2006/relationships" xmlns:p="http://schemas.openxmlformats.org/presentationml/2006/main" showMasterSp="0" showMasterPhAnim="0">
   <p:cSld>
     <p:spTree>
       <p:nvGrpSpPr>
-        <p:cNvPr id="50" name="Shape 50"/>
+        <p:cNvPr id="1" name="Shape 50"/>
         <p:cNvGrpSpPr/>
         <p:nvPr/>
       </p:nvGrpSpPr>
@@ -729,20 +741,26 @@
       <p:sp>
         <p:nvSpPr>
           <p:cNvPr id="51" name="Google Shape;51;p:notes"/>
-          <p:cNvSpPr/>
+          <p:cNvSpPr>
+            <a:spLocks noGrp="1" noRot="1" noChangeAspect="1"/>
+          </p:cNvSpPr>
           <p:nvPr>
-            <p:ph idx="2" type="sldImg"/>
+            <p:ph type="sldImg" idx="2"/>
           </p:nvPr>
         </p:nvSpPr>
         <p:spPr>
           <a:xfrm>
-            <a:off x="381300" y="685800"/>
-            <a:ext cx="6096075" cy="3429000"/>
+            <a:off x="381000" y="685800"/>
+            <a:ext cx="6096000" cy="3429000"/>
           </a:xfrm>
           <a:custGeom>
-            <a:rect b="b" l="l" r="r" t="t"/>
+            <a:avLst/>
+            <a:gdLst/>
+            <a:ahLst/>
+            <a:cxnLst/>
+            <a:rect l="l" t="t" r="r" b="b"/>
             <a:pathLst>
-              <a:path extrusionOk="0" h="120000" w="120000">
+              <a:path w="120000" h="120000" extrusionOk="0">
                 <a:moveTo>
                   <a:pt x="0" y="0"/>
                 </a:moveTo>
@@ -764,9 +782,11 @@
       <p:sp>
         <p:nvSpPr>
           <p:cNvPr id="52" name="Google Shape;52;p:notes"/>
-          <p:cNvSpPr txBox="1"/>
+          <p:cNvSpPr txBox="1">
+            <a:spLocks noGrp="1"/>
+          </p:cNvSpPr>
           <p:nvPr>
-            <p:ph idx="1" type="body"/>
+            <p:ph type="body" idx="1"/>
           </p:nvPr>
         </p:nvSpPr>
         <p:spPr>
@@ -779,12 +799,12 @@
           </a:prstGeom>
         </p:spPr>
         <p:txBody>
-          <a:bodyPr anchorCtr="0" anchor="t" bIns="91425" lIns="91425" spcFirstLastPara="1" rIns="91425" wrap="square" tIns="91425">
+          <a:bodyPr spcFirstLastPara="1" wrap="square" lIns="91425" tIns="91425" rIns="91425" bIns="91425" anchor="t" anchorCtr="0">
             <a:noAutofit/>
           </a:bodyPr>
           <a:lstStyle/>
           <a:p>
-            <a:pPr indent="0" lvl="0" marL="0" rtl="0" algn="l">
+            <a:pPr marL="0" lvl="0" indent="0" algn="l" rtl="0">
               <a:spcBef>
                 <a:spcPts val="0"/>
               </a:spcBef>
@@ -793,9 +813,6 @@
               </a:spcAft>
               <a:buNone/>
             </a:pPr>
-            <a:r>
-              <a:t/>
-            </a:r>
             <a:endParaRPr/>
           </a:p>
         </p:txBody>
@@ -809,11 +826,11 @@
 </file>
 
 <file path=ppt/notesSlides/notesSlide10.xml><?xml version="1.0" encoding="utf-8"?>
-<p:notes xmlns:a="http://schemas.openxmlformats.org/drawingml/2006/main" xmlns:r="http://schemas.openxmlformats.org/officeDocument/2006/relationships" xmlns:mc="http://schemas.openxmlformats.org/markup-compatibility/2006" xmlns:mv="urn:schemas-microsoft-com:mac:vml" xmlns:p="http://schemas.openxmlformats.org/presentationml/2006/main" xmlns:c="http://schemas.openxmlformats.org/drawingml/2006/chart" xmlns:dgm="http://schemas.openxmlformats.org/drawingml/2006/diagram" xmlns:o="urn:schemas-microsoft-com:office:office" xmlns:v="urn:schemas-microsoft-com:vml" xmlns:pvml="urn:schemas-microsoft-com:office:powerpoint" xmlns:com="http://schemas.openxmlformats.org/drawingml/2006/compatibility" xmlns:p14="http://schemas.microsoft.com/office/powerpoint/2010/main" xmlns:p15="http://schemas.microsoft.com/office/powerpoint/2012/main" xmlns:ahyp="http://schemas.microsoft.com/office/drawing/2018/hyperlinkcolor" showMasterPhAnim="0" showMasterSp="0">
+<p:notes xmlns:a="http://schemas.openxmlformats.org/drawingml/2006/main" xmlns:r="http://schemas.openxmlformats.org/officeDocument/2006/relationships" xmlns:p="http://schemas.openxmlformats.org/presentationml/2006/main" showMasterSp="0" showMasterPhAnim="0">
   <p:cSld>
     <p:spTree>
       <p:nvGrpSpPr>
-        <p:cNvPr id="124" name="Shape 124"/>
+        <p:cNvPr id="1" name="Shape 124"/>
         <p:cNvGrpSpPr/>
         <p:nvPr/>
       </p:nvGrpSpPr>
@@ -828,20 +845,26 @@
       <p:sp>
         <p:nvSpPr>
           <p:cNvPr id="125" name="Google Shape;125;g37fa3dcd40f_0_68:notes"/>
-          <p:cNvSpPr/>
+          <p:cNvSpPr>
+            <a:spLocks noGrp="1" noRot="1" noChangeAspect="1"/>
+          </p:cNvSpPr>
           <p:nvPr>
-            <p:ph idx="2" type="sldImg"/>
+            <p:ph type="sldImg" idx="2"/>
           </p:nvPr>
         </p:nvSpPr>
         <p:spPr>
           <a:xfrm>
-            <a:off x="381300" y="685800"/>
+            <a:off x="381000" y="685800"/>
             <a:ext cx="6096000" cy="3429000"/>
           </a:xfrm>
           <a:custGeom>
-            <a:rect b="b" l="l" r="r" t="t"/>
+            <a:avLst/>
+            <a:gdLst/>
+            <a:ahLst/>
+            <a:cxnLst/>
+            <a:rect l="l" t="t" r="r" b="b"/>
             <a:pathLst>
-              <a:path extrusionOk="0" h="120000" w="120000">
+              <a:path w="120000" h="120000" extrusionOk="0">
                 <a:moveTo>
                   <a:pt x="0" y="0"/>
                 </a:moveTo>
@@ -863,9 +886,11 @@
       <p:sp>
         <p:nvSpPr>
           <p:cNvPr id="126" name="Google Shape;126;g37fa3dcd40f_0_68:notes"/>
-          <p:cNvSpPr txBox="1"/>
+          <p:cNvSpPr txBox="1">
+            <a:spLocks noGrp="1"/>
+          </p:cNvSpPr>
           <p:nvPr>
-            <p:ph idx="1" type="body"/>
+            <p:ph type="body" idx="1"/>
           </p:nvPr>
         </p:nvSpPr>
         <p:spPr>
@@ -878,12 +903,12 @@
           </a:prstGeom>
         </p:spPr>
         <p:txBody>
-          <a:bodyPr anchorCtr="0" anchor="t" bIns="91425" lIns="91425" spcFirstLastPara="1" rIns="91425" wrap="square" tIns="91425">
+          <a:bodyPr spcFirstLastPara="1" wrap="square" lIns="91425" tIns="91425" rIns="91425" bIns="91425" anchor="t" anchorCtr="0">
             <a:noAutofit/>
           </a:bodyPr>
           <a:lstStyle/>
           <a:p>
-            <a:pPr indent="0" lvl="0" marL="0" rtl="0" algn="l">
+            <a:pPr marL="0" lvl="0" indent="0" algn="l" rtl="0">
               <a:spcBef>
                 <a:spcPts val="0"/>
               </a:spcBef>
@@ -892,9 +917,6 @@
               </a:spcAft>
               <a:buNone/>
             </a:pPr>
-            <a:r>
-              <a:t/>
-            </a:r>
             <a:endParaRPr/>
           </a:p>
         </p:txBody>
@@ -908,11 +930,11 @@
 </file>
 
 <file path=ppt/notesSlides/notesSlide11.xml><?xml version="1.0" encoding="utf-8"?>
-<p:notes xmlns:a="http://schemas.openxmlformats.org/drawingml/2006/main" xmlns:r="http://schemas.openxmlformats.org/officeDocument/2006/relationships" xmlns:mc="http://schemas.openxmlformats.org/markup-compatibility/2006" xmlns:mv="urn:schemas-microsoft-com:mac:vml" xmlns:p="http://schemas.openxmlformats.org/presentationml/2006/main" xmlns:c="http://schemas.openxmlformats.org/drawingml/2006/chart" xmlns:dgm="http://schemas.openxmlformats.org/drawingml/2006/diagram" xmlns:o="urn:schemas-microsoft-com:office:office" xmlns:v="urn:schemas-microsoft-com:vml" xmlns:pvml="urn:schemas-microsoft-com:office:powerpoint" xmlns:com="http://schemas.openxmlformats.org/drawingml/2006/compatibility" xmlns:p14="http://schemas.microsoft.com/office/powerpoint/2010/main" xmlns:p15="http://schemas.microsoft.com/office/powerpoint/2012/main" xmlns:ahyp="http://schemas.microsoft.com/office/drawing/2018/hyperlinkcolor" showMasterPhAnim="0" showMasterSp="0">
+<p:notes xmlns:a="http://schemas.openxmlformats.org/drawingml/2006/main" xmlns:r="http://schemas.openxmlformats.org/officeDocument/2006/relationships" xmlns:p="http://schemas.openxmlformats.org/presentationml/2006/main" showMasterSp="0" showMasterPhAnim="0">
   <p:cSld>
     <p:spTree>
       <p:nvGrpSpPr>
-        <p:cNvPr id="132" name="Shape 132"/>
+        <p:cNvPr id="1" name="Shape 132"/>
         <p:cNvGrpSpPr/>
         <p:nvPr/>
       </p:nvGrpSpPr>
@@ -927,20 +949,26 @@
       <p:sp>
         <p:nvSpPr>
           <p:cNvPr id="133" name="Google Shape;133;g37fa3dcd40f_0_74:notes"/>
-          <p:cNvSpPr/>
+          <p:cNvSpPr>
+            <a:spLocks noGrp="1" noRot="1" noChangeAspect="1"/>
+          </p:cNvSpPr>
           <p:nvPr>
-            <p:ph idx="2" type="sldImg"/>
+            <p:ph type="sldImg" idx="2"/>
           </p:nvPr>
         </p:nvSpPr>
         <p:spPr>
           <a:xfrm>
-            <a:off x="381300" y="685800"/>
+            <a:off x="381000" y="685800"/>
             <a:ext cx="6096000" cy="3429000"/>
           </a:xfrm>
           <a:custGeom>
-            <a:rect b="b" l="l" r="r" t="t"/>
+            <a:avLst/>
+            <a:gdLst/>
+            <a:ahLst/>
+            <a:cxnLst/>
+            <a:rect l="l" t="t" r="r" b="b"/>
             <a:pathLst>
-              <a:path extrusionOk="0" h="120000" w="120000">
+              <a:path w="120000" h="120000" extrusionOk="0">
                 <a:moveTo>
                   <a:pt x="0" y="0"/>
                 </a:moveTo>
@@ -962,9 +990,11 @@
       <p:sp>
         <p:nvSpPr>
           <p:cNvPr id="134" name="Google Shape;134;g37fa3dcd40f_0_74:notes"/>
-          <p:cNvSpPr txBox="1"/>
+          <p:cNvSpPr txBox="1">
+            <a:spLocks noGrp="1"/>
+          </p:cNvSpPr>
           <p:nvPr>
-            <p:ph idx="1" type="body"/>
+            <p:ph type="body" idx="1"/>
           </p:nvPr>
         </p:nvSpPr>
         <p:spPr>
@@ -977,12 +1007,12 @@
           </a:prstGeom>
         </p:spPr>
         <p:txBody>
-          <a:bodyPr anchorCtr="0" anchor="t" bIns="91425" lIns="91425" spcFirstLastPara="1" rIns="91425" wrap="square" tIns="91425">
+          <a:bodyPr spcFirstLastPara="1" wrap="square" lIns="91425" tIns="91425" rIns="91425" bIns="91425" anchor="t" anchorCtr="0">
             <a:noAutofit/>
           </a:bodyPr>
           <a:lstStyle/>
           <a:p>
-            <a:pPr indent="0" lvl="0" marL="0" rtl="0" algn="l">
+            <a:pPr marL="0" lvl="0" indent="0" algn="l" rtl="0">
               <a:spcBef>
                 <a:spcPts val="0"/>
               </a:spcBef>
@@ -991,9 +1021,6 @@
               </a:spcAft>
               <a:buNone/>
             </a:pPr>
-            <a:r>
-              <a:t/>
-            </a:r>
             <a:endParaRPr/>
           </a:p>
         </p:txBody>
@@ -1007,308 +1034,11 @@
 </file>
 
 <file path=ppt/notesSlides/notesSlide12.xml><?xml version="1.0" encoding="utf-8"?>
-<p:notes xmlns:a="http://schemas.openxmlformats.org/drawingml/2006/main" xmlns:r="http://schemas.openxmlformats.org/officeDocument/2006/relationships" xmlns:mc="http://schemas.openxmlformats.org/markup-compatibility/2006" xmlns:mv="urn:schemas-microsoft-com:mac:vml" xmlns:p="http://schemas.openxmlformats.org/presentationml/2006/main" xmlns:c="http://schemas.openxmlformats.org/drawingml/2006/chart" xmlns:dgm="http://schemas.openxmlformats.org/drawingml/2006/diagram" xmlns:o="urn:schemas-microsoft-com:office:office" xmlns:v="urn:schemas-microsoft-com:vml" xmlns:pvml="urn:schemas-microsoft-com:office:powerpoint" xmlns:com="http://schemas.openxmlformats.org/drawingml/2006/compatibility" xmlns:p14="http://schemas.microsoft.com/office/powerpoint/2010/main" xmlns:p15="http://schemas.microsoft.com/office/powerpoint/2012/main" xmlns:ahyp="http://schemas.microsoft.com/office/drawing/2018/hyperlinkcolor" showMasterPhAnim="0" showMasterSp="0">
+<p:notes xmlns:a="http://schemas.openxmlformats.org/drawingml/2006/main" xmlns:r="http://schemas.openxmlformats.org/officeDocument/2006/relationships" xmlns:p="http://schemas.openxmlformats.org/presentationml/2006/main" showMasterSp="0" showMasterPhAnim="0">
   <p:cSld>
     <p:spTree>
       <p:nvGrpSpPr>
-        <p:cNvPr id="141" name="Shape 141"/>
-        <p:cNvGrpSpPr/>
-        <p:nvPr/>
-      </p:nvGrpSpPr>
-      <p:grpSpPr>
-        <a:xfrm>
-          <a:off x="0" y="0"/>
-          <a:ext cx="0" cy="0"/>
-          <a:chOff x="0" y="0"/>
-          <a:chExt cx="0" cy="0"/>
-        </a:xfrm>
-      </p:grpSpPr>
-      <p:sp>
-        <p:nvSpPr>
-          <p:cNvPr id="142" name="Google Shape;142;g37fa3dcd40f_0_82:notes"/>
-          <p:cNvSpPr/>
-          <p:nvPr>
-            <p:ph idx="2" type="sldImg"/>
-          </p:nvPr>
-        </p:nvSpPr>
-        <p:spPr>
-          <a:xfrm>
-            <a:off x="381300" y="685800"/>
-            <a:ext cx="6096000" cy="3429000"/>
-          </a:xfrm>
-          <a:custGeom>
-            <a:rect b="b" l="l" r="r" t="t"/>
-            <a:pathLst>
-              <a:path extrusionOk="0" h="120000" w="120000">
-                <a:moveTo>
-                  <a:pt x="0" y="0"/>
-                </a:moveTo>
-                <a:lnTo>
-                  <a:pt x="120000" y="0"/>
-                </a:lnTo>
-                <a:lnTo>
-                  <a:pt x="120000" y="120000"/>
-                </a:lnTo>
-                <a:lnTo>
-                  <a:pt x="0" y="120000"/>
-                </a:lnTo>
-                <a:close/>
-              </a:path>
-            </a:pathLst>
-          </a:custGeom>
-        </p:spPr>
-      </p:sp>
-      <p:sp>
-        <p:nvSpPr>
-          <p:cNvPr id="143" name="Google Shape;143;g37fa3dcd40f_0_82:notes"/>
-          <p:cNvSpPr txBox="1"/>
-          <p:nvPr>
-            <p:ph idx="1" type="body"/>
-          </p:nvPr>
-        </p:nvSpPr>
-        <p:spPr>
-          <a:xfrm>
-            <a:off x="685800" y="4343400"/>
-            <a:ext cx="5486400" cy="4114800"/>
-          </a:xfrm>
-          <a:prstGeom prst="rect">
-            <a:avLst/>
-          </a:prstGeom>
-        </p:spPr>
-        <p:txBody>
-          <a:bodyPr anchorCtr="0" anchor="t" bIns="91425" lIns="91425" spcFirstLastPara="1" rIns="91425" wrap="square" tIns="91425">
-            <a:noAutofit/>
-          </a:bodyPr>
-          <a:lstStyle/>
-          <a:p>
-            <a:pPr indent="0" lvl="0" marL="0" rtl="0" algn="l">
-              <a:spcBef>
-                <a:spcPts val="0"/>
-              </a:spcBef>
-              <a:spcAft>
-                <a:spcPts val="0"/>
-              </a:spcAft>
-              <a:buNone/>
-            </a:pPr>
-            <a:r>
-              <a:t/>
-            </a:r>
-            <a:endParaRPr/>
-          </a:p>
-        </p:txBody>
-      </p:sp>
-    </p:spTree>
-  </p:cSld>
-  <p:clrMapOvr>
-    <a:masterClrMapping/>
-  </p:clrMapOvr>
-</p:notes>
-</file>
-
-<file path=ppt/notesSlides/notesSlide13.xml><?xml version="1.0" encoding="utf-8"?>
-<p:notes xmlns:a="http://schemas.openxmlformats.org/drawingml/2006/main" xmlns:r="http://schemas.openxmlformats.org/officeDocument/2006/relationships" xmlns:mc="http://schemas.openxmlformats.org/markup-compatibility/2006" xmlns:mv="urn:schemas-microsoft-com:mac:vml" xmlns:p="http://schemas.openxmlformats.org/presentationml/2006/main" xmlns:c="http://schemas.openxmlformats.org/drawingml/2006/chart" xmlns:dgm="http://schemas.openxmlformats.org/drawingml/2006/diagram" xmlns:o="urn:schemas-microsoft-com:office:office" xmlns:v="urn:schemas-microsoft-com:vml" xmlns:pvml="urn:schemas-microsoft-com:office:powerpoint" xmlns:com="http://schemas.openxmlformats.org/drawingml/2006/compatibility" xmlns:p14="http://schemas.microsoft.com/office/powerpoint/2010/main" xmlns:p15="http://schemas.microsoft.com/office/powerpoint/2012/main" xmlns:ahyp="http://schemas.microsoft.com/office/drawing/2018/hyperlinkcolor" showMasterPhAnim="0" showMasterSp="0">
-  <p:cSld>
-    <p:spTree>
-      <p:nvGrpSpPr>
-        <p:cNvPr id="149" name="Shape 149"/>
-        <p:cNvGrpSpPr/>
-        <p:nvPr/>
-      </p:nvGrpSpPr>
-      <p:grpSpPr>
-        <a:xfrm>
-          <a:off x="0" y="0"/>
-          <a:ext cx="0" cy="0"/>
-          <a:chOff x="0" y="0"/>
-          <a:chExt cx="0" cy="0"/>
-        </a:xfrm>
-      </p:grpSpPr>
-      <p:sp>
-        <p:nvSpPr>
-          <p:cNvPr id="150" name="Google Shape;150;g37fa3dcd40f_0_89:notes"/>
-          <p:cNvSpPr/>
-          <p:nvPr>
-            <p:ph idx="2" type="sldImg"/>
-          </p:nvPr>
-        </p:nvSpPr>
-        <p:spPr>
-          <a:xfrm>
-            <a:off x="381300" y="685800"/>
-            <a:ext cx="6096000" cy="3429000"/>
-          </a:xfrm>
-          <a:custGeom>
-            <a:rect b="b" l="l" r="r" t="t"/>
-            <a:pathLst>
-              <a:path extrusionOk="0" h="120000" w="120000">
-                <a:moveTo>
-                  <a:pt x="0" y="0"/>
-                </a:moveTo>
-                <a:lnTo>
-                  <a:pt x="120000" y="0"/>
-                </a:lnTo>
-                <a:lnTo>
-                  <a:pt x="120000" y="120000"/>
-                </a:lnTo>
-                <a:lnTo>
-                  <a:pt x="0" y="120000"/>
-                </a:lnTo>
-                <a:close/>
-              </a:path>
-            </a:pathLst>
-          </a:custGeom>
-        </p:spPr>
-      </p:sp>
-      <p:sp>
-        <p:nvSpPr>
-          <p:cNvPr id="151" name="Google Shape;151;g37fa3dcd40f_0_89:notes"/>
-          <p:cNvSpPr txBox="1"/>
-          <p:nvPr>
-            <p:ph idx="1" type="body"/>
-          </p:nvPr>
-        </p:nvSpPr>
-        <p:spPr>
-          <a:xfrm>
-            <a:off x="685800" y="4343400"/>
-            <a:ext cx="5486400" cy="4114800"/>
-          </a:xfrm>
-          <a:prstGeom prst="rect">
-            <a:avLst/>
-          </a:prstGeom>
-        </p:spPr>
-        <p:txBody>
-          <a:bodyPr anchorCtr="0" anchor="t" bIns="91425" lIns="91425" spcFirstLastPara="1" rIns="91425" wrap="square" tIns="91425">
-            <a:noAutofit/>
-          </a:bodyPr>
-          <a:lstStyle/>
-          <a:p>
-            <a:pPr indent="0" lvl="0" marL="0" rtl="0" algn="l">
-              <a:spcBef>
-                <a:spcPts val="0"/>
-              </a:spcBef>
-              <a:spcAft>
-                <a:spcPts val="0"/>
-              </a:spcAft>
-              <a:buNone/>
-            </a:pPr>
-            <a:r>
-              <a:t/>
-            </a:r>
-            <a:endParaRPr/>
-          </a:p>
-        </p:txBody>
-      </p:sp>
-    </p:spTree>
-  </p:cSld>
-  <p:clrMapOvr>
-    <a:masterClrMapping/>
-  </p:clrMapOvr>
-</p:notes>
-</file>
-
-<file path=ppt/notesSlides/notesSlide14.xml><?xml version="1.0" encoding="utf-8"?>
-<p:notes xmlns:a="http://schemas.openxmlformats.org/drawingml/2006/main" xmlns:r="http://schemas.openxmlformats.org/officeDocument/2006/relationships" xmlns:mc="http://schemas.openxmlformats.org/markup-compatibility/2006" xmlns:mv="urn:schemas-microsoft-com:mac:vml" xmlns:p="http://schemas.openxmlformats.org/presentationml/2006/main" xmlns:c="http://schemas.openxmlformats.org/drawingml/2006/chart" xmlns:dgm="http://schemas.openxmlformats.org/drawingml/2006/diagram" xmlns:o="urn:schemas-microsoft-com:office:office" xmlns:v="urn:schemas-microsoft-com:vml" xmlns:pvml="urn:schemas-microsoft-com:office:powerpoint" xmlns:com="http://schemas.openxmlformats.org/drawingml/2006/compatibility" xmlns:p14="http://schemas.microsoft.com/office/powerpoint/2010/main" xmlns:p15="http://schemas.microsoft.com/office/powerpoint/2012/main" xmlns:ahyp="http://schemas.microsoft.com/office/drawing/2018/hyperlinkcolor" showMasterPhAnim="0" showMasterSp="0">
-  <p:cSld>
-    <p:spTree>
-      <p:nvGrpSpPr>
-        <p:cNvPr id="155" name="Shape 155"/>
-        <p:cNvGrpSpPr/>
-        <p:nvPr/>
-      </p:nvGrpSpPr>
-      <p:grpSpPr>
-        <a:xfrm>
-          <a:off x="0" y="0"/>
-          <a:ext cx="0" cy="0"/>
-          <a:chOff x="0" y="0"/>
-          <a:chExt cx="0" cy="0"/>
-        </a:xfrm>
-      </p:grpSpPr>
-      <p:sp>
-        <p:nvSpPr>
-          <p:cNvPr id="156" name="Google Shape;156;g381babfb1b7_0_0:notes"/>
-          <p:cNvSpPr/>
-          <p:nvPr>
-            <p:ph idx="2" type="sldImg"/>
-          </p:nvPr>
-        </p:nvSpPr>
-        <p:spPr>
-          <a:xfrm>
-            <a:off x="381300" y="685800"/>
-            <a:ext cx="6096000" cy="3429000"/>
-          </a:xfrm>
-          <a:custGeom>
-            <a:rect b="b" l="l" r="r" t="t"/>
-            <a:pathLst>
-              <a:path extrusionOk="0" h="120000" w="120000">
-                <a:moveTo>
-                  <a:pt x="0" y="0"/>
-                </a:moveTo>
-                <a:lnTo>
-                  <a:pt x="120000" y="0"/>
-                </a:lnTo>
-                <a:lnTo>
-                  <a:pt x="120000" y="120000"/>
-                </a:lnTo>
-                <a:lnTo>
-                  <a:pt x="0" y="120000"/>
-                </a:lnTo>
-                <a:close/>
-              </a:path>
-            </a:pathLst>
-          </a:custGeom>
-        </p:spPr>
-      </p:sp>
-      <p:sp>
-        <p:nvSpPr>
-          <p:cNvPr id="157" name="Google Shape;157;g381babfb1b7_0_0:notes"/>
-          <p:cNvSpPr txBox="1"/>
-          <p:nvPr>
-            <p:ph idx="1" type="body"/>
-          </p:nvPr>
-        </p:nvSpPr>
-        <p:spPr>
-          <a:xfrm>
-            <a:off x="685800" y="4343400"/>
-            <a:ext cx="5486400" cy="4114800"/>
-          </a:xfrm>
-          <a:prstGeom prst="rect">
-            <a:avLst/>
-          </a:prstGeom>
-        </p:spPr>
-        <p:txBody>
-          <a:bodyPr anchorCtr="0" anchor="t" bIns="91425" lIns="91425" spcFirstLastPara="1" rIns="91425" wrap="square" tIns="91425">
-            <a:noAutofit/>
-          </a:bodyPr>
-          <a:lstStyle/>
-          <a:p>
-            <a:pPr indent="0" lvl="0" marL="0" rtl="0" algn="l">
-              <a:spcBef>
-                <a:spcPts val="0"/>
-              </a:spcBef>
-              <a:spcAft>
-                <a:spcPts val="0"/>
-              </a:spcAft>
-              <a:buNone/>
-            </a:pPr>
-            <a:r>
-              <a:t/>
-            </a:r>
-            <a:endParaRPr/>
-          </a:p>
-        </p:txBody>
-      </p:sp>
-    </p:spTree>
-  </p:cSld>
-  <p:clrMapOvr>
-    <a:masterClrMapping/>
-  </p:clrMapOvr>
-</p:notes>
-</file>
-
-<file path=ppt/notesSlides/notesSlide15.xml><?xml version="1.0" encoding="utf-8"?>
-<p:notes xmlns:a="http://schemas.openxmlformats.org/drawingml/2006/main" xmlns:r="http://schemas.openxmlformats.org/officeDocument/2006/relationships" xmlns:mc="http://schemas.openxmlformats.org/markup-compatibility/2006" xmlns:mv="urn:schemas-microsoft-com:mac:vml" xmlns:p="http://schemas.openxmlformats.org/presentationml/2006/main" xmlns:c="http://schemas.openxmlformats.org/drawingml/2006/chart" xmlns:dgm="http://schemas.openxmlformats.org/drawingml/2006/diagram" xmlns:o="urn:schemas-microsoft-com:office:office" xmlns:v="urn:schemas-microsoft-com:vml" xmlns:pvml="urn:schemas-microsoft-com:office:powerpoint" xmlns:com="http://schemas.openxmlformats.org/drawingml/2006/compatibility" xmlns:p14="http://schemas.microsoft.com/office/powerpoint/2010/main" xmlns:p15="http://schemas.microsoft.com/office/powerpoint/2012/main" xmlns:ahyp="http://schemas.microsoft.com/office/drawing/2018/hyperlinkcolor" showMasterPhAnim="0" showMasterSp="0">
-  <p:cSld>
-    <p:spTree>
-      <p:nvGrpSpPr>
-        <p:cNvPr id="161" name="Shape 161"/>
+        <p:cNvPr id="1" name="Shape 161"/>
         <p:cNvGrpSpPr/>
         <p:nvPr/>
       </p:nvGrpSpPr>
@@ -1323,9 +1053,11 @@
       <p:sp>
         <p:nvSpPr>
           <p:cNvPr id="162" name="Google Shape;162;g37fa3dcd40f_0_7:notes"/>
-          <p:cNvSpPr/>
+          <p:cNvSpPr>
+            <a:spLocks noGrp="1" noRot="1" noChangeAspect="1"/>
+          </p:cNvSpPr>
           <p:nvPr>
-            <p:ph idx="2" type="sldImg"/>
+            <p:ph type="sldImg" idx="2"/>
           </p:nvPr>
         </p:nvSpPr>
         <p:spPr>
@@ -1334,9 +1066,13 @@
             <a:ext cx="6096000" cy="3429000"/>
           </a:xfrm>
           <a:custGeom>
-            <a:rect b="b" l="l" r="r" t="t"/>
+            <a:avLst/>
+            <a:gdLst/>
+            <a:ahLst/>
+            <a:cxnLst/>
+            <a:rect l="l" t="t" r="r" b="b"/>
             <a:pathLst>
-              <a:path extrusionOk="0" h="120000" w="120000">
+              <a:path w="120000" h="120000" extrusionOk="0">
                 <a:moveTo>
                   <a:pt x="0" y="0"/>
                 </a:moveTo>
@@ -1358,9 +1094,11 @@
       <p:sp>
         <p:nvSpPr>
           <p:cNvPr id="163" name="Google Shape;163;g37fa3dcd40f_0_7:notes"/>
-          <p:cNvSpPr txBox="1"/>
+          <p:cNvSpPr txBox="1">
+            <a:spLocks noGrp="1"/>
+          </p:cNvSpPr>
           <p:nvPr>
-            <p:ph idx="1" type="body"/>
+            <p:ph type="body" idx="1"/>
           </p:nvPr>
         </p:nvSpPr>
         <p:spPr>
@@ -1373,12 +1111,12 @@
           </a:prstGeom>
         </p:spPr>
         <p:txBody>
-          <a:bodyPr anchorCtr="0" anchor="t" bIns="91425" lIns="91425" spcFirstLastPara="1" rIns="91425" wrap="square" tIns="91425">
+          <a:bodyPr spcFirstLastPara="1" wrap="square" lIns="91425" tIns="91425" rIns="91425" bIns="91425" anchor="t" anchorCtr="0">
             <a:noAutofit/>
           </a:bodyPr>
           <a:lstStyle/>
           <a:p>
-            <a:pPr indent="0" lvl="0" marL="0" rtl="0" algn="l">
+            <a:pPr marL="0" lvl="0" indent="0" algn="l" rtl="0">
               <a:spcBef>
                 <a:spcPts val="0"/>
               </a:spcBef>
@@ -1387,9 +1125,6 @@
               </a:spcAft>
               <a:buNone/>
             </a:pPr>
-            <a:r>
-              <a:t/>
-            </a:r>
             <a:endParaRPr/>
           </a:p>
         </p:txBody>
@@ -1403,11 +1138,11 @@
 </file>
 
 <file path=ppt/notesSlides/notesSlide2.xml><?xml version="1.0" encoding="utf-8"?>
-<p:notes xmlns:a="http://schemas.openxmlformats.org/drawingml/2006/main" xmlns:r="http://schemas.openxmlformats.org/officeDocument/2006/relationships" xmlns:mc="http://schemas.openxmlformats.org/markup-compatibility/2006" xmlns:mv="urn:schemas-microsoft-com:mac:vml" xmlns:p="http://schemas.openxmlformats.org/presentationml/2006/main" xmlns:c="http://schemas.openxmlformats.org/drawingml/2006/chart" xmlns:dgm="http://schemas.openxmlformats.org/drawingml/2006/diagram" xmlns:o="urn:schemas-microsoft-com:office:office" xmlns:v="urn:schemas-microsoft-com:vml" xmlns:pvml="urn:schemas-microsoft-com:office:powerpoint" xmlns:com="http://schemas.openxmlformats.org/drawingml/2006/compatibility" xmlns:p14="http://schemas.microsoft.com/office/powerpoint/2010/main" xmlns:p15="http://schemas.microsoft.com/office/powerpoint/2012/main" xmlns:ahyp="http://schemas.microsoft.com/office/drawing/2018/hyperlinkcolor" showMasterPhAnim="0" showMasterSp="0">
+<p:notes xmlns:a="http://schemas.openxmlformats.org/drawingml/2006/main" xmlns:r="http://schemas.openxmlformats.org/officeDocument/2006/relationships" xmlns:p="http://schemas.openxmlformats.org/presentationml/2006/main" showMasterSp="0" showMasterPhAnim="0">
   <p:cSld>
     <p:spTree>
       <p:nvGrpSpPr>
-        <p:cNvPr id="59" name="Shape 59"/>
+        <p:cNvPr id="1" name="Shape 59"/>
         <p:cNvGrpSpPr/>
         <p:nvPr/>
       </p:nvGrpSpPr>
@@ -1422,20 +1157,26 @@
       <p:sp>
         <p:nvSpPr>
           <p:cNvPr id="60" name="Google Shape;60;g37fa3dcd40f_0_1:notes"/>
-          <p:cNvSpPr/>
+          <p:cNvSpPr>
+            <a:spLocks noGrp="1" noRot="1" noChangeAspect="1"/>
+          </p:cNvSpPr>
           <p:nvPr>
-            <p:ph idx="2" type="sldImg"/>
+            <p:ph type="sldImg" idx="2"/>
           </p:nvPr>
         </p:nvSpPr>
         <p:spPr>
           <a:xfrm>
-            <a:off x="381300" y="685800"/>
+            <a:off x="381000" y="685800"/>
             <a:ext cx="6096000" cy="3429000"/>
           </a:xfrm>
           <a:custGeom>
-            <a:rect b="b" l="l" r="r" t="t"/>
+            <a:avLst/>
+            <a:gdLst/>
+            <a:ahLst/>
+            <a:cxnLst/>
+            <a:rect l="l" t="t" r="r" b="b"/>
             <a:pathLst>
-              <a:path extrusionOk="0" h="120000" w="120000">
+              <a:path w="120000" h="120000" extrusionOk="0">
                 <a:moveTo>
                   <a:pt x="0" y="0"/>
                 </a:moveTo>
@@ -1457,9 +1198,11 @@
       <p:sp>
         <p:nvSpPr>
           <p:cNvPr id="61" name="Google Shape;61;g37fa3dcd40f_0_1:notes"/>
-          <p:cNvSpPr txBox="1"/>
+          <p:cNvSpPr txBox="1">
+            <a:spLocks noGrp="1"/>
+          </p:cNvSpPr>
           <p:nvPr>
-            <p:ph idx="1" type="body"/>
+            <p:ph type="body" idx="1"/>
           </p:nvPr>
         </p:nvSpPr>
         <p:spPr>
@@ -1472,12 +1215,12 @@
           </a:prstGeom>
         </p:spPr>
         <p:txBody>
-          <a:bodyPr anchorCtr="0" anchor="t" bIns="91425" lIns="91425" spcFirstLastPara="1" rIns="91425" wrap="square" tIns="91425">
+          <a:bodyPr spcFirstLastPara="1" wrap="square" lIns="91425" tIns="91425" rIns="91425" bIns="91425" anchor="t" anchorCtr="0">
             <a:noAutofit/>
           </a:bodyPr>
           <a:lstStyle/>
           <a:p>
-            <a:pPr indent="0" lvl="0" marL="0" rtl="0" algn="l">
+            <a:pPr marL="0" lvl="0" indent="0" algn="l" rtl="0">
               <a:spcBef>
                 <a:spcPts val="0"/>
               </a:spcBef>
@@ -1486,9 +1229,6 @@
               </a:spcAft>
               <a:buNone/>
             </a:pPr>
-            <a:r>
-              <a:t/>
-            </a:r>
             <a:endParaRPr/>
           </a:p>
         </p:txBody>
@@ -1502,11 +1242,11 @@
 </file>
 
 <file path=ppt/notesSlides/notesSlide3.xml><?xml version="1.0" encoding="utf-8"?>
-<p:notes xmlns:a="http://schemas.openxmlformats.org/drawingml/2006/main" xmlns:r="http://schemas.openxmlformats.org/officeDocument/2006/relationships" xmlns:mc="http://schemas.openxmlformats.org/markup-compatibility/2006" xmlns:mv="urn:schemas-microsoft-com:mac:vml" xmlns:p="http://schemas.openxmlformats.org/presentationml/2006/main" xmlns:c="http://schemas.openxmlformats.org/drawingml/2006/chart" xmlns:dgm="http://schemas.openxmlformats.org/drawingml/2006/diagram" xmlns:o="urn:schemas-microsoft-com:office:office" xmlns:v="urn:schemas-microsoft-com:vml" xmlns:pvml="urn:schemas-microsoft-com:office:powerpoint" xmlns:com="http://schemas.openxmlformats.org/drawingml/2006/compatibility" xmlns:p14="http://schemas.microsoft.com/office/powerpoint/2010/main" xmlns:p15="http://schemas.microsoft.com/office/powerpoint/2012/main" xmlns:ahyp="http://schemas.microsoft.com/office/drawing/2018/hyperlinkcolor" showMasterPhAnim="0" showMasterSp="0">
+<p:notes xmlns:a="http://schemas.openxmlformats.org/drawingml/2006/main" xmlns:r="http://schemas.openxmlformats.org/officeDocument/2006/relationships" xmlns:p="http://schemas.openxmlformats.org/presentationml/2006/main" showMasterSp="0" showMasterPhAnim="0">
   <p:cSld>
     <p:spTree>
       <p:nvGrpSpPr>
-        <p:cNvPr id="67" name="Shape 67"/>
+        <p:cNvPr id="1" name="Shape 67"/>
         <p:cNvGrpSpPr/>
         <p:nvPr/>
       </p:nvGrpSpPr>
@@ -1521,20 +1261,26 @@
       <p:sp>
         <p:nvSpPr>
           <p:cNvPr id="68" name="Google Shape;68;g37fa3dcd40f_0_17:notes"/>
-          <p:cNvSpPr/>
+          <p:cNvSpPr>
+            <a:spLocks noGrp="1" noRot="1" noChangeAspect="1"/>
+          </p:cNvSpPr>
           <p:nvPr>
-            <p:ph idx="2" type="sldImg"/>
+            <p:ph type="sldImg" idx="2"/>
           </p:nvPr>
         </p:nvSpPr>
         <p:spPr>
           <a:xfrm>
-            <a:off x="381300" y="685800"/>
+            <a:off x="381000" y="685800"/>
             <a:ext cx="6096000" cy="3429000"/>
           </a:xfrm>
           <a:custGeom>
-            <a:rect b="b" l="l" r="r" t="t"/>
+            <a:avLst/>
+            <a:gdLst/>
+            <a:ahLst/>
+            <a:cxnLst/>
+            <a:rect l="l" t="t" r="r" b="b"/>
             <a:pathLst>
-              <a:path extrusionOk="0" h="120000" w="120000">
+              <a:path w="120000" h="120000" extrusionOk="0">
                 <a:moveTo>
                   <a:pt x="0" y="0"/>
                 </a:moveTo>
@@ -1556,9 +1302,11 @@
       <p:sp>
         <p:nvSpPr>
           <p:cNvPr id="69" name="Google Shape;69;g37fa3dcd40f_0_17:notes"/>
-          <p:cNvSpPr txBox="1"/>
+          <p:cNvSpPr txBox="1">
+            <a:spLocks noGrp="1"/>
+          </p:cNvSpPr>
           <p:nvPr>
-            <p:ph idx="1" type="body"/>
+            <p:ph type="body" idx="1"/>
           </p:nvPr>
         </p:nvSpPr>
         <p:spPr>
@@ -1571,12 +1319,12 @@
           </a:prstGeom>
         </p:spPr>
         <p:txBody>
-          <a:bodyPr anchorCtr="0" anchor="t" bIns="91425" lIns="91425" spcFirstLastPara="1" rIns="91425" wrap="square" tIns="91425">
+          <a:bodyPr spcFirstLastPara="1" wrap="square" lIns="91425" tIns="91425" rIns="91425" bIns="91425" anchor="t" anchorCtr="0">
             <a:noAutofit/>
           </a:bodyPr>
           <a:lstStyle/>
           <a:p>
-            <a:pPr indent="0" lvl="0" marL="0" rtl="0" algn="l">
+            <a:pPr marL="0" lvl="0" indent="0" algn="l" rtl="0">
               <a:spcBef>
                 <a:spcPts val="0"/>
               </a:spcBef>
@@ -1585,9 +1333,6 @@
               </a:spcAft>
               <a:buNone/>
             </a:pPr>
-            <a:r>
-              <a:t/>
-            </a:r>
             <a:endParaRPr/>
           </a:p>
         </p:txBody>
@@ -1601,11 +1346,11 @@
 </file>
 
 <file path=ppt/notesSlides/notesSlide4.xml><?xml version="1.0" encoding="utf-8"?>
-<p:notes xmlns:a="http://schemas.openxmlformats.org/drawingml/2006/main" xmlns:r="http://schemas.openxmlformats.org/officeDocument/2006/relationships" xmlns:mc="http://schemas.openxmlformats.org/markup-compatibility/2006" xmlns:mv="urn:schemas-microsoft-com:mac:vml" xmlns:p="http://schemas.openxmlformats.org/presentationml/2006/main" xmlns:c="http://schemas.openxmlformats.org/drawingml/2006/chart" xmlns:dgm="http://schemas.openxmlformats.org/drawingml/2006/diagram" xmlns:o="urn:schemas-microsoft-com:office:office" xmlns:v="urn:schemas-microsoft-com:vml" xmlns:pvml="urn:schemas-microsoft-com:office:powerpoint" xmlns:com="http://schemas.openxmlformats.org/drawingml/2006/compatibility" xmlns:p14="http://schemas.microsoft.com/office/powerpoint/2010/main" xmlns:p15="http://schemas.microsoft.com/office/powerpoint/2012/main" xmlns:ahyp="http://schemas.microsoft.com/office/drawing/2018/hyperlinkcolor" showMasterPhAnim="0" showMasterSp="0">
+<p:notes xmlns:a="http://schemas.openxmlformats.org/drawingml/2006/main" xmlns:r="http://schemas.openxmlformats.org/officeDocument/2006/relationships" xmlns:p="http://schemas.openxmlformats.org/presentationml/2006/main" showMasterSp="0" showMasterPhAnim="0">
   <p:cSld>
     <p:spTree>
       <p:nvGrpSpPr>
-        <p:cNvPr id="76" name="Shape 76"/>
+        <p:cNvPr id="1" name="Shape 76"/>
         <p:cNvGrpSpPr/>
         <p:nvPr/>
       </p:nvGrpSpPr>
@@ -1620,20 +1365,26 @@
       <p:sp>
         <p:nvSpPr>
           <p:cNvPr id="77" name="Google Shape;77;g37fa3dcd40f_0_32:notes"/>
-          <p:cNvSpPr/>
+          <p:cNvSpPr>
+            <a:spLocks noGrp="1" noRot="1" noChangeAspect="1"/>
+          </p:cNvSpPr>
           <p:nvPr>
-            <p:ph idx="2" type="sldImg"/>
+            <p:ph type="sldImg" idx="2"/>
           </p:nvPr>
         </p:nvSpPr>
         <p:spPr>
           <a:xfrm>
-            <a:off x="381300" y="685800"/>
+            <a:off x="381000" y="685800"/>
             <a:ext cx="6096000" cy="3429000"/>
           </a:xfrm>
           <a:custGeom>
-            <a:rect b="b" l="l" r="r" t="t"/>
+            <a:avLst/>
+            <a:gdLst/>
+            <a:ahLst/>
+            <a:cxnLst/>
+            <a:rect l="l" t="t" r="r" b="b"/>
             <a:pathLst>
-              <a:path extrusionOk="0" h="120000" w="120000">
+              <a:path w="120000" h="120000" extrusionOk="0">
                 <a:moveTo>
                   <a:pt x="0" y="0"/>
                 </a:moveTo>
@@ -1655,9 +1406,11 @@
       <p:sp>
         <p:nvSpPr>
           <p:cNvPr id="78" name="Google Shape;78;g37fa3dcd40f_0_32:notes"/>
-          <p:cNvSpPr txBox="1"/>
+          <p:cNvSpPr txBox="1">
+            <a:spLocks noGrp="1"/>
+          </p:cNvSpPr>
           <p:nvPr>
-            <p:ph idx="1" type="body"/>
+            <p:ph type="body" idx="1"/>
           </p:nvPr>
         </p:nvSpPr>
         <p:spPr>
@@ -1670,12 +1423,12 @@
           </a:prstGeom>
         </p:spPr>
         <p:txBody>
-          <a:bodyPr anchorCtr="0" anchor="t" bIns="91425" lIns="91425" spcFirstLastPara="1" rIns="91425" wrap="square" tIns="91425">
+          <a:bodyPr spcFirstLastPara="1" wrap="square" lIns="91425" tIns="91425" rIns="91425" bIns="91425" anchor="t" anchorCtr="0">
             <a:noAutofit/>
           </a:bodyPr>
           <a:lstStyle/>
           <a:p>
-            <a:pPr indent="0" lvl="0" marL="0" rtl="0" algn="l">
+            <a:pPr marL="0" lvl="0" indent="0" algn="l" rtl="0">
               <a:spcBef>
                 <a:spcPts val="0"/>
               </a:spcBef>
@@ -1684,9 +1437,6 @@
               </a:spcAft>
               <a:buNone/>
             </a:pPr>
-            <a:r>
-              <a:t/>
-            </a:r>
             <a:endParaRPr/>
           </a:p>
         </p:txBody>
@@ -1700,11 +1450,11 @@
 </file>
 
 <file path=ppt/notesSlides/notesSlide5.xml><?xml version="1.0" encoding="utf-8"?>
-<p:notes xmlns:a="http://schemas.openxmlformats.org/drawingml/2006/main" xmlns:r="http://schemas.openxmlformats.org/officeDocument/2006/relationships" xmlns:mc="http://schemas.openxmlformats.org/markup-compatibility/2006" xmlns:mv="urn:schemas-microsoft-com:mac:vml" xmlns:p="http://schemas.openxmlformats.org/presentationml/2006/main" xmlns:c="http://schemas.openxmlformats.org/drawingml/2006/chart" xmlns:dgm="http://schemas.openxmlformats.org/drawingml/2006/diagram" xmlns:o="urn:schemas-microsoft-com:office:office" xmlns:v="urn:schemas-microsoft-com:vml" xmlns:pvml="urn:schemas-microsoft-com:office:powerpoint" xmlns:com="http://schemas.openxmlformats.org/drawingml/2006/compatibility" xmlns:p14="http://schemas.microsoft.com/office/powerpoint/2010/main" xmlns:p15="http://schemas.microsoft.com/office/powerpoint/2012/main" xmlns:ahyp="http://schemas.microsoft.com/office/drawing/2018/hyperlinkcolor" showMasterPhAnim="0" showMasterSp="0">
+<p:notes xmlns:a="http://schemas.openxmlformats.org/drawingml/2006/main" xmlns:r="http://schemas.openxmlformats.org/officeDocument/2006/relationships" xmlns:p="http://schemas.openxmlformats.org/presentationml/2006/main" showMasterSp="0" showMasterPhAnim="0">
   <p:cSld>
     <p:spTree>
       <p:nvGrpSpPr>
-        <p:cNvPr id="84" name="Shape 84"/>
+        <p:cNvPr id="1" name="Shape 84"/>
         <p:cNvGrpSpPr/>
         <p:nvPr/>
       </p:nvGrpSpPr>
@@ -1719,20 +1469,26 @@
       <p:sp>
         <p:nvSpPr>
           <p:cNvPr id="85" name="Google Shape;85;g37fa3dcd40f_0_38:notes"/>
-          <p:cNvSpPr/>
+          <p:cNvSpPr>
+            <a:spLocks noGrp="1" noRot="1" noChangeAspect="1"/>
+          </p:cNvSpPr>
           <p:nvPr>
-            <p:ph idx="2" type="sldImg"/>
+            <p:ph type="sldImg" idx="2"/>
           </p:nvPr>
         </p:nvSpPr>
         <p:spPr>
           <a:xfrm>
-            <a:off x="381300" y="685800"/>
+            <a:off x="381000" y="685800"/>
             <a:ext cx="6096000" cy="3429000"/>
           </a:xfrm>
           <a:custGeom>
-            <a:rect b="b" l="l" r="r" t="t"/>
+            <a:avLst/>
+            <a:gdLst/>
+            <a:ahLst/>
+            <a:cxnLst/>
+            <a:rect l="l" t="t" r="r" b="b"/>
             <a:pathLst>
-              <a:path extrusionOk="0" h="120000" w="120000">
+              <a:path w="120000" h="120000" extrusionOk="0">
                 <a:moveTo>
                   <a:pt x="0" y="0"/>
                 </a:moveTo>
@@ -1754,9 +1510,11 @@
       <p:sp>
         <p:nvSpPr>
           <p:cNvPr id="86" name="Google Shape;86;g37fa3dcd40f_0_38:notes"/>
-          <p:cNvSpPr txBox="1"/>
+          <p:cNvSpPr txBox="1">
+            <a:spLocks noGrp="1"/>
+          </p:cNvSpPr>
           <p:nvPr>
-            <p:ph idx="1" type="body"/>
+            <p:ph type="body" idx="1"/>
           </p:nvPr>
         </p:nvSpPr>
         <p:spPr>
@@ -1769,12 +1527,12 @@
           </a:prstGeom>
         </p:spPr>
         <p:txBody>
-          <a:bodyPr anchorCtr="0" anchor="t" bIns="91425" lIns="91425" spcFirstLastPara="1" rIns="91425" wrap="square" tIns="91425">
+          <a:bodyPr spcFirstLastPara="1" wrap="square" lIns="91425" tIns="91425" rIns="91425" bIns="91425" anchor="t" anchorCtr="0">
             <a:noAutofit/>
           </a:bodyPr>
           <a:lstStyle/>
           <a:p>
-            <a:pPr indent="0" lvl="0" marL="0" rtl="0" algn="l">
+            <a:pPr marL="0" lvl="0" indent="0" algn="l" rtl="0">
               <a:spcBef>
                 <a:spcPts val="0"/>
               </a:spcBef>
@@ -1783,9 +1541,6 @@
               </a:spcAft>
               <a:buNone/>
             </a:pPr>
-            <a:r>
-              <a:t/>
-            </a:r>
             <a:endParaRPr/>
           </a:p>
         </p:txBody>
@@ -1799,11 +1554,11 @@
 </file>
 
 <file path=ppt/notesSlides/notesSlide6.xml><?xml version="1.0" encoding="utf-8"?>
-<p:notes xmlns:a="http://schemas.openxmlformats.org/drawingml/2006/main" xmlns:r="http://schemas.openxmlformats.org/officeDocument/2006/relationships" xmlns:mc="http://schemas.openxmlformats.org/markup-compatibility/2006" xmlns:mv="urn:schemas-microsoft-com:mac:vml" xmlns:p="http://schemas.openxmlformats.org/presentationml/2006/main" xmlns:c="http://schemas.openxmlformats.org/drawingml/2006/chart" xmlns:dgm="http://schemas.openxmlformats.org/drawingml/2006/diagram" xmlns:o="urn:schemas-microsoft-com:office:office" xmlns:v="urn:schemas-microsoft-com:vml" xmlns:pvml="urn:schemas-microsoft-com:office:powerpoint" xmlns:com="http://schemas.openxmlformats.org/drawingml/2006/compatibility" xmlns:p14="http://schemas.microsoft.com/office/powerpoint/2010/main" xmlns:p15="http://schemas.microsoft.com/office/powerpoint/2012/main" xmlns:ahyp="http://schemas.microsoft.com/office/drawing/2018/hyperlinkcolor" showMasterPhAnim="0" showMasterSp="0">
+<p:notes xmlns:a="http://schemas.openxmlformats.org/drawingml/2006/main" xmlns:r="http://schemas.openxmlformats.org/officeDocument/2006/relationships" xmlns:p="http://schemas.openxmlformats.org/presentationml/2006/main" showMasterSp="0" showMasterPhAnim="0">
   <p:cSld>
     <p:spTree>
       <p:nvGrpSpPr>
-        <p:cNvPr id="92" name="Shape 92"/>
+        <p:cNvPr id="1" name="Shape 92"/>
         <p:cNvGrpSpPr/>
         <p:nvPr/>
       </p:nvGrpSpPr>
@@ -1818,20 +1573,26 @@
       <p:sp>
         <p:nvSpPr>
           <p:cNvPr id="93" name="Google Shape;93;g37fa3dcd40f_0_44:notes"/>
-          <p:cNvSpPr/>
+          <p:cNvSpPr>
+            <a:spLocks noGrp="1" noRot="1" noChangeAspect="1"/>
+          </p:cNvSpPr>
           <p:nvPr>
-            <p:ph idx="2" type="sldImg"/>
+            <p:ph type="sldImg" idx="2"/>
           </p:nvPr>
         </p:nvSpPr>
         <p:spPr>
           <a:xfrm>
-            <a:off x="381300" y="685800"/>
+            <a:off x="381000" y="685800"/>
             <a:ext cx="6096000" cy="3429000"/>
           </a:xfrm>
           <a:custGeom>
-            <a:rect b="b" l="l" r="r" t="t"/>
+            <a:avLst/>
+            <a:gdLst/>
+            <a:ahLst/>
+            <a:cxnLst/>
+            <a:rect l="l" t="t" r="r" b="b"/>
             <a:pathLst>
-              <a:path extrusionOk="0" h="120000" w="120000">
+              <a:path w="120000" h="120000" extrusionOk="0">
                 <a:moveTo>
                   <a:pt x="0" y="0"/>
                 </a:moveTo>
@@ -1853,9 +1614,11 @@
       <p:sp>
         <p:nvSpPr>
           <p:cNvPr id="94" name="Google Shape;94;g37fa3dcd40f_0_44:notes"/>
-          <p:cNvSpPr txBox="1"/>
+          <p:cNvSpPr txBox="1">
+            <a:spLocks noGrp="1"/>
+          </p:cNvSpPr>
           <p:nvPr>
-            <p:ph idx="1" type="body"/>
+            <p:ph type="body" idx="1"/>
           </p:nvPr>
         </p:nvSpPr>
         <p:spPr>
@@ -1868,12 +1631,12 @@
           </a:prstGeom>
         </p:spPr>
         <p:txBody>
-          <a:bodyPr anchorCtr="0" anchor="t" bIns="91425" lIns="91425" spcFirstLastPara="1" rIns="91425" wrap="square" tIns="91425">
+          <a:bodyPr spcFirstLastPara="1" wrap="square" lIns="91425" tIns="91425" rIns="91425" bIns="91425" anchor="t" anchorCtr="0">
             <a:noAutofit/>
           </a:bodyPr>
           <a:lstStyle/>
           <a:p>
-            <a:pPr indent="0" lvl="0" marL="0" rtl="0" algn="l">
+            <a:pPr marL="0" lvl="0" indent="0" algn="l" rtl="0">
               <a:spcBef>
                 <a:spcPts val="0"/>
               </a:spcBef>
@@ -1882,9 +1645,6 @@
               </a:spcAft>
               <a:buNone/>
             </a:pPr>
-            <a:r>
-              <a:t/>
-            </a:r>
             <a:endParaRPr/>
           </a:p>
         </p:txBody>
@@ -1898,11 +1658,11 @@
 </file>
 
 <file path=ppt/notesSlides/notesSlide7.xml><?xml version="1.0" encoding="utf-8"?>
-<p:notes xmlns:a="http://schemas.openxmlformats.org/drawingml/2006/main" xmlns:r="http://schemas.openxmlformats.org/officeDocument/2006/relationships" xmlns:mc="http://schemas.openxmlformats.org/markup-compatibility/2006" xmlns:mv="urn:schemas-microsoft-com:mac:vml" xmlns:p="http://schemas.openxmlformats.org/presentationml/2006/main" xmlns:c="http://schemas.openxmlformats.org/drawingml/2006/chart" xmlns:dgm="http://schemas.openxmlformats.org/drawingml/2006/diagram" xmlns:o="urn:schemas-microsoft-com:office:office" xmlns:v="urn:schemas-microsoft-com:vml" xmlns:pvml="urn:schemas-microsoft-com:office:powerpoint" xmlns:com="http://schemas.openxmlformats.org/drawingml/2006/compatibility" xmlns:p14="http://schemas.microsoft.com/office/powerpoint/2010/main" xmlns:p15="http://schemas.microsoft.com/office/powerpoint/2012/main" xmlns:ahyp="http://schemas.microsoft.com/office/drawing/2018/hyperlinkcolor" showMasterPhAnim="0" showMasterSp="0">
+<p:notes xmlns:a="http://schemas.openxmlformats.org/drawingml/2006/main" xmlns:r="http://schemas.openxmlformats.org/officeDocument/2006/relationships" xmlns:p="http://schemas.openxmlformats.org/presentationml/2006/main" showMasterSp="0" showMasterPhAnim="0">
   <p:cSld>
     <p:spTree>
       <p:nvGrpSpPr>
-        <p:cNvPr id="100" name="Shape 100"/>
+        <p:cNvPr id="1" name="Shape 100"/>
         <p:cNvGrpSpPr/>
         <p:nvPr/>
       </p:nvGrpSpPr>
@@ -1917,20 +1677,26 @@
       <p:sp>
         <p:nvSpPr>
           <p:cNvPr id="101" name="Google Shape;101;g37fa3dcd40f_0_50:notes"/>
-          <p:cNvSpPr/>
+          <p:cNvSpPr>
+            <a:spLocks noGrp="1" noRot="1" noChangeAspect="1"/>
+          </p:cNvSpPr>
           <p:nvPr>
-            <p:ph idx="2" type="sldImg"/>
+            <p:ph type="sldImg" idx="2"/>
           </p:nvPr>
         </p:nvSpPr>
         <p:spPr>
           <a:xfrm>
-            <a:off x="381300" y="685800"/>
+            <a:off x="381000" y="685800"/>
             <a:ext cx="6096000" cy="3429000"/>
           </a:xfrm>
           <a:custGeom>
-            <a:rect b="b" l="l" r="r" t="t"/>
+            <a:avLst/>
+            <a:gdLst/>
+            <a:ahLst/>
+            <a:cxnLst/>
+            <a:rect l="l" t="t" r="r" b="b"/>
             <a:pathLst>
-              <a:path extrusionOk="0" h="120000" w="120000">
+              <a:path w="120000" h="120000" extrusionOk="0">
                 <a:moveTo>
                   <a:pt x="0" y="0"/>
                 </a:moveTo>
@@ -1952,9 +1718,11 @@
       <p:sp>
         <p:nvSpPr>
           <p:cNvPr id="102" name="Google Shape;102;g37fa3dcd40f_0_50:notes"/>
-          <p:cNvSpPr txBox="1"/>
+          <p:cNvSpPr txBox="1">
+            <a:spLocks noGrp="1"/>
+          </p:cNvSpPr>
           <p:nvPr>
-            <p:ph idx="1" type="body"/>
+            <p:ph type="body" idx="1"/>
           </p:nvPr>
         </p:nvSpPr>
         <p:spPr>
@@ -1967,12 +1735,12 @@
           </a:prstGeom>
         </p:spPr>
         <p:txBody>
-          <a:bodyPr anchorCtr="0" anchor="t" bIns="91425" lIns="91425" spcFirstLastPara="1" rIns="91425" wrap="square" tIns="91425">
+          <a:bodyPr spcFirstLastPara="1" wrap="square" lIns="91425" tIns="91425" rIns="91425" bIns="91425" anchor="t" anchorCtr="0">
             <a:noAutofit/>
           </a:bodyPr>
           <a:lstStyle/>
           <a:p>
-            <a:pPr indent="0" lvl="0" marL="0" rtl="0" algn="l">
+            <a:pPr marL="0" lvl="0" indent="0" algn="l" rtl="0">
               <a:spcBef>
                 <a:spcPts val="0"/>
               </a:spcBef>
@@ -1981,9 +1749,6 @@
               </a:spcAft>
               <a:buNone/>
             </a:pPr>
-            <a:r>
-              <a:t/>
-            </a:r>
             <a:endParaRPr/>
           </a:p>
         </p:txBody>
@@ -1997,11 +1762,11 @@
 </file>
 
 <file path=ppt/notesSlides/notesSlide8.xml><?xml version="1.0" encoding="utf-8"?>
-<p:notes xmlns:a="http://schemas.openxmlformats.org/drawingml/2006/main" xmlns:r="http://schemas.openxmlformats.org/officeDocument/2006/relationships" xmlns:mc="http://schemas.openxmlformats.org/markup-compatibility/2006" xmlns:mv="urn:schemas-microsoft-com:mac:vml" xmlns:p="http://schemas.openxmlformats.org/presentationml/2006/main" xmlns:c="http://schemas.openxmlformats.org/drawingml/2006/chart" xmlns:dgm="http://schemas.openxmlformats.org/drawingml/2006/diagram" xmlns:o="urn:schemas-microsoft-com:office:office" xmlns:v="urn:schemas-microsoft-com:vml" xmlns:pvml="urn:schemas-microsoft-com:office:powerpoint" xmlns:com="http://schemas.openxmlformats.org/drawingml/2006/compatibility" xmlns:p14="http://schemas.microsoft.com/office/powerpoint/2010/main" xmlns:p15="http://schemas.microsoft.com/office/powerpoint/2012/main" xmlns:ahyp="http://schemas.microsoft.com/office/drawing/2018/hyperlinkcolor" showMasterPhAnim="0" showMasterSp="0">
+<p:notes xmlns:a="http://schemas.openxmlformats.org/drawingml/2006/main" xmlns:r="http://schemas.openxmlformats.org/officeDocument/2006/relationships" xmlns:p="http://schemas.openxmlformats.org/presentationml/2006/main" showMasterSp="0" showMasterPhAnim="0">
   <p:cSld>
     <p:spTree>
       <p:nvGrpSpPr>
-        <p:cNvPr id="108" name="Shape 108"/>
+        <p:cNvPr id="1" name="Shape 108"/>
         <p:cNvGrpSpPr/>
         <p:nvPr/>
       </p:nvGrpSpPr>
@@ -2016,20 +1781,26 @@
       <p:sp>
         <p:nvSpPr>
           <p:cNvPr id="109" name="Google Shape;109;g37fa3dcd40f_0_56:notes"/>
-          <p:cNvSpPr/>
+          <p:cNvSpPr>
+            <a:spLocks noGrp="1" noRot="1" noChangeAspect="1"/>
+          </p:cNvSpPr>
           <p:nvPr>
-            <p:ph idx="2" type="sldImg"/>
+            <p:ph type="sldImg" idx="2"/>
           </p:nvPr>
         </p:nvSpPr>
         <p:spPr>
           <a:xfrm>
-            <a:off x="381300" y="685800"/>
+            <a:off x="381000" y="685800"/>
             <a:ext cx="6096000" cy="3429000"/>
           </a:xfrm>
           <a:custGeom>
-            <a:rect b="b" l="l" r="r" t="t"/>
+            <a:avLst/>
+            <a:gdLst/>
+            <a:ahLst/>
+            <a:cxnLst/>
+            <a:rect l="l" t="t" r="r" b="b"/>
             <a:pathLst>
-              <a:path extrusionOk="0" h="120000" w="120000">
+              <a:path w="120000" h="120000" extrusionOk="0">
                 <a:moveTo>
                   <a:pt x="0" y="0"/>
                 </a:moveTo>
@@ -2051,9 +1822,11 @@
       <p:sp>
         <p:nvSpPr>
           <p:cNvPr id="110" name="Google Shape;110;g37fa3dcd40f_0_56:notes"/>
-          <p:cNvSpPr txBox="1"/>
+          <p:cNvSpPr txBox="1">
+            <a:spLocks noGrp="1"/>
+          </p:cNvSpPr>
           <p:nvPr>
-            <p:ph idx="1" type="body"/>
+            <p:ph type="body" idx="1"/>
           </p:nvPr>
         </p:nvSpPr>
         <p:spPr>
@@ -2066,12 +1839,12 @@
           </a:prstGeom>
         </p:spPr>
         <p:txBody>
-          <a:bodyPr anchorCtr="0" anchor="t" bIns="91425" lIns="91425" spcFirstLastPara="1" rIns="91425" wrap="square" tIns="91425">
+          <a:bodyPr spcFirstLastPara="1" wrap="square" lIns="91425" tIns="91425" rIns="91425" bIns="91425" anchor="t" anchorCtr="0">
             <a:noAutofit/>
           </a:bodyPr>
           <a:lstStyle/>
           <a:p>
-            <a:pPr indent="0" lvl="0" marL="0" rtl="0" algn="l">
+            <a:pPr marL="0" lvl="0" indent="0" algn="l" rtl="0">
               <a:spcBef>
                 <a:spcPts val="0"/>
               </a:spcBef>
@@ -2080,9 +1853,6 @@
               </a:spcAft>
               <a:buNone/>
             </a:pPr>
-            <a:r>
-              <a:t/>
-            </a:r>
             <a:endParaRPr/>
           </a:p>
         </p:txBody>
@@ -2096,11 +1866,11 @@
 </file>
 
 <file path=ppt/notesSlides/notesSlide9.xml><?xml version="1.0" encoding="utf-8"?>
-<p:notes xmlns:a="http://schemas.openxmlformats.org/drawingml/2006/main" xmlns:r="http://schemas.openxmlformats.org/officeDocument/2006/relationships" xmlns:mc="http://schemas.openxmlformats.org/markup-compatibility/2006" xmlns:mv="urn:schemas-microsoft-com:mac:vml" xmlns:p="http://schemas.openxmlformats.org/presentationml/2006/main" xmlns:c="http://schemas.openxmlformats.org/drawingml/2006/chart" xmlns:dgm="http://schemas.openxmlformats.org/drawingml/2006/diagram" xmlns:o="urn:schemas-microsoft-com:office:office" xmlns:v="urn:schemas-microsoft-com:vml" xmlns:pvml="urn:schemas-microsoft-com:office:powerpoint" xmlns:com="http://schemas.openxmlformats.org/drawingml/2006/compatibility" xmlns:p14="http://schemas.microsoft.com/office/powerpoint/2010/main" xmlns:p15="http://schemas.microsoft.com/office/powerpoint/2012/main" xmlns:ahyp="http://schemas.microsoft.com/office/drawing/2018/hyperlinkcolor" showMasterPhAnim="0" showMasterSp="0">
+<p:notes xmlns:a="http://schemas.openxmlformats.org/drawingml/2006/main" xmlns:r="http://schemas.openxmlformats.org/officeDocument/2006/relationships" xmlns:p="http://schemas.openxmlformats.org/presentationml/2006/main" showMasterSp="0" showMasterPhAnim="0">
   <p:cSld>
     <p:spTree>
       <p:nvGrpSpPr>
-        <p:cNvPr id="116" name="Shape 116"/>
+        <p:cNvPr id="1" name="Shape 116"/>
         <p:cNvGrpSpPr/>
         <p:nvPr/>
       </p:nvGrpSpPr>
@@ -2115,20 +1885,26 @@
       <p:sp>
         <p:nvSpPr>
           <p:cNvPr id="117" name="Google Shape;117;g37fa3dcd40f_0_62:notes"/>
-          <p:cNvSpPr/>
+          <p:cNvSpPr>
+            <a:spLocks noGrp="1" noRot="1" noChangeAspect="1"/>
+          </p:cNvSpPr>
           <p:nvPr>
-            <p:ph idx="2" type="sldImg"/>
+            <p:ph type="sldImg" idx="2"/>
           </p:nvPr>
         </p:nvSpPr>
         <p:spPr>
           <a:xfrm>
-            <a:off x="381300" y="685800"/>
+            <a:off x="381000" y="685800"/>
             <a:ext cx="6096000" cy="3429000"/>
           </a:xfrm>
           <a:custGeom>
-            <a:rect b="b" l="l" r="r" t="t"/>
+            <a:avLst/>
+            <a:gdLst/>
+            <a:ahLst/>
+            <a:cxnLst/>
+            <a:rect l="l" t="t" r="r" b="b"/>
             <a:pathLst>
-              <a:path extrusionOk="0" h="120000" w="120000">
+              <a:path w="120000" h="120000" extrusionOk="0">
                 <a:moveTo>
                   <a:pt x="0" y="0"/>
                 </a:moveTo>
@@ -2150,9 +1926,11 @@
       <p:sp>
         <p:nvSpPr>
           <p:cNvPr id="118" name="Google Shape;118;g37fa3dcd40f_0_62:notes"/>
-          <p:cNvSpPr txBox="1"/>
+          <p:cNvSpPr txBox="1">
+            <a:spLocks noGrp="1"/>
+          </p:cNvSpPr>
           <p:nvPr>
-            <p:ph idx="1" type="body"/>
+            <p:ph type="body" idx="1"/>
           </p:nvPr>
         </p:nvSpPr>
         <p:spPr>
@@ -2165,12 +1943,12 @@
           </a:prstGeom>
         </p:spPr>
         <p:txBody>
-          <a:bodyPr anchorCtr="0" anchor="t" bIns="91425" lIns="91425" spcFirstLastPara="1" rIns="91425" wrap="square" tIns="91425">
+          <a:bodyPr spcFirstLastPara="1" wrap="square" lIns="91425" tIns="91425" rIns="91425" bIns="91425" anchor="t" anchorCtr="0">
             <a:noAutofit/>
           </a:bodyPr>
           <a:lstStyle/>
           <a:p>
-            <a:pPr indent="0" lvl="0" marL="0" rtl="0" algn="l">
+            <a:pPr marL="0" lvl="0" indent="0" algn="l" rtl="0">
               <a:spcBef>
                 <a:spcPts val="0"/>
               </a:spcBef>
@@ -2179,9 +1957,6 @@
               </a:spcAft>
               <a:buNone/>
             </a:pPr>
-            <a:r>
-              <a:t/>
-            </a:r>
             <a:endParaRPr/>
           </a:p>
         </p:txBody>
@@ -2195,11 +1970,11 @@
 </file>
 
 <file path=ppt/slideLayouts/slideLayout1.xml><?xml version="1.0" encoding="utf-8"?>
-<p:sldLayout xmlns:a="http://schemas.openxmlformats.org/drawingml/2006/main" xmlns:r="http://schemas.openxmlformats.org/officeDocument/2006/relationships" xmlns:mc="http://schemas.openxmlformats.org/markup-compatibility/2006" xmlns:mv="urn:schemas-microsoft-com:mac:vml" xmlns:p="http://schemas.openxmlformats.org/presentationml/2006/main" xmlns:c="http://schemas.openxmlformats.org/drawingml/2006/chart" xmlns:dgm="http://schemas.openxmlformats.org/drawingml/2006/diagram" xmlns:o="urn:schemas-microsoft-com:office:office" xmlns:v="urn:schemas-microsoft-com:vml" xmlns:pvml="urn:schemas-microsoft-com:office:powerpoint" xmlns:com="http://schemas.openxmlformats.org/drawingml/2006/compatibility" xmlns:p14="http://schemas.microsoft.com/office/powerpoint/2010/main" xmlns:p15="http://schemas.microsoft.com/office/powerpoint/2012/main" xmlns:ahyp="http://schemas.microsoft.com/office/drawing/2018/hyperlinkcolor" matchingName="Title slide" type="title">
+<p:sldLayout xmlns:a="http://schemas.openxmlformats.org/drawingml/2006/main" xmlns:r="http://schemas.openxmlformats.org/officeDocument/2006/relationships" xmlns:p="http://schemas.openxmlformats.org/presentationml/2006/main" matchingName="Title slide" type="title">
   <p:cSld name="TITLE">
     <p:spTree>
       <p:nvGrpSpPr>
-        <p:cNvPr id="9" name="Shape 9"/>
+        <p:cNvPr id="1" name="Shape 9"/>
         <p:cNvGrpSpPr/>
         <p:nvPr/>
       </p:nvGrpSpPr>
@@ -2214,7 +1989,9 @@
       <p:sp>
         <p:nvSpPr>
           <p:cNvPr id="10" name="Google Shape;10;p2"/>
-          <p:cNvSpPr txBox="1"/>
+          <p:cNvSpPr txBox="1">
+            <a:spLocks noGrp="1"/>
+          </p:cNvSpPr>
           <p:nvPr>
             <p:ph type="ctrTitle"/>
           </p:nvPr>
@@ -2229,7 +2006,7 @@
           </a:prstGeom>
         </p:spPr>
         <p:txBody>
-          <a:bodyPr anchorCtr="0" anchor="b" bIns="91425" lIns="91425" spcFirstLastPara="1" rIns="91425" wrap="square" tIns="91425">
+          <a:bodyPr spcFirstLastPara="1" wrap="square" lIns="91425" tIns="91425" rIns="91425" bIns="91425" anchor="b" anchorCtr="0">
             <a:normAutofit/>
           </a:bodyPr>
           <a:lstStyle>
@@ -2333,15 +2110,19 @@
               <a:defRPr sz="5200"/>
             </a:lvl9pPr>
           </a:lstStyle>
-          <a:p/>
+          <a:p>
+            <a:endParaRPr/>
+          </a:p>
         </p:txBody>
       </p:sp>
       <p:sp>
         <p:nvSpPr>
           <p:cNvPr id="11" name="Google Shape;11;p2"/>
-          <p:cNvSpPr txBox="1"/>
+          <p:cNvSpPr txBox="1">
+            <a:spLocks noGrp="1"/>
+          </p:cNvSpPr>
           <p:nvPr>
-            <p:ph idx="1" type="subTitle"/>
+            <p:ph type="subTitle" idx="1"/>
           </p:nvPr>
         </p:nvSpPr>
         <p:spPr>
@@ -2354,7 +2135,7 @@
           </a:prstGeom>
         </p:spPr>
         <p:txBody>
-          <a:bodyPr anchorCtr="0" anchor="t" bIns="91425" lIns="91425" spcFirstLastPara="1" rIns="91425" wrap="square" tIns="91425">
+          <a:bodyPr spcFirstLastPara="1" wrap="square" lIns="91425" tIns="91425" rIns="91425" bIns="91425" anchor="t" anchorCtr="0">
             <a:normAutofit/>
           </a:bodyPr>
           <a:lstStyle>
@@ -2485,15 +2266,19 @@
               <a:defRPr sz="2800"/>
             </a:lvl9pPr>
           </a:lstStyle>
-          <a:p/>
+          <a:p>
+            <a:endParaRPr/>
+          </a:p>
         </p:txBody>
       </p:sp>
       <p:sp>
         <p:nvSpPr>
           <p:cNvPr id="12" name="Google Shape;12;p2"/>
-          <p:cNvSpPr txBox="1"/>
+          <p:cNvSpPr txBox="1">
+            <a:spLocks noGrp="1"/>
+          </p:cNvSpPr>
           <p:nvPr>
-            <p:ph idx="12" type="sldNum"/>
+            <p:ph type="sldNum" idx="12"/>
           </p:nvPr>
         </p:nvSpPr>
         <p:spPr>
@@ -2506,7 +2291,7 @@
           </a:prstGeom>
         </p:spPr>
         <p:txBody>
-          <a:bodyPr anchorCtr="0" anchor="ctr" bIns="91425" lIns="91425" spcFirstLastPara="1" rIns="91425" wrap="square" tIns="91425">
+          <a:bodyPr spcFirstLastPara="1" wrap="square" lIns="91425" tIns="91425" rIns="91425" bIns="91425" anchor="ctr" anchorCtr="0">
             <a:normAutofit/>
           </a:bodyPr>
           <a:lstStyle>
@@ -2548,7 +2333,7 @@
             </a:lvl9pPr>
           </a:lstStyle>
           <a:p>
-            <a:pPr indent="0" lvl="0" marL="0" rtl="0" algn="r">
+            <a:pPr marL="0" lvl="0" indent="0" algn="r" rtl="0">
               <a:spcBef>
                 <a:spcPts val="0"/>
               </a:spcBef>
@@ -2574,11 +2359,11 @@
 </file>
 
 <file path=ppt/slideLayouts/slideLayout10.xml><?xml version="1.0" encoding="utf-8"?>
-<p:sldLayout xmlns:a="http://schemas.openxmlformats.org/drawingml/2006/main" xmlns:r="http://schemas.openxmlformats.org/officeDocument/2006/relationships" xmlns:mc="http://schemas.openxmlformats.org/markup-compatibility/2006" xmlns:mv="urn:schemas-microsoft-com:mac:vml" xmlns:p="http://schemas.openxmlformats.org/presentationml/2006/main" xmlns:c="http://schemas.openxmlformats.org/drawingml/2006/chart" xmlns:dgm="http://schemas.openxmlformats.org/drawingml/2006/diagram" xmlns:o="urn:schemas-microsoft-com:office:office" xmlns:v="urn:schemas-microsoft-com:vml" xmlns:pvml="urn:schemas-microsoft-com:office:powerpoint" xmlns:com="http://schemas.openxmlformats.org/drawingml/2006/compatibility" xmlns:p14="http://schemas.microsoft.com/office/powerpoint/2010/main" xmlns:p15="http://schemas.microsoft.com/office/powerpoint/2012/main" xmlns:ahyp="http://schemas.microsoft.com/office/drawing/2018/hyperlinkcolor" matchingName="Big number">
+<p:sldLayout xmlns:a="http://schemas.openxmlformats.org/drawingml/2006/main" xmlns:r="http://schemas.openxmlformats.org/officeDocument/2006/relationships" xmlns:p="http://schemas.openxmlformats.org/presentationml/2006/main" matchingName="Big number">
   <p:cSld name="BIG_NUMBER">
     <p:spTree>
       <p:nvGrpSpPr>
-        <p:cNvPr id="44" name="Shape 44"/>
+        <p:cNvPr id="1" name="Shape 44"/>
         <p:cNvGrpSpPr/>
         <p:nvPr/>
       </p:nvGrpSpPr>
@@ -2593,9 +2378,11 @@
       <p:sp>
         <p:nvSpPr>
           <p:cNvPr id="45" name="Google Shape;45;p11"/>
-          <p:cNvSpPr txBox="1"/>
+          <p:cNvSpPr txBox="1">
+            <a:spLocks noGrp="1"/>
+          </p:cNvSpPr>
           <p:nvPr>
-            <p:ph hasCustomPrompt="1" type="title"/>
+            <p:ph type="title" hasCustomPrompt="1"/>
           </p:nvPr>
         </p:nvSpPr>
         <p:spPr>
@@ -2608,7 +2395,7 @@
           </a:prstGeom>
         </p:spPr>
         <p:txBody>
-          <a:bodyPr anchorCtr="0" anchor="b" bIns="91425" lIns="91425" spcFirstLastPara="1" rIns="91425" wrap="square" tIns="91425">
+          <a:bodyPr spcFirstLastPara="1" wrap="square" lIns="91425" tIns="91425" rIns="91425" bIns="91425" anchor="b" anchorCtr="0">
             <a:normAutofit/>
           </a:bodyPr>
           <a:lstStyle>
@@ -2722,9 +2509,11 @@
       <p:sp>
         <p:nvSpPr>
           <p:cNvPr id="46" name="Google Shape;46;p11"/>
-          <p:cNvSpPr txBox="1"/>
+          <p:cNvSpPr txBox="1">
+            <a:spLocks noGrp="1"/>
+          </p:cNvSpPr>
           <p:nvPr>
-            <p:ph idx="1" type="body"/>
+            <p:ph type="body" idx="1"/>
           </p:nvPr>
         </p:nvSpPr>
         <p:spPr>
@@ -2737,11 +2526,11 @@
           </a:prstGeom>
         </p:spPr>
         <p:txBody>
-          <a:bodyPr anchorCtr="0" anchor="t" bIns="91425" lIns="91425" spcFirstLastPara="1" rIns="91425" wrap="square" tIns="91425">
+          <a:bodyPr spcFirstLastPara="1" wrap="square" lIns="91425" tIns="91425" rIns="91425" bIns="91425" anchor="t" anchorCtr="0">
             <a:normAutofit/>
           </a:bodyPr>
           <a:lstStyle>
-            <a:lvl1pPr indent="-342900" lvl="0" marL="457200" algn="ctr">
+            <a:lvl1pPr marL="457200" lvl="0" indent="-342900" algn="ctr">
               <a:spcBef>
                 <a:spcPts val="0"/>
               </a:spcBef>
@@ -2752,7 +2541,7 @@
               <a:buChar char="●"/>
               <a:defRPr/>
             </a:lvl1pPr>
-            <a:lvl2pPr indent="-317500" lvl="1" marL="914400" algn="ctr">
+            <a:lvl2pPr marL="914400" lvl="1" indent="-317500" algn="ctr">
               <a:spcBef>
                 <a:spcPts val="0"/>
               </a:spcBef>
@@ -2763,7 +2552,7 @@
               <a:buChar char="○"/>
               <a:defRPr/>
             </a:lvl2pPr>
-            <a:lvl3pPr indent="-317500" lvl="2" marL="1371600" algn="ctr">
+            <a:lvl3pPr marL="1371600" lvl="2" indent="-317500" algn="ctr">
               <a:spcBef>
                 <a:spcPts val="0"/>
               </a:spcBef>
@@ -2774,7 +2563,7 @@
               <a:buChar char="■"/>
               <a:defRPr/>
             </a:lvl3pPr>
-            <a:lvl4pPr indent="-317500" lvl="3" marL="1828800" algn="ctr">
+            <a:lvl4pPr marL="1828800" lvl="3" indent="-317500" algn="ctr">
               <a:spcBef>
                 <a:spcPts val="0"/>
               </a:spcBef>
@@ -2785,7 +2574,7 @@
               <a:buChar char="●"/>
               <a:defRPr/>
             </a:lvl4pPr>
-            <a:lvl5pPr indent="-317500" lvl="4" marL="2286000" algn="ctr">
+            <a:lvl5pPr marL="2286000" lvl="4" indent="-317500" algn="ctr">
               <a:spcBef>
                 <a:spcPts val="0"/>
               </a:spcBef>
@@ -2796,7 +2585,7 @@
               <a:buChar char="○"/>
               <a:defRPr/>
             </a:lvl5pPr>
-            <a:lvl6pPr indent="-317500" lvl="5" marL="2743200" algn="ctr">
+            <a:lvl6pPr marL="2743200" lvl="5" indent="-317500" algn="ctr">
               <a:spcBef>
                 <a:spcPts val="0"/>
               </a:spcBef>
@@ -2807,7 +2596,7 @@
               <a:buChar char="■"/>
               <a:defRPr/>
             </a:lvl6pPr>
-            <a:lvl7pPr indent="-317500" lvl="6" marL="3200400" algn="ctr">
+            <a:lvl7pPr marL="3200400" lvl="6" indent="-317500" algn="ctr">
               <a:spcBef>
                 <a:spcPts val="0"/>
               </a:spcBef>
@@ -2818,7 +2607,7 @@
               <a:buChar char="●"/>
               <a:defRPr/>
             </a:lvl7pPr>
-            <a:lvl8pPr indent="-317500" lvl="7" marL="3657600" algn="ctr">
+            <a:lvl8pPr marL="3657600" lvl="7" indent="-317500" algn="ctr">
               <a:spcBef>
                 <a:spcPts val="0"/>
               </a:spcBef>
@@ -2829,7 +2618,7 @@
               <a:buChar char="○"/>
               <a:defRPr/>
             </a:lvl8pPr>
-            <a:lvl9pPr indent="-317500" lvl="8" marL="4114800" algn="ctr">
+            <a:lvl9pPr marL="4114800" lvl="8" indent="-317500" algn="ctr">
               <a:spcBef>
                 <a:spcPts val="0"/>
               </a:spcBef>
@@ -2841,15 +2630,19 @@
               <a:defRPr/>
             </a:lvl9pPr>
           </a:lstStyle>
-          <a:p/>
+          <a:p>
+            <a:endParaRPr/>
+          </a:p>
         </p:txBody>
       </p:sp>
       <p:sp>
         <p:nvSpPr>
           <p:cNvPr id="47" name="Google Shape;47;p11"/>
-          <p:cNvSpPr txBox="1"/>
+          <p:cNvSpPr txBox="1">
+            <a:spLocks noGrp="1"/>
+          </p:cNvSpPr>
           <p:nvPr>
-            <p:ph idx="12" type="sldNum"/>
+            <p:ph type="sldNum" idx="12"/>
           </p:nvPr>
         </p:nvSpPr>
         <p:spPr>
@@ -2862,7 +2655,7 @@
           </a:prstGeom>
         </p:spPr>
         <p:txBody>
-          <a:bodyPr anchorCtr="0" anchor="ctr" bIns="91425" lIns="91425" spcFirstLastPara="1" rIns="91425" wrap="square" tIns="91425">
+          <a:bodyPr spcFirstLastPara="1" wrap="square" lIns="91425" tIns="91425" rIns="91425" bIns="91425" anchor="ctr" anchorCtr="0">
             <a:normAutofit/>
           </a:bodyPr>
           <a:lstStyle>
@@ -2904,7 +2697,7 @@
             </a:lvl9pPr>
           </a:lstStyle>
           <a:p>
-            <a:pPr indent="0" lvl="0" marL="0" rtl="0" algn="r">
+            <a:pPr marL="0" lvl="0" indent="0" algn="r" rtl="0">
               <a:spcBef>
                 <a:spcPts val="0"/>
               </a:spcBef>
@@ -2930,11 +2723,11 @@
 </file>
 
 <file path=ppt/slideLayouts/slideLayout11.xml><?xml version="1.0" encoding="utf-8"?>
-<p:sldLayout xmlns:a="http://schemas.openxmlformats.org/drawingml/2006/main" xmlns:r="http://schemas.openxmlformats.org/officeDocument/2006/relationships" xmlns:mc="http://schemas.openxmlformats.org/markup-compatibility/2006" xmlns:mv="urn:schemas-microsoft-com:mac:vml" xmlns:p="http://schemas.openxmlformats.org/presentationml/2006/main" xmlns:c="http://schemas.openxmlformats.org/drawingml/2006/chart" xmlns:dgm="http://schemas.openxmlformats.org/drawingml/2006/diagram" xmlns:o="urn:schemas-microsoft-com:office:office" xmlns:v="urn:schemas-microsoft-com:vml" xmlns:pvml="urn:schemas-microsoft-com:office:powerpoint" xmlns:com="http://schemas.openxmlformats.org/drawingml/2006/compatibility" xmlns:p14="http://schemas.microsoft.com/office/powerpoint/2010/main" xmlns:p15="http://schemas.microsoft.com/office/powerpoint/2012/main" xmlns:ahyp="http://schemas.microsoft.com/office/drawing/2018/hyperlinkcolor" matchingName="Blank" type="blank">
+<p:sldLayout xmlns:a="http://schemas.openxmlformats.org/drawingml/2006/main" xmlns:r="http://schemas.openxmlformats.org/officeDocument/2006/relationships" xmlns:p="http://schemas.openxmlformats.org/presentationml/2006/main" matchingName="Blank" type="blank">
   <p:cSld name="BLANK">
     <p:spTree>
       <p:nvGrpSpPr>
-        <p:cNvPr id="48" name="Shape 48"/>
+        <p:cNvPr id="1" name="Shape 48"/>
         <p:cNvGrpSpPr/>
         <p:nvPr/>
       </p:nvGrpSpPr>
@@ -2949,9 +2742,11 @@
       <p:sp>
         <p:nvSpPr>
           <p:cNvPr id="49" name="Google Shape;49;p12"/>
-          <p:cNvSpPr txBox="1"/>
+          <p:cNvSpPr txBox="1">
+            <a:spLocks noGrp="1"/>
+          </p:cNvSpPr>
           <p:nvPr>
-            <p:ph idx="12" type="sldNum"/>
+            <p:ph type="sldNum" idx="12"/>
           </p:nvPr>
         </p:nvSpPr>
         <p:spPr>
@@ -2964,7 +2759,7 @@
           </a:prstGeom>
         </p:spPr>
         <p:txBody>
-          <a:bodyPr anchorCtr="0" anchor="ctr" bIns="91425" lIns="91425" spcFirstLastPara="1" rIns="91425" wrap="square" tIns="91425">
+          <a:bodyPr spcFirstLastPara="1" wrap="square" lIns="91425" tIns="91425" rIns="91425" bIns="91425" anchor="ctr" anchorCtr="0">
             <a:normAutofit/>
           </a:bodyPr>
           <a:lstStyle>
@@ -3006,7 +2801,7 @@
             </a:lvl9pPr>
           </a:lstStyle>
           <a:p>
-            <a:pPr indent="0" lvl="0" marL="0" rtl="0" algn="r">
+            <a:pPr marL="0" lvl="0" indent="0" algn="r" rtl="0">
               <a:spcBef>
                 <a:spcPts val="0"/>
               </a:spcBef>
@@ -3032,11 +2827,11 @@
 </file>
 
 <file path=ppt/slideLayouts/slideLayout2.xml><?xml version="1.0" encoding="utf-8"?>
-<p:sldLayout xmlns:a="http://schemas.openxmlformats.org/drawingml/2006/main" xmlns:r="http://schemas.openxmlformats.org/officeDocument/2006/relationships" xmlns:mc="http://schemas.openxmlformats.org/markup-compatibility/2006" xmlns:mv="urn:schemas-microsoft-com:mac:vml" xmlns:p="http://schemas.openxmlformats.org/presentationml/2006/main" xmlns:c="http://schemas.openxmlformats.org/drawingml/2006/chart" xmlns:dgm="http://schemas.openxmlformats.org/drawingml/2006/diagram" xmlns:o="urn:schemas-microsoft-com:office:office" xmlns:v="urn:schemas-microsoft-com:vml" xmlns:pvml="urn:schemas-microsoft-com:office:powerpoint" xmlns:com="http://schemas.openxmlformats.org/drawingml/2006/compatibility" xmlns:p14="http://schemas.microsoft.com/office/powerpoint/2010/main" xmlns:p15="http://schemas.microsoft.com/office/powerpoint/2012/main" xmlns:ahyp="http://schemas.microsoft.com/office/drawing/2018/hyperlinkcolor" matchingName="Section header" type="secHead">
+<p:sldLayout xmlns:a="http://schemas.openxmlformats.org/drawingml/2006/main" xmlns:r="http://schemas.openxmlformats.org/officeDocument/2006/relationships" xmlns:p="http://schemas.openxmlformats.org/presentationml/2006/main" matchingName="Section header" type="secHead">
   <p:cSld name="SECTION_HEADER">
     <p:spTree>
       <p:nvGrpSpPr>
-        <p:cNvPr id="13" name="Shape 13"/>
+        <p:cNvPr id="1" name="Shape 13"/>
         <p:cNvGrpSpPr/>
         <p:nvPr/>
       </p:nvGrpSpPr>
@@ -3051,7 +2846,9 @@
       <p:sp>
         <p:nvSpPr>
           <p:cNvPr id="14" name="Google Shape;14;p3"/>
-          <p:cNvSpPr txBox="1"/>
+          <p:cNvSpPr txBox="1">
+            <a:spLocks noGrp="1"/>
+          </p:cNvSpPr>
           <p:nvPr>
             <p:ph type="title"/>
           </p:nvPr>
@@ -3066,7 +2863,7 @@
           </a:prstGeom>
         </p:spPr>
         <p:txBody>
-          <a:bodyPr anchorCtr="0" anchor="ctr" bIns="91425" lIns="91425" spcFirstLastPara="1" rIns="91425" wrap="square" tIns="91425">
+          <a:bodyPr spcFirstLastPara="1" wrap="square" lIns="91425" tIns="91425" rIns="91425" bIns="91425" anchor="ctr" anchorCtr="0">
             <a:normAutofit/>
           </a:bodyPr>
           <a:lstStyle>
@@ -3170,15 +2967,19 @@
               <a:defRPr sz="3600"/>
             </a:lvl9pPr>
           </a:lstStyle>
-          <a:p/>
+          <a:p>
+            <a:endParaRPr/>
+          </a:p>
         </p:txBody>
       </p:sp>
       <p:sp>
         <p:nvSpPr>
           <p:cNvPr id="15" name="Google Shape;15;p3"/>
-          <p:cNvSpPr txBox="1"/>
+          <p:cNvSpPr txBox="1">
+            <a:spLocks noGrp="1"/>
+          </p:cNvSpPr>
           <p:nvPr>
-            <p:ph idx="12" type="sldNum"/>
+            <p:ph type="sldNum" idx="12"/>
           </p:nvPr>
         </p:nvSpPr>
         <p:spPr>
@@ -3191,7 +2992,7 @@
           </a:prstGeom>
         </p:spPr>
         <p:txBody>
-          <a:bodyPr anchorCtr="0" anchor="ctr" bIns="91425" lIns="91425" spcFirstLastPara="1" rIns="91425" wrap="square" tIns="91425">
+          <a:bodyPr spcFirstLastPara="1" wrap="square" lIns="91425" tIns="91425" rIns="91425" bIns="91425" anchor="ctr" anchorCtr="0">
             <a:normAutofit/>
           </a:bodyPr>
           <a:lstStyle>
@@ -3233,7 +3034,7 @@
             </a:lvl9pPr>
           </a:lstStyle>
           <a:p>
-            <a:pPr indent="0" lvl="0" marL="0" rtl="0" algn="r">
+            <a:pPr marL="0" lvl="0" indent="0" algn="r" rtl="0">
               <a:spcBef>
                 <a:spcPts val="0"/>
               </a:spcBef>
@@ -3259,11 +3060,11 @@
 </file>
 
 <file path=ppt/slideLayouts/slideLayout3.xml><?xml version="1.0" encoding="utf-8"?>
-<p:sldLayout xmlns:a="http://schemas.openxmlformats.org/drawingml/2006/main" xmlns:r="http://schemas.openxmlformats.org/officeDocument/2006/relationships" xmlns:mc="http://schemas.openxmlformats.org/markup-compatibility/2006" xmlns:mv="urn:schemas-microsoft-com:mac:vml" xmlns:p="http://schemas.openxmlformats.org/presentationml/2006/main" xmlns:c="http://schemas.openxmlformats.org/drawingml/2006/chart" xmlns:dgm="http://schemas.openxmlformats.org/drawingml/2006/diagram" xmlns:o="urn:schemas-microsoft-com:office:office" xmlns:v="urn:schemas-microsoft-com:vml" xmlns:pvml="urn:schemas-microsoft-com:office:powerpoint" xmlns:com="http://schemas.openxmlformats.org/drawingml/2006/compatibility" xmlns:p14="http://schemas.microsoft.com/office/powerpoint/2010/main" xmlns:p15="http://schemas.microsoft.com/office/powerpoint/2012/main" xmlns:ahyp="http://schemas.microsoft.com/office/drawing/2018/hyperlinkcolor" matchingName="Title and body" type="tx">
+<p:sldLayout xmlns:a="http://schemas.openxmlformats.org/drawingml/2006/main" xmlns:r="http://schemas.openxmlformats.org/officeDocument/2006/relationships" xmlns:p="http://schemas.openxmlformats.org/presentationml/2006/main" matchingName="Title and body" type="tx">
   <p:cSld name="TITLE_AND_BODY">
     <p:spTree>
       <p:nvGrpSpPr>
-        <p:cNvPr id="16" name="Shape 16"/>
+        <p:cNvPr id="1" name="Shape 16"/>
         <p:cNvGrpSpPr/>
         <p:nvPr/>
       </p:nvGrpSpPr>
@@ -3278,7 +3079,9 @@
       <p:sp>
         <p:nvSpPr>
           <p:cNvPr id="17" name="Google Shape;17;p4"/>
-          <p:cNvSpPr txBox="1"/>
+          <p:cNvSpPr txBox="1">
+            <a:spLocks noGrp="1"/>
+          </p:cNvSpPr>
           <p:nvPr>
             <p:ph type="title"/>
           </p:nvPr>
@@ -3293,7 +3096,7 @@
           </a:prstGeom>
         </p:spPr>
         <p:txBody>
-          <a:bodyPr anchorCtr="0" anchor="t" bIns="91425" lIns="91425" spcFirstLastPara="1" rIns="91425" wrap="square" tIns="91425">
+          <a:bodyPr spcFirstLastPara="1" wrap="square" lIns="91425" tIns="91425" rIns="91425" bIns="91425" anchor="t" anchorCtr="0">
             <a:normAutofit/>
           </a:bodyPr>
           <a:lstStyle>
@@ -3397,15 +3200,19 @@
               <a:defRPr/>
             </a:lvl9pPr>
           </a:lstStyle>
-          <a:p/>
+          <a:p>
+            <a:endParaRPr/>
+          </a:p>
         </p:txBody>
       </p:sp>
       <p:sp>
         <p:nvSpPr>
           <p:cNvPr id="18" name="Google Shape;18;p4"/>
-          <p:cNvSpPr txBox="1"/>
+          <p:cNvSpPr txBox="1">
+            <a:spLocks noGrp="1"/>
+          </p:cNvSpPr>
           <p:nvPr>
-            <p:ph idx="1" type="body"/>
+            <p:ph type="body" idx="1"/>
           </p:nvPr>
         </p:nvSpPr>
         <p:spPr>
@@ -3418,11 +3225,11 @@
           </a:prstGeom>
         </p:spPr>
         <p:txBody>
-          <a:bodyPr anchorCtr="0" anchor="t" bIns="91425" lIns="91425" spcFirstLastPara="1" rIns="91425" wrap="square" tIns="91425">
+          <a:bodyPr spcFirstLastPara="1" wrap="square" lIns="91425" tIns="91425" rIns="91425" bIns="91425" anchor="t" anchorCtr="0">
             <a:normAutofit/>
           </a:bodyPr>
           <a:lstStyle>
-            <a:lvl1pPr indent="-342900" lvl="0" marL="457200">
+            <a:lvl1pPr marL="457200" lvl="0" indent="-342900">
               <a:spcBef>
                 <a:spcPts val="0"/>
               </a:spcBef>
@@ -3433,7 +3240,7 @@
               <a:buChar char="●"/>
               <a:defRPr/>
             </a:lvl1pPr>
-            <a:lvl2pPr indent="-317500" lvl="1" marL="914400">
+            <a:lvl2pPr marL="914400" lvl="1" indent="-317500">
               <a:spcBef>
                 <a:spcPts val="0"/>
               </a:spcBef>
@@ -3444,7 +3251,7 @@
               <a:buChar char="○"/>
               <a:defRPr/>
             </a:lvl2pPr>
-            <a:lvl3pPr indent="-317500" lvl="2" marL="1371600">
+            <a:lvl3pPr marL="1371600" lvl="2" indent="-317500">
               <a:spcBef>
                 <a:spcPts val="0"/>
               </a:spcBef>
@@ -3455,7 +3262,7 @@
               <a:buChar char="■"/>
               <a:defRPr/>
             </a:lvl3pPr>
-            <a:lvl4pPr indent="-317500" lvl="3" marL="1828800">
+            <a:lvl4pPr marL="1828800" lvl="3" indent="-317500">
               <a:spcBef>
                 <a:spcPts val="0"/>
               </a:spcBef>
@@ -3466,7 +3273,7 @@
               <a:buChar char="●"/>
               <a:defRPr/>
             </a:lvl4pPr>
-            <a:lvl5pPr indent="-317500" lvl="4" marL="2286000">
+            <a:lvl5pPr marL="2286000" lvl="4" indent="-317500">
               <a:spcBef>
                 <a:spcPts val="0"/>
               </a:spcBef>
@@ -3477,7 +3284,7 @@
               <a:buChar char="○"/>
               <a:defRPr/>
             </a:lvl5pPr>
-            <a:lvl6pPr indent="-317500" lvl="5" marL="2743200">
+            <a:lvl6pPr marL="2743200" lvl="5" indent="-317500">
               <a:spcBef>
                 <a:spcPts val="0"/>
               </a:spcBef>
@@ -3488,7 +3295,7 @@
               <a:buChar char="■"/>
               <a:defRPr/>
             </a:lvl6pPr>
-            <a:lvl7pPr indent="-317500" lvl="6" marL="3200400">
+            <a:lvl7pPr marL="3200400" lvl="6" indent="-317500">
               <a:spcBef>
                 <a:spcPts val="0"/>
               </a:spcBef>
@@ -3499,7 +3306,7 @@
               <a:buChar char="●"/>
               <a:defRPr/>
             </a:lvl7pPr>
-            <a:lvl8pPr indent="-317500" lvl="7" marL="3657600">
+            <a:lvl8pPr marL="3657600" lvl="7" indent="-317500">
               <a:spcBef>
                 <a:spcPts val="0"/>
               </a:spcBef>
@@ -3510,7 +3317,7 @@
               <a:buChar char="○"/>
               <a:defRPr/>
             </a:lvl8pPr>
-            <a:lvl9pPr indent="-317500" lvl="8" marL="4114800">
+            <a:lvl9pPr marL="4114800" lvl="8" indent="-317500">
               <a:spcBef>
                 <a:spcPts val="0"/>
               </a:spcBef>
@@ -3522,15 +3329,19 @@
               <a:defRPr/>
             </a:lvl9pPr>
           </a:lstStyle>
-          <a:p/>
+          <a:p>
+            <a:endParaRPr/>
+          </a:p>
         </p:txBody>
       </p:sp>
       <p:sp>
         <p:nvSpPr>
           <p:cNvPr id="19" name="Google Shape;19;p4"/>
-          <p:cNvSpPr txBox="1"/>
+          <p:cNvSpPr txBox="1">
+            <a:spLocks noGrp="1"/>
+          </p:cNvSpPr>
           <p:nvPr>
-            <p:ph idx="12" type="sldNum"/>
+            <p:ph type="sldNum" idx="12"/>
           </p:nvPr>
         </p:nvSpPr>
         <p:spPr>
@@ -3543,7 +3354,7 @@
           </a:prstGeom>
         </p:spPr>
         <p:txBody>
-          <a:bodyPr anchorCtr="0" anchor="ctr" bIns="91425" lIns="91425" spcFirstLastPara="1" rIns="91425" wrap="square" tIns="91425">
+          <a:bodyPr spcFirstLastPara="1" wrap="square" lIns="91425" tIns="91425" rIns="91425" bIns="91425" anchor="ctr" anchorCtr="0">
             <a:normAutofit/>
           </a:bodyPr>
           <a:lstStyle>
@@ -3585,7 +3396,7 @@
             </a:lvl9pPr>
           </a:lstStyle>
           <a:p>
-            <a:pPr indent="0" lvl="0" marL="0" rtl="0" algn="r">
+            <a:pPr marL="0" lvl="0" indent="0" algn="r" rtl="0">
               <a:spcBef>
                 <a:spcPts val="0"/>
               </a:spcBef>
@@ -3611,11 +3422,11 @@
 </file>
 
 <file path=ppt/slideLayouts/slideLayout4.xml><?xml version="1.0" encoding="utf-8"?>
-<p:sldLayout xmlns:a="http://schemas.openxmlformats.org/drawingml/2006/main" xmlns:r="http://schemas.openxmlformats.org/officeDocument/2006/relationships" xmlns:mc="http://schemas.openxmlformats.org/markup-compatibility/2006" xmlns:mv="urn:schemas-microsoft-com:mac:vml" xmlns:p="http://schemas.openxmlformats.org/presentationml/2006/main" xmlns:c="http://schemas.openxmlformats.org/drawingml/2006/chart" xmlns:dgm="http://schemas.openxmlformats.org/drawingml/2006/diagram" xmlns:o="urn:schemas-microsoft-com:office:office" xmlns:v="urn:schemas-microsoft-com:vml" xmlns:pvml="urn:schemas-microsoft-com:office:powerpoint" xmlns:com="http://schemas.openxmlformats.org/drawingml/2006/compatibility" xmlns:p14="http://schemas.microsoft.com/office/powerpoint/2010/main" xmlns:p15="http://schemas.microsoft.com/office/powerpoint/2012/main" xmlns:ahyp="http://schemas.microsoft.com/office/drawing/2018/hyperlinkcolor" matchingName="Title and two columns" type="twoColTx">
+<p:sldLayout xmlns:a="http://schemas.openxmlformats.org/drawingml/2006/main" xmlns:r="http://schemas.openxmlformats.org/officeDocument/2006/relationships" xmlns:p="http://schemas.openxmlformats.org/presentationml/2006/main" matchingName="Title and two columns" type="twoColTx">
   <p:cSld name="TITLE_AND_TWO_COLUMNS">
     <p:spTree>
       <p:nvGrpSpPr>
-        <p:cNvPr id="20" name="Shape 20"/>
+        <p:cNvPr id="1" name="Shape 20"/>
         <p:cNvGrpSpPr/>
         <p:nvPr/>
       </p:nvGrpSpPr>
@@ -3630,7 +3441,9 @@
       <p:sp>
         <p:nvSpPr>
           <p:cNvPr id="21" name="Google Shape;21;p5"/>
-          <p:cNvSpPr txBox="1"/>
+          <p:cNvSpPr txBox="1">
+            <a:spLocks noGrp="1"/>
+          </p:cNvSpPr>
           <p:nvPr>
             <p:ph type="title"/>
           </p:nvPr>
@@ -3645,7 +3458,7 @@
           </a:prstGeom>
         </p:spPr>
         <p:txBody>
-          <a:bodyPr anchorCtr="0" anchor="t" bIns="91425" lIns="91425" spcFirstLastPara="1" rIns="91425" wrap="square" tIns="91425">
+          <a:bodyPr spcFirstLastPara="1" wrap="square" lIns="91425" tIns="91425" rIns="91425" bIns="91425" anchor="t" anchorCtr="0">
             <a:normAutofit/>
           </a:bodyPr>
           <a:lstStyle>
@@ -3749,15 +3562,19 @@
               <a:defRPr/>
             </a:lvl9pPr>
           </a:lstStyle>
-          <a:p/>
+          <a:p>
+            <a:endParaRPr/>
+          </a:p>
         </p:txBody>
       </p:sp>
       <p:sp>
         <p:nvSpPr>
           <p:cNvPr id="22" name="Google Shape;22;p5"/>
-          <p:cNvSpPr txBox="1"/>
+          <p:cNvSpPr txBox="1">
+            <a:spLocks noGrp="1"/>
+          </p:cNvSpPr>
           <p:nvPr>
-            <p:ph idx="1" type="body"/>
+            <p:ph type="body" idx="1"/>
           </p:nvPr>
         </p:nvSpPr>
         <p:spPr>
@@ -3770,11 +3587,11 @@
           </a:prstGeom>
         </p:spPr>
         <p:txBody>
-          <a:bodyPr anchorCtr="0" anchor="t" bIns="91425" lIns="91425" spcFirstLastPara="1" rIns="91425" wrap="square" tIns="91425">
+          <a:bodyPr spcFirstLastPara="1" wrap="square" lIns="91425" tIns="91425" rIns="91425" bIns="91425" anchor="t" anchorCtr="0">
             <a:normAutofit/>
           </a:bodyPr>
           <a:lstStyle>
-            <a:lvl1pPr indent="-317500" lvl="0" marL="457200">
+            <a:lvl1pPr marL="457200" lvl="0" indent="-317500">
               <a:spcBef>
                 <a:spcPts val="0"/>
               </a:spcBef>
@@ -3785,7 +3602,7 @@
               <a:buChar char="●"/>
               <a:defRPr sz="1400"/>
             </a:lvl1pPr>
-            <a:lvl2pPr indent="-304800" lvl="1" marL="914400">
+            <a:lvl2pPr marL="914400" lvl="1" indent="-304800">
               <a:spcBef>
                 <a:spcPts val="0"/>
               </a:spcBef>
@@ -3796,7 +3613,7 @@
               <a:buChar char="○"/>
               <a:defRPr sz="1200"/>
             </a:lvl2pPr>
-            <a:lvl3pPr indent="-304800" lvl="2" marL="1371600">
+            <a:lvl3pPr marL="1371600" lvl="2" indent="-304800">
               <a:spcBef>
                 <a:spcPts val="0"/>
               </a:spcBef>
@@ -3807,7 +3624,7 @@
               <a:buChar char="■"/>
               <a:defRPr sz="1200"/>
             </a:lvl3pPr>
-            <a:lvl4pPr indent="-304800" lvl="3" marL="1828800">
+            <a:lvl4pPr marL="1828800" lvl="3" indent="-304800">
               <a:spcBef>
                 <a:spcPts val="0"/>
               </a:spcBef>
@@ -3818,7 +3635,7 @@
               <a:buChar char="●"/>
               <a:defRPr sz="1200"/>
             </a:lvl4pPr>
-            <a:lvl5pPr indent="-304800" lvl="4" marL="2286000">
+            <a:lvl5pPr marL="2286000" lvl="4" indent="-304800">
               <a:spcBef>
                 <a:spcPts val="0"/>
               </a:spcBef>
@@ -3829,7 +3646,7 @@
               <a:buChar char="○"/>
               <a:defRPr sz="1200"/>
             </a:lvl5pPr>
-            <a:lvl6pPr indent="-304800" lvl="5" marL="2743200">
+            <a:lvl6pPr marL="2743200" lvl="5" indent="-304800">
               <a:spcBef>
                 <a:spcPts val="0"/>
               </a:spcBef>
@@ -3840,7 +3657,7 @@
               <a:buChar char="■"/>
               <a:defRPr sz="1200"/>
             </a:lvl6pPr>
-            <a:lvl7pPr indent="-304800" lvl="6" marL="3200400">
+            <a:lvl7pPr marL="3200400" lvl="6" indent="-304800">
               <a:spcBef>
                 <a:spcPts val="0"/>
               </a:spcBef>
@@ -3851,7 +3668,7 @@
               <a:buChar char="●"/>
               <a:defRPr sz="1200"/>
             </a:lvl7pPr>
-            <a:lvl8pPr indent="-304800" lvl="7" marL="3657600">
+            <a:lvl8pPr marL="3657600" lvl="7" indent="-304800">
               <a:spcBef>
                 <a:spcPts val="0"/>
               </a:spcBef>
@@ -3862,7 +3679,7 @@
               <a:buChar char="○"/>
               <a:defRPr sz="1200"/>
             </a:lvl8pPr>
-            <a:lvl9pPr indent="-304800" lvl="8" marL="4114800">
+            <a:lvl9pPr marL="4114800" lvl="8" indent="-304800">
               <a:spcBef>
                 <a:spcPts val="0"/>
               </a:spcBef>
@@ -3874,15 +3691,19 @@
               <a:defRPr sz="1200"/>
             </a:lvl9pPr>
           </a:lstStyle>
-          <a:p/>
+          <a:p>
+            <a:endParaRPr/>
+          </a:p>
         </p:txBody>
       </p:sp>
       <p:sp>
         <p:nvSpPr>
           <p:cNvPr id="23" name="Google Shape;23;p5"/>
-          <p:cNvSpPr txBox="1"/>
+          <p:cNvSpPr txBox="1">
+            <a:spLocks noGrp="1"/>
+          </p:cNvSpPr>
           <p:nvPr>
-            <p:ph idx="2" type="body"/>
+            <p:ph type="body" idx="2"/>
           </p:nvPr>
         </p:nvSpPr>
         <p:spPr>
@@ -3895,11 +3716,11 @@
           </a:prstGeom>
         </p:spPr>
         <p:txBody>
-          <a:bodyPr anchorCtr="0" anchor="t" bIns="91425" lIns="91425" spcFirstLastPara="1" rIns="91425" wrap="square" tIns="91425">
+          <a:bodyPr spcFirstLastPara="1" wrap="square" lIns="91425" tIns="91425" rIns="91425" bIns="91425" anchor="t" anchorCtr="0">
             <a:normAutofit/>
           </a:bodyPr>
           <a:lstStyle>
-            <a:lvl1pPr indent="-317500" lvl="0" marL="457200">
+            <a:lvl1pPr marL="457200" lvl="0" indent="-317500">
               <a:spcBef>
                 <a:spcPts val="0"/>
               </a:spcBef>
@@ -3910,7 +3731,7 @@
               <a:buChar char="●"/>
               <a:defRPr sz="1400"/>
             </a:lvl1pPr>
-            <a:lvl2pPr indent="-304800" lvl="1" marL="914400">
+            <a:lvl2pPr marL="914400" lvl="1" indent="-304800">
               <a:spcBef>
                 <a:spcPts val="0"/>
               </a:spcBef>
@@ -3921,7 +3742,7 @@
               <a:buChar char="○"/>
               <a:defRPr sz="1200"/>
             </a:lvl2pPr>
-            <a:lvl3pPr indent="-304800" lvl="2" marL="1371600">
+            <a:lvl3pPr marL="1371600" lvl="2" indent="-304800">
               <a:spcBef>
                 <a:spcPts val="0"/>
               </a:spcBef>
@@ -3932,7 +3753,7 @@
               <a:buChar char="■"/>
               <a:defRPr sz="1200"/>
             </a:lvl3pPr>
-            <a:lvl4pPr indent="-304800" lvl="3" marL="1828800">
+            <a:lvl4pPr marL="1828800" lvl="3" indent="-304800">
               <a:spcBef>
                 <a:spcPts val="0"/>
               </a:spcBef>
@@ -3943,7 +3764,7 @@
               <a:buChar char="●"/>
               <a:defRPr sz="1200"/>
             </a:lvl4pPr>
-            <a:lvl5pPr indent="-304800" lvl="4" marL="2286000">
+            <a:lvl5pPr marL="2286000" lvl="4" indent="-304800">
               <a:spcBef>
                 <a:spcPts val="0"/>
               </a:spcBef>
@@ -3954,7 +3775,7 @@
               <a:buChar char="○"/>
               <a:defRPr sz="1200"/>
             </a:lvl5pPr>
-            <a:lvl6pPr indent="-304800" lvl="5" marL="2743200">
+            <a:lvl6pPr marL="2743200" lvl="5" indent="-304800">
               <a:spcBef>
                 <a:spcPts val="0"/>
               </a:spcBef>
@@ -3965,7 +3786,7 @@
               <a:buChar char="■"/>
               <a:defRPr sz="1200"/>
             </a:lvl6pPr>
-            <a:lvl7pPr indent="-304800" lvl="6" marL="3200400">
+            <a:lvl7pPr marL="3200400" lvl="6" indent="-304800">
               <a:spcBef>
                 <a:spcPts val="0"/>
               </a:spcBef>
@@ -3976,7 +3797,7 @@
               <a:buChar char="●"/>
               <a:defRPr sz="1200"/>
             </a:lvl7pPr>
-            <a:lvl8pPr indent="-304800" lvl="7" marL="3657600">
+            <a:lvl8pPr marL="3657600" lvl="7" indent="-304800">
               <a:spcBef>
                 <a:spcPts val="0"/>
               </a:spcBef>
@@ -3987,7 +3808,7 @@
               <a:buChar char="○"/>
               <a:defRPr sz="1200"/>
             </a:lvl8pPr>
-            <a:lvl9pPr indent="-304800" lvl="8" marL="4114800">
+            <a:lvl9pPr marL="4114800" lvl="8" indent="-304800">
               <a:spcBef>
                 <a:spcPts val="0"/>
               </a:spcBef>
@@ -3999,15 +3820,19 @@
               <a:defRPr sz="1200"/>
             </a:lvl9pPr>
           </a:lstStyle>
-          <a:p/>
+          <a:p>
+            <a:endParaRPr/>
+          </a:p>
         </p:txBody>
       </p:sp>
       <p:sp>
         <p:nvSpPr>
           <p:cNvPr id="24" name="Google Shape;24;p5"/>
-          <p:cNvSpPr txBox="1"/>
+          <p:cNvSpPr txBox="1">
+            <a:spLocks noGrp="1"/>
+          </p:cNvSpPr>
           <p:nvPr>
-            <p:ph idx="12" type="sldNum"/>
+            <p:ph type="sldNum" idx="12"/>
           </p:nvPr>
         </p:nvSpPr>
         <p:spPr>
@@ -4020,7 +3845,7 @@
           </a:prstGeom>
         </p:spPr>
         <p:txBody>
-          <a:bodyPr anchorCtr="0" anchor="ctr" bIns="91425" lIns="91425" spcFirstLastPara="1" rIns="91425" wrap="square" tIns="91425">
+          <a:bodyPr spcFirstLastPara="1" wrap="square" lIns="91425" tIns="91425" rIns="91425" bIns="91425" anchor="ctr" anchorCtr="0">
             <a:normAutofit/>
           </a:bodyPr>
           <a:lstStyle>
@@ -4062,7 +3887,7 @@
             </a:lvl9pPr>
           </a:lstStyle>
           <a:p>
-            <a:pPr indent="0" lvl="0" marL="0" rtl="0" algn="r">
+            <a:pPr marL="0" lvl="0" indent="0" algn="r" rtl="0">
               <a:spcBef>
                 <a:spcPts val="0"/>
               </a:spcBef>
@@ -4088,11 +3913,11 @@
 </file>
 
 <file path=ppt/slideLayouts/slideLayout5.xml><?xml version="1.0" encoding="utf-8"?>
-<p:sldLayout xmlns:a="http://schemas.openxmlformats.org/drawingml/2006/main" xmlns:r="http://schemas.openxmlformats.org/officeDocument/2006/relationships" xmlns:mc="http://schemas.openxmlformats.org/markup-compatibility/2006" xmlns:mv="urn:schemas-microsoft-com:mac:vml" xmlns:p="http://schemas.openxmlformats.org/presentationml/2006/main" xmlns:c="http://schemas.openxmlformats.org/drawingml/2006/chart" xmlns:dgm="http://schemas.openxmlformats.org/drawingml/2006/diagram" xmlns:o="urn:schemas-microsoft-com:office:office" xmlns:v="urn:schemas-microsoft-com:vml" xmlns:pvml="urn:schemas-microsoft-com:office:powerpoint" xmlns:com="http://schemas.openxmlformats.org/drawingml/2006/compatibility" xmlns:p14="http://schemas.microsoft.com/office/powerpoint/2010/main" xmlns:p15="http://schemas.microsoft.com/office/powerpoint/2012/main" xmlns:ahyp="http://schemas.microsoft.com/office/drawing/2018/hyperlinkcolor" matchingName="Title only" type="titleOnly">
+<p:sldLayout xmlns:a="http://schemas.openxmlformats.org/drawingml/2006/main" xmlns:r="http://schemas.openxmlformats.org/officeDocument/2006/relationships" xmlns:p="http://schemas.openxmlformats.org/presentationml/2006/main" matchingName="Title only" type="titleOnly">
   <p:cSld name="TITLE_ONLY">
     <p:spTree>
       <p:nvGrpSpPr>
-        <p:cNvPr id="25" name="Shape 25"/>
+        <p:cNvPr id="1" name="Shape 25"/>
         <p:cNvGrpSpPr/>
         <p:nvPr/>
       </p:nvGrpSpPr>
@@ -4107,7 +3932,9 @@
       <p:sp>
         <p:nvSpPr>
           <p:cNvPr id="26" name="Google Shape;26;p6"/>
-          <p:cNvSpPr txBox="1"/>
+          <p:cNvSpPr txBox="1">
+            <a:spLocks noGrp="1"/>
+          </p:cNvSpPr>
           <p:nvPr>
             <p:ph type="title"/>
           </p:nvPr>
@@ -4122,7 +3949,7 @@
           </a:prstGeom>
         </p:spPr>
         <p:txBody>
-          <a:bodyPr anchorCtr="0" anchor="t" bIns="91425" lIns="91425" spcFirstLastPara="1" rIns="91425" wrap="square" tIns="91425">
+          <a:bodyPr spcFirstLastPara="1" wrap="square" lIns="91425" tIns="91425" rIns="91425" bIns="91425" anchor="t" anchorCtr="0">
             <a:normAutofit/>
           </a:bodyPr>
           <a:lstStyle>
@@ -4226,15 +4053,19 @@
               <a:defRPr/>
             </a:lvl9pPr>
           </a:lstStyle>
-          <a:p/>
+          <a:p>
+            <a:endParaRPr/>
+          </a:p>
         </p:txBody>
       </p:sp>
       <p:sp>
         <p:nvSpPr>
           <p:cNvPr id="27" name="Google Shape;27;p6"/>
-          <p:cNvSpPr txBox="1"/>
+          <p:cNvSpPr txBox="1">
+            <a:spLocks noGrp="1"/>
+          </p:cNvSpPr>
           <p:nvPr>
-            <p:ph idx="12" type="sldNum"/>
+            <p:ph type="sldNum" idx="12"/>
           </p:nvPr>
         </p:nvSpPr>
         <p:spPr>
@@ -4247,7 +4078,7 @@
           </a:prstGeom>
         </p:spPr>
         <p:txBody>
-          <a:bodyPr anchorCtr="0" anchor="ctr" bIns="91425" lIns="91425" spcFirstLastPara="1" rIns="91425" wrap="square" tIns="91425">
+          <a:bodyPr spcFirstLastPara="1" wrap="square" lIns="91425" tIns="91425" rIns="91425" bIns="91425" anchor="ctr" anchorCtr="0">
             <a:normAutofit/>
           </a:bodyPr>
           <a:lstStyle>
@@ -4289,7 +4120,7 @@
             </a:lvl9pPr>
           </a:lstStyle>
           <a:p>
-            <a:pPr indent="0" lvl="0" marL="0" rtl="0" algn="r">
+            <a:pPr marL="0" lvl="0" indent="0" algn="r" rtl="0">
               <a:spcBef>
                 <a:spcPts val="0"/>
               </a:spcBef>
@@ -4315,11 +4146,11 @@
 </file>
 
 <file path=ppt/slideLayouts/slideLayout6.xml><?xml version="1.0" encoding="utf-8"?>
-<p:sldLayout xmlns:a="http://schemas.openxmlformats.org/drawingml/2006/main" xmlns:r="http://schemas.openxmlformats.org/officeDocument/2006/relationships" xmlns:mc="http://schemas.openxmlformats.org/markup-compatibility/2006" xmlns:mv="urn:schemas-microsoft-com:mac:vml" xmlns:p="http://schemas.openxmlformats.org/presentationml/2006/main" xmlns:c="http://schemas.openxmlformats.org/drawingml/2006/chart" xmlns:dgm="http://schemas.openxmlformats.org/drawingml/2006/diagram" xmlns:o="urn:schemas-microsoft-com:office:office" xmlns:v="urn:schemas-microsoft-com:vml" xmlns:pvml="urn:schemas-microsoft-com:office:powerpoint" xmlns:com="http://schemas.openxmlformats.org/drawingml/2006/compatibility" xmlns:p14="http://schemas.microsoft.com/office/powerpoint/2010/main" xmlns:p15="http://schemas.microsoft.com/office/powerpoint/2012/main" xmlns:ahyp="http://schemas.microsoft.com/office/drawing/2018/hyperlinkcolor" matchingName="One column text">
+<p:sldLayout xmlns:a="http://schemas.openxmlformats.org/drawingml/2006/main" xmlns:r="http://schemas.openxmlformats.org/officeDocument/2006/relationships" xmlns:p="http://schemas.openxmlformats.org/presentationml/2006/main" matchingName="One column text">
   <p:cSld name="ONE_COLUMN_TEXT">
     <p:spTree>
       <p:nvGrpSpPr>
-        <p:cNvPr id="28" name="Shape 28"/>
+        <p:cNvPr id="1" name="Shape 28"/>
         <p:cNvGrpSpPr/>
         <p:nvPr/>
       </p:nvGrpSpPr>
@@ -4334,7 +4165,9 @@
       <p:sp>
         <p:nvSpPr>
           <p:cNvPr id="29" name="Google Shape;29;p7"/>
-          <p:cNvSpPr txBox="1"/>
+          <p:cNvSpPr txBox="1">
+            <a:spLocks noGrp="1"/>
+          </p:cNvSpPr>
           <p:nvPr>
             <p:ph type="title"/>
           </p:nvPr>
@@ -4349,7 +4182,7 @@
           </a:prstGeom>
         </p:spPr>
         <p:txBody>
-          <a:bodyPr anchorCtr="0" anchor="b" bIns="91425" lIns="91425" spcFirstLastPara="1" rIns="91425" wrap="square" tIns="91425">
+          <a:bodyPr spcFirstLastPara="1" wrap="square" lIns="91425" tIns="91425" rIns="91425" bIns="91425" anchor="b" anchorCtr="0">
             <a:normAutofit/>
           </a:bodyPr>
           <a:lstStyle>
@@ -4453,15 +4286,19 @@
               <a:defRPr sz="2400"/>
             </a:lvl9pPr>
           </a:lstStyle>
-          <a:p/>
+          <a:p>
+            <a:endParaRPr/>
+          </a:p>
         </p:txBody>
       </p:sp>
       <p:sp>
         <p:nvSpPr>
           <p:cNvPr id="30" name="Google Shape;30;p7"/>
-          <p:cNvSpPr txBox="1"/>
+          <p:cNvSpPr txBox="1">
+            <a:spLocks noGrp="1"/>
+          </p:cNvSpPr>
           <p:nvPr>
-            <p:ph idx="1" type="body"/>
+            <p:ph type="body" idx="1"/>
           </p:nvPr>
         </p:nvSpPr>
         <p:spPr>
@@ -4474,11 +4311,11 @@
           </a:prstGeom>
         </p:spPr>
         <p:txBody>
-          <a:bodyPr anchorCtr="0" anchor="t" bIns="91425" lIns="91425" spcFirstLastPara="1" rIns="91425" wrap="square" tIns="91425">
+          <a:bodyPr spcFirstLastPara="1" wrap="square" lIns="91425" tIns="91425" rIns="91425" bIns="91425" anchor="t" anchorCtr="0">
             <a:normAutofit/>
           </a:bodyPr>
           <a:lstStyle>
-            <a:lvl1pPr indent="-304800" lvl="0" marL="457200">
+            <a:lvl1pPr marL="457200" lvl="0" indent="-304800">
               <a:spcBef>
                 <a:spcPts val="0"/>
               </a:spcBef>
@@ -4489,7 +4326,7 @@
               <a:buChar char="●"/>
               <a:defRPr sz="1200"/>
             </a:lvl1pPr>
-            <a:lvl2pPr indent="-304800" lvl="1" marL="914400">
+            <a:lvl2pPr marL="914400" lvl="1" indent="-304800">
               <a:spcBef>
                 <a:spcPts val="0"/>
               </a:spcBef>
@@ -4500,7 +4337,7 @@
               <a:buChar char="○"/>
               <a:defRPr sz="1200"/>
             </a:lvl2pPr>
-            <a:lvl3pPr indent="-304800" lvl="2" marL="1371600">
+            <a:lvl3pPr marL="1371600" lvl="2" indent="-304800">
               <a:spcBef>
                 <a:spcPts val="0"/>
               </a:spcBef>
@@ -4511,7 +4348,7 @@
               <a:buChar char="■"/>
               <a:defRPr sz="1200"/>
             </a:lvl3pPr>
-            <a:lvl4pPr indent="-304800" lvl="3" marL="1828800">
+            <a:lvl4pPr marL="1828800" lvl="3" indent="-304800">
               <a:spcBef>
                 <a:spcPts val="0"/>
               </a:spcBef>
@@ -4522,7 +4359,7 @@
               <a:buChar char="●"/>
               <a:defRPr sz="1200"/>
             </a:lvl4pPr>
-            <a:lvl5pPr indent="-304800" lvl="4" marL="2286000">
+            <a:lvl5pPr marL="2286000" lvl="4" indent="-304800">
               <a:spcBef>
                 <a:spcPts val="0"/>
               </a:spcBef>
@@ -4533,7 +4370,7 @@
               <a:buChar char="○"/>
               <a:defRPr sz="1200"/>
             </a:lvl5pPr>
-            <a:lvl6pPr indent="-304800" lvl="5" marL="2743200">
+            <a:lvl6pPr marL="2743200" lvl="5" indent="-304800">
               <a:spcBef>
                 <a:spcPts val="0"/>
               </a:spcBef>
@@ -4544,7 +4381,7 @@
               <a:buChar char="■"/>
               <a:defRPr sz="1200"/>
             </a:lvl6pPr>
-            <a:lvl7pPr indent="-304800" lvl="6" marL="3200400">
+            <a:lvl7pPr marL="3200400" lvl="6" indent="-304800">
               <a:spcBef>
                 <a:spcPts val="0"/>
               </a:spcBef>
@@ -4555,7 +4392,7 @@
               <a:buChar char="●"/>
               <a:defRPr sz="1200"/>
             </a:lvl7pPr>
-            <a:lvl8pPr indent="-304800" lvl="7" marL="3657600">
+            <a:lvl8pPr marL="3657600" lvl="7" indent="-304800">
               <a:spcBef>
                 <a:spcPts val="0"/>
               </a:spcBef>
@@ -4566,7 +4403,7 @@
               <a:buChar char="○"/>
               <a:defRPr sz="1200"/>
             </a:lvl8pPr>
-            <a:lvl9pPr indent="-304800" lvl="8" marL="4114800">
+            <a:lvl9pPr marL="4114800" lvl="8" indent="-304800">
               <a:spcBef>
                 <a:spcPts val="0"/>
               </a:spcBef>
@@ -4578,15 +4415,19 @@
               <a:defRPr sz="1200"/>
             </a:lvl9pPr>
           </a:lstStyle>
-          <a:p/>
+          <a:p>
+            <a:endParaRPr/>
+          </a:p>
         </p:txBody>
       </p:sp>
       <p:sp>
         <p:nvSpPr>
           <p:cNvPr id="31" name="Google Shape;31;p7"/>
-          <p:cNvSpPr txBox="1"/>
+          <p:cNvSpPr txBox="1">
+            <a:spLocks noGrp="1"/>
+          </p:cNvSpPr>
           <p:nvPr>
-            <p:ph idx="12" type="sldNum"/>
+            <p:ph type="sldNum" idx="12"/>
           </p:nvPr>
         </p:nvSpPr>
         <p:spPr>
@@ -4599,7 +4440,7 @@
           </a:prstGeom>
         </p:spPr>
         <p:txBody>
-          <a:bodyPr anchorCtr="0" anchor="ctr" bIns="91425" lIns="91425" spcFirstLastPara="1" rIns="91425" wrap="square" tIns="91425">
+          <a:bodyPr spcFirstLastPara="1" wrap="square" lIns="91425" tIns="91425" rIns="91425" bIns="91425" anchor="ctr" anchorCtr="0">
             <a:normAutofit/>
           </a:bodyPr>
           <a:lstStyle>
@@ -4641,7 +4482,7 @@
             </a:lvl9pPr>
           </a:lstStyle>
           <a:p>
-            <a:pPr indent="0" lvl="0" marL="0" rtl="0" algn="r">
+            <a:pPr marL="0" lvl="0" indent="0" algn="r" rtl="0">
               <a:spcBef>
                 <a:spcPts val="0"/>
               </a:spcBef>
@@ -4667,11 +4508,11 @@
 </file>
 
 <file path=ppt/slideLayouts/slideLayout7.xml><?xml version="1.0" encoding="utf-8"?>
-<p:sldLayout xmlns:a="http://schemas.openxmlformats.org/drawingml/2006/main" xmlns:r="http://schemas.openxmlformats.org/officeDocument/2006/relationships" xmlns:mc="http://schemas.openxmlformats.org/markup-compatibility/2006" xmlns:mv="urn:schemas-microsoft-com:mac:vml" xmlns:p="http://schemas.openxmlformats.org/presentationml/2006/main" xmlns:c="http://schemas.openxmlformats.org/drawingml/2006/chart" xmlns:dgm="http://schemas.openxmlformats.org/drawingml/2006/diagram" xmlns:o="urn:schemas-microsoft-com:office:office" xmlns:v="urn:schemas-microsoft-com:vml" xmlns:pvml="urn:schemas-microsoft-com:office:powerpoint" xmlns:com="http://schemas.openxmlformats.org/drawingml/2006/compatibility" xmlns:p14="http://schemas.microsoft.com/office/powerpoint/2010/main" xmlns:p15="http://schemas.microsoft.com/office/powerpoint/2012/main" xmlns:ahyp="http://schemas.microsoft.com/office/drawing/2018/hyperlinkcolor" matchingName="Main point">
+<p:sldLayout xmlns:a="http://schemas.openxmlformats.org/drawingml/2006/main" xmlns:r="http://schemas.openxmlformats.org/officeDocument/2006/relationships" xmlns:p="http://schemas.openxmlformats.org/presentationml/2006/main" matchingName="Main point">
   <p:cSld name="MAIN_POINT">
     <p:spTree>
       <p:nvGrpSpPr>
-        <p:cNvPr id="32" name="Shape 32"/>
+        <p:cNvPr id="1" name="Shape 32"/>
         <p:cNvGrpSpPr/>
         <p:nvPr/>
       </p:nvGrpSpPr>
@@ -4686,7 +4527,9 @@
       <p:sp>
         <p:nvSpPr>
           <p:cNvPr id="33" name="Google Shape;33;p8"/>
-          <p:cNvSpPr txBox="1"/>
+          <p:cNvSpPr txBox="1">
+            <a:spLocks noGrp="1"/>
+          </p:cNvSpPr>
           <p:nvPr>
             <p:ph type="title"/>
           </p:nvPr>
@@ -4701,7 +4544,7 @@
           </a:prstGeom>
         </p:spPr>
         <p:txBody>
-          <a:bodyPr anchorCtr="0" anchor="ctr" bIns="91425" lIns="91425" spcFirstLastPara="1" rIns="91425" wrap="square" tIns="91425">
+          <a:bodyPr spcFirstLastPara="1" wrap="square" lIns="91425" tIns="91425" rIns="91425" bIns="91425" anchor="ctr" anchorCtr="0">
             <a:normAutofit/>
           </a:bodyPr>
           <a:lstStyle>
@@ -4805,15 +4648,19 @@
               <a:defRPr sz="4800"/>
             </a:lvl9pPr>
           </a:lstStyle>
-          <a:p/>
+          <a:p>
+            <a:endParaRPr/>
+          </a:p>
         </p:txBody>
       </p:sp>
       <p:sp>
         <p:nvSpPr>
           <p:cNvPr id="34" name="Google Shape;34;p8"/>
-          <p:cNvSpPr txBox="1"/>
+          <p:cNvSpPr txBox="1">
+            <a:spLocks noGrp="1"/>
+          </p:cNvSpPr>
           <p:nvPr>
-            <p:ph idx="12" type="sldNum"/>
+            <p:ph type="sldNum" idx="12"/>
           </p:nvPr>
         </p:nvSpPr>
         <p:spPr>
@@ -4826,7 +4673,7 @@
           </a:prstGeom>
         </p:spPr>
         <p:txBody>
-          <a:bodyPr anchorCtr="0" anchor="ctr" bIns="91425" lIns="91425" spcFirstLastPara="1" rIns="91425" wrap="square" tIns="91425">
+          <a:bodyPr spcFirstLastPara="1" wrap="square" lIns="91425" tIns="91425" rIns="91425" bIns="91425" anchor="ctr" anchorCtr="0">
             <a:normAutofit/>
           </a:bodyPr>
           <a:lstStyle>
@@ -4868,7 +4715,7 @@
             </a:lvl9pPr>
           </a:lstStyle>
           <a:p>
-            <a:pPr indent="0" lvl="0" marL="0" rtl="0" algn="r">
+            <a:pPr marL="0" lvl="0" indent="0" algn="r" rtl="0">
               <a:spcBef>
                 <a:spcPts val="0"/>
               </a:spcBef>
@@ -4894,11 +4741,11 @@
 </file>
 
 <file path=ppt/slideLayouts/slideLayout8.xml><?xml version="1.0" encoding="utf-8"?>
-<p:sldLayout xmlns:a="http://schemas.openxmlformats.org/drawingml/2006/main" xmlns:r="http://schemas.openxmlformats.org/officeDocument/2006/relationships" xmlns:mc="http://schemas.openxmlformats.org/markup-compatibility/2006" xmlns:mv="urn:schemas-microsoft-com:mac:vml" xmlns:p="http://schemas.openxmlformats.org/presentationml/2006/main" xmlns:c="http://schemas.openxmlformats.org/drawingml/2006/chart" xmlns:dgm="http://schemas.openxmlformats.org/drawingml/2006/diagram" xmlns:o="urn:schemas-microsoft-com:office:office" xmlns:v="urn:schemas-microsoft-com:vml" xmlns:pvml="urn:schemas-microsoft-com:office:powerpoint" xmlns:com="http://schemas.openxmlformats.org/drawingml/2006/compatibility" xmlns:p14="http://schemas.microsoft.com/office/powerpoint/2010/main" xmlns:p15="http://schemas.microsoft.com/office/powerpoint/2012/main" xmlns:ahyp="http://schemas.microsoft.com/office/drawing/2018/hyperlinkcolor" matchingName="Section title and description">
+<p:sldLayout xmlns:a="http://schemas.openxmlformats.org/drawingml/2006/main" xmlns:r="http://schemas.openxmlformats.org/officeDocument/2006/relationships" xmlns:p="http://schemas.openxmlformats.org/presentationml/2006/main" matchingName="Section title and description">
   <p:cSld name="SECTION_TITLE_AND_DESCRIPTION">
     <p:spTree>
       <p:nvGrpSpPr>
-        <p:cNvPr id="35" name="Shape 35"/>
+        <p:cNvPr id="1" name="Shape 35"/>
         <p:cNvGrpSpPr/>
         <p:nvPr/>
       </p:nvGrpSpPr>
@@ -4932,12 +4779,12 @@
           </a:ln>
         </p:spPr>
         <p:txBody>
-          <a:bodyPr anchorCtr="0" anchor="ctr" bIns="91425" lIns="91425" spcFirstLastPara="1" rIns="91425" wrap="square" tIns="91425">
+          <a:bodyPr spcFirstLastPara="1" wrap="square" lIns="91425" tIns="91425" rIns="91425" bIns="91425" anchor="ctr" anchorCtr="0">
             <a:noAutofit/>
           </a:bodyPr>
           <a:lstStyle/>
           <a:p>
-            <a:pPr indent="0" lvl="0" marL="0" rtl="0" algn="l">
+            <a:pPr marL="0" lvl="0" indent="0" algn="l" rtl="0">
               <a:spcBef>
                 <a:spcPts val="0"/>
               </a:spcBef>
@@ -4946,9 +4793,6 @@
               </a:spcAft>
               <a:buNone/>
             </a:pPr>
-            <a:r>
-              <a:t/>
-            </a:r>
             <a:endParaRPr/>
           </a:p>
         </p:txBody>
@@ -4956,7 +4800,9 @@
       <p:sp>
         <p:nvSpPr>
           <p:cNvPr id="37" name="Google Shape;37;p9"/>
-          <p:cNvSpPr txBox="1"/>
+          <p:cNvSpPr txBox="1">
+            <a:spLocks noGrp="1"/>
+          </p:cNvSpPr>
           <p:nvPr>
             <p:ph type="title"/>
           </p:nvPr>
@@ -4971,7 +4817,7 @@
           </a:prstGeom>
         </p:spPr>
         <p:txBody>
-          <a:bodyPr anchorCtr="0" anchor="b" bIns="91425" lIns="91425" spcFirstLastPara="1" rIns="91425" wrap="square" tIns="91425">
+          <a:bodyPr spcFirstLastPara="1" wrap="square" lIns="91425" tIns="91425" rIns="91425" bIns="91425" anchor="b" anchorCtr="0">
             <a:normAutofit/>
           </a:bodyPr>
           <a:lstStyle>
@@ -5075,15 +4921,19 @@
               <a:defRPr sz="4200"/>
             </a:lvl9pPr>
           </a:lstStyle>
-          <a:p/>
+          <a:p>
+            <a:endParaRPr/>
+          </a:p>
         </p:txBody>
       </p:sp>
       <p:sp>
         <p:nvSpPr>
           <p:cNvPr id="38" name="Google Shape;38;p9"/>
-          <p:cNvSpPr txBox="1"/>
+          <p:cNvSpPr txBox="1">
+            <a:spLocks noGrp="1"/>
+          </p:cNvSpPr>
           <p:nvPr>
-            <p:ph idx="1" type="subTitle"/>
+            <p:ph type="subTitle" idx="1"/>
           </p:nvPr>
         </p:nvSpPr>
         <p:spPr>
@@ -5096,7 +4946,7 @@
           </a:prstGeom>
         </p:spPr>
         <p:txBody>
-          <a:bodyPr anchorCtr="0" anchor="t" bIns="91425" lIns="91425" spcFirstLastPara="1" rIns="91425" wrap="square" tIns="91425">
+          <a:bodyPr spcFirstLastPara="1" wrap="square" lIns="91425" tIns="91425" rIns="91425" bIns="91425" anchor="t" anchorCtr="0">
             <a:normAutofit/>
           </a:bodyPr>
           <a:lstStyle>
@@ -5227,15 +5077,19 @@
               <a:defRPr sz="2100"/>
             </a:lvl9pPr>
           </a:lstStyle>
-          <a:p/>
+          <a:p>
+            <a:endParaRPr/>
+          </a:p>
         </p:txBody>
       </p:sp>
       <p:sp>
         <p:nvSpPr>
           <p:cNvPr id="39" name="Google Shape;39;p9"/>
-          <p:cNvSpPr txBox="1"/>
+          <p:cNvSpPr txBox="1">
+            <a:spLocks noGrp="1"/>
+          </p:cNvSpPr>
           <p:nvPr>
-            <p:ph idx="2" type="body"/>
+            <p:ph type="body" idx="2"/>
           </p:nvPr>
         </p:nvSpPr>
         <p:spPr>
@@ -5248,11 +5102,11 @@
           </a:prstGeom>
         </p:spPr>
         <p:txBody>
-          <a:bodyPr anchorCtr="0" anchor="ctr" bIns="91425" lIns="91425" spcFirstLastPara="1" rIns="91425" wrap="square" tIns="91425">
+          <a:bodyPr spcFirstLastPara="1" wrap="square" lIns="91425" tIns="91425" rIns="91425" bIns="91425" anchor="ctr" anchorCtr="0">
             <a:normAutofit/>
           </a:bodyPr>
           <a:lstStyle>
-            <a:lvl1pPr indent="-342900" lvl="0" marL="457200">
+            <a:lvl1pPr marL="457200" lvl="0" indent="-342900">
               <a:spcBef>
                 <a:spcPts val="0"/>
               </a:spcBef>
@@ -5263,7 +5117,7 @@
               <a:buChar char="●"/>
               <a:defRPr/>
             </a:lvl1pPr>
-            <a:lvl2pPr indent="-317500" lvl="1" marL="914400">
+            <a:lvl2pPr marL="914400" lvl="1" indent="-317500">
               <a:spcBef>
                 <a:spcPts val="0"/>
               </a:spcBef>
@@ -5274,7 +5128,7 @@
               <a:buChar char="○"/>
               <a:defRPr/>
             </a:lvl2pPr>
-            <a:lvl3pPr indent="-317500" lvl="2" marL="1371600">
+            <a:lvl3pPr marL="1371600" lvl="2" indent="-317500">
               <a:spcBef>
                 <a:spcPts val="0"/>
               </a:spcBef>
@@ -5285,7 +5139,7 @@
               <a:buChar char="■"/>
               <a:defRPr/>
             </a:lvl3pPr>
-            <a:lvl4pPr indent="-317500" lvl="3" marL="1828800">
+            <a:lvl4pPr marL="1828800" lvl="3" indent="-317500">
               <a:spcBef>
                 <a:spcPts val="0"/>
               </a:spcBef>
@@ -5296,7 +5150,7 @@
               <a:buChar char="●"/>
               <a:defRPr/>
             </a:lvl4pPr>
-            <a:lvl5pPr indent="-317500" lvl="4" marL="2286000">
+            <a:lvl5pPr marL="2286000" lvl="4" indent="-317500">
               <a:spcBef>
                 <a:spcPts val="0"/>
               </a:spcBef>
@@ -5307,7 +5161,7 @@
               <a:buChar char="○"/>
               <a:defRPr/>
             </a:lvl5pPr>
-            <a:lvl6pPr indent="-317500" lvl="5" marL="2743200">
+            <a:lvl6pPr marL="2743200" lvl="5" indent="-317500">
               <a:spcBef>
                 <a:spcPts val="0"/>
               </a:spcBef>
@@ -5318,7 +5172,7 @@
               <a:buChar char="■"/>
               <a:defRPr/>
             </a:lvl6pPr>
-            <a:lvl7pPr indent="-317500" lvl="6" marL="3200400">
+            <a:lvl7pPr marL="3200400" lvl="6" indent="-317500">
               <a:spcBef>
                 <a:spcPts val="0"/>
               </a:spcBef>
@@ -5329,7 +5183,7 @@
               <a:buChar char="●"/>
               <a:defRPr/>
             </a:lvl7pPr>
-            <a:lvl8pPr indent="-317500" lvl="7" marL="3657600">
+            <a:lvl8pPr marL="3657600" lvl="7" indent="-317500">
               <a:spcBef>
                 <a:spcPts val="0"/>
               </a:spcBef>
@@ -5340,7 +5194,7 @@
               <a:buChar char="○"/>
               <a:defRPr/>
             </a:lvl8pPr>
-            <a:lvl9pPr indent="-317500" lvl="8" marL="4114800">
+            <a:lvl9pPr marL="4114800" lvl="8" indent="-317500">
               <a:spcBef>
                 <a:spcPts val="0"/>
               </a:spcBef>
@@ -5352,15 +5206,19 @@
               <a:defRPr/>
             </a:lvl9pPr>
           </a:lstStyle>
-          <a:p/>
+          <a:p>
+            <a:endParaRPr/>
+          </a:p>
         </p:txBody>
       </p:sp>
       <p:sp>
         <p:nvSpPr>
           <p:cNvPr id="40" name="Google Shape;40;p9"/>
-          <p:cNvSpPr txBox="1"/>
+          <p:cNvSpPr txBox="1">
+            <a:spLocks noGrp="1"/>
+          </p:cNvSpPr>
           <p:nvPr>
-            <p:ph idx="12" type="sldNum"/>
+            <p:ph type="sldNum" idx="12"/>
           </p:nvPr>
         </p:nvSpPr>
         <p:spPr>
@@ -5373,7 +5231,7 @@
           </a:prstGeom>
         </p:spPr>
         <p:txBody>
-          <a:bodyPr anchorCtr="0" anchor="ctr" bIns="91425" lIns="91425" spcFirstLastPara="1" rIns="91425" wrap="square" tIns="91425">
+          <a:bodyPr spcFirstLastPara="1" wrap="square" lIns="91425" tIns="91425" rIns="91425" bIns="91425" anchor="ctr" anchorCtr="0">
             <a:normAutofit/>
           </a:bodyPr>
           <a:lstStyle>
@@ -5415,7 +5273,7 @@
             </a:lvl9pPr>
           </a:lstStyle>
           <a:p>
-            <a:pPr indent="0" lvl="0" marL="0" rtl="0" algn="r">
+            <a:pPr marL="0" lvl="0" indent="0" algn="r" rtl="0">
               <a:spcBef>
                 <a:spcPts val="0"/>
               </a:spcBef>
@@ -5441,11 +5299,11 @@
 </file>
 
 <file path=ppt/slideLayouts/slideLayout9.xml><?xml version="1.0" encoding="utf-8"?>
-<p:sldLayout xmlns:a="http://schemas.openxmlformats.org/drawingml/2006/main" xmlns:r="http://schemas.openxmlformats.org/officeDocument/2006/relationships" xmlns:mc="http://schemas.openxmlformats.org/markup-compatibility/2006" xmlns:mv="urn:schemas-microsoft-com:mac:vml" xmlns:p="http://schemas.openxmlformats.org/presentationml/2006/main" xmlns:c="http://schemas.openxmlformats.org/drawingml/2006/chart" xmlns:dgm="http://schemas.openxmlformats.org/drawingml/2006/diagram" xmlns:o="urn:schemas-microsoft-com:office:office" xmlns:v="urn:schemas-microsoft-com:vml" xmlns:pvml="urn:schemas-microsoft-com:office:powerpoint" xmlns:com="http://schemas.openxmlformats.org/drawingml/2006/compatibility" xmlns:p14="http://schemas.microsoft.com/office/powerpoint/2010/main" xmlns:p15="http://schemas.microsoft.com/office/powerpoint/2012/main" xmlns:ahyp="http://schemas.microsoft.com/office/drawing/2018/hyperlinkcolor" matchingName="Caption">
+<p:sldLayout xmlns:a="http://schemas.openxmlformats.org/drawingml/2006/main" xmlns:r="http://schemas.openxmlformats.org/officeDocument/2006/relationships" xmlns:p="http://schemas.openxmlformats.org/presentationml/2006/main" matchingName="Caption">
   <p:cSld name="CAPTION_ONLY">
     <p:spTree>
       <p:nvGrpSpPr>
-        <p:cNvPr id="41" name="Shape 41"/>
+        <p:cNvPr id="1" name="Shape 41"/>
         <p:cNvGrpSpPr/>
         <p:nvPr/>
       </p:nvGrpSpPr>
@@ -5460,9 +5318,11 @@
       <p:sp>
         <p:nvSpPr>
           <p:cNvPr id="42" name="Google Shape;42;p10"/>
-          <p:cNvSpPr txBox="1"/>
+          <p:cNvSpPr txBox="1">
+            <a:spLocks noGrp="1"/>
+          </p:cNvSpPr>
           <p:nvPr>
-            <p:ph idx="1" type="body"/>
+            <p:ph type="body" idx="1"/>
           </p:nvPr>
         </p:nvSpPr>
         <p:spPr>
@@ -5475,11 +5335,11 @@
           </a:prstGeom>
         </p:spPr>
         <p:txBody>
-          <a:bodyPr anchorCtr="0" anchor="ctr" bIns="91425" lIns="91425" spcFirstLastPara="1" rIns="91425" wrap="square" tIns="91425">
+          <a:bodyPr spcFirstLastPara="1" wrap="square" lIns="91425" tIns="91425" rIns="91425" bIns="91425" anchor="ctr" anchorCtr="0">
             <a:normAutofit/>
           </a:bodyPr>
           <a:lstStyle>
-            <a:lvl1pPr indent="-228600" lvl="0" marL="457200">
+            <a:lvl1pPr marL="457200" lvl="0" indent="-228600">
               <a:lnSpc>
                 <a:spcPct val="100000"/>
               </a:lnSpc>
@@ -5494,15 +5354,19 @@
               <a:defRPr/>
             </a:lvl1pPr>
           </a:lstStyle>
-          <a:p/>
+          <a:p>
+            <a:endParaRPr/>
+          </a:p>
         </p:txBody>
       </p:sp>
       <p:sp>
         <p:nvSpPr>
           <p:cNvPr id="43" name="Google Shape;43;p10"/>
-          <p:cNvSpPr txBox="1"/>
+          <p:cNvSpPr txBox="1">
+            <a:spLocks noGrp="1"/>
+          </p:cNvSpPr>
           <p:nvPr>
-            <p:ph idx="12" type="sldNum"/>
+            <p:ph type="sldNum" idx="12"/>
           </p:nvPr>
         </p:nvSpPr>
         <p:spPr>
@@ -5515,7 +5379,7 @@
           </a:prstGeom>
         </p:spPr>
         <p:txBody>
-          <a:bodyPr anchorCtr="0" anchor="ctr" bIns="91425" lIns="91425" spcFirstLastPara="1" rIns="91425" wrap="square" tIns="91425">
+          <a:bodyPr spcFirstLastPara="1" wrap="square" lIns="91425" tIns="91425" rIns="91425" bIns="91425" anchor="ctr" anchorCtr="0">
             <a:normAutofit/>
           </a:bodyPr>
           <a:lstStyle>
@@ -5557,7 +5421,7 @@
             </a:lvl9pPr>
           </a:lstStyle>
           <a:p>
-            <a:pPr indent="0" lvl="0" marL="0" rtl="0" algn="r">
+            <a:pPr marL="0" lvl="0" indent="0" algn="r" rtl="0">
               <a:spcBef>
                 <a:spcPts val="0"/>
               </a:spcBef>
@@ -5583,18 +5447,19 @@
 </file>
 
 <file path=ppt/slideMasters/slideMaster1.xml><?xml version="1.0" encoding="utf-8"?>
-<p:sldMaster xmlns:a="http://schemas.openxmlformats.org/drawingml/2006/main" xmlns:r="http://schemas.openxmlformats.org/officeDocument/2006/relationships" xmlns:mc="http://schemas.openxmlformats.org/markup-compatibility/2006" xmlns:mv="urn:schemas-microsoft-com:mac:vml" xmlns:p="http://schemas.openxmlformats.org/presentationml/2006/main" xmlns:c="http://schemas.openxmlformats.org/drawingml/2006/chart" xmlns:dgm="http://schemas.openxmlformats.org/drawingml/2006/diagram" xmlns:o="urn:schemas-microsoft-com:office:office" xmlns:v="urn:schemas-microsoft-com:vml" xmlns:pvml="urn:schemas-microsoft-com:office:powerpoint" xmlns:com="http://schemas.openxmlformats.org/drawingml/2006/compatibility" xmlns:p14="http://schemas.microsoft.com/office/powerpoint/2010/main" xmlns:p15="http://schemas.microsoft.com/office/powerpoint/2012/main" xmlns:ahyp="http://schemas.microsoft.com/office/drawing/2018/hyperlinkcolor">
+<p:sldMaster xmlns:a="http://schemas.openxmlformats.org/drawingml/2006/main" xmlns:r="http://schemas.openxmlformats.org/officeDocument/2006/relationships" xmlns:p="http://schemas.openxmlformats.org/presentationml/2006/main">
   <p:cSld name="simple-light-2">
     <p:bg>
       <p:bgPr>
         <a:solidFill>
           <a:schemeClr val="lt1"/>
         </a:solidFill>
+        <a:effectLst/>
       </p:bgPr>
     </p:bg>
     <p:spTree>
       <p:nvGrpSpPr>
-        <p:cNvPr id="5" name="Shape 5"/>
+        <p:cNvPr id="1" name="Shape 5"/>
         <p:cNvGrpSpPr/>
         <p:nvPr/>
       </p:nvGrpSpPr>
@@ -5609,7 +5474,9 @@
       <p:sp>
         <p:nvSpPr>
           <p:cNvPr id="6" name="Google Shape;6;p1"/>
-          <p:cNvSpPr txBox="1"/>
+          <p:cNvSpPr txBox="1">
+            <a:spLocks noGrp="1"/>
+          </p:cNvSpPr>
           <p:nvPr>
             <p:ph type="title"/>
           </p:nvPr>
@@ -5628,7 +5495,7 @@
           </a:ln>
         </p:spPr>
         <p:txBody>
-          <a:bodyPr anchorCtr="0" anchor="t" bIns="91425" lIns="91425" spcFirstLastPara="1" rIns="91425" wrap="square" tIns="91425">
+          <a:bodyPr spcFirstLastPara="1" wrap="square" lIns="91425" tIns="91425" rIns="91425" bIns="91425" anchor="t" anchorCtr="0">
             <a:normAutofit/>
           </a:bodyPr>
           <a:lstStyle>
@@ -5795,15 +5662,19 @@
               </a:defRPr>
             </a:lvl9pPr>
           </a:lstStyle>
-          <a:p/>
+          <a:p>
+            <a:endParaRPr/>
+          </a:p>
         </p:txBody>
       </p:sp>
       <p:sp>
         <p:nvSpPr>
           <p:cNvPr id="7" name="Google Shape;7;p1"/>
-          <p:cNvSpPr txBox="1"/>
+          <p:cNvSpPr txBox="1">
+            <a:spLocks noGrp="1"/>
+          </p:cNvSpPr>
           <p:nvPr>
-            <p:ph idx="1" type="body"/>
+            <p:ph type="body" idx="1"/>
           </p:nvPr>
         </p:nvSpPr>
         <p:spPr>
@@ -5820,11 +5691,11 @@
           </a:ln>
         </p:spPr>
         <p:txBody>
-          <a:bodyPr anchorCtr="0" anchor="t" bIns="91425" lIns="91425" spcFirstLastPara="1" rIns="91425" wrap="square" tIns="91425">
+          <a:bodyPr spcFirstLastPara="1" wrap="square" lIns="91425" tIns="91425" rIns="91425" bIns="91425" anchor="t" anchorCtr="0">
             <a:normAutofit/>
           </a:bodyPr>
           <a:lstStyle>
-            <a:lvl1pPr indent="-342900" lvl="0" marL="457200">
+            <a:lvl1pPr marL="457200" lvl="0" indent="-342900">
               <a:lnSpc>
                 <a:spcPct val="115000"/>
               </a:lnSpc>
@@ -5845,7 +5716,7 @@
                 </a:solidFill>
               </a:defRPr>
             </a:lvl1pPr>
-            <a:lvl2pPr indent="-317500" lvl="1" marL="914400">
+            <a:lvl2pPr marL="914400" lvl="1" indent="-317500">
               <a:lnSpc>
                 <a:spcPct val="115000"/>
               </a:lnSpc>
@@ -5866,7 +5737,7 @@
                 </a:solidFill>
               </a:defRPr>
             </a:lvl2pPr>
-            <a:lvl3pPr indent="-317500" lvl="2" marL="1371600">
+            <a:lvl3pPr marL="1371600" lvl="2" indent="-317500">
               <a:lnSpc>
                 <a:spcPct val="115000"/>
               </a:lnSpc>
@@ -5887,7 +5758,7 @@
                 </a:solidFill>
               </a:defRPr>
             </a:lvl3pPr>
-            <a:lvl4pPr indent="-317500" lvl="3" marL="1828800">
+            <a:lvl4pPr marL="1828800" lvl="3" indent="-317500">
               <a:lnSpc>
                 <a:spcPct val="115000"/>
               </a:lnSpc>
@@ -5908,7 +5779,7 @@
                 </a:solidFill>
               </a:defRPr>
             </a:lvl4pPr>
-            <a:lvl5pPr indent="-317500" lvl="4" marL="2286000">
+            <a:lvl5pPr marL="2286000" lvl="4" indent="-317500">
               <a:lnSpc>
                 <a:spcPct val="115000"/>
               </a:lnSpc>
@@ -5929,7 +5800,7 @@
                 </a:solidFill>
               </a:defRPr>
             </a:lvl5pPr>
-            <a:lvl6pPr indent="-317500" lvl="5" marL="2743200">
+            <a:lvl6pPr marL="2743200" lvl="5" indent="-317500">
               <a:lnSpc>
                 <a:spcPct val="115000"/>
               </a:lnSpc>
@@ -5950,7 +5821,7 @@
                 </a:solidFill>
               </a:defRPr>
             </a:lvl6pPr>
-            <a:lvl7pPr indent="-317500" lvl="6" marL="3200400">
+            <a:lvl7pPr marL="3200400" lvl="6" indent="-317500">
               <a:lnSpc>
                 <a:spcPct val="115000"/>
               </a:lnSpc>
@@ -5971,7 +5842,7 @@
                 </a:solidFill>
               </a:defRPr>
             </a:lvl7pPr>
-            <a:lvl8pPr indent="-317500" lvl="7" marL="3657600">
+            <a:lvl8pPr marL="3657600" lvl="7" indent="-317500">
               <a:lnSpc>
                 <a:spcPct val="115000"/>
               </a:lnSpc>
@@ -5992,7 +5863,7 @@
                 </a:solidFill>
               </a:defRPr>
             </a:lvl8pPr>
-            <a:lvl9pPr indent="-317500" lvl="8" marL="4114800">
+            <a:lvl9pPr marL="4114800" lvl="8" indent="-317500">
               <a:lnSpc>
                 <a:spcPct val="115000"/>
               </a:lnSpc>
@@ -6014,15 +5885,19 @@
               </a:defRPr>
             </a:lvl9pPr>
           </a:lstStyle>
-          <a:p/>
+          <a:p>
+            <a:endParaRPr/>
+          </a:p>
         </p:txBody>
       </p:sp>
       <p:sp>
         <p:nvSpPr>
           <p:cNvPr id="8" name="Google Shape;8;p1"/>
-          <p:cNvSpPr txBox="1"/>
+          <p:cNvSpPr txBox="1">
+            <a:spLocks noGrp="1"/>
+          </p:cNvSpPr>
           <p:nvPr>
-            <p:ph idx="12" type="sldNum"/>
+            <p:ph type="sldNum" idx="12"/>
           </p:nvPr>
         </p:nvSpPr>
         <p:spPr>
@@ -6039,7 +5914,7 @@
           </a:ln>
         </p:spPr>
         <p:txBody>
-          <a:bodyPr anchorCtr="0" anchor="ctr" bIns="91425" lIns="91425" spcFirstLastPara="1" rIns="91425" wrap="square" tIns="91425">
+          <a:bodyPr spcFirstLastPara="1" wrap="square" lIns="91425" tIns="91425" rIns="91425" bIns="91425" anchor="ctr" anchorCtr="0">
             <a:normAutofit/>
           </a:bodyPr>
           <a:lstStyle>
@@ -6117,7 +5992,7 @@
             </a:lvl9pPr>
           </a:lstStyle>
           <a:p>
-            <a:pPr indent="0" lvl="0" marL="0" rtl="0" algn="r">
+            <a:pPr marL="0" lvl="0" indent="0" algn="r" rtl="0">
               <a:spcBef>
                 <a:spcPts val="0"/>
               </a:spcBef>
@@ -6136,7 +6011,7 @@
       </p:sp>
     </p:spTree>
   </p:cSld>
-  <p:clrMap accent1="accent1" accent2="accent2" accent3="accent3" accent4="accent4" accent5="accent5" accent6="accent6" bg1="lt1" bg2="dk2" tx1="dk1" tx2="lt2" folHlink="folHlink" hlink="hlink"/>
+  <p:clrMap bg1="lt1" tx1="dk1" bg2="dk2" tx2="lt2" accent1="accent1" accent2="accent2" accent3="accent3" accent4="accent4" accent5="accent5" accent6="accent6" hlink="hlink" folHlink="folHlink"/>
   <p:sldLayoutIdLst>
     <p:sldLayoutId id="2147483648" r:id="rId1"/>
     <p:sldLayoutId id="2147483649" r:id="rId2"/>
@@ -6150,10 +6025,10 @@
     <p:sldLayoutId id="2147483657" r:id="rId10"/>
     <p:sldLayoutId id="2147483658" r:id="rId11"/>
   </p:sldLayoutIdLst>
-  <p:hf dt="0" ftr="0" hdr="0" sldNum="0"/>
+  <p:hf sldNum="0" hdr="0" ftr="0" dt="0"/>
   <p:txStyles>
     <p:titleStyle>
-      <a:defPPr lvl="0" marR="0" rtl="0" algn="l">
+      <a:defPPr marR="0" lvl="0" algn="l" rtl="0">
         <a:lnSpc>
           <a:spcPct val="100000"/>
         </a:lnSpc>
@@ -6164,7 +6039,7 @@
           <a:spcPts val="0"/>
         </a:spcAft>
       </a:defPPr>
-      <a:lvl1pPr lvl="0" marR="0" rtl="0" algn="l">
+      <a:lvl1pPr marR="0" lvl="0" algn="l" rtl="0">
         <a:lnSpc>
           <a:spcPct val="100000"/>
         </a:lnSpc>
@@ -6178,7 +6053,7 @@
           <a:srgbClr val="000000"/>
         </a:buClr>
         <a:buFont typeface="Arial"/>
-        <a:defRPr b="0" i="0" sz="1400" u="none" cap="none" strike="noStrike">
+        <a:defRPr sz="1400" b="0" i="0" u="none" strike="noStrike" cap="none">
           <a:solidFill>
             <a:srgbClr val="000000"/>
           </a:solidFill>
@@ -6188,7 +6063,7 @@
           <a:sym typeface="Arial"/>
         </a:defRPr>
       </a:lvl1pPr>
-      <a:lvl2pPr lvl="1" marR="0" rtl="0" algn="l">
+      <a:lvl2pPr marR="0" lvl="1" algn="l" rtl="0">
         <a:lnSpc>
           <a:spcPct val="100000"/>
         </a:lnSpc>
@@ -6202,7 +6077,7 @@
           <a:srgbClr val="000000"/>
         </a:buClr>
         <a:buFont typeface="Arial"/>
-        <a:defRPr b="0" i="0" sz="1400" u="none" cap="none" strike="noStrike">
+        <a:defRPr sz="1400" b="0" i="0" u="none" strike="noStrike" cap="none">
           <a:solidFill>
             <a:srgbClr val="000000"/>
           </a:solidFill>
@@ -6212,7 +6087,7 @@
           <a:sym typeface="Arial"/>
         </a:defRPr>
       </a:lvl2pPr>
-      <a:lvl3pPr lvl="2" marR="0" rtl="0" algn="l">
+      <a:lvl3pPr marR="0" lvl="2" algn="l" rtl="0">
         <a:lnSpc>
           <a:spcPct val="100000"/>
         </a:lnSpc>
@@ -6226,7 +6101,7 @@
           <a:srgbClr val="000000"/>
         </a:buClr>
         <a:buFont typeface="Arial"/>
-        <a:defRPr b="0" i="0" sz="1400" u="none" cap="none" strike="noStrike">
+        <a:defRPr sz="1400" b="0" i="0" u="none" strike="noStrike" cap="none">
           <a:solidFill>
             <a:srgbClr val="000000"/>
           </a:solidFill>
@@ -6236,7 +6111,7 @@
           <a:sym typeface="Arial"/>
         </a:defRPr>
       </a:lvl3pPr>
-      <a:lvl4pPr lvl="3" marR="0" rtl="0" algn="l">
+      <a:lvl4pPr marR="0" lvl="3" algn="l" rtl="0">
         <a:lnSpc>
           <a:spcPct val="100000"/>
         </a:lnSpc>
@@ -6250,7 +6125,7 @@
           <a:srgbClr val="000000"/>
         </a:buClr>
         <a:buFont typeface="Arial"/>
-        <a:defRPr b="0" i="0" sz="1400" u="none" cap="none" strike="noStrike">
+        <a:defRPr sz="1400" b="0" i="0" u="none" strike="noStrike" cap="none">
           <a:solidFill>
             <a:srgbClr val="000000"/>
           </a:solidFill>
@@ -6260,7 +6135,7 @@
           <a:sym typeface="Arial"/>
         </a:defRPr>
       </a:lvl4pPr>
-      <a:lvl5pPr lvl="4" marR="0" rtl="0" algn="l">
+      <a:lvl5pPr marR="0" lvl="4" algn="l" rtl="0">
         <a:lnSpc>
           <a:spcPct val="100000"/>
         </a:lnSpc>
@@ -6274,7 +6149,7 @@
           <a:srgbClr val="000000"/>
         </a:buClr>
         <a:buFont typeface="Arial"/>
-        <a:defRPr b="0" i="0" sz="1400" u="none" cap="none" strike="noStrike">
+        <a:defRPr sz="1400" b="0" i="0" u="none" strike="noStrike" cap="none">
           <a:solidFill>
             <a:srgbClr val="000000"/>
           </a:solidFill>
@@ -6284,7 +6159,7 @@
           <a:sym typeface="Arial"/>
         </a:defRPr>
       </a:lvl5pPr>
-      <a:lvl6pPr lvl="5" marR="0" rtl="0" algn="l">
+      <a:lvl6pPr marR="0" lvl="5" algn="l" rtl="0">
         <a:lnSpc>
           <a:spcPct val="100000"/>
         </a:lnSpc>
@@ -6298,7 +6173,7 @@
           <a:srgbClr val="000000"/>
         </a:buClr>
         <a:buFont typeface="Arial"/>
-        <a:defRPr b="0" i="0" sz="1400" u="none" cap="none" strike="noStrike">
+        <a:defRPr sz="1400" b="0" i="0" u="none" strike="noStrike" cap="none">
           <a:solidFill>
             <a:srgbClr val="000000"/>
           </a:solidFill>
@@ -6308,7 +6183,7 @@
           <a:sym typeface="Arial"/>
         </a:defRPr>
       </a:lvl6pPr>
-      <a:lvl7pPr lvl="6" marR="0" rtl="0" algn="l">
+      <a:lvl7pPr marR="0" lvl="6" algn="l" rtl="0">
         <a:lnSpc>
           <a:spcPct val="100000"/>
         </a:lnSpc>
@@ -6322,7 +6197,7 @@
           <a:srgbClr val="000000"/>
         </a:buClr>
         <a:buFont typeface="Arial"/>
-        <a:defRPr b="0" i="0" sz="1400" u="none" cap="none" strike="noStrike">
+        <a:defRPr sz="1400" b="0" i="0" u="none" strike="noStrike" cap="none">
           <a:solidFill>
             <a:srgbClr val="000000"/>
           </a:solidFill>
@@ -6332,7 +6207,7 @@
           <a:sym typeface="Arial"/>
         </a:defRPr>
       </a:lvl7pPr>
-      <a:lvl8pPr lvl="7" marR="0" rtl="0" algn="l">
+      <a:lvl8pPr marR="0" lvl="7" algn="l" rtl="0">
         <a:lnSpc>
           <a:spcPct val="100000"/>
         </a:lnSpc>
@@ -6346,7 +6221,7 @@
           <a:srgbClr val="000000"/>
         </a:buClr>
         <a:buFont typeface="Arial"/>
-        <a:defRPr b="0" i="0" sz="1400" u="none" cap="none" strike="noStrike">
+        <a:defRPr sz="1400" b="0" i="0" u="none" strike="noStrike" cap="none">
           <a:solidFill>
             <a:srgbClr val="000000"/>
           </a:solidFill>
@@ -6356,7 +6231,7 @@
           <a:sym typeface="Arial"/>
         </a:defRPr>
       </a:lvl8pPr>
-      <a:lvl9pPr lvl="8" marR="0" rtl="0" algn="l">
+      <a:lvl9pPr marR="0" lvl="8" algn="l" rtl="0">
         <a:lnSpc>
           <a:spcPct val="100000"/>
         </a:lnSpc>
@@ -6370,7 +6245,7 @@
           <a:srgbClr val="000000"/>
         </a:buClr>
         <a:buFont typeface="Arial"/>
-        <a:defRPr b="0" i="0" sz="1400" u="none" cap="none" strike="noStrike">
+        <a:defRPr sz="1400" b="0" i="0" u="none" strike="noStrike" cap="none">
           <a:solidFill>
             <a:srgbClr val="000000"/>
           </a:solidFill>
@@ -6382,7 +6257,7 @@
       </a:lvl9pPr>
     </p:titleStyle>
     <p:bodyStyle>
-      <a:defPPr lvl="0" marR="0" rtl="0" algn="l">
+      <a:defPPr marR="0" lvl="0" algn="l" rtl="0">
         <a:lnSpc>
           <a:spcPct val="100000"/>
         </a:lnSpc>
@@ -6393,7 +6268,7 @@
           <a:spcPts val="0"/>
         </a:spcAft>
       </a:defPPr>
-      <a:lvl1pPr lvl="0" marR="0" rtl="0" algn="l">
+      <a:lvl1pPr marR="0" lvl="0" algn="l" rtl="0">
         <a:lnSpc>
           <a:spcPct val="100000"/>
         </a:lnSpc>
@@ -6407,7 +6282,7 @@
           <a:srgbClr val="000000"/>
         </a:buClr>
         <a:buFont typeface="Arial"/>
-        <a:defRPr b="0" i="0" sz="1400" u="none" cap="none" strike="noStrike">
+        <a:defRPr sz="1400" b="0" i="0" u="none" strike="noStrike" cap="none">
           <a:solidFill>
             <a:srgbClr val="000000"/>
           </a:solidFill>
@@ -6417,7 +6292,7 @@
           <a:sym typeface="Arial"/>
         </a:defRPr>
       </a:lvl1pPr>
-      <a:lvl2pPr lvl="1" marR="0" rtl="0" algn="l">
+      <a:lvl2pPr marR="0" lvl="1" algn="l" rtl="0">
         <a:lnSpc>
           <a:spcPct val="100000"/>
         </a:lnSpc>
@@ -6431,7 +6306,7 @@
           <a:srgbClr val="000000"/>
         </a:buClr>
         <a:buFont typeface="Arial"/>
-        <a:defRPr b="0" i="0" sz="1400" u="none" cap="none" strike="noStrike">
+        <a:defRPr sz="1400" b="0" i="0" u="none" strike="noStrike" cap="none">
           <a:solidFill>
             <a:srgbClr val="000000"/>
           </a:solidFill>
@@ -6441,7 +6316,7 @@
           <a:sym typeface="Arial"/>
         </a:defRPr>
       </a:lvl2pPr>
-      <a:lvl3pPr lvl="2" marR="0" rtl="0" algn="l">
+      <a:lvl3pPr marR="0" lvl="2" algn="l" rtl="0">
         <a:lnSpc>
           <a:spcPct val="100000"/>
         </a:lnSpc>
@@ -6455,7 +6330,7 @@
           <a:srgbClr val="000000"/>
         </a:buClr>
         <a:buFont typeface="Arial"/>
-        <a:defRPr b="0" i="0" sz="1400" u="none" cap="none" strike="noStrike">
+        <a:defRPr sz="1400" b="0" i="0" u="none" strike="noStrike" cap="none">
           <a:solidFill>
             <a:srgbClr val="000000"/>
           </a:solidFill>
@@ -6465,7 +6340,7 @@
           <a:sym typeface="Arial"/>
         </a:defRPr>
       </a:lvl3pPr>
-      <a:lvl4pPr lvl="3" marR="0" rtl="0" algn="l">
+      <a:lvl4pPr marR="0" lvl="3" algn="l" rtl="0">
         <a:lnSpc>
           <a:spcPct val="100000"/>
         </a:lnSpc>
@@ -6479,7 +6354,7 @@
           <a:srgbClr val="000000"/>
         </a:buClr>
         <a:buFont typeface="Arial"/>
-        <a:defRPr b="0" i="0" sz="1400" u="none" cap="none" strike="noStrike">
+        <a:defRPr sz="1400" b="0" i="0" u="none" strike="noStrike" cap="none">
           <a:solidFill>
             <a:srgbClr val="000000"/>
           </a:solidFill>
@@ -6489,7 +6364,7 @@
           <a:sym typeface="Arial"/>
         </a:defRPr>
       </a:lvl4pPr>
-      <a:lvl5pPr lvl="4" marR="0" rtl="0" algn="l">
+      <a:lvl5pPr marR="0" lvl="4" algn="l" rtl="0">
         <a:lnSpc>
           <a:spcPct val="100000"/>
         </a:lnSpc>
@@ -6503,7 +6378,7 @@
           <a:srgbClr val="000000"/>
         </a:buClr>
         <a:buFont typeface="Arial"/>
-        <a:defRPr b="0" i="0" sz="1400" u="none" cap="none" strike="noStrike">
+        <a:defRPr sz="1400" b="0" i="0" u="none" strike="noStrike" cap="none">
           <a:solidFill>
             <a:srgbClr val="000000"/>
           </a:solidFill>
@@ -6513,7 +6388,7 @@
           <a:sym typeface="Arial"/>
         </a:defRPr>
       </a:lvl5pPr>
-      <a:lvl6pPr lvl="5" marR="0" rtl="0" algn="l">
+      <a:lvl6pPr marR="0" lvl="5" algn="l" rtl="0">
         <a:lnSpc>
           <a:spcPct val="100000"/>
         </a:lnSpc>
@@ -6527,7 +6402,7 @@
           <a:srgbClr val="000000"/>
         </a:buClr>
         <a:buFont typeface="Arial"/>
-        <a:defRPr b="0" i="0" sz="1400" u="none" cap="none" strike="noStrike">
+        <a:defRPr sz="1400" b="0" i="0" u="none" strike="noStrike" cap="none">
           <a:solidFill>
             <a:srgbClr val="000000"/>
           </a:solidFill>
@@ -6537,7 +6412,7 @@
           <a:sym typeface="Arial"/>
         </a:defRPr>
       </a:lvl6pPr>
-      <a:lvl7pPr lvl="6" marR="0" rtl="0" algn="l">
+      <a:lvl7pPr marR="0" lvl="6" algn="l" rtl="0">
         <a:lnSpc>
           <a:spcPct val="100000"/>
         </a:lnSpc>
@@ -6551,7 +6426,7 @@
           <a:srgbClr val="000000"/>
         </a:buClr>
         <a:buFont typeface="Arial"/>
-        <a:defRPr b="0" i="0" sz="1400" u="none" cap="none" strike="noStrike">
+        <a:defRPr sz="1400" b="0" i="0" u="none" strike="noStrike" cap="none">
           <a:solidFill>
             <a:srgbClr val="000000"/>
           </a:solidFill>
@@ -6561,7 +6436,7 @@
           <a:sym typeface="Arial"/>
         </a:defRPr>
       </a:lvl7pPr>
-      <a:lvl8pPr lvl="7" marR="0" rtl="0" algn="l">
+      <a:lvl8pPr marR="0" lvl="7" algn="l" rtl="0">
         <a:lnSpc>
           <a:spcPct val="100000"/>
         </a:lnSpc>
@@ -6575,7 +6450,7 @@
           <a:srgbClr val="000000"/>
         </a:buClr>
         <a:buFont typeface="Arial"/>
-        <a:defRPr b="0" i="0" sz="1400" u="none" cap="none" strike="noStrike">
+        <a:defRPr sz="1400" b="0" i="0" u="none" strike="noStrike" cap="none">
           <a:solidFill>
             <a:srgbClr val="000000"/>
           </a:solidFill>
@@ -6585,7 +6460,7 @@
           <a:sym typeface="Arial"/>
         </a:defRPr>
       </a:lvl8pPr>
-      <a:lvl9pPr lvl="8" marR="0" rtl="0" algn="l">
+      <a:lvl9pPr marR="0" lvl="8" algn="l" rtl="0">
         <a:lnSpc>
           <a:spcPct val="100000"/>
         </a:lnSpc>
@@ -6599,7 +6474,7 @@
           <a:srgbClr val="000000"/>
         </a:buClr>
         <a:buFont typeface="Arial"/>
-        <a:defRPr b="0" i="0" sz="1400" u="none" cap="none" strike="noStrike">
+        <a:defRPr sz="1400" b="0" i="0" u="none" strike="noStrike" cap="none">
           <a:solidFill>
             <a:srgbClr val="000000"/>
           </a:solidFill>
@@ -6611,7 +6486,7 @@
       </a:lvl9pPr>
     </p:bodyStyle>
     <p:otherStyle>
-      <a:defPPr lvl="0" marR="0" rtl="0" algn="l">
+      <a:defPPr marR="0" lvl="0" algn="l" rtl="0">
         <a:lnSpc>
           <a:spcPct val="100000"/>
         </a:lnSpc>
@@ -6622,7 +6497,7 @@
           <a:spcPts val="0"/>
         </a:spcAft>
       </a:defPPr>
-      <a:lvl1pPr lvl="0" marR="0" rtl="0" algn="l">
+      <a:lvl1pPr marR="0" lvl="0" algn="l" rtl="0">
         <a:lnSpc>
           <a:spcPct val="100000"/>
         </a:lnSpc>
@@ -6636,7 +6511,7 @@
           <a:srgbClr val="000000"/>
         </a:buClr>
         <a:buFont typeface="Arial"/>
-        <a:defRPr b="0" i="0" sz="1400" u="none" cap="none" strike="noStrike">
+        <a:defRPr sz="1400" b="0" i="0" u="none" strike="noStrike" cap="none">
           <a:solidFill>
             <a:srgbClr val="000000"/>
           </a:solidFill>
@@ -6646,7 +6521,7 @@
           <a:sym typeface="Arial"/>
         </a:defRPr>
       </a:lvl1pPr>
-      <a:lvl2pPr lvl="1" marR="0" rtl="0" algn="l">
+      <a:lvl2pPr marR="0" lvl="1" algn="l" rtl="0">
         <a:lnSpc>
           <a:spcPct val="100000"/>
         </a:lnSpc>
@@ -6660,7 +6535,7 @@
           <a:srgbClr val="000000"/>
         </a:buClr>
         <a:buFont typeface="Arial"/>
-        <a:defRPr b="0" i="0" sz="1400" u="none" cap="none" strike="noStrike">
+        <a:defRPr sz="1400" b="0" i="0" u="none" strike="noStrike" cap="none">
           <a:solidFill>
             <a:srgbClr val="000000"/>
           </a:solidFill>
@@ -6670,7 +6545,7 @@
           <a:sym typeface="Arial"/>
         </a:defRPr>
       </a:lvl2pPr>
-      <a:lvl3pPr lvl="2" marR="0" rtl="0" algn="l">
+      <a:lvl3pPr marR="0" lvl="2" algn="l" rtl="0">
         <a:lnSpc>
           <a:spcPct val="100000"/>
         </a:lnSpc>
@@ -6684,7 +6559,7 @@
           <a:srgbClr val="000000"/>
         </a:buClr>
         <a:buFont typeface="Arial"/>
-        <a:defRPr b="0" i="0" sz="1400" u="none" cap="none" strike="noStrike">
+        <a:defRPr sz="1400" b="0" i="0" u="none" strike="noStrike" cap="none">
           <a:solidFill>
             <a:srgbClr val="000000"/>
           </a:solidFill>
@@ -6694,7 +6569,7 @@
           <a:sym typeface="Arial"/>
         </a:defRPr>
       </a:lvl3pPr>
-      <a:lvl4pPr lvl="3" marR="0" rtl="0" algn="l">
+      <a:lvl4pPr marR="0" lvl="3" algn="l" rtl="0">
         <a:lnSpc>
           <a:spcPct val="100000"/>
         </a:lnSpc>
@@ -6708,7 +6583,7 @@
           <a:srgbClr val="000000"/>
         </a:buClr>
         <a:buFont typeface="Arial"/>
-        <a:defRPr b="0" i="0" sz="1400" u="none" cap="none" strike="noStrike">
+        <a:defRPr sz="1400" b="0" i="0" u="none" strike="noStrike" cap="none">
           <a:solidFill>
             <a:srgbClr val="000000"/>
           </a:solidFill>
@@ -6718,7 +6593,7 @@
           <a:sym typeface="Arial"/>
         </a:defRPr>
       </a:lvl4pPr>
-      <a:lvl5pPr lvl="4" marR="0" rtl="0" algn="l">
+      <a:lvl5pPr marR="0" lvl="4" algn="l" rtl="0">
         <a:lnSpc>
           <a:spcPct val="100000"/>
         </a:lnSpc>
@@ -6732,7 +6607,7 @@
           <a:srgbClr val="000000"/>
         </a:buClr>
         <a:buFont typeface="Arial"/>
-        <a:defRPr b="0" i="0" sz="1400" u="none" cap="none" strike="noStrike">
+        <a:defRPr sz="1400" b="0" i="0" u="none" strike="noStrike" cap="none">
           <a:solidFill>
             <a:srgbClr val="000000"/>
           </a:solidFill>
@@ -6742,7 +6617,7 @@
           <a:sym typeface="Arial"/>
         </a:defRPr>
       </a:lvl5pPr>
-      <a:lvl6pPr lvl="5" marR="0" rtl="0" algn="l">
+      <a:lvl6pPr marR="0" lvl="5" algn="l" rtl="0">
         <a:lnSpc>
           <a:spcPct val="100000"/>
         </a:lnSpc>
@@ -6756,7 +6631,7 @@
           <a:srgbClr val="000000"/>
         </a:buClr>
         <a:buFont typeface="Arial"/>
-        <a:defRPr b="0" i="0" sz="1400" u="none" cap="none" strike="noStrike">
+        <a:defRPr sz="1400" b="0" i="0" u="none" strike="noStrike" cap="none">
           <a:solidFill>
             <a:srgbClr val="000000"/>
           </a:solidFill>
@@ -6766,7 +6641,7 @@
           <a:sym typeface="Arial"/>
         </a:defRPr>
       </a:lvl6pPr>
-      <a:lvl7pPr lvl="6" marR="0" rtl="0" algn="l">
+      <a:lvl7pPr marR="0" lvl="6" algn="l" rtl="0">
         <a:lnSpc>
           <a:spcPct val="100000"/>
         </a:lnSpc>
@@ -6780,7 +6655,7 @@
           <a:srgbClr val="000000"/>
         </a:buClr>
         <a:buFont typeface="Arial"/>
-        <a:defRPr b="0" i="0" sz="1400" u="none" cap="none" strike="noStrike">
+        <a:defRPr sz="1400" b="0" i="0" u="none" strike="noStrike" cap="none">
           <a:solidFill>
             <a:srgbClr val="000000"/>
           </a:solidFill>
@@ -6790,7 +6665,7 @@
           <a:sym typeface="Arial"/>
         </a:defRPr>
       </a:lvl7pPr>
-      <a:lvl8pPr lvl="7" marR="0" rtl="0" algn="l">
+      <a:lvl8pPr marR="0" lvl="7" algn="l" rtl="0">
         <a:lnSpc>
           <a:spcPct val="100000"/>
         </a:lnSpc>
@@ -6804,7 +6679,7 @@
           <a:srgbClr val="000000"/>
         </a:buClr>
         <a:buFont typeface="Arial"/>
-        <a:defRPr b="0" i="0" sz="1400" u="none" cap="none" strike="noStrike">
+        <a:defRPr sz="1400" b="0" i="0" u="none" strike="noStrike" cap="none">
           <a:solidFill>
             <a:srgbClr val="000000"/>
           </a:solidFill>
@@ -6814,7 +6689,7 @@
           <a:sym typeface="Arial"/>
         </a:defRPr>
       </a:lvl8pPr>
-      <a:lvl9pPr lvl="8" marR="0" rtl="0" algn="l">
+      <a:lvl9pPr marR="0" lvl="8" algn="l" rtl="0">
         <a:lnSpc>
           <a:spcPct val="100000"/>
         </a:lnSpc>
@@ -6828,7 +6703,7 @@
           <a:srgbClr val="000000"/>
         </a:buClr>
         <a:buFont typeface="Arial"/>
-        <a:defRPr b="0" i="0" sz="1400" u="none" cap="none" strike="noStrike">
+        <a:defRPr sz="1400" b="0" i="0" u="none" strike="noStrike" cap="none">
           <a:solidFill>
             <a:srgbClr val="000000"/>
           </a:solidFill>
@@ -6844,11 +6719,11 @@
 </file>
 
 <file path=ppt/slides/slide1.xml><?xml version="1.0" encoding="utf-8"?>
-<p:sld xmlns:a="http://schemas.openxmlformats.org/drawingml/2006/main" xmlns:r="http://schemas.openxmlformats.org/officeDocument/2006/relationships" xmlns:mc="http://schemas.openxmlformats.org/markup-compatibility/2006" xmlns:mv="urn:schemas-microsoft-com:mac:vml" xmlns:p="http://schemas.openxmlformats.org/presentationml/2006/main" xmlns:c="http://schemas.openxmlformats.org/drawingml/2006/chart" xmlns:dgm="http://schemas.openxmlformats.org/drawingml/2006/diagram" xmlns:o="urn:schemas-microsoft-com:office:office" xmlns:v="urn:schemas-microsoft-com:vml" xmlns:pvml="urn:schemas-microsoft-com:office:powerpoint" xmlns:com="http://schemas.openxmlformats.org/drawingml/2006/compatibility" xmlns:p14="http://schemas.microsoft.com/office/powerpoint/2010/main" xmlns:p15="http://schemas.microsoft.com/office/powerpoint/2012/main" xmlns:ahyp="http://schemas.microsoft.com/office/drawing/2018/hyperlinkcolor">
+<p:sld xmlns:a="http://schemas.openxmlformats.org/drawingml/2006/main" xmlns:r="http://schemas.openxmlformats.org/officeDocument/2006/relationships" xmlns:p="http://schemas.openxmlformats.org/presentationml/2006/main">
   <p:cSld>
     <p:spTree>
       <p:nvGrpSpPr>
-        <p:cNvPr id="53" name="Shape 53"/>
+        <p:cNvPr id="1" name="Shape 53"/>
         <p:cNvGrpSpPr/>
         <p:nvPr/>
       </p:nvGrpSpPr>
@@ -6863,7 +6738,9 @@
       <p:sp>
         <p:nvSpPr>
           <p:cNvPr id="54" name="Google Shape;54;p13"/>
-          <p:cNvSpPr txBox="1"/>
+          <p:cNvSpPr txBox="1">
+            <a:spLocks noGrp="1"/>
+          </p:cNvSpPr>
           <p:nvPr>
             <p:ph type="ctrTitle"/>
           </p:nvPr>
@@ -6878,12 +6755,12 @@
           </a:prstGeom>
         </p:spPr>
         <p:txBody>
-          <a:bodyPr anchorCtr="0" anchor="b" bIns="91425" lIns="91425" spcFirstLastPara="1" rIns="91425" wrap="square" tIns="91425">
+          <a:bodyPr spcFirstLastPara="1" wrap="square" lIns="91425" tIns="91425" rIns="91425" bIns="91425" anchor="b" anchorCtr="0">
             <a:normAutofit/>
           </a:bodyPr>
           <a:lstStyle/>
           <a:p>
-            <a:pPr indent="0" lvl="0" marL="0" rtl="0" algn="ctr">
+            <a:pPr marL="0" lvl="0" indent="0" algn="ctr" rtl="0">
               <a:spcBef>
                 <a:spcPts val="0"/>
               </a:spcBef>
@@ -6892,9 +6769,6 @@
               </a:spcAft>
               <a:buNone/>
             </a:pPr>
-            <a:r>
-              <a:t/>
-            </a:r>
             <a:endParaRPr/>
           </a:p>
         </p:txBody>
@@ -6902,9 +6776,11 @@
       <p:sp>
         <p:nvSpPr>
           <p:cNvPr id="55" name="Google Shape;55;p13"/>
-          <p:cNvSpPr txBox="1"/>
+          <p:cNvSpPr txBox="1">
+            <a:spLocks noGrp="1"/>
+          </p:cNvSpPr>
           <p:nvPr>
-            <p:ph idx="1" type="subTitle"/>
+            <p:ph type="subTitle" idx="1"/>
           </p:nvPr>
         </p:nvSpPr>
         <p:spPr>
@@ -6917,12 +6793,12 @@
           </a:prstGeom>
         </p:spPr>
         <p:txBody>
-          <a:bodyPr anchorCtr="0" anchor="t" bIns="91425" lIns="91425" spcFirstLastPara="1" rIns="91425" wrap="square" tIns="91425">
+          <a:bodyPr spcFirstLastPara="1" wrap="square" lIns="91425" tIns="91425" rIns="91425" bIns="91425" anchor="t" anchorCtr="0">
             <a:normAutofit/>
           </a:bodyPr>
           <a:lstStyle/>
           <a:p>
-            <a:pPr indent="0" lvl="0" marL="0" rtl="0" algn="ctr">
+            <a:pPr marL="0" lvl="0" indent="0" algn="ctr" rtl="0">
               <a:spcBef>
                 <a:spcPts val="0"/>
               </a:spcBef>
@@ -6931,9 +6807,6 @@
               </a:spcAft>
               <a:buNone/>
             </a:pPr>
-            <a:r>
-              <a:t/>
-            </a:r>
             <a:endParaRPr/>
           </a:p>
         </p:txBody>
@@ -6986,12 +6859,12 @@
           </a:ln>
         </p:spPr>
         <p:txBody>
-          <a:bodyPr anchorCtr="0" anchor="t" bIns="91425" lIns="91425" spcFirstLastPara="1" rIns="91425" wrap="square" tIns="91425">
+          <a:bodyPr spcFirstLastPara="1" wrap="square" lIns="91425" tIns="91425" rIns="91425" bIns="91425" anchor="t" anchorCtr="0">
             <a:spAutoFit/>
           </a:bodyPr>
           <a:lstStyle/>
           <a:p>
-            <a:pPr indent="0" lvl="0" marL="457200" rtl="0" algn="l">
+            <a:pPr marL="457200" lvl="0" indent="0" algn="l" rtl="0">
               <a:lnSpc>
                 <a:spcPct val="115000"/>
               </a:lnSpc>
@@ -7004,7 +6877,7 @@
               <a:buNone/>
             </a:pPr>
             <a:r>
-              <a:rPr b="1" lang="en-GB" sz="1800">
+              <a:rPr lang="en-GB" sz="1800" b="1">
                 <a:solidFill>
                   <a:schemeClr val="dk1"/>
                 </a:solidFill>
@@ -7033,7 +6906,7 @@
         <p:spPr>
           <a:xfrm>
             <a:off x="540825" y="3778025"/>
-            <a:ext cx="3000000" cy="895800"/>
+            <a:ext cx="6239116" cy="927916"/>
           </a:xfrm>
           <a:prstGeom prst="rect">
             <a:avLst/>
@@ -7044,12 +6917,12 @@
           </a:ln>
         </p:spPr>
         <p:txBody>
-          <a:bodyPr anchorCtr="0" anchor="t" bIns="91425" lIns="91425" spcFirstLastPara="1" rIns="91425" wrap="square" tIns="91425">
+          <a:bodyPr spcFirstLastPara="1" wrap="square" lIns="91425" tIns="91425" rIns="91425" bIns="91425" anchor="t" anchorCtr="0">
             <a:spAutoFit/>
           </a:bodyPr>
           <a:lstStyle/>
           <a:p>
-            <a:pPr indent="-317500" lvl="0" marL="457200" rtl="0" algn="l">
+            <a:pPr marL="457200" lvl="0" indent="-317500" algn="l" rtl="0">
               <a:lnSpc>
                 <a:spcPct val="115000"/>
               </a:lnSpc>
@@ -7067,7 +6940,7 @@
               <a:buChar char="➔"/>
             </a:pPr>
             <a:r>
-              <a:rPr lang="en-GB">
+              <a:rPr lang="en-GB" dirty="0">
                 <a:solidFill>
                   <a:schemeClr val="dk1"/>
                 </a:solidFill>
@@ -7076,9 +6949,9 @@
                 <a:cs typeface="Poppins"/>
                 <a:sym typeface="Poppins"/>
               </a:rPr>
-              <a:t>Team name - </a:t>
-            </a:r>
-            <a:endParaRPr>
+              <a:t>Team name – Deadline Dodgers</a:t>
+            </a:r>
+            <a:endParaRPr dirty="0">
               <a:solidFill>
                 <a:schemeClr val="dk1"/>
               </a:solidFill>
@@ -7089,7 +6962,7 @@
             </a:endParaRPr>
           </a:p>
           <a:p>
-            <a:pPr indent="-317500" lvl="0" marL="457200" rtl="0" algn="l">
+            <a:pPr marL="457200" lvl="0" indent="-317500" algn="l" rtl="0">
               <a:lnSpc>
                 <a:spcPct val="115000"/>
               </a:lnSpc>
@@ -7107,7 +6980,7 @@
               <a:buChar char="➔"/>
             </a:pPr>
             <a:r>
-              <a:rPr lang="en-GB">
+              <a:rPr lang="en-GB" dirty="0">
                 <a:solidFill>
                   <a:schemeClr val="dk1"/>
                 </a:solidFill>
@@ -7116,9 +6989,9 @@
                 <a:cs typeface="Poppins"/>
                 <a:sym typeface="Poppins"/>
               </a:rPr>
-              <a:t>Team leader name - </a:t>
-            </a:r>
-            <a:endParaRPr>
+              <a:t>Team leader name – Chanchal Taye</a:t>
+            </a:r>
+            <a:endParaRPr dirty="0">
               <a:solidFill>
                 <a:schemeClr val="dk1"/>
               </a:solidFill>
@@ -7129,16 +7002,10 @@
             </a:endParaRPr>
           </a:p>
           <a:p>
-            <a:pPr indent="-317500" lvl="0" marL="457200" rtl="0" algn="l">
+            <a:pPr marL="457200" lvl="0" indent="-317500">
               <a:lnSpc>
                 <a:spcPct val="115000"/>
               </a:lnSpc>
-              <a:spcBef>
-                <a:spcPts val="0"/>
-              </a:spcBef>
-              <a:spcAft>
-                <a:spcPts val="0"/>
-              </a:spcAft>
               <a:buClr>
                 <a:schemeClr val="dk1"/>
               </a:buClr>
@@ -7147,7 +7014,7 @@
               <a:buChar char="➔"/>
             </a:pPr>
             <a:r>
-              <a:rPr lang="en-GB">
+              <a:rPr lang="en-GB" dirty="0">
                 <a:solidFill>
                   <a:schemeClr val="dk1"/>
                 </a:solidFill>
@@ -7158,7 +7025,11 @@
               </a:rPr>
               <a:t>Problem Statement - </a:t>
             </a:r>
-            <a:endParaRPr/>
+            <a:r>
+              <a:rPr lang="en-IN" dirty="0"/>
+              <a:t>Future of Work &amp; Productivity</a:t>
+            </a:r>
+            <a:endParaRPr dirty="0"/>
           </a:p>
         </p:txBody>
       </p:sp>
@@ -7171,11 +7042,11 @@
 </file>
 
 <file path=ppt/slides/slide10.xml><?xml version="1.0" encoding="utf-8"?>
-<p:sld xmlns:a="http://schemas.openxmlformats.org/drawingml/2006/main" xmlns:r="http://schemas.openxmlformats.org/officeDocument/2006/relationships" xmlns:mc="http://schemas.openxmlformats.org/markup-compatibility/2006" xmlns:mv="urn:schemas-microsoft-com:mac:vml" xmlns:p="http://schemas.openxmlformats.org/presentationml/2006/main" xmlns:c="http://schemas.openxmlformats.org/drawingml/2006/chart" xmlns:dgm="http://schemas.openxmlformats.org/drawingml/2006/diagram" xmlns:o="urn:schemas-microsoft-com:office:office" xmlns:v="urn:schemas-microsoft-com:vml" xmlns:pvml="urn:schemas-microsoft-com:office:powerpoint" xmlns:com="http://schemas.openxmlformats.org/drawingml/2006/compatibility" xmlns:p14="http://schemas.microsoft.com/office/powerpoint/2010/main" xmlns:p15="http://schemas.microsoft.com/office/powerpoint/2012/main" xmlns:ahyp="http://schemas.microsoft.com/office/drawing/2018/hyperlinkcolor">
+<p:sld xmlns:a="http://schemas.openxmlformats.org/drawingml/2006/main" xmlns:r="http://schemas.openxmlformats.org/officeDocument/2006/relationships" xmlns:p="http://schemas.openxmlformats.org/presentationml/2006/main">
   <p:cSld>
     <p:spTree>
       <p:nvGrpSpPr>
-        <p:cNvPr id="127" name="Shape 127"/>
+        <p:cNvPr id="1" name="Shape 127"/>
         <p:cNvGrpSpPr/>
         <p:nvPr/>
       </p:nvGrpSpPr>
@@ -7190,7 +7061,9 @@
       <p:sp>
         <p:nvSpPr>
           <p:cNvPr id="128" name="Google Shape;128;p22"/>
-          <p:cNvSpPr txBox="1"/>
+          <p:cNvSpPr txBox="1">
+            <a:spLocks noGrp="1"/>
+          </p:cNvSpPr>
           <p:nvPr>
             <p:ph type="ctrTitle"/>
           </p:nvPr>
@@ -7205,12 +7078,12 @@
           </a:prstGeom>
         </p:spPr>
         <p:txBody>
-          <a:bodyPr anchorCtr="0" anchor="b" bIns="91425" lIns="91425" spcFirstLastPara="1" rIns="91425" wrap="square" tIns="91425">
+          <a:bodyPr spcFirstLastPara="1" wrap="square" lIns="91425" tIns="91425" rIns="91425" bIns="91425" anchor="b" anchorCtr="0">
             <a:normAutofit/>
           </a:bodyPr>
           <a:lstStyle/>
           <a:p>
-            <a:pPr indent="0" lvl="0" marL="0" rtl="0" algn="l">
+            <a:pPr marL="0" lvl="0" indent="0" algn="l" rtl="0">
               <a:spcBef>
                 <a:spcPts val="0"/>
               </a:spcBef>
@@ -7221,65 +7094,15 @@
               <a:buNone/>
             </a:pPr>
             <a:r>
-              <a:rPr b="1" lang="en-GB" sz="1620">
+              <a:rPr lang="en-GB" sz="1620" b="1" dirty="0">
                 <a:latin typeface="Poppins"/>
                 <a:ea typeface="Poppins"/>
                 <a:cs typeface="Poppins"/>
                 <a:sym typeface="Poppins"/>
               </a:rPr>
-              <a:t>Estimated implementation cost (optional)</a:t>
-            </a:r>
-            <a:endParaRPr b="1" sz="1620">
-              <a:latin typeface="Poppins"/>
-              <a:ea typeface="Poppins"/>
-              <a:cs typeface="Poppins"/>
-              <a:sym typeface="Poppins"/>
-            </a:endParaRPr>
-          </a:p>
-        </p:txBody>
-      </p:sp>
-      <p:sp>
-        <p:nvSpPr>
-          <p:cNvPr id="129" name="Google Shape;129;p22"/>
-          <p:cNvSpPr txBox="1"/>
-          <p:nvPr>
-            <p:ph idx="1" type="subTitle"/>
-          </p:nvPr>
-        </p:nvSpPr>
-        <p:spPr>
-          <a:xfrm>
-            <a:off x="311700" y="1249775"/>
-            <a:ext cx="8520600" cy="3525000"/>
-          </a:xfrm>
-          <a:prstGeom prst="rect">
-            <a:avLst/>
-          </a:prstGeom>
-        </p:spPr>
-        <p:txBody>
-          <a:bodyPr anchorCtr="0" anchor="t" bIns="91425" lIns="91425" spcFirstLastPara="1" rIns="91425" wrap="square" tIns="91425">
-            <a:normAutofit/>
-          </a:bodyPr>
-          <a:lstStyle/>
-          <a:p>
-            <a:pPr indent="0" lvl="0" marL="0" rtl="0" algn="l">
-              <a:spcBef>
-                <a:spcPts val="0"/>
-              </a:spcBef>
-              <a:spcAft>
-                <a:spcPts val="0"/>
-              </a:spcAft>
-              <a:buNone/>
-            </a:pPr>
-            <a:r>
-              <a:rPr lang="en-GB" sz="1300">
-                <a:latin typeface="Poppins"/>
-                <a:ea typeface="Poppins"/>
-                <a:cs typeface="Poppins"/>
-                <a:sym typeface="Poppins"/>
-              </a:rPr>
-              <a:t>Type here</a:t>
-            </a:r>
-            <a:endParaRPr sz="1300">
+              <a:t>Estimated implementation cost</a:t>
+            </a:r>
+            <a:endParaRPr sz="1620" b="1" dirty="0">
               <a:latin typeface="Poppins"/>
               <a:ea typeface="Poppins"/>
               <a:cs typeface="Poppins"/>
@@ -7298,7 +7121,7 @@
           <a:blip r:embed="rId3">
             <a:alphaModFix/>
           </a:blip>
-          <a:srcRect b="89082" l="0" r="0" t="0"/>
+          <a:srcRect b="89082"/>
           <a:stretch/>
         </p:blipFill>
         <p:spPr>
@@ -7325,7 +7148,7 @@
           <a:blip r:embed="rId4">
             <a:alphaModFix/>
           </a:blip>
-          <a:srcRect b="0" l="0" r="0" t="98295"/>
+          <a:srcRect t="98295"/>
           <a:stretch/>
         </p:blipFill>
         <p:spPr>
@@ -7342,6 +7165,368 @@
           </a:ln>
         </p:spPr>
       </p:pic>
+      <p:sp>
+        <p:nvSpPr>
+          <p:cNvPr id="4" name="TextBox 3">
+            <a:extLst>
+              <a:ext uri="{FF2B5EF4-FFF2-40B4-BE49-F238E27FC236}">
+                <a16:creationId xmlns:a16="http://schemas.microsoft.com/office/drawing/2014/main" id="{DCBEE7CA-D0B5-79A8-6CD2-D6DE9F495FCB}"/>
+              </a:ext>
+            </a:extLst>
+          </p:cNvPr>
+          <p:cNvSpPr txBox="1"/>
+          <p:nvPr/>
+        </p:nvSpPr>
+        <p:spPr>
+          <a:xfrm>
+            <a:off x="252761" y="1192175"/>
+            <a:ext cx="8579539" cy="3816429"/>
+          </a:xfrm>
+          <a:prstGeom prst="rect">
+            <a:avLst/>
+          </a:prstGeom>
+          <a:noFill/>
+        </p:spPr>
+        <p:txBody>
+          <a:bodyPr wrap="square" rtlCol="0">
+            <a:spAutoFit/>
+          </a:bodyPr>
+          <a:lstStyle/>
+          <a:p>
+            <a:r>
+              <a:rPr lang="en-IN" sz="1100" dirty="0">
+                <a:latin typeface="Poppins" panose="00000500000000000000" pitchFamily="2" charset="0"/>
+                <a:cs typeface="Poppins" panose="00000500000000000000" pitchFamily="2" charset="0"/>
+              </a:rPr>
+              <a:t>Cost Breakdown by Deployment Tier</a:t>
+            </a:r>
+          </a:p>
+          <a:p>
+            <a:r>
+              <a:rPr lang="en-IN" sz="1100" dirty="0">
+                <a:latin typeface="Poppins" panose="00000500000000000000" pitchFamily="2" charset="0"/>
+                <a:cs typeface="Poppins" panose="00000500000000000000" pitchFamily="2" charset="0"/>
+              </a:rPr>
+              <a:t>Tier 1: POC / University Deployment (50 users)</a:t>
+            </a:r>
+          </a:p>
+          <a:p>
+            <a:r>
+              <a:rPr lang="en-IN" sz="1100" b="1" dirty="0">
+                <a:latin typeface="Poppins" panose="00000500000000000000" pitchFamily="2" charset="0"/>
+                <a:cs typeface="Poppins" panose="00000500000000000000" pitchFamily="2" charset="0"/>
+              </a:rPr>
+              <a:t>Infrastructure:</a:t>
+            </a:r>
+            <a:endParaRPr lang="en-IN" sz="1100" dirty="0">
+              <a:latin typeface="Poppins" panose="00000500000000000000" pitchFamily="2" charset="0"/>
+              <a:cs typeface="Poppins" panose="00000500000000000000" pitchFamily="2" charset="0"/>
+            </a:endParaRPr>
+          </a:p>
+          <a:p>
+            <a:r>
+              <a:rPr lang="en-IN" sz="1100" b="1" dirty="0">
+                <a:latin typeface="Poppins" panose="00000500000000000000" pitchFamily="2" charset="0"/>
+                <a:cs typeface="Poppins" panose="00000500000000000000" pitchFamily="2" charset="0"/>
+              </a:rPr>
+              <a:t>Cloud VM:</a:t>
+            </a:r>
+            <a:r>
+              <a:rPr lang="en-IN" sz="1100" dirty="0">
+                <a:latin typeface="Poppins" panose="00000500000000000000" pitchFamily="2" charset="0"/>
+                <a:cs typeface="Poppins" panose="00000500000000000000" pitchFamily="2" charset="0"/>
+              </a:rPr>
+              <a:t> </a:t>
+            </a:r>
+            <a:r>
+              <a:rPr lang="en-IN" sz="1100" dirty="0" err="1">
+                <a:latin typeface="Poppins" panose="00000500000000000000" pitchFamily="2" charset="0"/>
+                <a:cs typeface="Poppins" panose="00000500000000000000" pitchFamily="2" charset="0"/>
+              </a:rPr>
+              <a:t>DigitalOcean</a:t>
+            </a:r>
+            <a:r>
+              <a:rPr lang="en-IN" sz="1100" dirty="0">
+                <a:latin typeface="Poppins" panose="00000500000000000000" pitchFamily="2" charset="0"/>
+                <a:cs typeface="Poppins" panose="00000500000000000000" pitchFamily="2" charset="0"/>
+              </a:rPr>
+              <a:t> Premium Droplet (8 vCPU, 16GB RAM, 320GB SSD)</a:t>
+            </a:r>
+            <a:br>
+              <a:rPr lang="en-IN" sz="1100" dirty="0">
+                <a:latin typeface="Poppins" panose="00000500000000000000" pitchFamily="2" charset="0"/>
+                <a:cs typeface="Poppins" panose="00000500000000000000" pitchFamily="2" charset="0"/>
+              </a:rPr>
+            </a:br>
+            <a:r>
+              <a:rPr lang="en-IN" sz="1100" dirty="0">
+                <a:latin typeface="Poppins" panose="00000500000000000000" pitchFamily="2" charset="0"/>
+                <a:cs typeface="Poppins" panose="00000500000000000000" pitchFamily="2" charset="0"/>
+              </a:rPr>
+              <a:t>→ $96/month [web:145]</a:t>
+            </a:r>
+          </a:p>
+          <a:p>
+            <a:r>
+              <a:rPr lang="en-IN" sz="1100" b="1" dirty="0">
+                <a:latin typeface="Poppins" panose="00000500000000000000" pitchFamily="2" charset="0"/>
+                <a:cs typeface="Poppins" panose="00000500000000000000" pitchFamily="2" charset="0"/>
+              </a:rPr>
+              <a:t>PostgreSQL Managed DB:</a:t>
+            </a:r>
+            <a:r>
+              <a:rPr lang="en-IN" sz="1100" dirty="0">
+                <a:latin typeface="Poppins" panose="00000500000000000000" pitchFamily="2" charset="0"/>
+                <a:cs typeface="Poppins" panose="00000500000000000000" pitchFamily="2" charset="0"/>
+              </a:rPr>
+              <a:t> 2GB RAM, 10GB storage</a:t>
+            </a:r>
+            <a:br>
+              <a:rPr lang="en-IN" sz="1100" dirty="0">
+                <a:latin typeface="Poppins" panose="00000500000000000000" pitchFamily="2" charset="0"/>
+                <a:cs typeface="Poppins" panose="00000500000000000000" pitchFamily="2" charset="0"/>
+              </a:rPr>
+            </a:br>
+            <a:r>
+              <a:rPr lang="en-IN" sz="1100" dirty="0">
+                <a:latin typeface="Poppins" panose="00000500000000000000" pitchFamily="2" charset="0"/>
+                <a:cs typeface="Poppins" panose="00000500000000000000" pitchFamily="2" charset="0"/>
+              </a:rPr>
+              <a:t>→ $15/month [web:145]</a:t>
+            </a:r>
+          </a:p>
+          <a:p>
+            <a:r>
+              <a:rPr lang="en-IN" sz="1100" b="1" dirty="0">
+                <a:latin typeface="Poppins" panose="00000500000000000000" pitchFamily="2" charset="0"/>
+                <a:cs typeface="Poppins" panose="00000500000000000000" pitchFamily="2" charset="0"/>
+              </a:rPr>
+              <a:t>Redis Managed:</a:t>
+            </a:r>
+            <a:r>
+              <a:rPr lang="en-IN" sz="1100" dirty="0">
+                <a:latin typeface="Poppins" panose="00000500000000000000" pitchFamily="2" charset="0"/>
+                <a:cs typeface="Poppins" panose="00000500000000000000" pitchFamily="2" charset="0"/>
+              </a:rPr>
+              <a:t> 1GB RAM</a:t>
+            </a:r>
+            <a:br>
+              <a:rPr lang="en-IN" sz="1100" dirty="0">
+                <a:latin typeface="Poppins" panose="00000500000000000000" pitchFamily="2" charset="0"/>
+                <a:cs typeface="Poppins" panose="00000500000000000000" pitchFamily="2" charset="0"/>
+              </a:rPr>
+            </a:br>
+            <a:r>
+              <a:rPr lang="en-IN" sz="1100" dirty="0">
+                <a:latin typeface="Poppins" panose="00000500000000000000" pitchFamily="2" charset="0"/>
+                <a:cs typeface="Poppins" panose="00000500000000000000" pitchFamily="2" charset="0"/>
+              </a:rPr>
+              <a:t>→ $10/month</a:t>
+            </a:r>
+          </a:p>
+          <a:p>
+            <a:r>
+              <a:rPr lang="en-IN" sz="1100" b="1" dirty="0">
+                <a:latin typeface="Poppins" panose="00000500000000000000" pitchFamily="2" charset="0"/>
+                <a:cs typeface="Poppins" panose="00000500000000000000" pitchFamily="2" charset="0"/>
+              </a:rPr>
+              <a:t>Domain + SSL:</a:t>
+            </a:r>
+            <a:r>
+              <a:rPr lang="en-IN" sz="1100" dirty="0">
+                <a:latin typeface="Poppins" panose="00000500000000000000" pitchFamily="2" charset="0"/>
+                <a:cs typeface="Poppins" panose="00000500000000000000" pitchFamily="2" charset="0"/>
+              </a:rPr>
+              <a:t> Let's Encrypt (free) + domain registration</a:t>
+            </a:r>
+            <a:br>
+              <a:rPr lang="en-IN" sz="1100" dirty="0">
+                <a:latin typeface="Poppins" panose="00000500000000000000" pitchFamily="2" charset="0"/>
+                <a:cs typeface="Poppins" panose="00000500000000000000" pitchFamily="2" charset="0"/>
+              </a:rPr>
+            </a:br>
+            <a:r>
+              <a:rPr lang="en-IN" sz="1100" dirty="0">
+                <a:latin typeface="Poppins" panose="00000500000000000000" pitchFamily="2" charset="0"/>
+                <a:cs typeface="Poppins" panose="00000500000000000000" pitchFamily="2" charset="0"/>
+              </a:rPr>
+              <a:t>→ $12/year = $1/month</a:t>
+            </a:r>
+          </a:p>
+          <a:p>
+            <a:r>
+              <a:rPr lang="en-IN" sz="1100" b="1" dirty="0">
+                <a:latin typeface="Poppins" panose="00000500000000000000" pitchFamily="2" charset="0"/>
+                <a:cs typeface="Poppins" panose="00000500000000000000" pitchFamily="2" charset="0"/>
+              </a:rPr>
+              <a:t>LLM Costs:</a:t>
+            </a:r>
+            <a:endParaRPr lang="en-IN" sz="1100" dirty="0">
+              <a:latin typeface="Poppins" panose="00000500000000000000" pitchFamily="2" charset="0"/>
+              <a:cs typeface="Poppins" panose="00000500000000000000" pitchFamily="2" charset="0"/>
+            </a:endParaRPr>
+          </a:p>
+          <a:p>
+            <a:r>
+              <a:rPr lang="en-IN" sz="1100" b="1" dirty="0" err="1">
+                <a:latin typeface="Poppins" panose="00000500000000000000" pitchFamily="2" charset="0"/>
+                <a:cs typeface="Poppins" panose="00000500000000000000" pitchFamily="2" charset="0"/>
+              </a:rPr>
+              <a:t>Groq</a:t>
+            </a:r>
+            <a:r>
+              <a:rPr lang="en-IN" sz="1100" b="1" dirty="0">
+                <a:latin typeface="Poppins" panose="00000500000000000000" pitchFamily="2" charset="0"/>
+                <a:cs typeface="Poppins" panose="00000500000000000000" pitchFamily="2" charset="0"/>
+              </a:rPr>
+              <a:t> API:</a:t>
+            </a:r>
+            <a:r>
+              <a:rPr lang="en-IN" sz="1100" dirty="0">
+                <a:latin typeface="Poppins" panose="00000500000000000000" pitchFamily="2" charset="0"/>
+                <a:cs typeface="Poppins" panose="00000500000000000000" pitchFamily="2" charset="0"/>
+              </a:rPr>
+              <a:t> Free tier (14,400 requests/day)</a:t>
+            </a:r>
+            <a:br>
+              <a:rPr lang="en-IN" sz="1100" dirty="0">
+                <a:latin typeface="Poppins" panose="00000500000000000000" pitchFamily="2" charset="0"/>
+                <a:cs typeface="Poppins" panose="00000500000000000000" pitchFamily="2" charset="0"/>
+              </a:rPr>
+            </a:br>
+            <a:r>
+              <a:rPr lang="en-IN" sz="1100" dirty="0">
+                <a:latin typeface="Poppins" panose="00000500000000000000" pitchFamily="2" charset="0"/>
+                <a:cs typeface="Poppins" panose="00000500000000000000" pitchFamily="2" charset="0"/>
+              </a:rPr>
+              <a:t>→ $0/month [web:103]</a:t>
+            </a:r>
+          </a:p>
+          <a:p>
+            <a:r>
+              <a:rPr lang="en-IN" sz="1100" dirty="0">
+                <a:latin typeface="Poppins" panose="00000500000000000000" pitchFamily="2" charset="0"/>
+                <a:cs typeface="Poppins" panose="00000500000000000000" pitchFamily="2" charset="0"/>
+              </a:rPr>
+              <a:t>Estimated usage at 50 users: ~500 agent invocations/month → well within free tier</a:t>
+            </a:r>
+          </a:p>
+          <a:p>
+            <a:r>
+              <a:rPr lang="en-IN" sz="1100" b="1" dirty="0">
+                <a:latin typeface="Poppins" panose="00000500000000000000" pitchFamily="2" charset="0"/>
+                <a:cs typeface="Poppins" panose="00000500000000000000" pitchFamily="2" charset="0"/>
+              </a:rPr>
+              <a:t>Total Monthly: $122/month</a:t>
+            </a:r>
+            <a:br>
+              <a:rPr lang="en-IN" sz="1100" dirty="0">
+                <a:latin typeface="Poppins" panose="00000500000000000000" pitchFamily="2" charset="0"/>
+                <a:cs typeface="Poppins" panose="00000500000000000000" pitchFamily="2" charset="0"/>
+              </a:rPr>
+            </a:br>
+            <a:r>
+              <a:rPr lang="en-IN" sz="1100" b="1" dirty="0">
+                <a:latin typeface="Poppins" panose="00000500000000000000" pitchFamily="2" charset="0"/>
+                <a:cs typeface="Poppins" panose="00000500000000000000" pitchFamily="2" charset="0"/>
+              </a:rPr>
+              <a:t>Total Annual: $1,464</a:t>
+            </a:r>
+            <a:endParaRPr lang="en-IN" sz="1100" dirty="0">
+              <a:latin typeface="Poppins" panose="00000500000000000000" pitchFamily="2" charset="0"/>
+              <a:cs typeface="Poppins" panose="00000500000000000000" pitchFamily="2" charset="0"/>
+            </a:endParaRPr>
+          </a:p>
+          <a:p>
+            <a:r>
+              <a:rPr lang="en-IN" sz="1100" b="1" dirty="0">
+                <a:latin typeface="Poppins" panose="00000500000000000000" pitchFamily="2" charset="0"/>
+                <a:cs typeface="Poppins" panose="00000500000000000000" pitchFamily="2" charset="0"/>
+              </a:rPr>
+              <a:t>Development Cost (One-Time):</a:t>
+            </a:r>
+            <a:endParaRPr lang="en-IN" sz="1100" dirty="0">
+              <a:latin typeface="Poppins" panose="00000500000000000000" pitchFamily="2" charset="0"/>
+              <a:cs typeface="Poppins" panose="00000500000000000000" pitchFamily="2" charset="0"/>
+            </a:endParaRPr>
+          </a:p>
+          <a:p>
+            <a:r>
+              <a:rPr lang="en-IN" sz="1100" dirty="0">
+                <a:latin typeface="Poppins" panose="00000500000000000000" pitchFamily="2" charset="0"/>
+                <a:cs typeface="Poppins" panose="00000500000000000000" pitchFamily="2" charset="0"/>
+              </a:rPr>
+              <a:t>3 developers × 4 months × ₹60,000/month = </a:t>
+            </a:r>
+            <a:r>
+              <a:rPr lang="en-IN" sz="1100" b="1" dirty="0">
+                <a:latin typeface="Poppins" panose="00000500000000000000" pitchFamily="2" charset="0"/>
+                <a:cs typeface="Poppins" panose="00000500000000000000" pitchFamily="2" charset="0"/>
+              </a:rPr>
+              <a:t>₹7,20,000</a:t>
+            </a:r>
+            <a:r>
+              <a:rPr lang="en-IN" sz="1100" dirty="0">
+                <a:latin typeface="Poppins" panose="00000500000000000000" pitchFamily="2" charset="0"/>
+                <a:cs typeface="Poppins" panose="00000500000000000000" pitchFamily="2" charset="0"/>
+              </a:rPr>
+              <a:t> ($8,640 at 1 USD = ₹83)</a:t>
+            </a:r>
+          </a:p>
+          <a:p>
+            <a:r>
+              <a:rPr lang="en-IN" sz="1100" dirty="0">
+                <a:latin typeface="Poppins" panose="00000500000000000000" pitchFamily="2" charset="0"/>
+                <a:cs typeface="Poppins" panose="00000500000000000000" pitchFamily="2" charset="0"/>
+              </a:rPr>
+              <a:t>Testing &amp; QA: ₹80,000 ($960)</a:t>
+            </a:r>
+          </a:p>
+          <a:p>
+            <a:r>
+              <a:rPr lang="en-IN" sz="1100" b="1" dirty="0">
+                <a:latin typeface="Poppins" panose="00000500000000000000" pitchFamily="2" charset="0"/>
+                <a:cs typeface="Poppins" panose="00000500000000000000" pitchFamily="2" charset="0"/>
+              </a:rPr>
+              <a:t>Total Dev Cost: ₹8,00,000 ($9,600)</a:t>
+            </a:r>
+            <a:endParaRPr lang="en-IN" sz="1100" dirty="0">
+              <a:latin typeface="Poppins" panose="00000500000000000000" pitchFamily="2" charset="0"/>
+              <a:cs typeface="Poppins" panose="00000500000000000000" pitchFamily="2" charset="0"/>
+            </a:endParaRPr>
+          </a:p>
+          <a:p>
+            <a:r>
+              <a:rPr lang="en-IN" sz="1100" b="1" dirty="0">
+                <a:latin typeface="Poppins" panose="00000500000000000000" pitchFamily="2" charset="0"/>
+                <a:cs typeface="Poppins" panose="00000500000000000000" pitchFamily="2" charset="0"/>
+              </a:rPr>
+              <a:t>Total First Year (POC):</a:t>
+            </a:r>
+            <a:r>
+              <a:rPr lang="en-IN" sz="1100" dirty="0">
+                <a:latin typeface="Poppins" panose="00000500000000000000" pitchFamily="2" charset="0"/>
+                <a:cs typeface="Poppins" panose="00000500000000000000" pitchFamily="2" charset="0"/>
+              </a:rPr>
+              <a:t> $9,600 + $1,464 = </a:t>
+            </a:r>
+            <a:r>
+              <a:rPr lang="en-IN" sz="1100" b="1" dirty="0">
+                <a:latin typeface="Poppins" panose="00000500000000000000" pitchFamily="2" charset="0"/>
+                <a:cs typeface="Poppins" panose="00000500000000000000" pitchFamily="2" charset="0"/>
+              </a:rPr>
+              <a:t>$11,064</a:t>
+            </a:r>
+            <a:r>
+              <a:rPr lang="en-IN" sz="1100" dirty="0">
+                <a:latin typeface="Poppins" panose="00000500000000000000" pitchFamily="2" charset="0"/>
+                <a:cs typeface="Poppins" panose="00000500000000000000" pitchFamily="2" charset="0"/>
+              </a:rPr>
+              <a:t> (~₹9.18 lakh)</a:t>
+            </a:r>
+          </a:p>
+        </p:txBody>
+      </p:sp>
     </p:spTree>
   </p:cSld>
   <p:clrMapOvr>
@@ -7351,11 +7536,11 @@
 </file>
 
 <file path=ppt/slides/slide11.xml><?xml version="1.0" encoding="utf-8"?>
-<p:sld xmlns:a="http://schemas.openxmlformats.org/drawingml/2006/main" xmlns:r="http://schemas.openxmlformats.org/officeDocument/2006/relationships" xmlns:mc="http://schemas.openxmlformats.org/markup-compatibility/2006" xmlns:mv="urn:schemas-microsoft-com:mac:vml" xmlns:p="http://schemas.openxmlformats.org/presentationml/2006/main" xmlns:c="http://schemas.openxmlformats.org/drawingml/2006/chart" xmlns:dgm="http://schemas.openxmlformats.org/drawingml/2006/diagram" xmlns:o="urn:schemas-microsoft-com:office:office" xmlns:v="urn:schemas-microsoft-com:vml" xmlns:pvml="urn:schemas-microsoft-com:office:powerpoint" xmlns:com="http://schemas.openxmlformats.org/drawingml/2006/compatibility" xmlns:p14="http://schemas.microsoft.com/office/powerpoint/2010/main" xmlns:p15="http://schemas.microsoft.com/office/powerpoint/2012/main" xmlns:ahyp="http://schemas.microsoft.com/office/drawing/2018/hyperlinkcolor">
+<p:sld xmlns:a="http://schemas.openxmlformats.org/drawingml/2006/main" xmlns:r="http://schemas.openxmlformats.org/officeDocument/2006/relationships" xmlns:p="http://schemas.openxmlformats.org/presentationml/2006/main">
   <p:cSld>
     <p:spTree>
       <p:nvGrpSpPr>
-        <p:cNvPr id="135" name="Shape 135"/>
+        <p:cNvPr id="1" name="Shape 135"/>
         <p:cNvGrpSpPr/>
         <p:nvPr/>
       </p:nvGrpSpPr>
@@ -7369,58 +7554,10 @@
       </p:grpSpPr>
       <p:sp>
         <p:nvSpPr>
-          <p:cNvPr id="136" name="Google Shape;136;p23"/>
-          <p:cNvSpPr txBox="1"/>
-          <p:nvPr>
-            <p:ph idx="1" type="subTitle"/>
-          </p:nvPr>
-        </p:nvSpPr>
-        <p:spPr>
-          <a:xfrm>
-            <a:off x="311700" y="1926000"/>
-            <a:ext cx="8520600" cy="2848800"/>
-          </a:xfrm>
-          <a:prstGeom prst="rect">
-            <a:avLst/>
-          </a:prstGeom>
-        </p:spPr>
-        <p:txBody>
-          <a:bodyPr anchorCtr="0" anchor="t" bIns="91425" lIns="91425" spcFirstLastPara="1" rIns="91425" wrap="square" tIns="91425">
-            <a:normAutofit/>
-          </a:bodyPr>
-          <a:lstStyle/>
-          <a:p>
-            <a:pPr indent="0" lvl="0" marL="0" rtl="0" algn="l">
-              <a:spcBef>
-                <a:spcPts val="0"/>
-              </a:spcBef>
-              <a:spcAft>
-                <a:spcPts val="0"/>
-              </a:spcAft>
-              <a:buNone/>
-            </a:pPr>
-            <a:r>
-              <a:rPr lang="en-GB" sz="1300">
-                <a:latin typeface="Poppins"/>
-                <a:ea typeface="Poppins"/>
-                <a:cs typeface="Poppins"/>
-                <a:sym typeface="Poppins"/>
-              </a:rPr>
-              <a:t>Type here</a:t>
-            </a:r>
-            <a:endParaRPr sz="1300">
-              <a:latin typeface="Poppins"/>
-              <a:ea typeface="Poppins"/>
-              <a:cs typeface="Poppins"/>
-              <a:sym typeface="Poppins"/>
-            </a:endParaRPr>
-          </a:p>
-        </p:txBody>
-      </p:sp>
-      <p:sp>
-        <p:nvSpPr>
           <p:cNvPr id="137" name="Google Shape;137;p23"/>
-          <p:cNvSpPr txBox="1"/>
+          <p:cNvSpPr txBox="1">
+            <a:spLocks noGrp="1"/>
+          </p:cNvSpPr>
           <p:nvPr>
             <p:ph type="ctrTitle"/>
           </p:nvPr>
@@ -7435,12 +7572,12 @@
           </a:prstGeom>
         </p:spPr>
         <p:txBody>
-          <a:bodyPr anchorCtr="0" anchor="b" bIns="91425" lIns="91425" spcFirstLastPara="1" rIns="91425" wrap="square" tIns="91425">
+          <a:bodyPr spcFirstLastPara="1" wrap="square" lIns="91425" tIns="91425" rIns="91425" bIns="91425" anchor="b" anchorCtr="0">
             <a:normAutofit/>
           </a:bodyPr>
           <a:lstStyle/>
           <a:p>
-            <a:pPr indent="0" lvl="0" marL="0" rtl="0" algn="l">
+            <a:pPr marL="0" lvl="0" indent="0" algn="l" rtl="0">
               <a:spcBef>
                 <a:spcPts val="0"/>
               </a:spcBef>
@@ -7451,15 +7588,15 @@
               <a:buNone/>
             </a:pPr>
             <a:r>
-              <a:rPr b="1" lang="en-GB" sz="1620">
+              <a:rPr lang="en-GB" sz="1620" b="1" dirty="0">
                 <a:latin typeface="Poppins"/>
                 <a:ea typeface="Poppins"/>
                 <a:cs typeface="Poppins"/>
                 <a:sym typeface="Poppins"/>
               </a:rPr>
-              <a:t>Prototype Assets (Optional)</a:t>
-            </a:r>
-            <a:endParaRPr b="1" sz="1620">
+              <a:t>Prototype Assets</a:t>
+            </a:r>
+            <a:endParaRPr sz="1620" b="1" dirty="0">
               <a:latin typeface="Poppins"/>
               <a:ea typeface="Poppins"/>
               <a:cs typeface="Poppins"/>
@@ -7477,7 +7614,7 @@
         <p:spPr>
           <a:xfrm>
             <a:off x="311700" y="1192175"/>
-            <a:ext cx="8520600" cy="648000"/>
+            <a:ext cx="8520600" cy="680156"/>
           </a:xfrm>
           <a:prstGeom prst="rect">
             <a:avLst/>
@@ -7488,12 +7625,12 @@
           </a:ln>
         </p:spPr>
         <p:txBody>
-          <a:bodyPr anchorCtr="0" anchor="t" bIns="91425" lIns="91425" spcFirstLastPara="1" rIns="91425" wrap="square" tIns="91425">
+          <a:bodyPr spcFirstLastPara="1" wrap="square" lIns="91425" tIns="91425" rIns="91425" bIns="91425" anchor="t" anchorCtr="0">
             <a:spAutoFit/>
           </a:bodyPr>
           <a:lstStyle/>
           <a:p>
-            <a:pPr indent="-317500" lvl="0" marL="457200" rtl="0" algn="l">
+            <a:pPr marL="457200" lvl="0" indent="-317500" algn="l" rtl="0">
               <a:lnSpc>
                 <a:spcPct val="115000"/>
               </a:lnSpc>
@@ -7511,7 +7648,7 @@
               <a:buChar char="➔"/>
             </a:pPr>
             <a:r>
-              <a:rPr lang="en-GB">
+              <a:rPr lang="en-GB" dirty="0">
                 <a:solidFill>
                   <a:schemeClr val="dk1"/>
                 </a:solidFill>
@@ -7520,9 +7657,22 @@
                 <a:cs typeface="Poppins"/>
                 <a:sym typeface="Poppins"/>
               </a:rPr>
-              <a:t>GitHub Public Repository Link</a:t>
-            </a:r>
-            <a:endParaRPr>
+              <a:t>GitHub Public Repository – </a:t>
+            </a:r>
+            <a:r>
+              <a:rPr lang="en-GB" dirty="0" err="1">
+                <a:solidFill>
+                  <a:schemeClr val="dk1"/>
+                </a:solidFill>
+                <a:latin typeface="Poppins"/>
+                <a:ea typeface="Poppins"/>
+                <a:cs typeface="Poppins"/>
+                <a:sym typeface="Poppins"/>
+                <a:hlinkClick r:id="rId3"/>
+              </a:rPr>
+              <a:t>CurbAI</a:t>
+            </a:r>
+            <a:endParaRPr lang="en-GB" dirty="0">
               <a:solidFill>
                 <a:schemeClr val="dk1"/>
               </a:solidFill>
@@ -7533,7 +7683,7 @@
             </a:endParaRPr>
           </a:p>
           <a:p>
-            <a:pPr indent="-317500" lvl="0" marL="457200" rtl="0" algn="l">
+            <a:pPr marL="457200" lvl="0" indent="-317500" algn="l" rtl="0">
               <a:lnSpc>
                 <a:spcPct val="115000"/>
               </a:lnSpc>
@@ -7551,7 +7701,7 @@
               <a:buChar char="➔"/>
             </a:pPr>
             <a:r>
-              <a:rPr lang="en-GB">
+              <a:rPr lang="en-GB" dirty="0">
                 <a:solidFill>
                   <a:schemeClr val="dk1"/>
                 </a:solidFill>
@@ -7560,9 +7710,30 @@
                 <a:cs typeface="Poppins"/>
                 <a:sym typeface="Poppins"/>
               </a:rPr>
-              <a:t>Demo Video Link (Max: 3 Minutes)</a:t>
-            </a:r>
-            <a:endParaRPr/>
+              <a:t>Website Link – </a:t>
+            </a:r>
+            <a:r>
+              <a:rPr lang="en-GB" dirty="0" err="1">
+                <a:solidFill>
+                  <a:schemeClr val="dk1"/>
+                </a:solidFill>
+                <a:latin typeface="Poppins"/>
+                <a:ea typeface="Poppins"/>
+                <a:cs typeface="Poppins"/>
+                <a:sym typeface="Poppins"/>
+                <a:hlinkClick r:id="rId4"/>
+              </a:rPr>
+              <a:t>CurbAI</a:t>
+            </a:r>
+            <a:endParaRPr dirty="0">
+              <a:solidFill>
+                <a:schemeClr val="dk1"/>
+              </a:solidFill>
+              <a:latin typeface="Poppins"/>
+              <a:ea typeface="Poppins"/>
+              <a:cs typeface="Poppins"/>
+              <a:sym typeface="Poppins"/>
+            </a:endParaRPr>
           </a:p>
         </p:txBody>
       </p:sp>
@@ -7573,10 +7744,10 @@
           <p:nvPr/>
         </p:nvPicPr>
         <p:blipFill rotWithShape="1">
-          <a:blip r:embed="rId3">
+          <a:blip r:embed="rId5">
             <a:alphaModFix/>
           </a:blip>
-          <a:srcRect b="89082" l="0" r="0" t="0"/>
+          <a:srcRect b="89082"/>
           <a:stretch/>
         </p:blipFill>
         <p:spPr>
@@ -7600,10 +7771,10 @@
           <p:nvPr/>
         </p:nvPicPr>
         <p:blipFill rotWithShape="1">
-          <a:blip r:embed="rId4">
+          <a:blip r:embed="rId6">
             <a:alphaModFix/>
           </a:blip>
-          <a:srcRect b="0" l="0" r="0" t="98295"/>
+          <a:srcRect t="98295"/>
           <a:stretch/>
         </p:blipFill>
         <p:spPr>
@@ -7629,349 +7800,11 @@
 </file>
 
 <file path=ppt/slides/slide12.xml><?xml version="1.0" encoding="utf-8"?>
-<p:sld xmlns:a="http://schemas.openxmlformats.org/drawingml/2006/main" xmlns:r="http://schemas.openxmlformats.org/officeDocument/2006/relationships" xmlns:mc="http://schemas.openxmlformats.org/markup-compatibility/2006" xmlns:mv="urn:schemas-microsoft-com:mac:vml" xmlns:p="http://schemas.openxmlformats.org/presentationml/2006/main" xmlns:c="http://schemas.openxmlformats.org/drawingml/2006/chart" xmlns:dgm="http://schemas.openxmlformats.org/drawingml/2006/diagram" xmlns:o="urn:schemas-microsoft-com:office:office" xmlns:v="urn:schemas-microsoft-com:vml" xmlns:pvml="urn:schemas-microsoft-com:office:powerpoint" xmlns:com="http://schemas.openxmlformats.org/drawingml/2006/compatibility" xmlns:p14="http://schemas.microsoft.com/office/powerpoint/2010/main" xmlns:p15="http://schemas.microsoft.com/office/powerpoint/2012/main" xmlns:ahyp="http://schemas.microsoft.com/office/drawing/2018/hyperlinkcolor">
+<p:sld xmlns:a="http://schemas.openxmlformats.org/drawingml/2006/main" xmlns:r="http://schemas.openxmlformats.org/officeDocument/2006/relationships" xmlns:p="http://schemas.openxmlformats.org/presentationml/2006/main">
   <p:cSld>
     <p:spTree>
       <p:nvGrpSpPr>
-        <p:cNvPr id="144" name="Shape 144"/>
-        <p:cNvGrpSpPr/>
-        <p:nvPr/>
-      </p:nvGrpSpPr>
-      <p:grpSpPr>
-        <a:xfrm>
-          <a:off x="0" y="0"/>
-          <a:ext cx="0" cy="0"/>
-          <a:chOff x="0" y="0"/>
-          <a:chExt cx="0" cy="0"/>
-        </a:xfrm>
-      </p:grpSpPr>
-      <p:sp>
-        <p:nvSpPr>
-          <p:cNvPr id="145" name="Google Shape;145;p24"/>
-          <p:cNvSpPr txBox="1"/>
-          <p:nvPr>
-            <p:ph idx="1" type="subTitle"/>
-          </p:nvPr>
-        </p:nvSpPr>
-        <p:spPr>
-          <a:xfrm>
-            <a:off x="311700" y="1285750"/>
-            <a:ext cx="8520600" cy="3489000"/>
-          </a:xfrm>
-          <a:prstGeom prst="rect">
-            <a:avLst/>
-          </a:prstGeom>
-        </p:spPr>
-        <p:txBody>
-          <a:bodyPr anchorCtr="0" anchor="t" bIns="91425" lIns="91425" spcFirstLastPara="1" rIns="91425" wrap="square" tIns="91425">
-            <a:normAutofit/>
-          </a:bodyPr>
-          <a:lstStyle/>
-          <a:p>
-            <a:pPr indent="0" lvl="0" marL="0" rtl="0" algn="l">
-              <a:spcBef>
-                <a:spcPts val="0"/>
-              </a:spcBef>
-              <a:spcAft>
-                <a:spcPts val="0"/>
-              </a:spcAft>
-              <a:buNone/>
-            </a:pPr>
-            <a:r>
-              <a:rPr lang="en-GB" sz="1300">
-                <a:latin typeface="Poppins"/>
-                <a:ea typeface="Poppins"/>
-                <a:cs typeface="Poppins"/>
-                <a:sym typeface="Poppins"/>
-              </a:rPr>
-              <a:t>Type here</a:t>
-            </a:r>
-            <a:endParaRPr sz="1300">
-              <a:latin typeface="Poppins"/>
-              <a:ea typeface="Poppins"/>
-              <a:cs typeface="Poppins"/>
-              <a:sym typeface="Poppins"/>
-            </a:endParaRPr>
-          </a:p>
-        </p:txBody>
-      </p:sp>
-      <p:sp>
-        <p:nvSpPr>
-          <p:cNvPr id="146" name="Google Shape;146;p24"/>
-          <p:cNvSpPr txBox="1"/>
-          <p:nvPr>
-            <p:ph type="ctrTitle"/>
-          </p:nvPr>
-        </p:nvSpPr>
-        <p:spPr>
-          <a:xfrm>
-            <a:off x="311700" y="744575"/>
-            <a:ext cx="8520600" cy="447600"/>
-          </a:xfrm>
-          <a:prstGeom prst="rect">
-            <a:avLst/>
-          </a:prstGeom>
-        </p:spPr>
-        <p:txBody>
-          <a:bodyPr anchorCtr="0" anchor="b" bIns="91425" lIns="91425" spcFirstLastPara="1" rIns="91425" wrap="square" tIns="91425">
-            <a:normAutofit/>
-          </a:bodyPr>
-          <a:lstStyle/>
-          <a:p>
-            <a:pPr indent="0" lvl="0" marL="0" rtl="0" algn="l">
-              <a:spcBef>
-                <a:spcPts val="0"/>
-              </a:spcBef>
-              <a:spcAft>
-                <a:spcPts val="0"/>
-              </a:spcAft>
-              <a:buSzPts val="990"/>
-              <a:buNone/>
-            </a:pPr>
-            <a:r>
-              <a:rPr b="1" lang="en-GB" sz="1620">
-                <a:latin typeface="Poppins"/>
-                <a:ea typeface="Poppins"/>
-                <a:cs typeface="Poppins"/>
-                <a:sym typeface="Poppins"/>
-              </a:rPr>
-              <a:t>Add as per the requirements of the contest</a:t>
-            </a:r>
-            <a:endParaRPr b="1" sz="1620">
-              <a:latin typeface="Poppins"/>
-              <a:ea typeface="Poppins"/>
-              <a:cs typeface="Poppins"/>
-              <a:sym typeface="Poppins"/>
-            </a:endParaRPr>
-          </a:p>
-        </p:txBody>
-      </p:sp>
-      <p:pic>
-        <p:nvPicPr>
-          <p:cNvPr id="147" name="Google Shape;147;p24" title="AMD.PS.S22.png"/>
-          <p:cNvPicPr preferRelativeResize="0"/>
-          <p:nvPr/>
-        </p:nvPicPr>
-        <p:blipFill rotWithShape="1">
-          <a:blip r:embed="rId3">
-            <a:alphaModFix/>
-          </a:blip>
-          <a:srcRect b="89082" l="0" r="0" t="0"/>
-          <a:stretch/>
-        </p:blipFill>
-        <p:spPr>
-          <a:xfrm>
-            <a:off x="0" y="0"/>
-            <a:ext cx="9144000" cy="561524"/>
-          </a:xfrm>
-          <a:prstGeom prst="rect">
-            <a:avLst/>
-          </a:prstGeom>
-          <a:noFill/>
-          <a:ln>
-            <a:noFill/>
-          </a:ln>
-        </p:spPr>
-      </p:pic>
-      <p:pic>
-        <p:nvPicPr>
-          <p:cNvPr id="148" name="Google Shape;148;p24" title="AMD.PS.S11.png"/>
-          <p:cNvPicPr preferRelativeResize="0"/>
-          <p:nvPr/>
-        </p:nvPicPr>
-        <p:blipFill rotWithShape="1">
-          <a:blip r:embed="rId4">
-            <a:alphaModFix/>
-          </a:blip>
-          <a:srcRect b="0" l="0" r="0" t="98295"/>
-          <a:stretch/>
-        </p:blipFill>
-        <p:spPr>
-          <a:xfrm>
-            <a:off x="0" y="5055825"/>
-            <a:ext cx="9144000" cy="87674"/>
-          </a:xfrm>
-          <a:prstGeom prst="rect">
-            <a:avLst/>
-          </a:prstGeom>
-          <a:noFill/>
-          <a:ln>
-            <a:noFill/>
-          </a:ln>
-        </p:spPr>
-      </p:pic>
-    </p:spTree>
-  </p:cSld>
-  <p:clrMapOvr>
-    <a:masterClrMapping/>
-  </p:clrMapOvr>
-</p:sld>
-</file>
-
-<file path=ppt/slides/slide13.xml><?xml version="1.0" encoding="utf-8"?>
-<p:sld xmlns:a="http://schemas.openxmlformats.org/drawingml/2006/main" xmlns:r="http://schemas.openxmlformats.org/officeDocument/2006/relationships" xmlns:mc="http://schemas.openxmlformats.org/markup-compatibility/2006" xmlns:mv="urn:schemas-microsoft-com:mac:vml" xmlns:p="http://schemas.openxmlformats.org/presentationml/2006/main" xmlns:c="http://schemas.openxmlformats.org/drawingml/2006/chart" xmlns:dgm="http://schemas.openxmlformats.org/drawingml/2006/diagram" xmlns:o="urn:schemas-microsoft-com:office:office" xmlns:v="urn:schemas-microsoft-com:vml" xmlns:pvml="urn:schemas-microsoft-com:office:powerpoint" xmlns:com="http://schemas.openxmlformats.org/drawingml/2006/compatibility" xmlns:p14="http://schemas.microsoft.com/office/powerpoint/2010/main" xmlns:p15="http://schemas.microsoft.com/office/powerpoint/2012/main" xmlns:ahyp="http://schemas.microsoft.com/office/drawing/2018/hyperlinkcolor">
-  <p:cSld>
-    <p:spTree>
-      <p:nvGrpSpPr>
-        <p:cNvPr id="152" name="Shape 152"/>
-        <p:cNvGrpSpPr/>
-        <p:nvPr/>
-      </p:nvGrpSpPr>
-      <p:grpSpPr>
-        <a:xfrm>
-          <a:off x="0" y="0"/>
-          <a:ext cx="0" cy="0"/>
-          <a:chOff x="0" y="0"/>
-          <a:chExt cx="0" cy="0"/>
-        </a:xfrm>
-      </p:grpSpPr>
-      <p:pic>
-        <p:nvPicPr>
-          <p:cNvPr id="153" name="Google Shape;153;p25" title="AMD.PS.S22.png"/>
-          <p:cNvPicPr preferRelativeResize="0"/>
-          <p:nvPr/>
-        </p:nvPicPr>
-        <p:blipFill rotWithShape="1">
-          <a:blip r:embed="rId3">
-            <a:alphaModFix/>
-          </a:blip>
-          <a:srcRect b="89082" l="0" r="0" t="0"/>
-          <a:stretch/>
-        </p:blipFill>
-        <p:spPr>
-          <a:xfrm>
-            <a:off x="0" y="0"/>
-            <a:ext cx="9144000" cy="561524"/>
-          </a:xfrm>
-          <a:prstGeom prst="rect">
-            <a:avLst/>
-          </a:prstGeom>
-          <a:noFill/>
-          <a:ln>
-            <a:noFill/>
-          </a:ln>
-        </p:spPr>
-      </p:pic>
-      <p:pic>
-        <p:nvPicPr>
-          <p:cNvPr id="154" name="Google Shape;154;p25" title="AMD.PS.S11.png"/>
-          <p:cNvPicPr preferRelativeResize="0"/>
-          <p:nvPr/>
-        </p:nvPicPr>
-        <p:blipFill rotWithShape="1">
-          <a:blip r:embed="rId4">
-            <a:alphaModFix/>
-          </a:blip>
-          <a:srcRect b="0" l="0" r="0" t="98295"/>
-          <a:stretch/>
-        </p:blipFill>
-        <p:spPr>
-          <a:xfrm>
-            <a:off x="0" y="5055825"/>
-            <a:ext cx="9144000" cy="87674"/>
-          </a:xfrm>
-          <a:prstGeom prst="rect">
-            <a:avLst/>
-          </a:prstGeom>
-          <a:noFill/>
-          <a:ln>
-            <a:noFill/>
-          </a:ln>
-        </p:spPr>
-      </p:pic>
-    </p:spTree>
-  </p:cSld>
-  <p:clrMapOvr>
-    <a:masterClrMapping/>
-  </p:clrMapOvr>
-</p:sld>
-</file>
-
-<file path=ppt/slides/slide14.xml><?xml version="1.0" encoding="utf-8"?>
-<p:sld xmlns:a="http://schemas.openxmlformats.org/drawingml/2006/main" xmlns:r="http://schemas.openxmlformats.org/officeDocument/2006/relationships" xmlns:mc="http://schemas.openxmlformats.org/markup-compatibility/2006" xmlns:mv="urn:schemas-microsoft-com:mac:vml" xmlns:p="http://schemas.openxmlformats.org/presentationml/2006/main" xmlns:c="http://schemas.openxmlformats.org/drawingml/2006/chart" xmlns:dgm="http://schemas.openxmlformats.org/drawingml/2006/diagram" xmlns:o="urn:schemas-microsoft-com:office:office" xmlns:v="urn:schemas-microsoft-com:vml" xmlns:pvml="urn:schemas-microsoft-com:office:powerpoint" xmlns:com="http://schemas.openxmlformats.org/drawingml/2006/compatibility" xmlns:p14="http://schemas.microsoft.com/office/powerpoint/2010/main" xmlns:p15="http://schemas.microsoft.com/office/powerpoint/2012/main" xmlns:ahyp="http://schemas.microsoft.com/office/drawing/2018/hyperlinkcolor">
-  <p:cSld>
-    <p:spTree>
-      <p:nvGrpSpPr>
-        <p:cNvPr id="158" name="Shape 158"/>
-        <p:cNvGrpSpPr/>
-        <p:nvPr/>
-      </p:nvGrpSpPr>
-      <p:grpSpPr>
-        <a:xfrm>
-          <a:off x="0" y="0"/>
-          <a:ext cx="0" cy="0"/>
-          <a:chOff x="0" y="0"/>
-          <a:chExt cx="0" cy="0"/>
-        </a:xfrm>
-      </p:grpSpPr>
-      <p:pic>
-        <p:nvPicPr>
-          <p:cNvPr id="159" name="Google Shape;159;p26" title="AMD.PS.S22.png"/>
-          <p:cNvPicPr preferRelativeResize="0"/>
-          <p:nvPr/>
-        </p:nvPicPr>
-        <p:blipFill rotWithShape="1">
-          <a:blip r:embed="rId3">
-            <a:alphaModFix/>
-          </a:blip>
-          <a:srcRect b="89082" l="0" r="0" t="0"/>
-          <a:stretch/>
-        </p:blipFill>
-        <p:spPr>
-          <a:xfrm>
-            <a:off x="0" y="0"/>
-            <a:ext cx="9144000" cy="561524"/>
-          </a:xfrm>
-          <a:prstGeom prst="rect">
-            <a:avLst/>
-          </a:prstGeom>
-          <a:noFill/>
-          <a:ln>
-            <a:noFill/>
-          </a:ln>
-        </p:spPr>
-      </p:pic>
-      <p:pic>
-        <p:nvPicPr>
-          <p:cNvPr id="160" name="Google Shape;160;p26" title="AMD.PS.S11.png"/>
-          <p:cNvPicPr preferRelativeResize="0"/>
-          <p:nvPr/>
-        </p:nvPicPr>
-        <p:blipFill rotWithShape="1">
-          <a:blip r:embed="rId4">
-            <a:alphaModFix/>
-          </a:blip>
-          <a:srcRect b="0" l="0" r="0" t="98295"/>
-          <a:stretch/>
-        </p:blipFill>
-        <p:spPr>
-          <a:xfrm>
-            <a:off x="0" y="5055825"/>
-            <a:ext cx="9144000" cy="87674"/>
-          </a:xfrm>
-          <a:prstGeom prst="rect">
-            <a:avLst/>
-          </a:prstGeom>
-          <a:noFill/>
-          <a:ln>
-            <a:noFill/>
-          </a:ln>
-        </p:spPr>
-      </p:pic>
-    </p:spTree>
-  </p:cSld>
-  <p:clrMapOvr>
-    <a:masterClrMapping/>
-  </p:clrMapOvr>
-</p:sld>
-</file>
-
-<file path=ppt/slides/slide15.xml><?xml version="1.0" encoding="utf-8"?>
-<p:sld xmlns:a="http://schemas.openxmlformats.org/drawingml/2006/main" xmlns:r="http://schemas.openxmlformats.org/officeDocument/2006/relationships" xmlns:mc="http://schemas.openxmlformats.org/markup-compatibility/2006" xmlns:mv="urn:schemas-microsoft-com:mac:vml" xmlns:p="http://schemas.openxmlformats.org/presentationml/2006/main" xmlns:c="http://schemas.openxmlformats.org/drawingml/2006/chart" xmlns:dgm="http://schemas.openxmlformats.org/drawingml/2006/diagram" xmlns:o="urn:schemas-microsoft-com:office:office" xmlns:v="urn:schemas-microsoft-com:vml" xmlns:pvml="urn:schemas-microsoft-com:office:powerpoint" xmlns:com="http://schemas.openxmlformats.org/drawingml/2006/compatibility" xmlns:p14="http://schemas.microsoft.com/office/powerpoint/2010/main" xmlns:p15="http://schemas.microsoft.com/office/powerpoint/2012/main" xmlns:ahyp="http://schemas.microsoft.com/office/drawing/2018/hyperlinkcolor">
-  <p:cSld>
-    <p:spTree>
-      <p:nvGrpSpPr>
-        <p:cNvPr id="164" name="Shape 164"/>
+        <p:cNvPr id="1" name="Shape 164"/>
         <p:cNvGrpSpPr/>
         <p:nvPr/>
       </p:nvGrpSpPr>
@@ -7986,7 +7819,9 @@
       <p:sp>
         <p:nvSpPr>
           <p:cNvPr id="165" name="Google Shape;165;p27"/>
-          <p:cNvSpPr txBox="1"/>
+          <p:cNvSpPr txBox="1">
+            <a:spLocks noGrp="1"/>
+          </p:cNvSpPr>
           <p:nvPr>
             <p:ph type="ctrTitle"/>
           </p:nvPr>
@@ -8001,12 +7836,12 @@
           </a:prstGeom>
         </p:spPr>
         <p:txBody>
-          <a:bodyPr anchorCtr="0" anchor="b" bIns="91425" lIns="91425" spcFirstLastPara="1" rIns="91425" wrap="square" tIns="91425">
+          <a:bodyPr spcFirstLastPara="1" wrap="square" lIns="91425" tIns="91425" rIns="91425" bIns="91425" anchor="b" anchorCtr="0">
             <a:normAutofit/>
           </a:bodyPr>
           <a:lstStyle/>
           <a:p>
-            <a:pPr indent="0" lvl="0" marL="0" rtl="0" algn="ctr">
+            <a:pPr marL="0" lvl="0" indent="0" algn="ctr" rtl="0">
               <a:spcBef>
                 <a:spcPts val="0"/>
               </a:spcBef>
@@ -8015,9 +7850,6 @@
               </a:spcAft>
               <a:buNone/>
             </a:pPr>
-            <a:r>
-              <a:t/>
-            </a:r>
             <a:endParaRPr/>
           </a:p>
         </p:txBody>
@@ -8025,9 +7857,11 @@
       <p:sp>
         <p:nvSpPr>
           <p:cNvPr id="166" name="Google Shape;166;p27"/>
-          <p:cNvSpPr txBox="1"/>
+          <p:cNvSpPr txBox="1">
+            <a:spLocks noGrp="1"/>
+          </p:cNvSpPr>
           <p:nvPr>
-            <p:ph idx="1" type="subTitle"/>
+            <p:ph type="subTitle" idx="1"/>
           </p:nvPr>
         </p:nvSpPr>
         <p:spPr>
@@ -8040,12 +7874,12 @@
           </a:prstGeom>
         </p:spPr>
         <p:txBody>
-          <a:bodyPr anchorCtr="0" anchor="t" bIns="91425" lIns="91425" spcFirstLastPara="1" rIns="91425" wrap="square" tIns="91425">
+          <a:bodyPr spcFirstLastPara="1" wrap="square" lIns="91425" tIns="91425" rIns="91425" bIns="91425" anchor="t" anchorCtr="0">
             <a:normAutofit/>
           </a:bodyPr>
           <a:lstStyle/>
           <a:p>
-            <a:pPr indent="0" lvl="0" marL="0" rtl="0" algn="ctr">
+            <a:pPr marL="0" lvl="0" indent="0" algn="ctr" rtl="0">
               <a:spcBef>
                 <a:spcPts val="0"/>
               </a:spcBef>
@@ -8054,9 +7888,6 @@
               </a:spcAft>
               <a:buNone/>
             </a:pPr>
-            <a:r>
-              <a:t/>
-            </a:r>
             <a:endParaRPr/>
           </a:p>
         </p:txBody>
@@ -8071,7 +7902,7 @@
           <a:blip r:embed="rId3">
             <a:alphaModFix/>
           </a:blip>
-          <a:srcRect b="0" l="0" r="0" t="0"/>
+          <a:srcRect/>
           <a:stretch/>
         </p:blipFill>
         <p:spPr>
@@ -8097,11 +7928,11 @@
 </file>
 
 <file path=ppt/slides/slide2.xml><?xml version="1.0" encoding="utf-8"?>
-<p:sld xmlns:a="http://schemas.openxmlformats.org/drawingml/2006/main" xmlns:r="http://schemas.openxmlformats.org/officeDocument/2006/relationships" xmlns:mc="http://schemas.openxmlformats.org/markup-compatibility/2006" xmlns:mv="urn:schemas-microsoft-com:mac:vml" xmlns:p="http://schemas.openxmlformats.org/presentationml/2006/main" xmlns:c="http://schemas.openxmlformats.org/drawingml/2006/chart" xmlns:dgm="http://schemas.openxmlformats.org/drawingml/2006/diagram" xmlns:o="urn:schemas-microsoft-com:office:office" xmlns:v="urn:schemas-microsoft-com:vml" xmlns:pvml="urn:schemas-microsoft-com:office:powerpoint" xmlns:com="http://schemas.openxmlformats.org/drawingml/2006/compatibility" xmlns:p14="http://schemas.microsoft.com/office/powerpoint/2010/main" xmlns:p15="http://schemas.microsoft.com/office/powerpoint/2012/main" xmlns:ahyp="http://schemas.microsoft.com/office/drawing/2018/hyperlinkcolor">
+<p:sld xmlns:a="http://schemas.openxmlformats.org/drawingml/2006/main" xmlns:r="http://schemas.openxmlformats.org/officeDocument/2006/relationships" xmlns:p="http://schemas.openxmlformats.org/presentationml/2006/main">
   <p:cSld>
     <p:spTree>
       <p:nvGrpSpPr>
-        <p:cNvPr id="62" name="Shape 62"/>
+        <p:cNvPr id="1" name="Shape 62"/>
         <p:cNvGrpSpPr/>
         <p:nvPr/>
       </p:nvGrpSpPr>
@@ -8116,14 +7947,16 @@
       <p:sp>
         <p:nvSpPr>
           <p:cNvPr id="63" name="Google Shape;63;p14"/>
-          <p:cNvSpPr txBox="1"/>
+          <p:cNvSpPr txBox="1">
+            <a:spLocks noGrp="1"/>
+          </p:cNvSpPr>
           <p:nvPr>
             <p:ph type="ctrTitle"/>
           </p:nvPr>
         </p:nvSpPr>
         <p:spPr>
           <a:xfrm>
-            <a:off x="311700" y="744575"/>
+            <a:off x="311700" y="648146"/>
             <a:ext cx="8520600" cy="447600"/>
           </a:xfrm>
           <a:prstGeom prst="rect">
@@ -8131,12 +7964,12 @@
           </a:prstGeom>
         </p:spPr>
         <p:txBody>
-          <a:bodyPr anchorCtr="0" anchor="b" bIns="91425" lIns="91425" spcFirstLastPara="1" rIns="91425" wrap="square" tIns="91425">
+          <a:bodyPr spcFirstLastPara="1" wrap="square" lIns="91425" tIns="91425" rIns="91425" bIns="91425" anchor="b" anchorCtr="0">
             <a:normAutofit/>
           </a:bodyPr>
           <a:lstStyle/>
           <a:p>
-            <a:pPr indent="0" lvl="0" marL="0" rtl="0" algn="l">
+            <a:pPr marL="0" lvl="0" indent="0" algn="l" rtl="0">
               <a:spcBef>
                 <a:spcPts val="0"/>
               </a:spcBef>
@@ -8147,7 +7980,7 @@
               <a:buNone/>
             </a:pPr>
             <a:r>
-              <a:rPr b="1" lang="en-GB" sz="1620">
+              <a:rPr lang="en-GB" sz="1620" b="1" dirty="0">
                 <a:latin typeface="Poppins"/>
                 <a:ea typeface="Poppins"/>
                 <a:cs typeface="Poppins"/>
@@ -8155,7 +7988,7 @@
               </a:rPr>
               <a:t>Brief about the idea</a:t>
             </a:r>
-            <a:endParaRPr b="1" sz="1620">
+            <a:endParaRPr sz="1620" b="1" dirty="0">
               <a:latin typeface="Poppins"/>
               <a:ea typeface="Poppins"/>
               <a:cs typeface="Poppins"/>
@@ -8167,50 +8000,388 @@
       <p:sp>
         <p:nvSpPr>
           <p:cNvPr id="64" name="Google Shape;64;p14"/>
-          <p:cNvSpPr txBox="1"/>
+          <p:cNvSpPr txBox="1">
+            <a:spLocks noGrp="1"/>
+          </p:cNvSpPr>
           <p:nvPr>
-            <p:ph idx="1" type="subTitle"/>
+            <p:ph type="subTitle" idx="1"/>
           </p:nvPr>
         </p:nvSpPr>
         <p:spPr>
           <a:xfrm>
-            <a:off x="311700" y="1249775"/>
-            <a:ext cx="8520600" cy="3525000"/>
+            <a:off x="311700" y="1113202"/>
+            <a:ext cx="8520600" cy="3701367"/>
           </a:xfrm>
           <a:prstGeom prst="rect">
             <a:avLst/>
           </a:prstGeom>
         </p:spPr>
         <p:txBody>
-          <a:bodyPr anchorCtr="0" anchor="t" bIns="91425" lIns="91425" spcFirstLastPara="1" rIns="91425" wrap="square" tIns="91425">
-            <a:normAutofit/>
+          <a:bodyPr spcFirstLastPara="1" wrap="square" lIns="91425" tIns="91425" rIns="91425" bIns="91425" anchor="t" anchorCtr="0">
+            <a:normAutofit lnSpcReduction="10000"/>
           </a:bodyPr>
           <a:lstStyle/>
           <a:p>
-            <a:pPr indent="0" lvl="0" marL="0" rtl="0" algn="l">
-              <a:spcBef>
-                <a:spcPts val="0"/>
-              </a:spcBef>
-              <a:spcAft>
-                <a:spcPts val="0"/>
-              </a:spcAft>
-              <a:buNone/>
+            <a:pPr algn="l"/>
+            <a:r>
+              <a:rPr lang="en-US" sz="1200" dirty="0">
+                <a:solidFill>
+                  <a:schemeClr val="tx1"/>
+                </a:solidFill>
+                <a:latin typeface="Poppins" panose="00000500000000000000" pitchFamily="2" charset="0"/>
+                <a:cs typeface="Poppins" panose="00000500000000000000" pitchFamily="2" charset="0"/>
+              </a:rPr>
+              <a:t>Organizations struggle with:</a:t>
+            </a:r>
+          </a:p>
+          <a:p>
+            <a:pPr marL="114300" indent="0" algn="l"/>
+            <a:endParaRPr lang="en-US" sz="900" b="1" dirty="0">
+              <a:solidFill>
+                <a:schemeClr val="tx1"/>
+              </a:solidFill>
+              <a:latin typeface="Poppins" panose="00000500000000000000" pitchFamily="2" charset="0"/>
+              <a:cs typeface="Poppins" panose="00000500000000000000" pitchFamily="2" charset="0"/>
+            </a:endParaRPr>
+          </a:p>
+          <a:p>
+            <a:pPr marL="114300" indent="0" algn="l"/>
+            <a:r>
+              <a:rPr lang="en-US" sz="1200" b="1" dirty="0">
+                <a:solidFill>
+                  <a:schemeClr val="tx1"/>
+                </a:solidFill>
+                <a:latin typeface="Poppins" panose="00000500000000000000" pitchFamily="2" charset="0"/>
+                <a:cs typeface="Poppins" panose="00000500000000000000" pitchFamily="2" charset="0"/>
+              </a:rPr>
+              <a:t>Insider threats</a:t>
+            </a:r>
+            <a:r>
+              <a:rPr lang="en-US" sz="1200" dirty="0">
+                <a:solidFill>
+                  <a:schemeClr val="tx1"/>
+                </a:solidFill>
+                <a:latin typeface="Poppins" panose="00000500000000000000" pitchFamily="2" charset="0"/>
+                <a:cs typeface="Poppins" panose="00000500000000000000" pitchFamily="2" charset="0"/>
+              </a:rPr>
+              <a:t> going undetected until damage is done</a:t>
+            </a:r>
+          </a:p>
+          <a:p>
+            <a:pPr marL="114300" indent="0" algn="l"/>
+            <a:r>
+              <a:rPr lang="en-US" sz="1200" b="1" dirty="0">
+                <a:solidFill>
+                  <a:schemeClr val="tx1"/>
+                </a:solidFill>
+                <a:latin typeface="Poppins" panose="00000500000000000000" pitchFamily="2" charset="0"/>
+                <a:cs typeface="Poppins" panose="00000500000000000000" pitchFamily="2" charset="0"/>
+              </a:rPr>
+              <a:t>Unproductive work patterns</a:t>
+            </a:r>
+            <a:r>
+              <a:rPr lang="en-US" sz="1200" dirty="0">
+                <a:solidFill>
+                  <a:schemeClr val="tx1"/>
+                </a:solidFill>
+                <a:latin typeface="Poppins" panose="00000500000000000000" pitchFamily="2" charset="0"/>
+                <a:cs typeface="Poppins" panose="00000500000000000000" pitchFamily="2" charset="0"/>
+              </a:rPr>
+              <a:t> draining team efficiency without visibility</a:t>
+            </a:r>
+          </a:p>
+          <a:p>
+            <a:pPr marL="114300" indent="0" algn="l"/>
+            <a:r>
+              <a:rPr lang="en-US" sz="1200" b="1" dirty="0">
+                <a:solidFill>
+                  <a:schemeClr val="tx1"/>
+                </a:solidFill>
+                <a:latin typeface="Poppins" panose="00000500000000000000" pitchFamily="2" charset="0"/>
+                <a:cs typeface="Poppins" panose="00000500000000000000" pitchFamily="2" charset="0"/>
+              </a:rPr>
+              <a:t>Manual security monitoring</a:t>
+            </a:r>
+            <a:r>
+              <a:rPr lang="en-US" sz="1200" dirty="0">
+                <a:solidFill>
+                  <a:schemeClr val="tx1"/>
+                </a:solidFill>
+                <a:latin typeface="Poppins" panose="00000500000000000000" pitchFamily="2" charset="0"/>
+                <a:cs typeface="Poppins" panose="00000500000000000000" pitchFamily="2" charset="0"/>
+              </a:rPr>
+              <a:t> that cannot scale with remote work</a:t>
+            </a:r>
+          </a:p>
+          <a:p>
+            <a:pPr marL="114300" indent="0" algn="l"/>
+            <a:r>
+              <a:rPr lang="en-US" sz="1200" b="1" dirty="0">
+                <a:solidFill>
+                  <a:schemeClr val="tx1"/>
+                </a:solidFill>
+                <a:latin typeface="Poppins" panose="00000500000000000000" pitchFamily="2" charset="0"/>
+                <a:cs typeface="Poppins" panose="00000500000000000000" pitchFamily="2" charset="0"/>
+              </a:rPr>
+              <a:t>Zero visibility</a:t>
+            </a:r>
+            <a:r>
+              <a:rPr lang="en-US" sz="1200" dirty="0">
+                <a:solidFill>
+                  <a:schemeClr val="tx1"/>
+                </a:solidFill>
+                <a:latin typeface="Poppins" panose="00000500000000000000" pitchFamily="2" charset="0"/>
+                <a:cs typeface="Poppins" panose="00000500000000000000" pitchFamily="2" charset="0"/>
+              </a:rPr>
+              <a:t> into browser-based activities where 80% of work happens</a:t>
+            </a:r>
+          </a:p>
+          <a:p>
+            <a:pPr marL="571500" indent="-457200" algn="l">
+              <a:buFont typeface="Arial" panose="020B0604020202020204" pitchFamily="34" charset="0"/>
+              <a:buChar char="•"/>
             </a:pPr>
-            <a:r>
-              <a:rPr lang="en-GB" sz="1300">
-                <a:latin typeface="Poppins"/>
-                <a:ea typeface="Poppins"/>
-                <a:cs typeface="Poppins"/>
-                <a:sym typeface="Poppins"/>
-              </a:rPr>
-              <a:t>Type here</a:t>
-            </a:r>
-            <a:endParaRPr sz="1300">
-              <a:latin typeface="Poppins"/>
-              <a:ea typeface="Poppins"/>
-              <a:cs typeface="Poppins"/>
-              <a:sym typeface="Poppins"/>
+            <a:endParaRPr lang="en-US" sz="1200" dirty="0">
+              <a:solidFill>
+                <a:schemeClr val="tx1"/>
+              </a:solidFill>
+              <a:latin typeface="Poppins" panose="00000500000000000000" pitchFamily="2" charset="0"/>
+              <a:cs typeface="Poppins" panose="00000500000000000000" pitchFamily="2" charset="0"/>
             </a:endParaRPr>
+          </a:p>
+          <a:p>
+            <a:pPr algn="l"/>
+            <a:r>
+              <a:rPr lang="en-US" sz="1200" dirty="0">
+                <a:solidFill>
+                  <a:schemeClr val="tx1"/>
+                </a:solidFill>
+                <a:latin typeface="Poppins" panose="00000500000000000000" pitchFamily="2" charset="0"/>
+                <a:cs typeface="Poppins" panose="00000500000000000000" pitchFamily="2" charset="0"/>
+              </a:rPr>
+              <a:t>Our Solution: </a:t>
+            </a:r>
+            <a:r>
+              <a:rPr lang="en-US" sz="1200" dirty="0" err="1">
+                <a:solidFill>
+                  <a:schemeClr val="tx1"/>
+                </a:solidFill>
+                <a:latin typeface="Poppins" panose="00000500000000000000" pitchFamily="2" charset="0"/>
+                <a:cs typeface="Poppins" panose="00000500000000000000" pitchFamily="2" charset="0"/>
+              </a:rPr>
+              <a:t>CurbAI</a:t>
+            </a:r>
+            <a:r>
+              <a:rPr lang="en-US" sz="1200" dirty="0">
+                <a:solidFill>
+                  <a:schemeClr val="tx1"/>
+                </a:solidFill>
+                <a:latin typeface="Poppins" panose="00000500000000000000" pitchFamily="2" charset="0"/>
+                <a:cs typeface="Poppins" panose="00000500000000000000" pitchFamily="2" charset="0"/>
+              </a:rPr>
+              <a:t> (Browser Edition)</a:t>
+            </a:r>
+          </a:p>
+          <a:p>
+            <a:pPr algn="l"/>
+            <a:endParaRPr lang="en-US" sz="800" dirty="0">
+              <a:solidFill>
+                <a:schemeClr val="tx1"/>
+              </a:solidFill>
+              <a:latin typeface="Poppins" panose="00000500000000000000" pitchFamily="2" charset="0"/>
+              <a:cs typeface="Poppins" panose="00000500000000000000" pitchFamily="2" charset="0"/>
+            </a:endParaRPr>
+          </a:p>
+          <a:p>
+            <a:pPr algn="l"/>
+            <a:r>
+              <a:rPr lang="en-US" sz="1200" dirty="0">
+                <a:solidFill>
+                  <a:schemeClr val="tx1"/>
+                </a:solidFill>
+                <a:latin typeface="Poppins" panose="00000500000000000000" pitchFamily="2" charset="0"/>
+                <a:cs typeface="Poppins" panose="00000500000000000000" pitchFamily="2" charset="0"/>
+              </a:rPr>
+              <a:t>An </a:t>
+            </a:r>
+            <a:r>
+              <a:rPr lang="en-US" sz="1200" b="1" dirty="0">
+                <a:solidFill>
+                  <a:schemeClr val="tx1"/>
+                </a:solidFill>
+                <a:latin typeface="Poppins" panose="00000500000000000000" pitchFamily="2" charset="0"/>
+                <a:cs typeface="Poppins" panose="00000500000000000000" pitchFamily="2" charset="0"/>
+              </a:rPr>
+              <a:t>AI-powered behavioral intelligence platform</a:t>
+            </a:r>
+            <a:r>
+              <a:rPr lang="en-US" sz="1200" dirty="0">
+                <a:solidFill>
+                  <a:schemeClr val="tx1"/>
+                </a:solidFill>
+                <a:latin typeface="Poppins" panose="00000500000000000000" pitchFamily="2" charset="0"/>
+                <a:cs typeface="Poppins" panose="00000500000000000000" pitchFamily="2" charset="0"/>
+              </a:rPr>
+              <a:t> that monitors browser activity through a lightweight Chrome extension, detects anomalies using machine learning, and uses AI agents to reason about risks before presenting human-readable decisions to qualified approvers.</a:t>
+            </a:r>
+          </a:p>
+          <a:p>
+            <a:pPr algn="l"/>
+            <a:endParaRPr lang="en-US" sz="1200" b="1" dirty="0">
+              <a:solidFill>
+                <a:schemeClr val="tx1"/>
+              </a:solidFill>
+              <a:latin typeface="Poppins" panose="00000500000000000000" pitchFamily="2" charset="0"/>
+              <a:cs typeface="Poppins" panose="00000500000000000000" pitchFamily="2" charset="0"/>
+            </a:endParaRPr>
+          </a:p>
+          <a:p>
+            <a:pPr algn="l"/>
+            <a:r>
+              <a:rPr lang="en-US" sz="1200" b="1" dirty="0">
+                <a:solidFill>
+                  <a:schemeClr val="tx1"/>
+                </a:solidFill>
+                <a:latin typeface="Poppins" panose="00000500000000000000" pitchFamily="2" charset="0"/>
+                <a:cs typeface="Poppins" panose="00000500000000000000" pitchFamily="2" charset="0"/>
+              </a:rPr>
+              <a:t>Core Innovation:</a:t>
+            </a:r>
+            <a:r>
+              <a:rPr lang="en-US" sz="1200" dirty="0">
+                <a:solidFill>
+                  <a:schemeClr val="tx1"/>
+                </a:solidFill>
+                <a:latin typeface="Poppins" panose="00000500000000000000" pitchFamily="2" charset="0"/>
+                <a:cs typeface="Poppins" panose="00000500000000000000" pitchFamily="2" charset="0"/>
+              </a:rPr>
+              <a:t> Hybrid human-AI decision making — AI reasons, humans approve, system executes.</a:t>
+            </a:r>
+          </a:p>
+          <a:p>
+            <a:pPr algn="l"/>
+            <a:endParaRPr lang="en-US" sz="1200" dirty="0">
+              <a:solidFill>
+                <a:schemeClr val="tx1"/>
+              </a:solidFill>
+              <a:latin typeface="Poppins" panose="00000500000000000000" pitchFamily="2" charset="0"/>
+              <a:cs typeface="Poppins" panose="00000500000000000000" pitchFamily="2" charset="0"/>
+            </a:endParaRPr>
+          </a:p>
+          <a:p>
+            <a:pPr algn="l"/>
+            <a:r>
+              <a:rPr lang="en-US" sz="1200" dirty="0">
+                <a:solidFill>
+                  <a:schemeClr val="tx1"/>
+                </a:solidFill>
+                <a:latin typeface="Poppins" panose="00000500000000000000" pitchFamily="2" charset="0"/>
+                <a:cs typeface="Poppins" panose="00000500000000000000" pitchFamily="2" charset="0"/>
+              </a:rPr>
+              <a:t>Key Value Proposition</a:t>
+            </a:r>
+          </a:p>
+          <a:p>
+            <a:pPr algn="l"/>
+            <a:endParaRPr lang="en-US" sz="900" dirty="0">
+              <a:solidFill>
+                <a:schemeClr val="tx1"/>
+              </a:solidFill>
+              <a:latin typeface="Poppins" panose="00000500000000000000" pitchFamily="2" charset="0"/>
+              <a:cs typeface="Poppins" panose="00000500000000000000" pitchFamily="2" charset="0"/>
+            </a:endParaRPr>
+          </a:p>
+          <a:p>
+            <a:pPr algn="l"/>
+            <a:r>
+              <a:rPr lang="en-US" sz="1200" b="1" dirty="0">
+                <a:solidFill>
+                  <a:schemeClr val="tx1"/>
+                </a:solidFill>
+                <a:latin typeface="Poppins" panose="00000500000000000000" pitchFamily="2" charset="0"/>
+                <a:cs typeface="Poppins" panose="00000500000000000000" pitchFamily="2" charset="0"/>
+              </a:rPr>
+              <a:t>Proactive threat detection</a:t>
+            </a:r>
+            <a:r>
+              <a:rPr lang="en-US" sz="1200" dirty="0">
+                <a:solidFill>
+                  <a:schemeClr val="tx1"/>
+                </a:solidFill>
+                <a:latin typeface="Poppins" panose="00000500000000000000" pitchFamily="2" charset="0"/>
+                <a:cs typeface="Poppins" panose="00000500000000000000" pitchFamily="2" charset="0"/>
+              </a:rPr>
+              <a:t> — Catch insider threats and risky behavior before damage occurs</a:t>
+            </a:r>
+          </a:p>
+          <a:p>
+            <a:pPr algn="l"/>
+            <a:r>
+              <a:rPr lang="en-US" sz="1200" b="1" dirty="0">
+                <a:solidFill>
+                  <a:schemeClr val="tx1"/>
+                </a:solidFill>
+                <a:latin typeface="Poppins" panose="00000500000000000000" pitchFamily="2" charset="0"/>
+                <a:cs typeface="Poppins" panose="00000500000000000000" pitchFamily="2" charset="0"/>
+              </a:rPr>
+              <a:t>Productivity intelligence</a:t>
+            </a:r>
+            <a:r>
+              <a:rPr lang="en-US" sz="1200" dirty="0">
+                <a:solidFill>
+                  <a:schemeClr val="tx1"/>
+                </a:solidFill>
+                <a:latin typeface="Poppins" panose="00000500000000000000" pitchFamily="2" charset="0"/>
+                <a:cs typeface="Poppins" panose="00000500000000000000" pitchFamily="2" charset="0"/>
+              </a:rPr>
+              <a:t> — Identify burnout, disengagement, and distraction patterns</a:t>
+            </a:r>
+          </a:p>
+          <a:p>
+            <a:pPr algn="l"/>
+            <a:r>
+              <a:rPr lang="en-US" sz="1200" b="1" dirty="0">
+                <a:solidFill>
+                  <a:schemeClr val="tx1"/>
+                </a:solidFill>
+                <a:latin typeface="Poppins" panose="00000500000000000000" pitchFamily="2" charset="0"/>
+                <a:cs typeface="Poppins" panose="00000500000000000000" pitchFamily="2" charset="0"/>
+              </a:rPr>
+              <a:t>Audit-ready compliance</a:t>
+            </a:r>
+            <a:r>
+              <a:rPr lang="en-US" sz="1200" dirty="0">
+                <a:solidFill>
+                  <a:schemeClr val="tx1"/>
+                </a:solidFill>
+                <a:latin typeface="Poppins" panose="00000500000000000000" pitchFamily="2" charset="0"/>
+                <a:cs typeface="Poppins" panose="00000500000000000000" pitchFamily="2" charset="0"/>
+              </a:rPr>
+              <a:t> — Tamper-evident logs of every decision and action</a:t>
+            </a:r>
+          </a:p>
+          <a:p>
+            <a:pPr algn="l"/>
+            <a:r>
+              <a:rPr lang="en-US" sz="1200" b="1" dirty="0">
+                <a:solidFill>
+                  <a:schemeClr val="tx1"/>
+                </a:solidFill>
+                <a:latin typeface="Poppins" panose="00000500000000000000" pitchFamily="2" charset="0"/>
+                <a:cs typeface="Poppins" panose="00000500000000000000" pitchFamily="2" charset="0"/>
+              </a:rPr>
+              <a:t>Privacy-first architecture</a:t>
+            </a:r>
+            <a:r>
+              <a:rPr lang="en-US" sz="1200" dirty="0">
+                <a:solidFill>
+                  <a:schemeClr val="tx1"/>
+                </a:solidFill>
+                <a:latin typeface="Poppins" panose="00000500000000000000" pitchFamily="2" charset="0"/>
+                <a:cs typeface="Poppins" panose="00000500000000000000" pitchFamily="2" charset="0"/>
+              </a:rPr>
+              <a:t> — Monitor behavior patterns, not content</a:t>
+            </a:r>
           </a:p>
         </p:txBody>
       </p:sp>
@@ -8224,7 +8395,7 @@
           <a:blip r:embed="rId3">
             <a:alphaModFix/>
           </a:blip>
-          <a:srcRect b="89082" l="0" r="0" t="0"/>
+          <a:srcRect b="89082"/>
           <a:stretch/>
         </p:blipFill>
         <p:spPr>
@@ -8251,7 +8422,7 @@
           <a:blip r:embed="rId4">
             <a:alphaModFix/>
           </a:blip>
-          <a:srcRect b="0" l="0" r="0" t="98295"/>
+          <a:srcRect t="98295"/>
           <a:stretch/>
         </p:blipFill>
         <p:spPr>
@@ -8277,11 +8448,11 @@
 </file>
 
 <file path=ppt/slides/slide3.xml><?xml version="1.0" encoding="utf-8"?>
-<p:sld xmlns:a="http://schemas.openxmlformats.org/drawingml/2006/main" xmlns:r="http://schemas.openxmlformats.org/officeDocument/2006/relationships" xmlns:mc="http://schemas.openxmlformats.org/markup-compatibility/2006" xmlns:mv="urn:schemas-microsoft-com:mac:vml" xmlns:p="http://schemas.openxmlformats.org/presentationml/2006/main" xmlns:c="http://schemas.openxmlformats.org/drawingml/2006/chart" xmlns:dgm="http://schemas.openxmlformats.org/drawingml/2006/diagram" xmlns:o="urn:schemas-microsoft-com:office:office" xmlns:v="urn:schemas-microsoft-com:vml" xmlns:pvml="urn:schemas-microsoft-com:office:powerpoint" xmlns:com="http://schemas.openxmlformats.org/drawingml/2006/compatibility" xmlns:p14="http://schemas.microsoft.com/office/powerpoint/2010/main" xmlns:p15="http://schemas.microsoft.com/office/powerpoint/2012/main" xmlns:ahyp="http://schemas.microsoft.com/office/drawing/2018/hyperlinkcolor">
+<p:sld xmlns:a="http://schemas.openxmlformats.org/drawingml/2006/main" xmlns:r="http://schemas.openxmlformats.org/officeDocument/2006/relationships" xmlns:p="http://schemas.openxmlformats.org/presentationml/2006/main">
   <p:cSld>
     <p:spTree>
       <p:nvGrpSpPr>
-        <p:cNvPr id="70" name="Shape 70"/>
+        <p:cNvPr id="1" name="Shape 70"/>
         <p:cNvGrpSpPr/>
         <p:nvPr/>
       </p:nvGrpSpPr>
@@ -8296,14 +8467,16 @@
       <p:sp>
         <p:nvSpPr>
           <p:cNvPr id="71" name="Google Shape;71;p15"/>
-          <p:cNvSpPr txBox="1"/>
+          <p:cNvSpPr txBox="1">
+            <a:spLocks noGrp="1"/>
+          </p:cNvSpPr>
           <p:nvPr>
             <p:ph type="ctrTitle"/>
           </p:nvPr>
         </p:nvSpPr>
         <p:spPr>
           <a:xfrm>
-            <a:off x="311700" y="744575"/>
+            <a:off x="311700" y="561524"/>
             <a:ext cx="8520600" cy="447600"/>
           </a:xfrm>
           <a:prstGeom prst="rect">
@@ -8311,12 +8484,12 @@
           </a:prstGeom>
         </p:spPr>
         <p:txBody>
-          <a:bodyPr anchorCtr="0" anchor="b" bIns="91425" lIns="91425" spcFirstLastPara="1" rIns="91425" wrap="square" tIns="91425">
+          <a:bodyPr spcFirstLastPara="1" wrap="square" lIns="91425" tIns="91425" rIns="91425" bIns="91425" anchor="b" anchorCtr="0">
             <a:normAutofit/>
           </a:bodyPr>
           <a:lstStyle/>
           <a:p>
-            <a:pPr indent="0" lvl="0" marL="0" rtl="0" algn="l">
+            <a:pPr marL="0" lvl="0" indent="0" algn="l" rtl="0">
               <a:spcBef>
                 <a:spcPts val="0"/>
               </a:spcBef>
@@ -8327,7 +8500,7 @@
               <a:buNone/>
             </a:pPr>
             <a:r>
-              <a:rPr b="1" lang="en-GB" sz="1620">
+              <a:rPr lang="en-GB" sz="1620" b="1" dirty="0">
                 <a:latin typeface="Poppins"/>
                 <a:ea typeface="Poppins"/>
                 <a:cs typeface="Poppins"/>
@@ -8335,75 +8508,7 @@
               </a:rPr>
               <a:t>Opportunities</a:t>
             </a:r>
-            <a:endParaRPr b="1" sz="1620">
-              <a:latin typeface="Poppins"/>
-              <a:ea typeface="Poppins"/>
-              <a:cs typeface="Poppins"/>
-              <a:sym typeface="Poppins"/>
-            </a:endParaRPr>
-          </a:p>
-        </p:txBody>
-      </p:sp>
-      <p:sp>
-        <p:nvSpPr>
-          <p:cNvPr id="72" name="Google Shape;72;p15"/>
-          <p:cNvSpPr txBox="1"/>
-          <p:nvPr>
-            <p:ph idx="1" type="subTitle"/>
-          </p:nvPr>
-        </p:nvSpPr>
-        <p:spPr>
-          <a:xfrm>
-            <a:off x="311700" y="2192150"/>
-            <a:ext cx="8520600" cy="2582400"/>
-          </a:xfrm>
-          <a:prstGeom prst="rect">
-            <a:avLst/>
-          </a:prstGeom>
-        </p:spPr>
-        <p:txBody>
-          <a:bodyPr anchorCtr="0" anchor="t" bIns="91425" lIns="91425" spcFirstLastPara="1" rIns="91425" wrap="square" tIns="91425">
-            <a:normAutofit/>
-          </a:bodyPr>
-          <a:lstStyle/>
-          <a:p>
-            <a:pPr indent="0" lvl="0" marL="0" rtl="0" algn="l">
-              <a:spcBef>
-                <a:spcPts val="0"/>
-              </a:spcBef>
-              <a:spcAft>
-                <a:spcPts val="0"/>
-              </a:spcAft>
-              <a:buNone/>
-            </a:pPr>
-            <a:r>
-              <a:rPr lang="en-GB" sz="1300">
-                <a:latin typeface="Poppins"/>
-                <a:ea typeface="Poppins"/>
-                <a:cs typeface="Poppins"/>
-                <a:sym typeface="Poppins"/>
-              </a:rPr>
-              <a:t>Type h</a:t>
-            </a:r>
-            <a:r>
-              <a:rPr lang="en-GB" sz="1300">
-                <a:latin typeface="Poppins"/>
-                <a:ea typeface="Poppins"/>
-                <a:cs typeface="Poppins"/>
-                <a:sym typeface="Poppins"/>
-              </a:rPr>
-              <a:t>e</a:t>
-            </a:r>
-            <a:r>
-              <a:rPr lang="en-GB" sz="1300">
-                <a:latin typeface="Poppins"/>
-                <a:ea typeface="Poppins"/>
-                <a:cs typeface="Poppins"/>
-                <a:sym typeface="Poppins"/>
-              </a:rPr>
-              <a:t>re</a:t>
-            </a:r>
-            <a:endParaRPr sz="1300">
+            <a:endParaRPr sz="1620" b="1" dirty="0">
               <a:latin typeface="Poppins"/>
               <a:ea typeface="Poppins"/>
               <a:cs typeface="Poppins"/>
@@ -8420,8 +8525,8 @@
         </p:nvSpPr>
         <p:spPr>
           <a:xfrm>
-            <a:off x="311700" y="1192175"/>
-            <a:ext cx="8520600" cy="895800"/>
+            <a:off x="48322" y="897024"/>
+            <a:ext cx="9047355" cy="4158801"/>
           </a:xfrm>
           <a:prstGeom prst="rect">
             <a:avLst/>
@@ -8432,12 +8537,12 @@
           </a:ln>
         </p:spPr>
         <p:txBody>
-          <a:bodyPr anchorCtr="0" anchor="t" bIns="91425" lIns="91425" spcFirstLastPara="1" rIns="91425" wrap="square" tIns="91425">
+          <a:bodyPr spcFirstLastPara="1" wrap="square" lIns="91425" tIns="91425" rIns="91425" bIns="91425" anchor="t" anchorCtr="0">
             <a:spAutoFit/>
           </a:bodyPr>
           <a:lstStyle/>
           <a:p>
-            <a:pPr indent="-317500" lvl="0" marL="457200" rtl="0" algn="l">
+            <a:pPr marL="457200" lvl="0" indent="-317500" algn="l" rtl="0">
               <a:lnSpc>
                 <a:spcPct val="115000"/>
               </a:lnSpc>
@@ -8455,7 +8560,7 @@
               <a:buChar char="➔"/>
             </a:pPr>
             <a:r>
-              <a:rPr lang="en-GB">
+              <a:rPr lang="en-GB" sz="1200" b="1" dirty="0">
                 <a:solidFill>
                   <a:schemeClr val="dk1"/>
                 </a:solidFill>
@@ -8466,7 +8571,195 @@
               </a:rPr>
               <a:t>How different is it from any of the other existing ideas?</a:t>
             </a:r>
-            <a:endParaRPr>
+          </a:p>
+          <a:p>
+            <a:pPr marL="139700" lvl="0" algn="l" rtl="0">
+              <a:lnSpc>
+                <a:spcPct val="115000"/>
+              </a:lnSpc>
+              <a:spcBef>
+                <a:spcPts val="0"/>
+              </a:spcBef>
+              <a:spcAft>
+                <a:spcPts val="0"/>
+              </a:spcAft>
+              <a:buClr>
+                <a:schemeClr val="dk1"/>
+              </a:buClr>
+              <a:buSzPts val="1400"/>
+            </a:pPr>
+            <a:r>
+              <a:rPr lang="en-US" sz="1000" b="1" dirty="0">
+                <a:latin typeface="Poppins" panose="00000500000000000000" pitchFamily="2" charset="0"/>
+                <a:cs typeface="Poppins" panose="00000500000000000000" pitchFamily="2" charset="0"/>
+              </a:rPr>
+              <a:t>Deployment:</a:t>
+            </a:r>
+            <a:r>
+              <a:rPr lang="en-US" sz="1000" dirty="0">
+                <a:latin typeface="Poppins" panose="00000500000000000000" pitchFamily="2" charset="0"/>
+                <a:cs typeface="Poppins" panose="00000500000000000000" pitchFamily="2" charset="0"/>
+              </a:rPr>
+              <a:t> Swaps complex desktop agents requiring admin rights for a zero-admin browser extension.</a:t>
+            </a:r>
+          </a:p>
+          <a:p>
+            <a:pPr marL="139700" lvl="0" algn="l" rtl="0">
+              <a:lnSpc>
+                <a:spcPct val="115000"/>
+              </a:lnSpc>
+              <a:spcBef>
+                <a:spcPts val="0"/>
+              </a:spcBef>
+              <a:spcAft>
+                <a:spcPts val="0"/>
+              </a:spcAft>
+              <a:buClr>
+                <a:schemeClr val="dk1"/>
+              </a:buClr>
+              <a:buSzPts val="1400"/>
+            </a:pPr>
+            <a:r>
+              <a:rPr lang="en-US" sz="1000" b="1" dirty="0">
+                <a:latin typeface="Poppins" panose="00000500000000000000" pitchFamily="2" charset="0"/>
+                <a:cs typeface="Poppins" panose="00000500000000000000" pitchFamily="2" charset="0"/>
+              </a:rPr>
+              <a:t>Compatibility:</a:t>
+            </a:r>
+            <a:r>
+              <a:rPr lang="en-US" sz="1000" dirty="0">
+                <a:latin typeface="Poppins" panose="00000500000000000000" pitchFamily="2" charset="0"/>
+                <a:cs typeface="Poppins" panose="00000500000000000000" pitchFamily="2" charset="0"/>
+              </a:rPr>
+              <a:t> Replaces OS-specific limitations with identical performance across Windows, macOS, and Linux.</a:t>
+            </a:r>
+          </a:p>
+          <a:p>
+            <a:pPr marL="139700" lvl="0" algn="l" rtl="0">
+              <a:lnSpc>
+                <a:spcPct val="115000"/>
+              </a:lnSpc>
+              <a:spcBef>
+                <a:spcPts val="0"/>
+              </a:spcBef>
+              <a:spcAft>
+                <a:spcPts val="0"/>
+              </a:spcAft>
+              <a:buClr>
+                <a:schemeClr val="dk1"/>
+              </a:buClr>
+              <a:buSzPts val="1400"/>
+            </a:pPr>
+            <a:r>
+              <a:rPr lang="en-US" sz="1000" b="1" dirty="0">
+                <a:latin typeface="Poppins" panose="00000500000000000000" pitchFamily="2" charset="0"/>
+                <a:cs typeface="Poppins" panose="00000500000000000000" pitchFamily="2" charset="0"/>
+              </a:rPr>
+              <a:t>Intelligence:</a:t>
+            </a:r>
+            <a:r>
+              <a:rPr lang="en-US" sz="1000" dirty="0">
+                <a:latin typeface="Poppins" panose="00000500000000000000" pitchFamily="2" charset="0"/>
+                <a:cs typeface="Poppins" panose="00000500000000000000" pitchFamily="2" charset="0"/>
+              </a:rPr>
+              <a:t> Moves from rigid "rule-based" alerts to LLM agents that provide plain-English reasoning for every flag.</a:t>
+            </a:r>
+          </a:p>
+          <a:p>
+            <a:pPr marL="139700" lvl="0" algn="l" rtl="0">
+              <a:lnSpc>
+                <a:spcPct val="115000"/>
+              </a:lnSpc>
+              <a:spcBef>
+                <a:spcPts val="0"/>
+              </a:spcBef>
+              <a:spcAft>
+                <a:spcPts val="0"/>
+              </a:spcAft>
+              <a:buClr>
+                <a:schemeClr val="dk1"/>
+              </a:buClr>
+              <a:buSzPts val="1400"/>
+            </a:pPr>
+            <a:r>
+              <a:rPr lang="en-US" sz="1000" b="1" dirty="0">
+                <a:latin typeface="Poppins" panose="00000500000000000000" pitchFamily="2" charset="0"/>
+                <a:cs typeface="Poppins" panose="00000500000000000000" pitchFamily="2" charset="0"/>
+              </a:rPr>
+              <a:t>Control: </a:t>
+            </a:r>
+            <a:r>
+              <a:rPr lang="en-US" sz="1000" dirty="0">
+                <a:latin typeface="Poppins" panose="00000500000000000000" pitchFamily="2" charset="0"/>
+                <a:cs typeface="Poppins" panose="00000500000000000000" pitchFamily="2" charset="0"/>
+              </a:rPr>
+              <a:t>Replaces "all-or-nothing" automation with a human-in-the-loop approval workflow.</a:t>
+            </a:r>
+          </a:p>
+          <a:p>
+            <a:pPr marL="139700" lvl="0" algn="l" rtl="0">
+              <a:lnSpc>
+                <a:spcPct val="115000"/>
+              </a:lnSpc>
+              <a:spcBef>
+                <a:spcPts val="0"/>
+              </a:spcBef>
+              <a:spcAft>
+                <a:spcPts val="0"/>
+              </a:spcAft>
+              <a:buClr>
+                <a:schemeClr val="dk1"/>
+              </a:buClr>
+              <a:buSzPts val="1400"/>
+            </a:pPr>
+            <a:r>
+              <a:rPr lang="en-US" sz="1000" b="1" dirty="0">
+                <a:latin typeface="Poppins" panose="00000500000000000000" pitchFamily="2" charset="0"/>
+                <a:cs typeface="Poppins" panose="00000500000000000000" pitchFamily="2" charset="0"/>
+              </a:rPr>
+              <a:t>Security:</a:t>
+            </a:r>
+            <a:r>
+              <a:rPr lang="en-US" sz="1000" dirty="0">
+                <a:latin typeface="Poppins" panose="00000500000000000000" pitchFamily="2" charset="0"/>
+                <a:cs typeface="Poppins" panose="00000500000000000000" pitchFamily="2" charset="0"/>
+              </a:rPr>
+              <a:t> Upgrades standard logs to a tamper-evident, blockchain-style audit trail.</a:t>
+            </a:r>
+          </a:p>
+          <a:p>
+            <a:pPr marL="139700" lvl="0" algn="l" rtl="0">
+              <a:lnSpc>
+                <a:spcPct val="115000"/>
+              </a:lnSpc>
+              <a:spcBef>
+                <a:spcPts val="0"/>
+              </a:spcBef>
+              <a:spcAft>
+                <a:spcPts val="0"/>
+              </a:spcAft>
+              <a:buClr>
+                <a:schemeClr val="dk1"/>
+              </a:buClr>
+              <a:buSzPts val="1400"/>
+            </a:pPr>
+            <a:r>
+              <a:rPr lang="en-US" sz="1000" b="1" dirty="0">
+                <a:latin typeface="Poppins" panose="00000500000000000000" pitchFamily="2" charset="0"/>
+                <a:cs typeface="Poppins" panose="00000500000000000000" pitchFamily="2" charset="0"/>
+              </a:rPr>
+              <a:t>Privacy: </a:t>
+            </a:r>
+            <a:r>
+              <a:rPr lang="en-US" sz="1000" dirty="0">
+                <a:latin typeface="Poppins" panose="00000500000000000000" pitchFamily="2" charset="0"/>
+                <a:cs typeface="Poppins" panose="00000500000000000000" pitchFamily="2" charset="0"/>
+              </a:rPr>
+              <a:t>Shifts from invasive screenshots to capturing behavioral metadata only with no content capture.</a:t>
+            </a:r>
+          </a:p>
+          <a:p>
+            <a:endParaRPr sz="1100" dirty="0">
               <a:solidFill>
                 <a:schemeClr val="dk1"/>
               </a:solidFill>
@@ -8477,7 +8770,7 @@
             </a:endParaRPr>
           </a:p>
           <a:p>
-            <a:pPr indent="-317500" lvl="0" marL="457200" rtl="0" algn="l">
+            <a:pPr marL="457200" lvl="0" indent="-317500" algn="l" rtl="0">
               <a:lnSpc>
                 <a:spcPct val="115000"/>
               </a:lnSpc>
@@ -8495,7 +8788,7 @@
               <a:buChar char="➔"/>
             </a:pPr>
             <a:r>
-              <a:rPr lang="en-GB">
+              <a:rPr lang="en-GB" sz="1200" b="1" dirty="0">
                 <a:solidFill>
                   <a:schemeClr val="dk1"/>
                 </a:solidFill>
@@ -8506,7 +8799,188 @@
               </a:rPr>
               <a:t>How will it be able to solve the problem?</a:t>
             </a:r>
-            <a:endParaRPr>
+          </a:p>
+          <a:p>
+            <a:pPr marL="139700" lvl="0" algn="l" rtl="0">
+              <a:lnSpc>
+                <a:spcPct val="115000"/>
+              </a:lnSpc>
+              <a:spcBef>
+                <a:spcPts val="0"/>
+              </a:spcBef>
+              <a:spcAft>
+                <a:spcPts val="0"/>
+              </a:spcAft>
+              <a:buClr>
+                <a:schemeClr val="dk1"/>
+              </a:buClr>
+              <a:buSzPts val="1400"/>
+            </a:pPr>
+            <a:r>
+              <a:rPr lang="en-IN" sz="1000" b="1" dirty="0">
+                <a:solidFill>
+                  <a:schemeClr val="dk1"/>
+                </a:solidFill>
+                <a:latin typeface="Poppins"/>
+                <a:ea typeface="Poppins"/>
+                <a:cs typeface="Poppins"/>
+                <a:sym typeface="Poppins"/>
+              </a:rPr>
+              <a:t>Insider Threats:</a:t>
+            </a:r>
+            <a:r>
+              <a:rPr lang="en-IN" sz="1000" dirty="0">
+                <a:solidFill>
+                  <a:schemeClr val="dk1"/>
+                </a:solidFill>
+                <a:latin typeface="Poppins"/>
+                <a:ea typeface="Poppins"/>
+                <a:cs typeface="Poppins"/>
+                <a:sym typeface="Poppins"/>
+              </a:rPr>
+              <a:t> ML baselining flags deviations like data exfiltration, reducing undetected incidents by 84%.</a:t>
+            </a:r>
+          </a:p>
+          <a:p>
+            <a:pPr marL="139700" lvl="0" algn="l" rtl="0">
+              <a:lnSpc>
+                <a:spcPct val="115000"/>
+              </a:lnSpc>
+              <a:spcBef>
+                <a:spcPts val="0"/>
+              </a:spcBef>
+              <a:spcAft>
+                <a:spcPts val="0"/>
+              </a:spcAft>
+              <a:buClr>
+                <a:schemeClr val="dk1"/>
+              </a:buClr>
+              <a:buSzPts val="1400"/>
+            </a:pPr>
+            <a:r>
+              <a:rPr lang="en-IN" sz="1000" b="1" dirty="0">
+                <a:solidFill>
+                  <a:schemeClr val="dk1"/>
+                </a:solidFill>
+                <a:latin typeface="Poppins"/>
+                <a:ea typeface="Poppins"/>
+                <a:cs typeface="Poppins"/>
+                <a:sym typeface="Poppins"/>
+              </a:rPr>
+              <a:t>Productivity Blind Spots:</a:t>
+            </a:r>
+            <a:r>
+              <a:rPr lang="en-IN" sz="1000" dirty="0">
+                <a:solidFill>
+                  <a:schemeClr val="dk1"/>
+                </a:solidFill>
+                <a:latin typeface="Poppins"/>
+                <a:ea typeface="Poppins"/>
+                <a:cs typeface="Poppins"/>
+                <a:sym typeface="Poppins"/>
+              </a:rPr>
+              <a:t> Intelligence agents classify user health (e.g., Overloaded/Disengaged) for non-invasive management insights.</a:t>
+            </a:r>
+          </a:p>
+          <a:p>
+            <a:pPr marL="139700" lvl="0" algn="l" rtl="0">
+              <a:lnSpc>
+                <a:spcPct val="115000"/>
+              </a:lnSpc>
+              <a:spcBef>
+                <a:spcPts val="0"/>
+              </a:spcBef>
+              <a:spcAft>
+                <a:spcPts val="0"/>
+              </a:spcAft>
+              <a:buClr>
+                <a:schemeClr val="dk1"/>
+              </a:buClr>
+              <a:buSzPts val="1400"/>
+            </a:pPr>
+            <a:r>
+              <a:rPr lang="en-IN" sz="1000" b="1" dirty="0">
+                <a:solidFill>
+                  <a:schemeClr val="dk1"/>
+                </a:solidFill>
+                <a:latin typeface="Poppins"/>
+                <a:ea typeface="Poppins"/>
+                <a:cs typeface="Poppins"/>
+                <a:sym typeface="Poppins"/>
+              </a:rPr>
+              <a:t>Alert Fatigue:</a:t>
+            </a:r>
+            <a:r>
+              <a:rPr lang="en-IN" sz="1000" dirty="0">
+                <a:solidFill>
+                  <a:schemeClr val="dk1"/>
+                </a:solidFill>
+                <a:latin typeface="Poppins"/>
+                <a:ea typeface="Poppins"/>
+                <a:cs typeface="Poppins"/>
+                <a:sym typeface="Poppins"/>
+              </a:rPr>
+              <a:t> AI consolidates 200+ raw alerts into 5–10 high-quality decision packages per day.</a:t>
+            </a:r>
+          </a:p>
+          <a:p>
+            <a:pPr marL="139700" lvl="0" algn="l" rtl="0">
+              <a:lnSpc>
+                <a:spcPct val="115000"/>
+              </a:lnSpc>
+              <a:spcBef>
+                <a:spcPts val="0"/>
+              </a:spcBef>
+              <a:spcAft>
+                <a:spcPts val="0"/>
+              </a:spcAft>
+              <a:buClr>
+                <a:schemeClr val="dk1"/>
+              </a:buClr>
+              <a:buSzPts val="1400"/>
+            </a:pPr>
+            <a:r>
+              <a:rPr lang="en-IN" sz="1000" b="1" dirty="0">
+                <a:solidFill>
+                  <a:schemeClr val="dk1"/>
+                </a:solidFill>
+                <a:latin typeface="Poppins"/>
+                <a:ea typeface="Poppins"/>
+                <a:cs typeface="Poppins"/>
+                <a:sym typeface="Poppins"/>
+              </a:rPr>
+              <a:t>Compliance &amp; Audit:</a:t>
+            </a:r>
+            <a:r>
+              <a:rPr lang="en-IN" sz="1000" dirty="0">
+                <a:solidFill>
+                  <a:schemeClr val="dk1"/>
+                </a:solidFill>
+                <a:latin typeface="Poppins"/>
+                <a:ea typeface="Poppins"/>
+                <a:cs typeface="Poppins"/>
+                <a:sym typeface="Poppins"/>
+              </a:rPr>
+              <a:t> A tamper-evident log records every event and approval for verifiable regulatory evidence.</a:t>
+            </a:r>
+          </a:p>
+          <a:p>
+            <a:pPr marL="139700" lvl="0" algn="l" rtl="0">
+              <a:lnSpc>
+                <a:spcPct val="115000"/>
+              </a:lnSpc>
+              <a:spcBef>
+                <a:spcPts val="0"/>
+              </a:spcBef>
+              <a:spcAft>
+                <a:spcPts val="0"/>
+              </a:spcAft>
+              <a:buClr>
+                <a:schemeClr val="dk1"/>
+              </a:buClr>
+              <a:buSzPts val="1400"/>
+            </a:pPr>
+            <a:endParaRPr sz="1000" dirty="0">
               <a:solidFill>
                 <a:schemeClr val="dk1"/>
               </a:solidFill>
@@ -8517,7 +8991,7 @@
             </a:endParaRPr>
           </a:p>
           <a:p>
-            <a:pPr indent="-317500" lvl="0" marL="457200" rtl="0" algn="l">
+            <a:pPr marL="457200" lvl="0" indent="-317500" algn="l" rtl="0">
               <a:lnSpc>
                 <a:spcPct val="115000"/>
               </a:lnSpc>
@@ -8535,7 +9009,7 @@
               <a:buChar char="➔"/>
             </a:pPr>
             <a:r>
-              <a:rPr lang="en-GB">
+              <a:rPr lang="en-GB" sz="1100" b="1" dirty="0">
                 <a:solidFill>
                   <a:schemeClr val="dk1"/>
                 </a:solidFill>
@@ -8546,7 +9020,195 @@
               </a:rPr>
               <a:t>USP of the proposed solution</a:t>
             </a:r>
-            <a:endParaRPr/>
+          </a:p>
+          <a:p>
+            <a:pPr marL="139700" lvl="0">
+              <a:lnSpc>
+                <a:spcPct val="115000"/>
+              </a:lnSpc>
+              <a:buClr>
+                <a:schemeClr val="dk1"/>
+              </a:buClr>
+              <a:buSzPts val="1400"/>
+            </a:pPr>
+            <a:r>
+              <a:rPr lang="en-US" sz="1000" b="1" dirty="0">
+                <a:solidFill>
+                  <a:schemeClr val="dk1"/>
+                </a:solidFill>
+                <a:latin typeface="Poppins"/>
+                <a:ea typeface="Poppins"/>
+                <a:cs typeface="Poppins"/>
+                <a:sym typeface="Poppins"/>
+              </a:rPr>
+              <a:t>Open-Source LLM Support:</a:t>
+            </a:r>
+            <a:r>
+              <a:rPr lang="en-US" sz="1000" dirty="0">
+                <a:solidFill>
+                  <a:schemeClr val="dk1"/>
+                </a:solidFill>
+                <a:latin typeface="Poppins"/>
+                <a:ea typeface="Poppins"/>
+                <a:cs typeface="Poppins"/>
+                <a:sym typeface="Poppins"/>
+              </a:rPr>
+              <a:t> Use </a:t>
+            </a:r>
+            <a:r>
+              <a:rPr lang="en-US" sz="1000" dirty="0" err="1">
+                <a:solidFill>
+                  <a:schemeClr val="dk1"/>
+                </a:solidFill>
+                <a:latin typeface="Poppins"/>
+                <a:ea typeface="Poppins"/>
+                <a:cs typeface="Poppins"/>
+                <a:sym typeface="Poppins"/>
+              </a:rPr>
+              <a:t>Groq</a:t>
+            </a:r>
+            <a:r>
+              <a:rPr lang="en-US" sz="1000" dirty="0">
+                <a:solidFill>
+                  <a:schemeClr val="dk1"/>
+                </a:solidFill>
+                <a:latin typeface="Poppins"/>
+                <a:ea typeface="Poppins"/>
+                <a:cs typeface="Poppins"/>
+                <a:sym typeface="Poppins"/>
+              </a:rPr>
+              <a:t>/Llama (free, privacy-preserving) or OpenAI (higher quality). Customer controls their data residency.</a:t>
+            </a:r>
+          </a:p>
+          <a:p>
+            <a:pPr marL="139700" lvl="0">
+              <a:lnSpc>
+                <a:spcPct val="115000"/>
+              </a:lnSpc>
+              <a:buClr>
+                <a:schemeClr val="dk1"/>
+              </a:buClr>
+              <a:buSzPts val="1400"/>
+            </a:pPr>
+            <a:r>
+              <a:rPr lang="en-US" sz="1000" b="1" dirty="0">
+                <a:solidFill>
+                  <a:schemeClr val="dk1"/>
+                </a:solidFill>
+                <a:latin typeface="Poppins"/>
+                <a:ea typeface="Poppins"/>
+                <a:cs typeface="Poppins"/>
+                <a:sym typeface="Poppins"/>
+              </a:rPr>
+              <a:t>Behavioral, Not Surveillance:</a:t>
+            </a:r>
+            <a:r>
+              <a:rPr lang="en-US" sz="1000" dirty="0">
+                <a:solidFill>
+                  <a:schemeClr val="dk1"/>
+                </a:solidFill>
+                <a:latin typeface="Poppins"/>
+                <a:ea typeface="Poppins"/>
+                <a:cs typeface="Poppins"/>
+                <a:sym typeface="Poppins"/>
+              </a:rPr>
+              <a:t> Monitors what users do (domains visited, session patterns, time distribution), not content (no screenshots, no keystroke logging). Respects privacy while maintaining security.</a:t>
+            </a:r>
+          </a:p>
+          <a:p>
+            <a:pPr marL="139700" lvl="0">
+              <a:lnSpc>
+                <a:spcPct val="115000"/>
+              </a:lnSpc>
+              <a:buClr>
+                <a:schemeClr val="dk1"/>
+              </a:buClr>
+              <a:buSzPts val="1400"/>
+            </a:pPr>
+            <a:r>
+              <a:rPr lang="en-US" sz="1000" b="1" dirty="0">
+                <a:solidFill>
+                  <a:schemeClr val="dk1"/>
+                </a:solidFill>
+                <a:latin typeface="Poppins"/>
+                <a:ea typeface="Poppins"/>
+                <a:cs typeface="Poppins"/>
+                <a:sym typeface="Poppins"/>
+              </a:rPr>
+              <a:t>Explainable AI:</a:t>
+            </a:r>
+            <a:r>
+              <a:rPr lang="en-US" sz="1000" dirty="0">
+                <a:solidFill>
+                  <a:schemeClr val="dk1"/>
+                </a:solidFill>
+                <a:latin typeface="Poppins"/>
+                <a:ea typeface="Poppins"/>
+                <a:cs typeface="Poppins"/>
+                <a:sym typeface="Poppins"/>
+              </a:rPr>
+              <a:t> Every risk score shows which features contributed. Every agent decision includes the full LLM reasoning trace. No black box.</a:t>
+            </a:r>
+          </a:p>
+          <a:p>
+            <a:pPr marL="139700" lvl="0">
+              <a:lnSpc>
+                <a:spcPct val="115000"/>
+              </a:lnSpc>
+              <a:buClr>
+                <a:schemeClr val="dk1"/>
+              </a:buClr>
+              <a:buSzPts val="1400"/>
+            </a:pPr>
+            <a:r>
+              <a:rPr lang="en-US" sz="1000" b="1" dirty="0">
+                <a:solidFill>
+                  <a:schemeClr val="dk1"/>
+                </a:solidFill>
+                <a:latin typeface="Poppins"/>
+                <a:ea typeface="Poppins"/>
+                <a:cs typeface="Poppins"/>
+                <a:sym typeface="Poppins"/>
+              </a:rPr>
+              <a:t>Built for Indian Enterprise:</a:t>
+            </a:r>
+            <a:r>
+              <a:rPr lang="en-US" sz="1000" dirty="0">
+                <a:solidFill>
+                  <a:schemeClr val="dk1"/>
+                </a:solidFill>
+                <a:latin typeface="Poppins"/>
+                <a:ea typeface="Poppins"/>
+                <a:cs typeface="Poppins"/>
+                <a:sym typeface="Poppins"/>
+              </a:rPr>
+              <a:t> Supports on-premise deployment, integrates with Microsoft Teams (more common than Slack in India), handles IST </a:t>
+            </a:r>
+            <a:r>
+              <a:rPr lang="en-US" sz="1000" dirty="0" err="1">
+                <a:solidFill>
+                  <a:schemeClr val="dk1"/>
+                </a:solidFill>
+                <a:latin typeface="Poppins"/>
+                <a:ea typeface="Poppins"/>
+                <a:cs typeface="Poppins"/>
+                <a:sym typeface="Poppins"/>
+              </a:rPr>
+              <a:t>timezone</a:t>
+            </a:r>
+            <a:r>
+              <a:rPr lang="en-US" sz="1000" dirty="0">
+                <a:solidFill>
+                  <a:schemeClr val="dk1"/>
+                </a:solidFill>
+                <a:latin typeface="Poppins"/>
+                <a:ea typeface="Poppins"/>
+                <a:cs typeface="Poppins"/>
+                <a:sym typeface="Poppins"/>
+              </a:rPr>
+              <a:t> natively, built by Indian developers for Indian compliance requirements.</a:t>
+            </a:r>
+            <a:endParaRPr sz="1000" b="1" dirty="0"/>
           </a:p>
         </p:txBody>
       </p:sp>
@@ -8560,7 +9222,7 @@
           <a:blip r:embed="rId3">
             <a:alphaModFix/>
           </a:blip>
-          <a:srcRect b="89082" l="0" r="0" t="0"/>
+          <a:srcRect b="89082"/>
           <a:stretch/>
         </p:blipFill>
         <p:spPr>
@@ -8587,7 +9249,7 @@
           <a:blip r:embed="rId4">
             <a:alphaModFix/>
           </a:blip>
-          <a:srcRect b="0" l="0" r="0" t="98295"/>
+          <a:srcRect t="98295"/>
           <a:stretch/>
         </p:blipFill>
         <p:spPr>
@@ -8613,11 +9275,11 @@
 </file>
 
 <file path=ppt/slides/slide4.xml><?xml version="1.0" encoding="utf-8"?>
-<p:sld xmlns:a="http://schemas.openxmlformats.org/drawingml/2006/main" xmlns:r="http://schemas.openxmlformats.org/officeDocument/2006/relationships" xmlns:mc="http://schemas.openxmlformats.org/markup-compatibility/2006" xmlns:mv="urn:schemas-microsoft-com:mac:vml" xmlns:p="http://schemas.openxmlformats.org/presentationml/2006/main" xmlns:c="http://schemas.openxmlformats.org/drawingml/2006/chart" xmlns:dgm="http://schemas.openxmlformats.org/drawingml/2006/diagram" xmlns:o="urn:schemas-microsoft-com:office:office" xmlns:v="urn:schemas-microsoft-com:vml" xmlns:pvml="urn:schemas-microsoft-com:office:powerpoint" xmlns:com="http://schemas.openxmlformats.org/drawingml/2006/compatibility" xmlns:p14="http://schemas.microsoft.com/office/powerpoint/2010/main" xmlns:p15="http://schemas.microsoft.com/office/powerpoint/2012/main" xmlns:ahyp="http://schemas.microsoft.com/office/drawing/2018/hyperlinkcolor">
+<p:sld xmlns:a="http://schemas.openxmlformats.org/drawingml/2006/main" xmlns:r="http://schemas.openxmlformats.org/officeDocument/2006/relationships" xmlns:p="http://schemas.openxmlformats.org/presentationml/2006/main">
   <p:cSld>
     <p:spTree>
       <p:nvGrpSpPr>
-        <p:cNvPr id="79" name="Shape 79"/>
+        <p:cNvPr id="1" name="Shape 79"/>
         <p:cNvGrpSpPr/>
         <p:nvPr/>
       </p:nvGrpSpPr>
@@ -8632,14 +9294,16 @@
       <p:sp>
         <p:nvSpPr>
           <p:cNvPr id="80" name="Google Shape;80;p16"/>
-          <p:cNvSpPr txBox="1"/>
+          <p:cNvSpPr txBox="1">
+            <a:spLocks noGrp="1"/>
+          </p:cNvSpPr>
           <p:nvPr>
             <p:ph type="ctrTitle"/>
           </p:nvPr>
         </p:nvSpPr>
         <p:spPr>
           <a:xfrm>
-            <a:off x="311700" y="744575"/>
+            <a:off x="311700" y="561524"/>
             <a:ext cx="8520600" cy="447600"/>
           </a:xfrm>
           <a:prstGeom prst="rect">
@@ -8647,12 +9311,12 @@
           </a:prstGeom>
         </p:spPr>
         <p:txBody>
-          <a:bodyPr anchorCtr="0" anchor="b" bIns="91425" lIns="91425" spcFirstLastPara="1" rIns="91425" wrap="square" tIns="91425">
+          <a:bodyPr spcFirstLastPara="1" wrap="square" lIns="91425" tIns="91425" rIns="91425" bIns="91425" anchor="b" anchorCtr="0">
             <a:normAutofit/>
           </a:bodyPr>
           <a:lstStyle/>
           <a:p>
-            <a:pPr indent="0" lvl="0" marL="0" rtl="0" algn="l">
+            <a:pPr marL="0" lvl="0" indent="0" algn="l" rtl="0">
               <a:spcBef>
                 <a:spcPts val="0"/>
               </a:spcBef>
@@ -8663,7 +9327,7 @@
               <a:buNone/>
             </a:pPr>
             <a:r>
-              <a:rPr b="1" lang="en-GB" sz="1620">
+              <a:rPr lang="en-GB" sz="1620" b="1" dirty="0">
                 <a:latin typeface="Poppins"/>
                 <a:ea typeface="Poppins"/>
                 <a:cs typeface="Poppins"/>
@@ -8671,57 +9335,7 @@
               </a:rPr>
               <a:t>List of features offered by the solution</a:t>
             </a:r>
-            <a:endParaRPr b="1" sz="1620">
-              <a:latin typeface="Poppins"/>
-              <a:ea typeface="Poppins"/>
-              <a:cs typeface="Poppins"/>
-              <a:sym typeface="Poppins"/>
-            </a:endParaRPr>
-          </a:p>
-        </p:txBody>
-      </p:sp>
-      <p:sp>
-        <p:nvSpPr>
-          <p:cNvPr id="81" name="Google Shape;81;p16"/>
-          <p:cNvSpPr txBox="1"/>
-          <p:nvPr>
-            <p:ph idx="1" type="subTitle"/>
-          </p:nvPr>
-        </p:nvSpPr>
-        <p:spPr>
-          <a:xfrm>
-            <a:off x="311700" y="1249775"/>
-            <a:ext cx="8520600" cy="3525000"/>
-          </a:xfrm>
-          <a:prstGeom prst="rect">
-            <a:avLst/>
-          </a:prstGeom>
-        </p:spPr>
-        <p:txBody>
-          <a:bodyPr anchorCtr="0" anchor="t" bIns="91425" lIns="91425" spcFirstLastPara="1" rIns="91425" wrap="square" tIns="91425">
-            <a:normAutofit/>
-          </a:bodyPr>
-          <a:lstStyle/>
-          <a:p>
-            <a:pPr indent="0" lvl="0" marL="0" rtl="0" algn="l">
-              <a:spcBef>
-                <a:spcPts val="0"/>
-              </a:spcBef>
-              <a:spcAft>
-                <a:spcPts val="0"/>
-              </a:spcAft>
-              <a:buNone/>
-            </a:pPr>
-            <a:r>
-              <a:rPr lang="en-GB" sz="1300">
-                <a:latin typeface="Poppins"/>
-                <a:ea typeface="Poppins"/>
-                <a:cs typeface="Poppins"/>
-                <a:sym typeface="Poppins"/>
-              </a:rPr>
-              <a:t>Type here</a:t>
-            </a:r>
-            <a:endParaRPr sz="1300">
+            <a:endParaRPr sz="1620" b="1" dirty="0">
               <a:latin typeface="Poppins"/>
               <a:ea typeface="Poppins"/>
               <a:cs typeface="Poppins"/>
@@ -8740,7 +9354,7 @@
           <a:blip r:embed="rId3">
             <a:alphaModFix/>
           </a:blip>
-          <a:srcRect b="89082" l="0" r="0" t="0"/>
+          <a:srcRect b="89082"/>
           <a:stretch/>
         </p:blipFill>
         <p:spPr>
@@ -8767,7 +9381,7 @@
           <a:blip r:embed="rId4">
             <a:alphaModFix/>
           </a:blip>
-          <a:srcRect b="0" l="0" r="0" t="98295"/>
+          <a:srcRect t="98295"/>
           <a:stretch/>
         </p:blipFill>
         <p:spPr>
@@ -8784,6 +9398,461 @@
           </a:ln>
         </p:spPr>
       </p:pic>
+      <p:sp>
+        <p:nvSpPr>
+          <p:cNvPr id="5" name="TextBox 4">
+            <a:extLst>
+              <a:ext uri="{FF2B5EF4-FFF2-40B4-BE49-F238E27FC236}">
+                <a16:creationId xmlns:a16="http://schemas.microsoft.com/office/drawing/2014/main" id="{144C8910-8F09-7809-3F73-16FEFD04867C}"/>
+              </a:ext>
+            </a:extLst>
+          </p:cNvPr>
+          <p:cNvSpPr txBox="1"/>
+          <p:nvPr/>
+        </p:nvSpPr>
+        <p:spPr>
+          <a:xfrm>
+            <a:off x="311700" y="917111"/>
+            <a:ext cx="8520600" cy="4162678"/>
+          </a:xfrm>
+          <a:prstGeom prst="rect">
+            <a:avLst/>
+          </a:prstGeom>
+          <a:noFill/>
+        </p:spPr>
+        <p:txBody>
+          <a:bodyPr wrap="square" rtlCol="0">
+            <a:spAutoFit/>
+          </a:bodyPr>
+          <a:lstStyle/>
+          <a:p>
+            <a:r>
+              <a:rPr lang="en-IN" sz="1100" b="1" dirty="0">
+                <a:latin typeface="Poppins" panose="00000500000000000000" pitchFamily="2" charset="0"/>
+                <a:cs typeface="Poppins" panose="00000500000000000000" pitchFamily="2" charset="0"/>
+              </a:rPr>
+              <a:t>Core Security Features</a:t>
+            </a:r>
+          </a:p>
+          <a:p>
+            <a:r>
+              <a:rPr lang="en-IN" sz="1050" b="1" dirty="0">
+                <a:latin typeface="Poppins" panose="00000500000000000000" pitchFamily="2" charset="0"/>
+                <a:cs typeface="Poppins" panose="00000500000000000000" pitchFamily="2" charset="0"/>
+              </a:rPr>
+              <a:t>Real-Time Anomaly Detection:</a:t>
+            </a:r>
+            <a:r>
+              <a:rPr lang="en-IN" sz="1050" dirty="0">
+                <a:latin typeface="Poppins" panose="00000500000000000000" pitchFamily="2" charset="0"/>
+                <a:cs typeface="Poppins" panose="00000500000000000000" pitchFamily="2" charset="0"/>
+              </a:rPr>
+              <a:t> Isolation Forest ML model scores every browsing session against </a:t>
+            </a:r>
+            <a:r>
+              <a:rPr lang="en-IN" sz="1050" dirty="0" err="1">
+                <a:latin typeface="Poppins" panose="00000500000000000000" pitchFamily="2" charset="0"/>
+                <a:cs typeface="Poppins" panose="00000500000000000000" pitchFamily="2" charset="0"/>
+              </a:rPr>
+              <a:t>behavioral</a:t>
+            </a:r>
+            <a:r>
+              <a:rPr lang="en-IN" sz="1050" dirty="0">
+                <a:latin typeface="Poppins" panose="00000500000000000000" pitchFamily="2" charset="0"/>
+                <a:cs typeface="Poppins" panose="00000500000000000000" pitchFamily="2" charset="0"/>
+              </a:rPr>
+              <a:t> baseline</a:t>
+            </a:r>
+            <a:br>
+              <a:rPr lang="en-IN" sz="1050" dirty="0">
+                <a:latin typeface="Poppins" panose="00000500000000000000" pitchFamily="2" charset="0"/>
+                <a:cs typeface="Poppins" panose="00000500000000000000" pitchFamily="2" charset="0"/>
+              </a:rPr>
+            </a:br>
+            <a:r>
+              <a:rPr lang="en-IN" sz="1050" b="1" dirty="0">
+                <a:latin typeface="Poppins" panose="00000500000000000000" pitchFamily="2" charset="0"/>
+                <a:cs typeface="Poppins" panose="00000500000000000000" pitchFamily="2" charset="0"/>
+              </a:rPr>
+              <a:t>Security Intelligence Agent:</a:t>
+            </a:r>
+            <a:r>
+              <a:rPr lang="en-IN" sz="1050" dirty="0">
+                <a:latin typeface="Poppins" panose="00000500000000000000" pitchFamily="2" charset="0"/>
+                <a:cs typeface="Poppins" panose="00000500000000000000" pitchFamily="2" charset="0"/>
+              </a:rPr>
+              <a:t> LLM-powered reasoning about high-risk events with plain-English explanations</a:t>
+            </a:r>
+            <a:br>
+              <a:rPr lang="en-IN" sz="1050" dirty="0">
+                <a:latin typeface="Poppins" panose="00000500000000000000" pitchFamily="2" charset="0"/>
+                <a:cs typeface="Poppins" panose="00000500000000000000" pitchFamily="2" charset="0"/>
+              </a:rPr>
+            </a:br>
+            <a:r>
+              <a:rPr lang="en-IN" sz="1050" b="1" dirty="0">
+                <a:latin typeface="Poppins" panose="00000500000000000000" pitchFamily="2" charset="0"/>
+                <a:cs typeface="Poppins" panose="00000500000000000000" pitchFamily="2" charset="0"/>
+              </a:rPr>
+              <a:t>Human Approval Workflow:</a:t>
+            </a:r>
+            <a:r>
+              <a:rPr lang="en-IN" sz="1050" dirty="0">
+                <a:latin typeface="Poppins" panose="00000500000000000000" pitchFamily="2" charset="0"/>
+                <a:cs typeface="Poppins" panose="00000500000000000000" pitchFamily="2" charset="0"/>
+              </a:rPr>
+              <a:t> Every significant action requires analyst review with full context</a:t>
+            </a:r>
+            <a:br>
+              <a:rPr lang="en-IN" sz="1050" dirty="0">
+                <a:latin typeface="Poppins" panose="00000500000000000000" pitchFamily="2" charset="0"/>
+                <a:cs typeface="Poppins" panose="00000500000000000000" pitchFamily="2" charset="0"/>
+              </a:rPr>
+            </a:br>
+            <a:r>
+              <a:rPr lang="en-IN" sz="1050" b="1" dirty="0">
+                <a:latin typeface="Poppins" panose="00000500000000000000" pitchFamily="2" charset="0"/>
+                <a:cs typeface="Poppins" panose="00000500000000000000" pitchFamily="2" charset="0"/>
+              </a:rPr>
+              <a:t>Tamper-Evident Audit Log:</a:t>
+            </a:r>
+            <a:r>
+              <a:rPr lang="en-IN" sz="1050" dirty="0">
+                <a:latin typeface="Poppins" panose="00000500000000000000" pitchFamily="2" charset="0"/>
+                <a:cs typeface="Poppins" panose="00000500000000000000" pitchFamily="2" charset="0"/>
+              </a:rPr>
+              <a:t> Blockchain-style hash chain proves no records were altered</a:t>
+            </a:r>
+            <a:br>
+              <a:rPr lang="en-IN" sz="1050" dirty="0">
+                <a:latin typeface="Poppins" panose="00000500000000000000" pitchFamily="2" charset="0"/>
+                <a:cs typeface="Poppins" panose="00000500000000000000" pitchFamily="2" charset="0"/>
+              </a:rPr>
+            </a:br>
+            <a:r>
+              <a:rPr lang="en-IN" sz="1050" b="1" dirty="0">
+                <a:latin typeface="Poppins" panose="00000500000000000000" pitchFamily="2" charset="0"/>
+                <a:cs typeface="Poppins" panose="00000500000000000000" pitchFamily="2" charset="0"/>
+              </a:rPr>
+              <a:t>Incident Report Generation:</a:t>
+            </a:r>
+            <a:r>
+              <a:rPr lang="en-IN" sz="1050" dirty="0">
+                <a:latin typeface="Poppins" panose="00000500000000000000" pitchFamily="2" charset="0"/>
+                <a:cs typeface="Poppins" panose="00000500000000000000" pitchFamily="2" charset="0"/>
+              </a:rPr>
+              <a:t> Automated PDF reports with event timeline, ML explanation, and agent reasoning</a:t>
+            </a:r>
+          </a:p>
+          <a:p>
+            <a:endParaRPr lang="en-IN" sz="1050" dirty="0">
+              <a:latin typeface="Poppins" panose="00000500000000000000" pitchFamily="2" charset="0"/>
+              <a:cs typeface="Poppins" panose="00000500000000000000" pitchFamily="2" charset="0"/>
+            </a:endParaRPr>
+          </a:p>
+          <a:p>
+            <a:r>
+              <a:rPr lang="en-IN" sz="1100" b="1" dirty="0">
+                <a:latin typeface="Poppins" panose="00000500000000000000" pitchFamily="2" charset="0"/>
+                <a:cs typeface="Poppins" panose="00000500000000000000" pitchFamily="2" charset="0"/>
+              </a:rPr>
+              <a:t>Productivity Intelligence Features</a:t>
+            </a:r>
+          </a:p>
+          <a:p>
+            <a:r>
+              <a:rPr lang="en-IN" sz="1050" b="1" dirty="0">
+                <a:latin typeface="Poppins" panose="00000500000000000000" pitchFamily="2" charset="0"/>
+                <a:cs typeface="Poppins" panose="00000500000000000000" pitchFamily="2" charset="0"/>
+              </a:rPr>
+              <a:t>Productivity Pattern Analysis:</a:t>
+            </a:r>
+            <a:r>
+              <a:rPr lang="en-IN" sz="1050" dirty="0">
+                <a:latin typeface="Poppins" panose="00000500000000000000" pitchFamily="2" charset="0"/>
+                <a:cs typeface="Poppins" panose="00000500000000000000" pitchFamily="2" charset="0"/>
+              </a:rPr>
+              <a:t> 2-week </a:t>
+            </a:r>
+            <a:r>
+              <a:rPr lang="en-IN" sz="1050" dirty="0" err="1">
+                <a:latin typeface="Poppins" panose="00000500000000000000" pitchFamily="2" charset="0"/>
+                <a:cs typeface="Poppins" panose="00000500000000000000" pitchFamily="2" charset="0"/>
+              </a:rPr>
+              <a:t>behavioral</a:t>
+            </a:r>
+            <a:r>
+              <a:rPr lang="en-IN" sz="1050" dirty="0">
+                <a:latin typeface="Poppins" panose="00000500000000000000" pitchFamily="2" charset="0"/>
+                <a:cs typeface="Poppins" panose="00000500000000000000" pitchFamily="2" charset="0"/>
+              </a:rPr>
+              <a:t> classification (Healthy/Overloaded/Disengaged/Distracted)</a:t>
+            </a:r>
+            <a:br>
+              <a:rPr lang="en-IN" sz="1050" dirty="0">
+                <a:latin typeface="Poppins" panose="00000500000000000000" pitchFamily="2" charset="0"/>
+                <a:cs typeface="Poppins" panose="00000500000000000000" pitchFamily="2" charset="0"/>
+              </a:rPr>
+            </a:br>
+            <a:r>
+              <a:rPr lang="en-IN" sz="1050" b="1" dirty="0">
+                <a:latin typeface="Poppins" panose="00000500000000000000" pitchFamily="2" charset="0"/>
+                <a:cs typeface="Poppins" panose="00000500000000000000" pitchFamily="2" charset="0"/>
+              </a:rPr>
+              <a:t>Manager Recommendations:</a:t>
+            </a:r>
+            <a:r>
+              <a:rPr lang="en-IN" sz="1050" dirty="0">
+                <a:latin typeface="Poppins" panose="00000500000000000000" pitchFamily="2" charset="0"/>
+                <a:cs typeface="Poppins" panose="00000500000000000000" pitchFamily="2" charset="0"/>
+              </a:rPr>
+              <a:t> LLM-generated intervention suggestions with confidence scores</a:t>
+            </a:r>
+            <a:br>
+              <a:rPr lang="en-IN" sz="1050" dirty="0">
+                <a:latin typeface="Poppins" panose="00000500000000000000" pitchFamily="2" charset="0"/>
+                <a:cs typeface="Poppins" panose="00000500000000000000" pitchFamily="2" charset="0"/>
+              </a:rPr>
+            </a:br>
+            <a:r>
+              <a:rPr lang="en-IN" sz="1050" b="1" dirty="0">
+                <a:latin typeface="Poppins" panose="00000500000000000000" pitchFamily="2" charset="0"/>
+                <a:cs typeface="Poppins" panose="00000500000000000000" pitchFamily="2" charset="0"/>
+              </a:rPr>
+              <a:t>Working Hours Compliance:</a:t>
+            </a:r>
+            <a:r>
+              <a:rPr lang="en-IN" sz="1050" dirty="0">
+                <a:latin typeface="Poppins" panose="00000500000000000000" pitchFamily="2" charset="0"/>
+                <a:cs typeface="Poppins" panose="00000500000000000000" pitchFamily="2" charset="0"/>
+              </a:rPr>
+              <a:t> Flags off-hours work patterns indicating burnout risk</a:t>
+            </a:r>
+          </a:p>
+          <a:p>
+            <a:endParaRPr lang="en-IN" sz="1050" dirty="0">
+              <a:latin typeface="Poppins" panose="00000500000000000000" pitchFamily="2" charset="0"/>
+              <a:cs typeface="Poppins" panose="00000500000000000000" pitchFamily="2" charset="0"/>
+            </a:endParaRPr>
+          </a:p>
+          <a:p>
+            <a:r>
+              <a:rPr lang="en-IN" sz="1100" b="1" dirty="0">
+                <a:latin typeface="Poppins" panose="00000500000000000000" pitchFamily="2" charset="0"/>
+                <a:cs typeface="Poppins" panose="00000500000000000000" pitchFamily="2" charset="0"/>
+              </a:rPr>
+              <a:t>Technical Features</a:t>
+            </a:r>
+          </a:p>
+          <a:p>
+            <a:r>
+              <a:rPr lang="en-IN" sz="1050" b="1" dirty="0">
+                <a:latin typeface="Poppins" panose="00000500000000000000" pitchFamily="2" charset="0"/>
+                <a:cs typeface="Poppins" panose="00000500000000000000" pitchFamily="2" charset="0"/>
+              </a:rPr>
+              <a:t>Lightweight Chrome Extension:</a:t>
+            </a:r>
+            <a:r>
+              <a:rPr lang="en-IN" sz="1050" dirty="0">
+                <a:latin typeface="Poppins" panose="00000500000000000000" pitchFamily="2" charset="0"/>
+                <a:cs typeface="Poppins" panose="00000500000000000000" pitchFamily="2" charset="0"/>
+              </a:rPr>
+              <a:t> &lt;5MB, runs in Service Worker, minimal CPU/memory impact</a:t>
+            </a:r>
+            <a:br>
+              <a:rPr lang="en-IN" sz="1050" dirty="0">
+                <a:latin typeface="Poppins" panose="00000500000000000000" pitchFamily="2" charset="0"/>
+                <a:cs typeface="Poppins" panose="00000500000000000000" pitchFamily="2" charset="0"/>
+              </a:rPr>
+            </a:br>
+            <a:r>
+              <a:rPr lang="en-IN" sz="1050" b="1" dirty="0">
+                <a:latin typeface="Poppins" panose="00000500000000000000" pitchFamily="2" charset="0"/>
+                <a:cs typeface="Poppins" panose="00000500000000000000" pitchFamily="2" charset="0"/>
+              </a:rPr>
+              <a:t>WebSocket Command Channel:</a:t>
+            </a:r>
+            <a:r>
+              <a:rPr lang="en-IN" sz="1050" dirty="0">
+                <a:latin typeface="Poppins" panose="00000500000000000000" pitchFamily="2" charset="0"/>
+                <a:cs typeface="Poppins" panose="00000500000000000000" pitchFamily="2" charset="0"/>
+              </a:rPr>
+              <a:t> Real-time bidirectional communication for instant action execution</a:t>
+            </a:r>
+            <a:br>
+              <a:rPr lang="en-IN" sz="1050" dirty="0">
+                <a:latin typeface="Poppins" panose="00000500000000000000" pitchFamily="2" charset="0"/>
+                <a:cs typeface="Poppins" panose="00000500000000000000" pitchFamily="2" charset="0"/>
+              </a:rPr>
+            </a:br>
+            <a:r>
+              <a:rPr lang="en-IN" sz="1050" b="1" dirty="0">
+                <a:latin typeface="Poppins" panose="00000500000000000000" pitchFamily="2" charset="0"/>
+                <a:cs typeface="Poppins" panose="00000500000000000000" pitchFamily="2" charset="0"/>
+              </a:rPr>
+              <a:t>Multi-Model ML Pipeline:</a:t>
+            </a:r>
+            <a:r>
+              <a:rPr lang="en-IN" sz="1050" dirty="0">
+                <a:latin typeface="Poppins" panose="00000500000000000000" pitchFamily="2" charset="0"/>
+                <a:cs typeface="Poppins" panose="00000500000000000000" pitchFamily="2" charset="0"/>
+              </a:rPr>
+              <a:t> 3 models: Anomaly Detector, Domain Classifier, Productivity Classifier</a:t>
+            </a:r>
+            <a:br>
+              <a:rPr lang="en-IN" sz="1050" dirty="0">
+                <a:latin typeface="Poppins" panose="00000500000000000000" pitchFamily="2" charset="0"/>
+                <a:cs typeface="Poppins" panose="00000500000000000000" pitchFamily="2" charset="0"/>
+              </a:rPr>
+            </a:br>
+            <a:r>
+              <a:rPr lang="en-IN" sz="1050" b="1" dirty="0">
+                <a:latin typeface="Poppins" panose="00000500000000000000" pitchFamily="2" charset="0"/>
+                <a:cs typeface="Poppins" panose="00000500000000000000" pitchFamily="2" charset="0"/>
+              </a:rPr>
+              <a:t>Configurable Thresholds:</a:t>
+            </a:r>
+            <a:r>
+              <a:rPr lang="en-IN" sz="1050" dirty="0">
+                <a:latin typeface="Poppins" panose="00000500000000000000" pitchFamily="2" charset="0"/>
+                <a:cs typeface="Poppins" panose="00000500000000000000" pitchFamily="2" charset="0"/>
+              </a:rPr>
+              <a:t> Admins tune risk scoring and agent trigger sensitivity per organization</a:t>
+            </a:r>
+            <a:br>
+              <a:rPr lang="en-IN" sz="1050" dirty="0">
+                <a:latin typeface="Poppins" panose="00000500000000000000" pitchFamily="2" charset="0"/>
+                <a:cs typeface="Poppins" panose="00000500000000000000" pitchFamily="2" charset="0"/>
+              </a:rPr>
+            </a:br>
+            <a:r>
+              <a:rPr lang="en-IN" sz="1050" b="1" dirty="0">
+                <a:latin typeface="Poppins" panose="00000500000000000000" pitchFamily="2" charset="0"/>
+                <a:cs typeface="Poppins" panose="00000500000000000000" pitchFamily="2" charset="0"/>
+              </a:rPr>
+              <a:t>Role-Based Access Control:</a:t>
+            </a:r>
+            <a:r>
+              <a:rPr lang="en-IN" sz="1050" dirty="0">
+                <a:latin typeface="Poppins" panose="00000500000000000000" pitchFamily="2" charset="0"/>
+                <a:cs typeface="Poppins" panose="00000500000000000000" pitchFamily="2" charset="0"/>
+              </a:rPr>
+              <a:t> 3 roles (Analyst, Manager, Admin) with org-unit scoped data access</a:t>
+            </a:r>
+          </a:p>
+          <a:p>
+            <a:endParaRPr lang="en-IN" sz="1050" dirty="0">
+              <a:latin typeface="Poppins" panose="00000500000000000000" pitchFamily="2" charset="0"/>
+              <a:cs typeface="Poppins" panose="00000500000000000000" pitchFamily="2" charset="0"/>
+            </a:endParaRPr>
+          </a:p>
+          <a:p>
+            <a:r>
+              <a:rPr lang="en-IN" sz="1100" b="1" dirty="0">
+                <a:latin typeface="Poppins" panose="00000500000000000000" pitchFamily="2" charset="0"/>
+                <a:cs typeface="Poppins" panose="00000500000000000000" pitchFamily="2" charset="0"/>
+              </a:rPr>
+              <a:t>Integration Features</a:t>
+            </a:r>
+          </a:p>
+          <a:p>
+            <a:r>
+              <a:rPr lang="en-IN" sz="1050" b="1" dirty="0">
+                <a:latin typeface="Poppins" panose="00000500000000000000" pitchFamily="2" charset="0"/>
+                <a:cs typeface="Poppins" panose="00000500000000000000" pitchFamily="2" charset="0"/>
+              </a:rPr>
+              <a:t>Email Notifications</a:t>
+            </a:r>
+            <a:r>
+              <a:rPr lang="en-IN" sz="1050" dirty="0">
+                <a:latin typeface="Poppins" panose="00000500000000000000" pitchFamily="2" charset="0"/>
+                <a:cs typeface="Poppins" panose="00000500000000000000" pitchFamily="2" charset="0"/>
+              </a:rPr>
+              <a:t> (SMTP)</a:t>
+            </a:r>
+            <a:br>
+              <a:rPr lang="en-IN" sz="1050" dirty="0">
+                <a:latin typeface="Poppins" panose="00000500000000000000" pitchFamily="2" charset="0"/>
+                <a:cs typeface="Poppins" panose="00000500000000000000" pitchFamily="2" charset="0"/>
+              </a:rPr>
+            </a:br>
+            <a:r>
+              <a:rPr lang="en-IN" sz="1050" b="1" dirty="0">
+                <a:latin typeface="Poppins" panose="00000500000000000000" pitchFamily="2" charset="0"/>
+                <a:cs typeface="Poppins" panose="00000500000000000000" pitchFamily="2" charset="0"/>
+              </a:rPr>
+              <a:t>Slack Integration</a:t>
+            </a:r>
+            <a:r>
+              <a:rPr lang="en-IN" sz="1050" dirty="0">
+                <a:latin typeface="Poppins" panose="00000500000000000000" pitchFamily="2" charset="0"/>
+                <a:cs typeface="Poppins" panose="00000500000000000000" pitchFamily="2" charset="0"/>
+              </a:rPr>
+              <a:t> (Incoming Webhooks)</a:t>
+            </a:r>
+            <a:br>
+              <a:rPr lang="en-IN" sz="1050" dirty="0">
+                <a:latin typeface="Poppins" panose="00000500000000000000" pitchFamily="2" charset="0"/>
+                <a:cs typeface="Poppins" panose="00000500000000000000" pitchFamily="2" charset="0"/>
+              </a:rPr>
+            </a:br>
+            <a:r>
+              <a:rPr lang="en-IN" sz="1050" b="1" dirty="0">
+                <a:latin typeface="Poppins" panose="00000500000000000000" pitchFamily="2" charset="0"/>
+                <a:cs typeface="Poppins" panose="00000500000000000000" pitchFamily="2" charset="0"/>
+              </a:rPr>
+              <a:t>Microsoft Teams Integration</a:t>
+            </a:r>
+            <a:r>
+              <a:rPr lang="en-IN" sz="1050" dirty="0">
+                <a:latin typeface="Poppins" panose="00000500000000000000" pitchFamily="2" charset="0"/>
+                <a:cs typeface="Poppins" panose="00000500000000000000" pitchFamily="2" charset="0"/>
+              </a:rPr>
+              <a:t> (Incoming Webhooks)</a:t>
+            </a:r>
+            <a:br>
+              <a:rPr lang="en-IN" sz="1050" dirty="0">
+                <a:latin typeface="Poppins" panose="00000500000000000000" pitchFamily="2" charset="0"/>
+                <a:cs typeface="Poppins" panose="00000500000000000000" pitchFamily="2" charset="0"/>
+              </a:rPr>
+            </a:br>
+            <a:r>
+              <a:rPr lang="en-IN" sz="1050" b="1" dirty="0">
+                <a:latin typeface="Poppins" panose="00000500000000000000" pitchFamily="2" charset="0"/>
+                <a:cs typeface="Poppins" panose="00000500000000000000" pitchFamily="2" charset="0"/>
+              </a:rPr>
+              <a:t>OAuth2/SAML Authentication</a:t>
+            </a:r>
+            <a:r>
+              <a:rPr lang="en-IN" sz="1050" dirty="0">
+                <a:latin typeface="Poppins" panose="00000500000000000000" pitchFamily="2" charset="0"/>
+                <a:cs typeface="Poppins" panose="00000500000000000000" pitchFamily="2" charset="0"/>
+              </a:rPr>
+              <a:t> (Azure AD, Google Workspace)</a:t>
+            </a:r>
+            <a:br>
+              <a:rPr lang="en-IN" sz="1050" dirty="0">
+                <a:latin typeface="Poppins" panose="00000500000000000000" pitchFamily="2" charset="0"/>
+                <a:cs typeface="Poppins" panose="00000500000000000000" pitchFamily="2" charset="0"/>
+              </a:rPr>
+            </a:br>
+            <a:r>
+              <a:rPr lang="en-IN" sz="1050" b="1" dirty="0">
+                <a:latin typeface="Poppins" panose="00000500000000000000" pitchFamily="2" charset="0"/>
+                <a:cs typeface="Poppins" panose="00000500000000000000" pitchFamily="2" charset="0"/>
+              </a:rPr>
+              <a:t>Extensible Action Framework:</a:t>
+            </a:r>
+            <a:r>
+              <a:rPr lang="en-IN" sz="1050" dirty="0">
+                <a:latin typeface="Poppins" panose="00000500000000000000" pitchFamily="2" charset="0"/>
+                <a:cs typeface="Poppins" panose="00000500000000000000" pitchFamily="2" charset="0"/>
+              </a:rPr>
+              <a:t> New action types pluggable without code changes</a:t>
+            </a:r>
+          </a:p>
+        </p:txBody>
+      </p:sp>
     </p:spTree>
   </p:cSld>
   <p:clrMapOvr>
@@ -8793,11 +9862,11 @@
 </file>
 
 <file path=ppt/slides/slide5.xml><?xml version="1.0" encoding="utf-8"?>
-<p:sld xmlns:a="http://schemas.openxmlformats.org/drawingml/2006/main" xmlns:r="http://schemas.openxmlformats.org/officeDocument/2006/relationships" xmlns:mc="http://schemas.openxmlformats.org/markup-compatibility/2006" xmlns:mv="urn:schemas-microsoft-com:mac:vml" xmlns:p="http://schemas.openxmlformats.org/presentationml/2006/main" xmlns:c="http://schemas.openxmlformats.org/drawingml/2006/chart" xmlns:dgm="http://schemas.openxmlformats.org/drawingml/2006/diagram" xmlns:o="urn:schemas-microsoft-com:office:office" xmlns:v="urn:schemas-microsoft-com:vml" xmlns:pvml="urn:schemas-microsoft-com:office:powerpoint" xmlns:com="http://schemas.openxmlformats.org/drawingml/2006/compatibility" xmlns:p14="http://schemas.microsoft.com/office/powerpoint/2010/main" xmlns:p15="http://schemas.microsoft.com/office/powerpoint/2012/main" xmlns:ahyp="http://schemas.microsoft.com/office/drawing/2018/hyperlinkcolor">
+<p:sld xmlns:a="http://schemas.openxmlformats.org/drawingml/2006/main" xmlns:r="http://schemas.openxmlformats.org/officeDocument/2006/relationships" xmlns:p="http://schemas.openxmlformats.org/presentationml/2006/main">
   <p:cSld>
     <p:spTree>
       <p:nvGrpSpPr>
-        <p:cNvPr id="87" name="Shape 87"/>
+        <p:cNvPr id="1" name="Shape 87"/>
         <p:cNvGrpSpPr/>
         <p:nvPr/>
       </p:nvGrpSpPr>
@@ -8812,14 +9881,16 @@
       <p:sp>
         <p:nvSpPr>
           <p:cNvPr id="88" name="Google Shape;88;p17"/>
-          <p:cNvSpPr txBox="1"/>
+          <p:cNvSpPr txBox="1">
+            <a:spLocks noGrp="1"/>
+          </p:cNvSpPr>
           <p:nvPr>
             <p:ph type="ctrTitle"/>
           </p:nvPr>
         </p:nvSpPr>
         <p:spPr>
           <a:xfrm>
-            <a:off x="311700" y="744575"/>
+            <a:off x="311700" y="561524"/>
             <a:ext cx="8520600" cy="447600"/>
           </a:xfrm>
           <a:prstGeom prst="rect">
@@ -8827,12 +9898,12 @@
           </a:prstGeom>
         </p:spPr>
         <p:txBody>
-          <a:bodyPr anchorCtr="0" anchor="b" bIns="91425" lIns="91425" spcFirstLastPara="1" rIns="91425" wrap="square" tIns="91425">
+          <a:bodyPr spcFirstLastPara="1" wrap="square" lIns="91425" tIns="91425" rIns="91425" bIns="91425" anchor="b" anchorCtr="0">
             <a:normAutofit/>
           </a:bodyPr>
           <a:lstStyle/>
           <a:p>
-            <a:pPr indent="0" lvl="0" marL="0" rtl="0" algn="l">
+            <a:pPr marL="0" lvl="0" indent="0" algn="l" rtl="0">
               <a:spcBef>
                 <a:spcPts val="0"/>
               </a:spcBef>
@@ -8843,7 +9914,7 @@
               <a:buNone/>
             </a:pPr>
             <a:r>
-              <a:rPr b="1" lang="en-GB" sz="1620">
+              <a:rPr lang="en-GB" sz="1620" b="1" dirty="0">
                 <a:latin typeface="Poppins"/>
                 <a:ea typeface="Poppins"/>
                 <a:cs typeface="Poppins"/>
@@ -8851,57 +9922,7 @@
               </a:rPr>
               <a:t>Process flow diagram or Use-case diagram</a:t>
             </a:r>
-            <a:endParaRPr b="1" sz="1620">
-              <a:latin typeface="Poppins"/>
-              <a:ea typeface="Poppins"/>
-              <a:cs typeface="Poppins"/>
-              <a:sym typeface="Poppins"/>
-            </a:endParaRPr>
-          </a:p>
-        </p:txBody>
-      </p:sp>
-      <p:sp>
-        <p:nvSpPr>
-          <p:cNvPr id="89" name="Google Shape;89;p17"/>
-          <p:cNvSpPr txBox="1"/>
-          <p:nvPr>
-            <p:ph idx="1" type="subTitle"/>
-          </p:nvPr>
-        </p:nvSpPr>
-        <p:spPr>
-          <a:xfrm>
-            <a:off x="311700" y="1249775"/>
-            <a:ext cx="8520600" cy="3525000"/>
-          </a:xfrm>
-          <a:prstGeom prst="rect">
-            <a:avLst/>
-          </a:prstGeom>
-        </p:spPr>
-        <p:txBody>
-          <a:bodyPr anchorCtr="0" anchor="t" bIns="91425" lIns="91425" spcFirstLastPara="1" rIns="91425" wrap="square" tIns="91425">
-            <a:normAutofit/>
-          </a:bodyPr>
-          <a:lstStyle/>
-          <a:p>
-            <a:pPr indent="0" lvl="0" marL="0" rtl="0" algn="l">
-              <a:spcBef>
-                <a:spcPts val="0"/>
-              </a:spcBef>
-              <a:spcAft>
-                <a:spcPts val="0"/>
-              </a:spcAft>
-              <a:buNone/>
-            </a:pPr>
-            <a:r>
-              <a:rPr lang="en-GB" sz="1300">
-                <a:latin typeface="Poppins"/>
-                <a:ea typeface="Poppins"/>
-                <a:cs typeface="Poppins"/>
-                <a:sym typeface="Poppins"/>
-              </a:rPr>
-              <a:t>Type here</a:t>
-            </a:r>
-            <a:endParaRPr sz="1300">
+            <a:endParaRPr sz="1620" b="1" dirty="0">
               <a:latin typeface="Poppins"/>
               <a:ea typeface="Poppins"/>
               <a:cs typeface="Poppins"/>
@@ -8920,7 +9941,7 @@
           <a:blip r:embed="rId3">
             <a:alphaModFix/>
           </a:blip>
-          <a:srcRect b="89082" l="0" r="0" t="0"/>
+          <a:srcRect b="89082"/>
           <a:stretch/>
         </p:blipFill>
         <p:spPr>
@@ -8947,7 +9968,7 @@
           <a:blip r:embed="rId4">
             <a:alphaModFix/>
           </a:blip>
-          <a:srcRect b="0" l="0" r="0" t="98295"/>
+          <a:srcRect t="98295"/>
           <a:stretch/>
         </p:blipFill>
         <p:spPr>
@@ -8964,6 +9985,68 @@
           </a:ln>
         </p:spPr>
       </p:pic>
+      <p:pic>
+        <p:nvPicPr>
+          <p:cNvPr id="8" name="Picture 7">
+            <a:extLst>
+              <a:ext uri="{FF2B5EF4-FFF2-40B4-BE49-F238E27FC236}">
+                <a16:creationId xmlns:a16="http://schemas.microsoft.com/office/drawing/2014/main" id="{1B688C95-6B1C-E0A5-F8D2-8198F7BF4BB1}"/>
+              </a:ext>
+            </a:extLst>
+          </p:cNvPr>
+          <p:cNvPicPr>
+            <a:picLocks noChangeAspect="1"/>
+          </p:cNvPicPr>
+          <p:nvPr/>
+        </p:nvPicPr>
+        <p:blipFill>
+          <a:blip r:embed="rId5"/>
+          <a:srcRect l="2390" t="3614" r="5984" b="3450"/>
+          <a:stretch>
+            <a:fillRect/>
+          </a:stretch>
+        </p:blipFill>
+        <p:spPr>
+          <a:xfrm>
+            <a:off x="1129456" y="930930"/>
+            <a:ext cx="2617353" cy="4124895"/>
+          </a:xfrm>
+          <a:prstGeom prst="rect">
+            <a:avLst/>
+          </a:prstGeom>
+        </p:spPr>
+      </p:pic>
+      <p:pic>
+        <p:nvPicPr>
+          <p:cNvPr id="10" name="Picture 9">
+            <a:extLst>
+              <a:ext uri="{FF2B5EF4-FFF2-40B4-BE49-F238E27FC236}">
+                <a16:creationId xmlns:a16="http://schemas.microsoft.com/office/drawing/2014/main" id="{59D1ED93-F87B-C9DA-ABD7-7DEDA687F272}"/>
+              </a:ext>
+            </a:extLst>
+          </p:cNvPr>
+          <p:cNvPicPr>
+            <a:picLocks noChangeAspect="1"/>
+          </p:cNvPicPr>
+          <p:nvPr/>
+        </p:nvPicPr>
+        <p:blipFill>
+          <a:blip r:embed="rId6"/>
+          <a:srcRect t="4157" b="4737"/>
+          <a:stretch>
+            <a:fillRect/>
+          </a:stretch>
+        </p:blipFill>
+        <p:spPr>
+          <a:xfrm>
+            <a:off x="4878304" y="1076198"/>
+            <a:ext cx="3574708" cy="3834358"/>
+          </a:xfrm>
+          <a:prstGeom prst="rect">
+            <a:avLst/>
+          </a:prstGeom>
+        </p:spPr>
+      </p:pic>
     </p:spTree>
   </p:cSld>
   <p:clrMapOvr>
@@ -8973,11 +10056,11 @@
 </file>
 
 <file path=ppt/slides/slide6.xml><?xml version="1.0" encoding="utf-8"?>
-<p:sld xmlns:a="http://schemas.openxmlformats.org/drawingml/2006/main" xmlns:r="http://schemas.openxmlformats.org/officeDocument/2006/relationships" xmlns:mc="http://schemas.openxmlformats.org/markup-compatibility/2006" xmlns:mv="urn:schemas-microsoft-com:mac:vml" xmlns:p="http://schemas.openxmlformats.org/presentationml/2006/main" xmlns:c="http://schemas.openxmlformats.org/drawingml/2006/chart" xmlns:dgm="http://schemas.openxmlformats.org/drawingml/2006/diagram" xmlns:o="urn:schemas-microsoft-com:office:office" xmlns:v="urn:schemas-microsoft-com:vml" xmlns:pvml="urn:schemas-microsoft-com:office:powerpoint" xmlns:com="http://schemas.openxmlformats.org/drawingml/2006/compatibility" xmlns:p14="http://schemas.microsoft.com/office/powerpoint/2010/main" xmlns:p15="http://schemas.microsoft.com/office/powerpoint/2012/main" xmlns:ahyp="http://schemas.microsoft.com/office/drawing/2018/hyperlinkcolor">
+<p:sld xmlns:a="http://schemas.openxmlformats.org/drawingml/2006/main" xmlns:r="http://schemas.openxmlformats.org/officeDocument/2006/relationships" xmlns:p="http://schemas.openxmlformats.org/presentationml/2006/main">
   <p:cSld>
     <p:spTree>
       <p:nvGrpSpPr>
-        <p:cNvPr id="95" name="Shape 95"/>
+        <p:cNvPr id="1" name="Shape 95"/>
         <p:cNvGrpSpPr/>
         <p:nvPr/>
       </p:nvGrpSpPr>
@@ -8992,14 +10075,16 @@
       <p:sp>
         <p:nvSpPr>
           <p:cNvPr id="96" name="Google Shape;96;p18"/>
-          <p:cNvSpPr txBox="1"/>
+          <p:cNvSpPr txBox="1">
+            <a:spLocks noGrp="1"/>
+          </p:cNvSpPr>
           <p:nvPr>
             <p:ph type="ctrTitle"/>
           </p:nvPr>
         </p:nvSpPr>
         <p:spPr>
           <a:xfrm>
-            <a:off x="311700" y="744575"/>
+            <a:off x="311700" y="561524"/>
             <a:ext cx="8520600" cy="447600"/>
           </a:xfrm>
           <a:prstGeom prst="rect">
@@ -9007,12 +10092,12 @@
           </a:prstGeom>
         </p:spPr>
         <p:txBody>
-          <a:bodyPr anchorCtr="0" anchor="b" bIns="91425" lIns="91425" spcFirstLastPara="1" rIns="91425" wrap="square" tIns="91425">
+          <a:bodyPr spcFirstLastPara="1" wrap="square" lIns="91425" tIns="91425" rIns="91425" bIns="91425" anchor="b" anchorCtr="0">
             <a:normAutofit/>
           </a:bodyPr>
           <a:lstStyle/>
           <a:p>
-            <a:pPr indent="0" lvl="0" marL="0" rtl="0" algn="l">
+            <a:pPr marL="0" lvl="0" indent="0" algn="l" rtl="0">
               <a:spcBef>
                 <a:spcPts val="0"/>
               </a:spcBef>
@@ -9023,65 +10108,15 @@
               <a:buNone/>
             </a:pPr>
             <a:r>
-              <a:rPr b="1" lang="en-GB" sz="1620">
+              <a:rPr lang="en-GB" sz="1620" b="1" dirty="0">
                 <a:latin typeface="Poppins"/>
                 <a:ea typeface="Poppins"/>
                 <a:cs typeface="Poppins"/>
                 <a:sym typeface="Poppins"/>
               </a:rPr>
-              <a:t>Wireframes/Mock diagrams of the proposed solution (optional)</a:t>
-            </a:r>
-            <a:endParaRPr b="1" sz="1620">
-              <a:latin typeface="Poppins"/>
-              <a:ea typeface="Poppins"/>
-              <a:cs typeface="Poppins"/>
-              <a:sym typeface="Poppins"/>
-            </a:endParaRPr>
-          </a:p>
-        </p:txBody>
-      </p:sp>
-      <p:sp>
-        <p:nvSpPr>
-          <p:cNvPr id="97" name="Google Shape;97;p18"/>
-          <p:cNvSpPr txBox="1"/>
-          <p:nvPr>
-            <p:ph idx="1" type="subTitle"/>
-          </p:nvPr>
-        </p:nvSpPr>
-        <p:spPr>
-          <a:xfrm>
-            <a:off x="311700" y="1249775"/>
-            <a:ext cx="8520600" cy="3525000"/>
-          </a:xfrm>
-          <a:prstGeom prst="rect">
-            <a:avLst/>
-          </a:prstGeom>
-        </p:spPr>
-        <p:txBody>
-          <a:bodyPr anchorCtr="0" anchor="t" bIns="91425" lIns="91425" spcFirstLastPara="1" rIns="91425" wrap="square" tIns="91425">
-            <a:normAutofit/>
-          </a:bodyPr>
-          <a:lstStyle/>
-          <a:p>
-            <a:pPr indent="0" lvl="0" marL="0" rtl="0" algn="l">
-              <a:spcBef>
-                <a:spcPts val="0"/>
-              </a:spcBef>
-              <a:spcAft>
-                <a:spcPts val="0"/>
-              </a:spcAft>
-              <a:buNone/>
-            </a:pPr>
-            <a:r>
-              <a:rPr lang="en-GB" sz="1300">
-                <a:latin typeface="Poppins"/>
-                <a:ea typeface="Poppins"/>
-                <a:cs typeface="Poppins"/>
-                <a:sym typeface="Poppins"/>
-              </a:rPr>
-              <a:t>Type here</a:t>
-            </a:r>
-            <a:endParaRPr sz="1300">
+              <a:t>Wireframes/Mock diagrams of the proposed solution</a:t>
+            </a:r>
+            <a:endParaRPr sz="1620" b="1" dirty="0">
               <a:latin typeface="Poppins"/>
               <a:ea typeface="Poppins"/>
               <a:cs typeface="Poppins"/>
@@ -9100,7 +10135,7 @@
           <a:blip r:embed="rId3">
             <a:alphaModFix/>
           </a:blip>
-          <a:srcRect b="89082" l="0" r="0" t="0"/>
+          <a:srcRect b="89082"/>
           <a:stretch/>
         </p:blipFill>
         <p:spPr>
@@ -9127,7 +10162,7 @@
           <a:blip r:embed="rId4">
             <a:alphaModFix/>
           </a:blip>
-          <a:srcRect b="0" l="0" r="0" t="98295"/>
+          <a:srcRect t="98295"/>
           <a:stretch/>
         </p:blipFill>
         <p:spPr>
@@ -9144,6 +10179,96 @@
           </a:ln>
         </p:spPr>
       </p:pic>
+      <p:pic>
+        <p:nvPicPr>
+          <p:cNvPr id="5" name="Picture 4">
+            <a:extLst>
+              <a:ext uri="{FF2B5EF4-FFF2-40B4-BE49-F238E27FC236}">
+                <a16:creationId xmlns:a16="http://schemas.microsoft.com/office/drawing/2014/main" id="{DD56DDE2-539B-F5BE-A4EE-B4C5A02ACE33}"/>
+              </a:ext>
+            </a:extLst>
+          </p:cNvPr>
+          <p:cNvPicPr>
+            <a:picLocks noChangeAspect="1"/>
+          </p:cNvPicPr>
+          <p:nvPr/>
+        </p:nvPicPr>
+        <p:blipFill>
+          <a:blip r:embed="rId5"/>
+          <a:stretch>
+            <a:fillRect/>
+          </a:stretch>
+        </p:blipFill>
+        <p:spPr>
+          <a:xfrm>
+            <a:off x="311700" y="937707"/>
+            <a:ext cx="4114407" cy="2018184"/>
+          </a:xfrm>
+          <a:prstGeom prst="rect">
+            <a:avLst/>
+          </a:prstGeom>
+        </p:spPr>
+      </p:pic>
+      <p:pic>
+        <p:nvPicPr>
+          <p:cNvPr id="7" name="Picture 6">
+            <a:extLst>
+              <a:ext uri="{FF2B5EF4-FFF2-40B4-BE49-F238E27FC236}">
+                <a16:creationId xmlns:a16="http://schemas.microsoft.com/office/drawing/2014/main" id="{1824E8C8-B780-4E84-5915-176D937E1DBA}"/>
+              </a:ext>
+            </a:extLst>
+          </p:cNvPr>
+          <p:cNvPicPr>
+            <a:picLocks noChangeAspect="1"/>
+          </p:cNvPicPr>
+          <p:nvPr/>
+        </p:nvPicPr>
+        <p:blipFill>
+          <a:blip r:embed="rId6"/>
+          <a:stretch>
+            <a:fillRect/>
+          </a:stretch>
+        </p:blipFill>
+        <p:spPr>
+          <a:xfrm>
+            <a:off x="4572000" y="1870217"/>
+            <a:ext cx="4366954" cy="2018184"/>
+          </a:xfrm>
+          <a:prstGeom prst="rect">
+            <a:avLst/>
+          </a:prstGeom>
+        </p:spPr>
+      </p:pic>
+      <p:pic>
+        <p:nvPicPr>
+          <p:cNvPr id="9" name="Picture 8">
+            <a:extLst>
+              <a:ext uri="{FF2B5EF4-FFF2-40B4-BE49-F238E27FC236}">
+                <a16:creationId xmlns:a16="http://schemas.microsoft.com/office/drawing/2014/main" id="{5FEEF59A-441F-CDFA-C7A0-5E29482761B6}"/>
+              </a:ext>
+            </a:extLst>
+          </p:cNvPr>
+          <p:cNvPicPr>
+            <a:picLocks noChangeAspect="1"/>
+          </p:cNvPicPr>
+          <p:nvPr/>
+        </p:nvPicPr>
+        <p:blipFill>
+          <a:blip r:embed="rId7"/>
+          <a:stretch>
+            <a:fillRect/>
+          </a:stretch>
+        </p:blipFill>
+        <p:spPr>
+          <a:xfrm>
+            <a:off x="305079" y="3032474"/>
+            <a:ext cx="4121551" cy="2018184"/>
+          </a:xfrm>
+          <a:prstGeom prst="rect">
+            <a:avLst/>
+          </a:prstGeom>
+        </p:spPr>
+      </p:pic>
     </p:spTree>
   </p:cSld>
   <p:clrMapOvr>
@@ -9153,11 +10278,11 @@
 </file>
 
 <file path=ppt/slides/slide7.xml><?xml version="1.0" encoding="utf-8"?>
-<p:sld xmlns:a="http://schemas.openxmlformats.org/drawingml/2006/main" xmlns:r="http://schemas.openxmlformats.org/officeDocument/2006/relationships" xmlns:mc="http://schemas.openxmlformats.org/markup-compatibility/2006" xmlns:mv="urn:schemas-microsoft-com:mac:vml" xmlns:p="http://schemas.openxmlformats.org/presentationml/2006/main" xmlns:c="http://schemas.openxmlformats.org/drawingml/2006/chart" xmlns:dgm="http://schemas.openxmlformats.org/drawingml/2006/diagram" xmlns:o="urn:schemas-microsoft-com:office:office" xmlns:v="urn:schemas-microsoft-com:vml" xmlns:pvml="urn:schemas-microsoft-com:office:powerpoint" xmlns:com="http://schemas.openxmlformats.org/drawingml/2006/compatibility" xmlns:p14="http://schemas.microsoft.com/office/powerpoint/2010/main" xmlns:p15="http://schemas.microsoft.com/office/powerpoint/2012/main" xmlns:ahyp="http://schemas.microsoft.com/office/drawing/2018/hyperlinkcolor">
+<p:sld xmlns:a="http://schemas.openxmlformats.org/drawingml/2006/main" xmlns:r="http://schemas.openxmlformats.org/officeDocument/2006/relationships" xmlns:p="http://schemas.openxmlformats.org/presentationml/2006/main">
   <p:cSld>
     <p:spTree>
       <p:nvGrpSpPr>
-        <p:cNvPr id="103" name="Shape 103"/>
+        <p:cNvPr id="1" name="Shape 103"/>
         <p:cNvGrpSpPr/>
         <p:nvPr/>
       </p:nvGrpSpPr>
@@ -9169,107 +10294,6 @@
           <a:chExt cx="0" cy="0"/>
         </a:xfrm>
       </p:grpSpPr>
-      <p:sp>
-        <p:nvSpPr>
-          <p:cNvPr id="104" name="Google Shape;104;p19"/>
-          <p:cNvSpPr txBox="1"/>
-          <p:nvPr>
-            <p:ph type="ctrTitle"/>
-          </p:nvPr>
-        </p:nvSpPr>
-        <p:spPr>
-          <a:xfrm>
-            <a:off x="311700" y="744575"/>
-            <a:ext cx="8520600" cy="447600"/>
-          </a:xfrm>
-          <a:prstGeom prst="rect">
-            <a:avLst/>
-          </a:prstGeom>
-        </p:spPr>
-        <p:txBody>
-          <a:bodyPr anchorCtr="0" anchor="b" bIns="91425" lIns="91425" spcFirstLastPara="1" rIns="91425" wrap="square" tIns="91425">
-            <a:normAutofit/>
-          </a:bodyPr>
-          <a:lstStyle/>
-          <a:p>
-            <a:pPr indent="0" lvl="0" marL="0" rtl="0" algn="l">
-              <a:spcBef>
-                <a:spcPts val="0"/>
-              </a:spcBef>
-              <a:spcAft>
-                <a:spcPts val="0"/>
-              </a:spcAft>
-              <a:buSzPts val="990"/>
-              <a:buNone/>
-            </a:pPr>
-            <a:r>
-              <a:rPr b="1" lang="en-GB" sz="1620">
-                <a:latin typeface="Poppins"/>
-                <a:ea typeface="Poppins"/>
-                <a:cs typeface="Poppins"/>
-                <a:sym typeface="Poppins"/>
-              </a:rPr>
-              <a:t>Architecture diagram of the proposed solution</a:t>
-            </a:r>
-            <a:endParaRPr b="1" sz="1620">
-              <a:latin typeface="Poppins"/>
-              <a:ea typeface="Poppins"/>
-              <a:cs typeface="Poppins"/>
-              <a:sym typeface="Poppins"/>
-            </a:endParaRPr>
-          </a:p>
-        </p:txBody>
-      </p:sp>
-      <p:sp>
-        <p:nvSpPr>
-          <p:cNvPr id="105" name="Google Shape;105;p19"/>
-          <p:cNvSpPr txBox="1"/>
-          <p:nvPr>
-            <p:ph idx="1" type="subTitle"/>
-          </p:nvPr>
-        </p:nvSpPr>
-        <p:spPr>
-          <a:xfrm>
-            <a:off x="311700" y="1249775"/>
-            <a:ext cx="8520600" cy="3525000"/>
-          </a:xfrm>
-          <a:prstGeom prst="rect">
-            <a:avLst/>
-          </a:prstGeom>
-        </p:spPr>
-        <p:txBody>
-          <a:bodyPr anchorCtr="0" anchor="t" bIns="91425" lIns="91425" spcFirstLastPara="1" rIns="91425" wrap="square" tIns="91425">
-            <a:normAutofit/>
-          </a:bodyPr>
-          <a:lstStyle/>
-          <a:p>
-            <a:pPr indent="0" lvl="0" marL="0" rtl="0" algn="l">
-              <a:spcBef>
-                <a:spcPts val="0"/>
-              </a:spcBef>
-              <a:spcAft>
-                <a:spcPts val="0"/>
-              </a:spcAft>
-              <a:buNone/>
-            </a:pPr>
-            <a:r>
-              <a:rPr lang="en-GB" sz="1300">
-                <a:latin typeface="Poppins"/>
-                <a:ea typeface="Poppins"/>
-                <a:cs typeface="Poppins"/>
-                <a:sym typeface="Poppins"/>
-              </a:rPr>
-              <a:t>Type here</a:t>
-            </a:r>
-            <a:endParaRPr sz="1300">
-              <a:latin typeface="Poppins"/>
-              <a:ea typeface="Poppins"/>
-              <a:cs typeface="Poppins"/>
-              <a:sym typeface="Poppins"/>
-            </a:endParaRPr>
-          </a:p>
-        </p:txBody>
-      </p:sp>
       <p:pic>
         <p:nvPicPr>
           <p:cNvPr id="106" name="Google Shape;106;p19" title="AMD.PS.S22.png"/>
@@ -9280,7 +10304,7 @@
           <a:blip r:embed="rId3">
             <a:alphaModFix/>
           </a:blip>
-          <a:srcRect b="89082" l="0" r="0" t="0"/>
+          <a:srcRect b="89082"/>
           <a:stretch/>
         </p:blipFill>
         <p:spPr>
@@ -9307,7 +10331,7 @@
           <a:blip r:embed="rId4">
             <a:alphaModFix/>
           </a:blip>
-          <a:srcRect b="0" l="0" r="0" t="98295"/>
+          <a:srcRect t="98295"/>
           <a:stretch/>
         </p:blipFill>
         <p:spPr>
@@ -9324,6 +10348,37 @@
           </a:ln>
         </p:spPr>
       </p:pic>
+      <p:pic>
+        <p:nvPicPr>
+          <p:cNvPr id="5" name="Picture 4">
+            <a:extLst>
+              <a:ext uri="{FF2B5EF4-FFF2-40B4-BE49-F238E27FC236}">
+                <a16:creationId xmlns:a16="http://schemas.microsoft.com/office/drawing/2014/main" id="{9B396C32-FD1C-0884-8481-8171AE43547D}"/>
+              </a:ext>
+            </a:extLst>
+          </p:cNvPr>
+          <p:cNvPicPr>
+            <a:picLocks noChangeAspect="1"/>
+          </p:cNvPicPr>
+          <p:nvPr/>
+        </p:nvPicPr>
+        <p:blipFill>
+          <a:blip r:embed="rId5"/>
+          <a:srcRect l="5571" t="5166" r="3524" b="8364"/>
+          <a:stretch>
+            <a:fillRect/>
+          </a:stretch>
+        </p:blipFill>
+        <p:spPr>
+          <a:xfrm>
+            <a:off x="1484616" y="616036"/>
+            <a:ext cx="6174767" cy="4439789"/>
+          </a:xfrm>
+          <a:prstGeom prst="rect">
+            <a:avLst/>
+          </a:prstGeom>
+        </p:spPr>
+      </p:pic>
     </p:spTree>
   </p:cSld>
   <p:clrMapOvr>
@@ -9333,11 +10388,11 @@
 </file>
 
 <file path=ppt/slides/slide8.xml><?xml version="1.0" encoding="utf-8"?>
-<p:sld xmlns:a="http://schemas.openxmlformats.org/drawingml/2006/main" xmlns:r="http://schemas.openxmlformats.org/officeDocument/2006/relationships" xmlns:mc="http://schemas.openxmlformats.org/markup-compatibility/2006" xmlns:mv="urn:schemas-microsoft-com:mac:vml" xmlns:p="http://schemas.openxmlformats.org/presentationml/2006/main" xmlns:c="http://schemas.openxmlformats.org/drawingml/2006/chart" xmlns:dgm="http://schemas.openxmlformats.org/drawingml/2006/diagram" xmlns:o="urn:schemas-microsoft-com:office:office" xmlns:v="urn:schemas-microsoft-com:vml" xmlns:pvml="urn:schemas-microsoft-com:office:powerpoint" xmlns:com="http://schemas.openxmlformats.org/drawingml/2006/compatibility" xmlns:p14="http://schemas.microsoft.com/office/powerpoint/2010/main" xmlns:p15="http://schemas.microsoft.com/office/powerpoint/2012/main" xmlns:ahyp="http://schemas.microsoft.com/office/drawing/2018/hyperlinkcolor">
+<p:sld xmlns:a="http://schemas.openxmlformats.org/drawingml/2006/main" xmlns:r="http://schemas.openxmlformats.org/officeDocument/2006/relationships" xmlns:p="http://schemas.openxmlformats.org/presentationml/2006/main">
   <p:cSld>
     <p:spTree>
       <p:nvGrpSpPr>
-        <p:cNvPr id="111" name="Shape 111"/>
+        <p:cNvPr id="1" name="Shape 111"/>
         <p:cNvGrpSpPr/>
         <p:nvPr/>
       </p:nvGrpSpPr>
@@ -9352,14 +10407,16 @@
       <p:sp>
         <p:nvSpPr>
           <p:cNvPr id="112" name="Google Shape;112;p20"/>
-          <p:cNvSpPr txBox="1"/>
+          <p:cNvSpPr txBox="1">
+            <a:spLocks noGrp="1"/>
+          </p:cNvSpPr>
           <p:nvPr>
             <p:ph type="ctrTitle"/>
           </p:nvPr>
         </p:nvSpPr>
         <p:spPr>
           <a:xfrm>
-            <a:off x="311700" y="744575"/>
+            <a:off x="300548" y="592783"/>
             <a:ext cx="8520600" cy="447600"/>
           </a:xfrm>
           <a:prstGeom prst="rect">
@@ -9367,12 +10424,12 @@
           </a:prstGeom>
         </p:spPr>
         <p:txBody>
-          <a:bodyPr anchorCtr="0" anchor="b" bIns="91425" lIns="91425" spcFirstLastPara="1" rIns="91425" wrap="square" tIns="91425">
+          <a:bodyPr spcFirstLastPara="1" wrap="square" lIns="91425" tIns="91425" rIns="91425" bIns="91425" anchor="b" anchorCtr="0">
             <a:normAutofit/>
           </a:bodyPr>
           <a:lstStyle/>
           <a:p>
-            <a:pPr indent="0" lvl="0" marL="0" rtl="0" algn="l">
+            <a:pPr marL="0" lvl="0" indent="0" algn="l" rtl="0">
               <a:spcBef>
                 <a:spcPts val="0"/>
               </a:spcBef>
@@ -9383,7 +10440,7 @@
               <a:buNone/>
             </a:pPr>
             <a:r>
-              <a:rPr b="1" lang="en-GB" sz="1620">
+              <a:rPr lang="en-GB" sz="1620" b="1" dirty="0">
                 <a:latin typeface="Poppins"/>
                 <a:ea typeface="Poppins"/>
                 <a:cs typeface="Poppins"/>
@@ -9391,57 +10448,7 @@
               </a:rPr>
               <a:t>Technologies to be used in the solution</a:t>
             </a:r>
-            <a:endParaRPr b="1" sz="1620">
-              <a:latin typeface="Poppins"/>
-              <a:ea typeface="Poppins"/>
-              <a:cs typeface="Poppins"/>
-              <a:sym typeface="Poppins"/>
-            </a:endParaRPr>
-          </a:p>
-        </p:txBody>
-      </p:sp>
-      <p:sp>
-        <p:nvSpPr>
-          <p:cNvPr id="113" name="Google Shape;113;p20"/>
-          <p:cNvSpPr txBox="1"/>
-          <p:nvPr>
-            <p:ph idx="1" type="subTitle"/>
-          </p:nvPr>
-        </p:nvSpPr>
-        <p:spPr>
-          <a:xfrm>
-            <a:off x="311700" y="1249775"/>
-            <a:ext cx="8520600" cy="3525000"/>
-          </a:xfrm>
-          <a:prstGeom prst="rect">
-            <a:avLst/>
-          </a:prstGeom>
-        </p:spPr>
-        <p:txBody>
-          <a:bodyPr anchorCtr="0" anchor="t" bIns="91425" lIns="91425" spcFirstLastPara="1" rIns="91425" wrap="square" tIns="91425">
-            <a:normAutofit/>
-          </a:bodyPr>
-          <a:lstStyle/>
-          <a:p>
-            <a:pPr indent="0" lvl="0" marL="0" rtl="0" algn="l">
-              <a:spcBef>
-                <a:spcPts val="0"/>
-              </a:spcBef>
-              <a:spcAft>
-                <a:spcPts val="0"/>
-              </a:spcAft>
-              <a:buNone/>
-            </a:pPr>
-            <a:r>
-              <a:rPr lang="en-GB" sz="1300">
-                <a:latin typeface="Poppins"/>
-                <a:ea typeface="Poppins"/>
-                <a:cs typeface="Poppins"/>
-                <a:sym typeface="Poppins"/>
-              </a:rPr>
-              <a:t>Type here</a:t>
-            </a:r>
-            <a:endParaRPr sz="1300">
+            <a:endParaRPr sz="1620" b="1" dirty="0">
               <a:latin typeface="Poppins"/>
               <a:ea typeface="Poppins"/>
               <a:cs typeface="Poppins"/>
@@ -9460,7 +10467,7 @@
           <a:blip r:embed="rId3">
             <a:alphaModFix/>
           </a:blip>
-          <a:srcRect b="89082" l="0" r="0" t="0"/>
+          <a:srcRect b="89082"/>
           <a:stretch/>
         </p:blipFill>
         <p:spPr>
@@ -9487,7 +10494,7 @@
           <a:blip r:embed="rId4">
             <a:alphaModFix/>
           </a:blip>
-          <a:srcRect b="0" l="0" r="0" t="98295"/>
+          <a:srcRect t="98295"/>
           <a:stretch/>
         </p:blipFill>
         <p:spPr>
@@ -9504,6 +10511,741 @@
           </a:ln>
         </p:spPr>
       </p:pic>
+      <p:sp>
+        <p:nvSpPr>
+          <p:cNvPr id="4" name="TextBox 3">
+            <a:extLst>
+              <a:ext uri="{FF2B5EF4-FFF2-40B4-BE49-F238E27FC236}">
+                <a16:creationId xmlns:a16="http://schemas.microsoft.com/office/drawing/2014/main" id="{E73B715B-B7EB-6FA8-8283-DA6D7A8131D6}"/>
+              </a:ext>
+            </a:extLst>
+          </p:cNvPr>
+          <p:cNvSpPr txBox="1"/>
+          <p:nvPr/>
+        </p:nvSpPr>
+        <p:spPr>
+          <a:xfrm>
+            <a:off x="300548" y="994256"/>
+            <a:ext cx="8363415" cy="4154984"/>
+          </a:xfrm>
+          <a:prstGeom prst="rect">
+            <a:avLst/>
+          </a:prstGeom>
+          <a:noFill/>
+        </p:spPr>
+        <p:txBody>
+          <a:bodyPr wrap="square" rtlCol="0">
+            <a:spAutoFit/>
+          </a:bodyPr>
+          <a:lstStyle/>
+          <a:p>
+            <a:r>
+              <a:rPr lang="en-IN" sz="1100" b="1" dirty="0">
+                <a:latin typeface="Poppins" panose="00000500000000000000" pitchFamily="2" charset="0"/>
+                <a:cs typeface="Poppins" panose="00000500000000000000" pitchFamily="2" charset="0"/>
+              </a:rPr>
+              <a:t>Frontend &amp; User Interface</a:t>
+            </a:r>
+          </a:p>
+          <a:p>
+            <a:r>
+              <a:rPr lang="en-IN" sz="1100" b="1" dirty="0">
+                <a:latin typeface="Poppins" panose="00000500000000000000" pitchFamily="2" charset="0"/>
+                <a:cs typeface="Poppins" panose="00000500000000000000" pitchFamily="2" charset="0"/>
+              </a:rPr>
+              <a:t>Core Framework</a:t>
+            </a:r>
+            <a:r>
+              <a:rPr lang="en-IN" sz="1100" dirty="0">
+                <a:latin typeface="Poppins" panose="00000500000000000000" pitchFamily="2" charset="0"/>
+                <a:cs typeface="Poppins" panose="00000500000000000000" pitchFamily="2" charset="0"/>
+              </a:rPr>
+              <a:t>: </a:t>
+            </a:r>
+            <a:r>
+              <a:rPr lang="en-IN" sz="1100" b="1" dirty="0">
+                <a:latin typeface="Poppins" panose="00000500000000000000" pitchFamily="2" charset="0"/>
+                <a:cs typeface="Poppins" panose="00000500000000000000" pitchFamily="2" charset="0"/>
+              </a:rPr>
+              <a:t>React 18.3</a:t>
+            </a:r>
+            <a:r>
+              <a:rPr lang="en-IN" sz="1100" dirty="0">
+                <a:latin typeface="Poppins" panose="00000500000000000000" pitchFamily="2" charset="0"/>
+                <a:cs typeface="Poppins" panose="00000500000000000000" pitchFamily="2" charset="0"/>
+              </a:rPr>
+              <a:t> with </a:t>
+            </a:r>
+            <a:r>
+              <a:rPr lang="en-IN" sz="1100" b="1" dirty="0">
+                <a:latin typeface="Poppins" panose="00000500000000000000" pitchFamily="2" charset="0"/>
+                <a:cs typeface="Poppins" panose="00000500000000000000" pitchFamily="2" charset="0"/>
+              </a:rPr>
+              <a:t>React Router 6</a:t>
+            </a:r>
+            <a:r>
+              <a:rPr lang="en-IN" sz="1100" dirty="0">
+                <a:latin typeface="Poppins" panose="00000500000000000000" pitchFamily="2" charset="0"/>
+                <a:cs typeface="Poppins" panose="00000500000000000000" pitchFamily="2" charset="0"/>
+              </a:rPr>
+              <a:t> for high-performance dashboard navigation.</a:t>
+            </a:r>
+          </a:p>
+          <a:p>
+            <a:r>
+              <a:rPr lang="en-IN" sz="1100" b="1" dirty="0">
+                <a:latin typeface="Poppins" panose="00000500000000000000" pitchFamily="2" charset="0"/>
+                <a:cs typeface="Poppins" panose="00000500000000000000" pitchFamily="2" charset="0"/>
+              </a:rPr>
+              <a:t>Styling &amp; Visualization</a:t>
+            </a:r>
+            <a:r>
+              <a:rPr lang="en-IN" sz="1100" dirty="0">
+                <a:latin typeface="Poppins" panose="00000500000000000000" pitchFamily="2" charset="0"/>
+                <a:cs typeface="Poppins" panose="00000500000000000000" pitchFamily="2" charset="0"/>
+              </a:rPr>
+              <a:t>: </a:t>
+            </a:r>
+            <a:r>
+              <a:rPr lang="en-IN" sz="1100" b="1" dirty="0">
+                <a:latin typeface="Poppins" panose="00000500000000000000" pitchFamily="2" charset="0"/>
+                <a:cs typeface="Poppins" panose="00000500000000000000" pitchFamily="2" charset="0"/>
+              </a:rPr>
+              <a:t>Tailwind CSS</a:t>
+            </a:r>
+            <a:r>
+              <a:rPr lang="en-IN" sz="1100" dirty="0">
+                <a:latin typeface="Poppins" panose="00000500000000000000" pitchFamily="2" charset="0"/>
+                <a:cs typeface="Poppins" panose="00000500000000000000" pitchFamily="2" charset="0"/>
+              </a:rPr>
+              <a:t> for responsive design and </a:t>
+            </a:r>
+            <a:r>
+              <a:rPr lang="en-IN" sz="1100" b="1" dirty="0">
+                <a:latin typeface="Poppins" panose="00000500000000000000" pitchFamily="2" charset="0"/>
+                <a:cs typeface="Poppins" panose="00000500000000000000" pitchFamily="2" charset="0"/>
+              </a:rPr>
+              <a:t>Recharts</a:t>
+            </a:r>
+            <a:r>
+              <a:rPr lang="en-IN" sz="1100" dirty="0">
+                <a:latin typeface="Poppins" panose="00000500000000000000" pitchFamily="2" charset="0"/>
+                <a:cs typeface="Poppins" panose="00000500000000000000" pitchFamily="2" charset="0"/>
+              </a:rPr>
+              <a:t> for data-heavy analytics.</a:t>
+            </a:r>
+          </a:p>
+          <a:p>
+            <a:r>
+              <a:rPr lang="en-IN" sz="1100" b="1" dirty="0">
+                <a:latin typeface="Poppins" panose="00000500000000000000" pitchFamily="2" charset="0"/>
+                <a:cs typeface="Poppins" panose="00000500000000000000" pitchFamily="2" charset="0"/>
+              </a:rPr>
+              <a:t>Connectivity</a:t>
+            </a:r>
+            <a:r>
+              <a:rPr lang="en-IN" sz="1100" dirty="0">
+                <a:latin typeface="Poppins" panose="00000500000000000000" pitchFamily="2" charset="0"/>
+                <a:cs typeface="Poppins" panose="00000500000000000000" pitchFamily="2" charset="0"/>
+              </a:rPr>
+              <a:t>: </a:t>
+            </a:r>
+            <a:r>
+              <a:rPr lang="en-IN" sz="1100" b="1" dirty="0">
+                <a:latin typeface="Poppins" panose="00000500000000000000" pitchFamily="2" charset="0"/>
+                <a:cs typeface="Poppins" panose="00000500000000000000" pitchFamily="2" charset="0"/>
+              </a:rPr>
+              <a:t>Axios</a:t>
+            </a:r>
+            <a:r>
+              <a:rPr lang="en-IN" sz="1100" dirty="0">
+                <a:latin typeface="Poppins" panose="00000500000000000000" pitchFamily="2" charset="0"/>
+                <a:cs typeface="Poppins" panose="00000500000000000000" pitchFamily="2" charset="0"/>
+              </a:rPr>
+              <a:t> and </a:t>
+            </a:r>
+            <a:r>
+              <a:rPr lang="en-IN" sz="1100" b="1" dirty="0">
+                <a:latin typeface="Poppins" panose="00000500000000000000" pitchFamily="2" charset="0"/>
+                <a:cs typeface="Poppins" panose="00000500000000000000" pitchFamily="2" charset="0"/>
+              </a:rPr>
+              <a:t>Socket.io</a:t>
+            </a:r>
+            <a:r>
+              <a:rPr lang="en-IN" sz="1100" dirty="0">
+                <a:latin typeface="Poppins" panose="00000500000000000000" pitchFamily="2" charset="0"/>
+                <a:cs typeface="Poppins" panose="00000500000000000000" pitchFamily="2" charset="0"/>
+              </a:rPr>
+              <a:t> for seamless, real-time API and WebSocket communication.</a:t>
+            </a:r>
+          </a:p>
+          <a:p>
+            <a:endParaRPr lang="en-IN" sz="1100" b="1" dirty="0">
+              <a:latin typeface="Poppins" panose="00000500000000000000" pitchFamily="2" charset="0"/>
+              <a:cs typeface="Poppins" panose="00000500000000000000" pitchFamily="2" charset="0"/>
+            </a:endParaRPr>
+          </a:p>
+          <a:p>
+            <a:r>
+              <a:rPr lang="en-IN" sz="1100" b="1" dirty="0">
+                <a:latin typeface="Poppins" panose="00000500000000000000" pitchFamily="2" charset="0"/>
+                <a:cs typeface="Poppins" panose="00000500000000000000" pitchFamily="2" charset="0"/>
+              </a:rPr>
+              <a:t>Backend &amp; Infrastructure</a:t>
+            </a:r>
+          </a:p>
+          <a:p>
+            <a:r>
+              <a:rPr lang="en-IN" sz="1100" b="1" dirty="0">
+                <a:latin typeface="Poppins" panose="00000500000000000000" pitchFamily="2" charset="0"/>
+                <a:cs typeface="Poppins" panose="00000500000000000000" pitchFamily="2" charset="0"/>
+              </a:rPr>
+              <a:t>API Layer</a:t>
+            </a:r>
+            <a:r>
+              <a:rPr lang="en-IN" sz="1100" dirty="0">
+                <a:latin typeface="Poppins" panose="00000500000000000000" pitchFamily="2" charset="0"/>
+                <a:cs typeface="Poppins" panose="00000500000000000000" pitchFamily="2" charset="0"/>
+              </a:rPr>
+              <a:t>: </a:t>
+            </a:r>
+            <a:r>
+              <a:rPr lang="en-IN" sz="1100" b="1" dirty="0">
+                <a:latin typeface="Poppins" panose="00000500000000000000" pitchFamily="2" charset="0"/>
+                <a:cs typeface="Poppins" panose="00000500000000000000" pitchFamily="2" charset="0"/>
+              </a:rPr>
+              <a:t>Python 3.11</a:t>
+            </a:r>
+            <a:r>
+              <a:rPr lang="en-IN" sz="1100" dirty="0">
+                <a:latin typeface="Poppins" panose="00000500000000000000" pitchFamily="2" charset="0"/>
+                <a:cs typeface="Poppins" panose="00000500000000000000" pitchFamily="2" charset="0"/>
+              </a:rPr>
+              <a:t> powered by the </a:t>
+            </a:r>
+            <a:r>
+              <a:rPr lang="en-IN" sz="1100" b="1" dirty="0" err="1">
+                <a:latin typeface="Poppins" panose="00000500000000000000" pitchFamily="2" charset="0"/>
+                <a:cs typeface="Poppins" panose="00000500000000000000" pitchFamily="2" charset="0"/>
+              </a:rPr>
+              <a:t>FastAPI</a:t>
+            </a:r>
+            <a:r>
+              <a:rPr lang="en-IN" sz="1100" dirty="0">
+                <a:latin typeface="Poppins" panose="00000500000000000000" pitchFamily="2" charset="0"/>
+                <a:cs typeface="Poppins" panose="00000500000000000000" pitchFamily="2" charset="0"/>
+              </a:rPr>
+              <a:t> async framework.</a:t>
+            </a:r>
+          </a:p>
+          <a:p>
+            <a:r>
+              <a:rPr lang="en-IN" sz="1100" b="1" dirty="0">
+                <a:latin typeface="Poppins" panose="00000500000000000000" pitchFamily="2" charset="0"/>
+                <a:cs typeface="Poppins" panose="00000500000000000000" pitchFamily="2" charset="0"/>
+              </a:rPr>
+              <a:t>Data Management</a:t>
+            </a:r>
+            <a:r>
+              <a:rPr lang="en-IN" sz="1100" dirty="0">
+                <a:latin typeface="Poppins" panose="00000500000000000000" pitchFamily="2" charset="0"/>
+                <a:cs typeface="Poppins" panose="00000500000000000000" pitchFamily="2" charset="0"/>
+              </a:rPr>
+              <a:t>: </a:t>
+            </a:r>
+            <a:r>
+              <a:rPr lang="en-IN" sz="1100" b="1" dirty="0">
+                <a:latin typeface="Poppins" panose="00000500000000000000" pitchFamily="2" charset="0"/>
+                <a:cs typeface="Poppins" panose="00000500000000000000" pitchFamily="2" charset="0"/>
+              </a:rPr>
+              <a:t>PostgreSQL</a:t>
+            </a:r>
+            <a:r>
+              <a:rPr lang="en-IN" sz="1100" dirty="0">
+                <a:latin typeface="Poppins" panose="00000500000000000000" pitchFamily="2" charset="0"/>
+                <a:cs typeface="Poppins" panose="00000500000000000000" pitchFamily="2" charset="0"/>
+              </a:rPr>
+              <a:t> for relational storage, </a:t>
+            </a:r>
+            <a:r>
+              <a:rPr lang="en-IN" sz="1100" b="1" dirty="0">
+                <a:latin typeface="Poppins" panose="00000500000000000000" pitchFamily="2" charset="0"/>
+                <a:cs typeface="Poppins" panose="00000500000000000000" pitchFamily="2" charset="0"/>
+              </a:rPr>
+              <a:t>Redis</a:t>
+            </a:r>
+            <a:r>
+              <a:rPr lang="en-IN" sz="1100" dirty="0">
+                <a:latin typeface="Poppins" panose="00000500000000000000" pitchFamily="2" charset="0"/>
+                <a:cs typeface="Poppins" panose="00000500000000000000" pitchFamily="2" charset="0"/>
+              </a:rPr>
+              <a:t> for caching, and </a:t>
+            </a:r>
+            <a:r>
+              <a:rPr lang="en-IN" sz="1100" b="1" dirty="0">
+                <a:latin typeface="Poppins" panose="00000500000000000000" pitchFamily="2" charset="0"/>
+                <a:cs typeface="Poppins" panose="00000500000000000000" pitchFamily="2" charset="0"/>
+              </a:rPr>
+              <a:t>RabbitMQ/Celery</a:t>
+            </a:r>
+            <a:r>
+              <a:rPr lang="en-IN" sz="1100" dirty="0">
+                <a:latin typeface="Poppins" panose="00000500000000000000" pitchFamily="2" charset="0"/>
+                <a:cs typeface="Poppins" panose="00000500000000000000" pitchFamily="2" charset="0"/>
+              </a:rPr>
+              <a:t> for asynchronous task queuing.</a:t>
+            </a:r>
+          </a:p>
+          <a:p>
+            <a:r>
+              <a:rPr lang="en-IN" sz="1100" b="1" dirty="0">
+                <a:latin typeface="Poppins" panose="00000500000000000000" pitchFamily="2" charset="0"/>
+                <a:cs typeface="Poppins" panose="00000500000000000000" pitchFamily="2" charset="0"/>
+              </a:rPr>
+              <a:t>Server Ops</a:t>
+            </a:r>
+            <a:r>
+              <a:rPr lang="en-IN" sz="1100" dirty="0">
+                <a:latin typeface="Poppins" panose="00000500000000000000" pitchFamily="2" charset="0"/>
+                <a:cs typeface="Poppins" panose="00000500000000000000" pitchFamily="2" charset="0"/>
+              </a:rPr>
+              <a:t>: </a:t>
+            </a:r>
+            <a:r>
+              <a:rPr lang="en-IN" sz="1100" b="1" dirty="0">
+                <a:latin typeface="Poppins" panose="00000500000000000000" pitchFamily="2" charset="0"/>
+                <a:cs typeface="Poppins" panose="00000500000000000000" pitchFamily="2" charset="0"/>
+              </a:rPr>
+              <a:t>Nginx</a:t>
+            </a:r>
+            <a:r>
+              <a:rPr lang="en-IN" sz="1100" dirty="0">
+                <a:latin typeface="Poppins" panose="00000500000000000000" pitchFamily="2" charset="0"/>
+                <a:cs typeface="Poppins" panose="00000500000000000000" pitchFamily="2" charset="0"/>
+              </a:rPr>
+              <a:t> for reverse proxy/HTTPS, with </a:t>
+            </a:r>
+            <a:r>
+              <a:rPr lang="en-IN" sz="1100" b="1" dirty="0">
+                <a:latin typeface="Poppins" panose="00000500000000000000" pitchFamily="2" charset="0"/>
+                <a:cs typeface="Poppins" panose="00000500000000000000" pitchFamily="2" charset="0"/>
+              </a:rPr>
+              <a:t>Docker</a:t>
+            </a:r>
+            <a:r>
+              <a:rPr lang="en-IN" sz="1100" dirty="0">
+                <a:latin typeface="Poppins" panose="00000500000000000000" pitchFamily="2" charset="0"/>
+                <a:cs typeface="Poppins" panose="00000500000000000000" pitchFamily="2" charset="0"/>
+              </a:rPr>
+              <a:t> and </a:t>
+            </a:r>
+            <a:r>
+              <a:rPr lang="en-IN" sz="1100" b="1" dirty="0">
+                <a:latin typeface="Poppins" panose="00000500000000000000" pitchFamily="2" charset="0"/>
+                <a:cs typeface="Poppins" panose="00000500000000000000" pitchFamily="2" charset="0"/>
+              </a:rPr>
+              <a:t>GitHub Actions</a:t>
+            </a:r>
+            <a:r>
+              <a:rPr lang="en-IN" sz="1100" dirty="0">
+                <a:latin typeface="Poppins" panose="00000500000000000000" pitchFamily="2" charset="0"/>
+                <a:cs typeface="Poppins" panose="00000500000000000000" pitchFamily="2" charset="0"/>
+              </a:rPr>
+              <a:t> handling containerized CI/CD.</a:t>
+            </a:r>
+          </a:p>
+          <a:p>
+            <a:endParaRPr lang="en-IN" sz="1100" b="1" dirty="0">
+              <a:latin typeface="Poppins" panose="00000500000000000000" pitchFamily="2" charset="0"/>
+              <a:cs typeface="Poppins" panose="00000500000000000000" pitchFamily="2" charset="0"/>
+            </a:endParaRPr>
+          </a:p>
+          <a:p>
+            <a:r>
+              <a:rPr lang="en-IN" sz="1100" b="1" dirty="0">
+                <a:latin typeface="Poppins" panose="00000500000000000000" pitchFamily="2" charset="0"/>
+                <a:cs typeface="Poppins" panose="00000500000000000000" pitchFamily="2" charset="0"/>
+              </a:rPr>
+              <a:t>AI, ML &amp; Agent Orchestration</a:t>
+            </a:r>
+          </a:p>
+          <a:p>
+            <a:r>
+              <a:rPr lang="en-IN" sz="1100" b="1" dirty="0">
+                <a:latin typeface="Poppins" panose="00000500000000000000" pitchFamily="2" charset="0"/>
+                <a:cs typeface="Poppins" panose="00000500000000000000" pitchFamily="2" charset="0"/>
+              </a:rPr>
+              <a:t>Intelligence Engines</a:t>
+            </a:r>
+            <a:r>
+              <a:rPr lang="en-IN" sz="1100" dirty="0">
+                <a:latin typeface="Poppins" panose="00000500000000000000" pitchFamily="2" charset="0"/>
+                <a:cs typeface="Poppins" panose="00000500000000000000" pitchFamily="2" charset="0"/>
+              </a:rPr>
+              <a:t>: </a:t>
+            </a:r>
+            <a:r>
+              <a:rPr lang="en-IN" sz="1100" b="1" dirty="0" err="1">
+                <a:latin typeface="Poppins" panose="00000500000000000000" pitchFamily="2" charset="0"/>
+                <a:cs typeface="Poppins" panose="00000500000000000000" pitchFamily="2" charset="0"/>
+              </a:rPr>
+              <a:t>LangGraph</a:t>
+            </a:r>
+            <a:r>
+              <a:rPr lang="en-IN" sz="1100" dirty="0">
+                <a:latin typeface="Poppins" panose="00000500000000000000" pitchFamily="2" charset="0"/>
+                <a:cs typeface="Poppins" panose="00000500000000000000" pitchFamily="2" charset="0"/>
+              </a:rPr>
+              <a:t> for agent workflows and </a:t>
+            </a:r>
+            <a:r>
+              <a:rPr lang="en-IN" sz="1100" b="1" dirty="0" err="1">
+                <a:latin typeface="Poppins" panose="00000500000000000000" pitchFamily="2" charset="0"/>
+                <a:cs typeface="Poppins" panose="00000500000000000000" pitchFamily="2" charset="0"/>
+              </a:rPr>
+              <a:t>LangChain</a:t>
+            </a:r>
+            <a:r>
+              <a:rPr lang="en-IN" sz="1100" dirty="0">
+                <a:latin typeface="Poppins" panose="00000500000000000000" pitchFamily="2" charset="0"/>
+                <a:cs typeface="Poppins" panose="00000500000000000000" pitchFamily="2" charset="0"/>
+              </a:rPr>
+              <a:t> for LLM/prompt management.</a:t>
+            </a:r>
+          </a:p>
+          <a:p>
+            <a:r>
+              <a:rPr lang="en-IN" sz="1100" b="1" dirty="0">
+                <a:latin typeface="Poppins" panose="00000500000000000000" pitchFamily="2" charset="0"/>
+                <a:cs typeface="Poppins" panose="00000500000000000000" pitchFamily="2" charset="0"/>
+              </a:rPr>
+              <a:t>Models</a:t>
+            </a:r>
+            <a:r>
+              <a:rPr lang="en-IN" sz="1100" dirty="0">
+                <a:latin typeface="Poppins" panose="00000500000000000000" pitchFamily="2" charset="0"/>
+                <a:cs typeface="Poppins" panose="00000500000000000000" pitchFamily="2" charset="0"/>
+              </a:rPr>
+              <a:t>: </a:t>
+            </a:r>
+            <a:r>
+              <a:rPr lang="en-IN" sz="1100" b="1" dirty="0" err="1">
+                <a:latin typeface="Poppins" panose="00000500000000000000" pitchFamily="2" charset="0"/>
+                <a:cs typeface="Poppins" panose="00000500000000000000" pitchFamily="2" charset="0"/>
+              </a:rPr>
+              <a:t>Groq</a:t>
+            </a:r>
+            <a:r>
+              <a:rPr lang="en-IN" sz="1100" b="1" dirty="0">
+                <a:latin typeface="Poppins" panose="00000500000000000000" pitchFamily="2" charset="0"/>
+                <a:cs typeface="Poppins" panose="00000500000000000000" pitchFamily="2" charset="0"/>
+              </a:rPr>
+              <a:t> (Llama 3.3 70B)</a:t>
+            </a:r>
+            <a:r>
+              <a:rPr lang="en-IN" sz="1100" dirty="0">
+                <a:latin typeface="Poppins" panose="00000500000000000000" pitchFamily="2" charset="0"/>
+                <a:cs typeface="Poppins" panose="00000500000000000000" pitchFamily="2" charset="0"/>
+              </a:rPr>
+              <a:t> for open-source speed or </a:t>
+            </a:r>
+            <a:r>
+              <a:rPr lang="en-IN" sz="1100" b="1" dirty="0">
+                <a:latin typeface="Poppins" panose="00000500000000000000" pitchFamily="2" charset="0"/>
+                <a:cs typeface="Poppins" panose="00000500000000000000" pitchFamily="2" charset="0"/>
+              </a:rPr>
+              <a:t>OpenAI (GPT-4o)</a:t>
+            </a:r>
+            <a:r>
+              <a:rPr lang="en-IN" sz="1100" dirty="0">
+                <a:latin typeface="Poppins" panose="00000500000000000000" pitchFamily="2" charset="0"/>
+                <a:cs typeface="Poppins" panose="00000500000000000000" pitchFamily="2" charset="0"/>
+              </a:rPr>
+              <a:t> for complex reasoning.</a:t>
+            </a:r>
+          </a:p>
+          <a:p>
+            <a:r>
+              <a:rPr lang="en-IN" sz="1100" b="1" dirty="0">
+                <a:latin typeface="Poppins" panose="00000500000000000000" pitchFamily="2" charset="0"/>
+                <a:cs typeface="Poppins" panose="00000500000000000000" pitchFamily="2" charset="0"/>
+              </a:rPr>
+              <a:t>Data Science</a:t>
+            </a:r>
+            <a:r>
+              <a:rPr lang="en-IN" sz="1100" dirty="0">
+                <a:latin typeface="Poppins" panose="00000500000000000000" pitchFamily="2" charset="0"/>
+                <a:cs typeface="Poppins" panose="00000500000000000000" pitchFamily="2" charset="0"/>
+              </a:rPr>
+              <a:t>: </a:t>
+            </a:r>
+            <a:r>
+              <a:rPr lang="en-IN" sz="1100" b="1" dirty="0">
+                <a:latin typeface="Poppins" panose="00000500000000000000" pitchFamily="2" charset="0"/>
+                <a:cs typeface="Poppins" panose="00000500000000000000" pitchFamily="2" charset="0"/>
+              </a:rPr>
+              <a:t>Scikit-learn</a:t>
+            </a:r>
+            <a:r>
+              <a:rPr lang="en-IN" sz="1100" dirty="0">
+                <a:latin typeface="Poppins" panose="00000500000000000000" pitchFamily="2" charset="0"/>
+                <a:cs typeface="Poppins" panose="00000500000000000000" pitchFamily="2" charset="0"/>
+              </a:rPr>
+              <a:t> for Isolation Forest anomaly detection and </a:t>
+            </a:r>
+            <a:r>
+              <a:rPr lang="en-IN" sz="1100" b="1" dirty="0">
+                <a:latin typeface="Poppins" panose="00000500000000000000" pitchFamily="2" charset="0"/>
+                <a:cs typeface="Poppins" panose="00000500000000000000" pitchFamily="2" charset="0"/>
+              </a:rPr>
+              <a:t>Pandas</a:t>
+            </a:r>
+            <a:r>
+              <a:rPr lang="en-IN" sz="1100" dirty="0">
+                <a:latin typeface="Poppins" panose="00000500000000000000" pitchFamily="2" charset="0"/>
+                <a:cs typeface="Poppins" panose="00000500000000000000" pitchFamily="2" charset="0"/>
+              </a:rPr>
+              <a:t> for feature engineering.</a:t>
+            </a:r>
+          </a:p>
+          <a:p>
+            <a:endParaRPr lang="en-IN" sz="1100" b="1" dirty="0">
+              <a:latin typeface="Poppins" panose="00000500000000000000" pitchFamily="2" charset="0"/>
+              <a:cs typeface="Poppins" panose="00000500000000000000" pitchFamily="2" charset="0"/>
+            </a:endParaRPr>
+          </a:p>
+          <a:p>
+            <a:r>
+              <a:rPr lang="en-IN" sz="1100" b="1" dirty="0">
+                <a:latin typeface="Poppins" panose="00000500000000000000" pitchFamily="2" charset="0"/>
+                <a:cs typeface="Poppins" panose="00000500000000000000" pitchFamily="2" charset="0"/>
+              </a:rPr>
+              <a:t>Browser Extension (Manifest V3)</a:t>
+            </a:r>
+          </a:p>
+          <a:p>
+            <a:r>
+              <a:rPr lang="en-IN" sz="1100" b="1" dirty="0">
+                <a:latin typeface="Poppins" panose="00000500000000000000" pitchFamily="2" charset="0"/>
+                <a:cs typeface="Poppins" panose="00000500000000000000" pitchFamily="2" charset="0"/>
+              </a:rPr>
+              <a:t>Core Standard</a:t>
+            </a:r>
+            <a:r>
+              <a:rPr lang="en-IN" sz="1100" dirty="0">
+                <a:latin typeface="Poppins" panose="00000500000000000000" pitchFamily="2" charset="0"/>
+                <a:cs typeface="Poppins" panose="00000500000000000000" pitchFamily="2" charset="0"/>
+              </a:rPr>
+              <a:t>: Built on </a:t>
+            </a:r>
+            <a:r>
+              <a:rPr lang="en-IN" sz="1100" b="1" dirty="0">
+                <a:latin typeface="Poppins" panose="00000500000000000000" pitchFamily="2" charset="0"/>
+                <a:cs typeface="Poppins" panose="00000500000000000000" pitchFamily="2" charset="0"/>
+              </a:rPr>
+              <a:t>JavaScript (ES2022)</a:t>
+            </a:r>
+            <a:r>
+              <a:rPr lang="en-IN" sz="1100" dirty="0">
+                <a:latin typeface="Poppins" panose="00000500000000000000" pitchFamily="2" charset="0"/>
+                <a:cs typeface="Poppins" panose="00000500000000000000" pitchFamily="2" charset="0"/>
+              </a:rPr>
+              <a:t> using the </a:t>
+            </a:r>
+            <a:r>
+              <a:rPr lang="en-IN" sz="1100" b="1" dirty="0">
+                <a:latin typeface="Poppins" panose="00000500000000000000" pitchFamily="2" charset="0"/>
+                <a:cs typeface="Poppins" panose="00000500000000000000" pitchFamily="2" charset="0"/>
+              </a:rPr>
+              <a:t>Chrome Manifest V3</a:t>
+            </a:r>
+            <a:r>
+              <a:rPr lang="en-IN" sz="1100" dirty="0">
+                <a:latin typeface="Poppins" panose="00000500000000000000" pitchFamily="2" charset="0"/>
+                <a:cs typeface="Poppins" panose="00000500000000000000" pitchFamily="2" charset="0"/>
+              </a:rPr>
+              <a:t> standard.</a:t>
+            </a:r>
+          </a:p>
+          <a:p>
+            <a:r>
+              <a:rPr lang="en-IN" sz="1100" b="1" dirty="0">
+                <a:latin typeface="Poppins" panose="00000500000000000000" pitchFamily="2" charset="0"/>
+                <a:cs typeface="Poppins" panose="00000500000000000000" pitchFamily="2" charset="0"/>
+              </a:rPr>
+              <a:t>Monitoring</a:t>
+            </a:r>
+            <a:r>
+              <a:rPr lang="en-IN" sz="1100" dirty="0">
+                <a:latin typeface="Poppins" panose="00000500000000000000" pitchFamily="2" charset="0"/>
+                <a:cs typeface="Poppins" panose="00000500000000000000" pitchFamily="2" charset="0"/>
+              </a:rPr>
+              <a:t>: </a:t>
+            </a:r>
+            <a:r>
+              <a:rPr lang="en-IN" sz="1100" b="1" dirty="0" err="1">
+                <a:latin typeface="Poppins" panose="00000500000000000000" pitchFamily="2" charset="0"/>
+                <a:cs typeface="Poppins" panose="00000500000000000000" pitchFamily="2" charset="0"/>
+              </a:rPr>
+              <a:t>chrome.tabs</a:t>
+            </a:r>
+            <a:r>
+              <a:rPr lang="en-IN" sz="1100" dirty="0">
+                <a:latin typeface="Poppins" panose="00000500000000000000" pitchFamily="2" charset="0"/>
+                <a:cs typeface="Poppins" panose="00000500000000000000" pitchFamily="2" charset="0"/>
+              </a:rPr>
+              <a:t> and </a:t>
+            </a:r>
+            <a:r>
+              <a:rPr lang="en-IN" sz="1100" b="1" dirty="0" err="1">
+                <a:latin typeface="Poppins" panose="00000500000000000000" pitchFamily="2" charset="0"/>
+                <a:cs typeface="Poppins" panose="00000500000000000000" pitchFamily="2" charset="0"/>
+              </a:rPr>
+              <a:t>chrome.idle</a:t>
+            </a:r>
+            <a:r>
+              <a:rPr lang="en-IN" sz="1100" dirty="0">
+                <a:latin typeface="Poppins" panose="00000500000000000000" pitchFamily="2" charset="0"/>
+                <a:cs typeface="Poppins" panose="00000500000000000000" pitchFamily="2" charset="0"/>
+              </a:rPr>
+              <a:t> APIs for tracking tab events and user activity.</a:t>
+            </a:r>
+          </a:p>
+          <a:p>
+            <a:r>
+              <a:rPr lang="en-IN" sz="1100" b="1" dirty="0">
+                <a:latin typeface="Poppins" panose="00000500000000000000" pitchFamily="2" charset="0"/>
+                <a:cs typeface="Poppins" panose="00000500000000000000" pitchFamily="2" charset="0"/>
+              </a:rPr>
+              <a:t>Reliability</a:t>
+            </a:r>
+            <a:r>
+              <a:rPr lang="en-IN" sz="1100" dirty="0">
+                <a:latin typeface="Poppins" panose="00000500000000000000" pitchFamily="2" charset="0"/>
+                <a:cs typeface="Poppins" panose="00000500000000000000" pitchFamily="2" charset="0"/>
+              </a:rPr>
+              <a:t>: </a:t>
+            </a:r>
+            <a:r>
+              <a:rPr lang="en-IN" sz="1100" b="1" dirty="0" err="1">
+                <a:latin typeface="Poppins" panose="00000500000000000000" pitchFamily="2" charset="0"/>
+                <a:cs typeface="Poppins" panose="00000500000000000000" pitchFamily="2" charset="0"/>
+              </a:rPr>
+              <a:t>chrome.storage</a:t>
+            </a:r>
+            <a:r>
+              <a:rPr lang="en-IN" sz="1100" dirty="0">
+                <a:latin typeface="Poppins" panose="00000500000000000000" pitchFamily="2" charset="0"/>
+                <a:cs typeface="Poppins" panose="00000500000000000000" pitchFamily="2" charset="0"/>
+              </a:rPr>
+              <a:t> for local event buffering to prevent data loss.</a:t>
+            </a:r>
+          </a:p>
+          <a:p>
+            <a:endParaRPr lang="en-IN" sz="1100" b="1" dirty="0">
+              <a:latin typeface="Poppins" panose="00000500000000000000" pitchFamily="2" charset="0"/>
+              <a:cs typeface="Poppins" panose="00000500000000000000" pitchFamily="2" charset="0"/>
+            </a:endParaRPr>
+          </a:p>
+          <a:p>
+            <a:r>
+              <a:rPr lang="en-IN" sz="1100" b="1" dirty="0">
+                <a:latin typeface="Poppins" panose="00000500000000000000" pitchFamily="2" charset="0"/>
+                <a:cs typeface="Poppins" panose="00000500000000000000" pitchFamily="2" charset="0"/>
+              </a:rPr>
+              <a:t>Reporting &amp; Integrations</a:t>
+            </a:r>
+          </a:p>
+          <a:p>
+            <a:r>
+              <a:rPr lang="en-IN" sz="1100" b="1" dirty="0">
+                <a:latin typeface="Poppins" panose="00000500000000000000" pitchFamily="2" charset="0"/>
+                <a:cs typeface="Poppins" panose="00000500000000000000" pitchFamily="2" charset="0"/>
+              </a:rPr>
+              <a:t>Notifications</a:t>
+            </a:r>
+            <a:r>
+              <a:rPr lang="en-IN" sz="1100" dirty="0">
+                <a:latin typeface="Poppins" panose="00000500000000000000" pitchFamily="2" charset="0"/>
+                <a:cs typeface="Poppins" panose="00000500000000000000" pitchFamily="2" charset="0"/>
+              </a:rPr>
+              <a:t>: Native support for </a:t>
+            </a:r>
+            <a:r>
+              <a:rPr lang="en-IN" sz="1100" b="1" dirty="0">
+                <a:latin typeface="Poppins" panose="00000500000000000000" pitchFamily="2" charset="0"/>
+                <a:cs typeface="Poppins" panose="00000500000000000000" pitchFamily="2" charset="0"/>
+              </a:rPr>
+              <a:t>Microsoft Teams</a:t>
+            </a:r>
+            <a:r>
+              <a:rPr lang="en-IN" sz="1100" dirty="0">
+                <a:latin typeface="Poppins" panose="00000500000000000000" pitchFamily="2" charset="0"/>
+                <a:cs typeface="Poppins" panose="00000500000000000000" pitchFamily="2" charset="0"/>
+              </a:rPr>
+              <a:t> and </a:t>
+            </a:r>
+            <a:r>
+              <a:rPr lang="en-IN" sz="1100" b="1" dirty="0">
+                <a:latin typeface="Poppins" panose="00000500000000000000" pitchFamily="2" charset="0"/>
+                <a:cs typeface="Poppins" panose="00000500000000000000" pitchFamily="2" charset="0"/>
+              </a:rPr>
+              <a:t>Slack</a:t>
+            </a:r>
+            <a:r>
+              <a:rPr lang="en-IN" sz="1100" dirty="0">
+                <a:latin typeface="Poppins" panose="00000500000000000000" pitchFamily="2" charset="0"/>
+                <a:cs typeface="Poppins" panose="00000500000000000000" pitchFamily="2" charset="0"/>
+              </a:rPr>
+              <a:t> via incoming webhooks.</a:t>
+            </a:r>
+          </a:p>
+          <a:p>
+            <a:r>
+              <a:rPr lang="en-IN" sz="1100" b="1" dirty="0">
+                <a:latin typeface="Poppins" panose="00000500000000000000" pitchFamily="2" charset="0"/>
+                <a:cs typeface="Poppins" panose="00000500000000000000" pitchFamily="2" charset="0"/>
+              </a:rPr>
+              <a:t>Documentation</a:t>
+            </a:r>
+            <a:r>
+              <a:rPr lang="en-IN" sz="1100" dirty="0">
+                <a:latin typeface="Poppins" panose="00000500000000000000" pitchFamily="2" charset="0"/>
+                <a:cs typeface="Poppins" panose="00000500000000000000" pitchFamily="2" charset="0"/>
+              </a:rPr>
+              <a:t>: </a:t>
+            </a:r>
+            <a:r>
+              <a:rPr lang="en-IN" sz="1100" b="1" dirty="0" err="1">
+                <a:latin typeface="Poppins" panose="00000500000000000000" pitchFamily="2" charset="0"/>
+                <a:cs typeface="Poppins" panose="00000500000000000000" pitchFamily="2" charset="0"/>
+              </a:rPr>
+              <a:t>WeasyPrint</a:t>
+            </a:r>
+            <a:r>
+              <a:rPr lang="en-IN" sz="1100" dirty="0">
+                <a:latin typeface="Poppins" panose="00000500000000000000" pitchFamily="2" charset="0"/>
+                <a:cs typeface="Poppins" panose="00000500000000000000" pitchFamily="2" charset="0"/>
+              </a:rPr>
+              <a:t> and </a:t>
+            </a:r>
+            <a:r>
+              <a:rPr lang="en-IN" sz="1100" b="1" dirty="0">
+                <a:latin typeface="Poppins" panose="00000500000000000000" pitchFamily="2" charset="0"/>
+                <a:cs typeface="Poppins" panose="00000500000000000000" pitchFamily="2" charset="0"/>
+              </a:rPr>
+              <a:t>Jinja2</a:t>
+            </a:r>
+            <a:r>
+              <a:rPr lang="en-IN" sz="1100" dirty="0">
+                <a:latin typeface="Poppins" panose="00000500000000000000" pitchFamily="2" charset="0"/>
+                <a:cs typeface="Poppins" panose="00000500000000000000" pitchFamily="2" charset="0"/>
+              </a:rPr>
+              <a:t> for generating automated PDF compliance reports.</a:t>
+            </a:r>
+          </a:p>
+        </p:txBody>
+      </p:sp>
     </p:spTree>
   </p:cSld>
   <p:clrMapOvr>
@@ -9513,11 +11255,11 @@
 </file>
 
 <file path=ppt/slides/slide9.xml><?xml version="1.0" encoding="utf-8"?>
-<p:sld xmlns:a="http://schemas.openxmlformats.org/drawingml/2006/main" xmlns:r="http://schemas.openxmlformats.org/officeDocument/2006/relationships" xmlns:mc="http://schemas.openxmlformats.org/markup-compatibility/2006" xmlns:mv="urn:schemas-microsoft-com:mac:vml" xmlns:p="http://schemas.openxmlformats.org/presentationml/2006/main" xmlns:c="http://schemas.openxmlformats.org/drawingml/2006/chart" xmlns:dgm="http://schemas.openxmlformats.org/drawingml/2006/diagram" xmlns:o="urn:schemas-microsoft-com:office:office" xmlns:v="urn:schemas-microsoft-com:vml" xmlns:pvml="urn:schemas-microsoft-com:office:powerpoint" xmlns:com="http://schemas.openxmlformats.org/drawingml/2006/compatibility" xmlns:p14="http://schemas.microsoft.com/office/powerpoint/2010/main" xmlns:p15="http://schemas.microsoft.com/office/powerpoint/2012/main" xmlns:ahyp="http://schemas.microsoft.com/office/drawing/2018/hyperlinkcolor">
+<p:sld xmlns:a="http://schemas.openxmlformats.org/drawingml/2006/main" xmlns:r="http://schemas.openxmlformats.org/officeDocument/2006/relationships" xmlns:p="http://schemas.openxmlformats.org/presentationml/2006/main">
   <p:cSld>
     <p:spTree>
       <p:nvGrpSpPr>
-        <p:cNvPr id="119" name="Shape 119"/>
+        <p:cNvPr id="1" name="Shape 119"/>
         <p:cNvGrpSpPr/>
         <p:nvPr/>
       </p:nvGrpSpPr>
@@ -9532,14 +11274,16 @@
       <p:sp>
         <p:nvSpPr>
           <p:cNvPr id="120" name="Google Shape;120;p21"/>
-          <p:cNvSpPr txBox="1"/>
+          <p:cNvSpPr txBox="1">
+            <a:spLocks noGrp="1"/>
+          </p:cNvSpPr>
           <p:nvPr>
             <p:ph type="ctrTitle"/>
           </p:nvPr>
         </p:nvSpPr>
         <p:spPr>
           <a:xfrm>
-            <a:off x="311700" y="744575"/>
+            <a:off x="311700" y="576392"/>
             <a:ext cx="8520600" cy="447600"/>
           </a:xfrm>
           <a:prstGeom prst="rect">
@@ -9547,12 +11291,12 @@
           </a:prstGeom>
         </p:spPr>
         <p:txBody>
-          <a:bodyPr anchorCtr="0" anchor="b" bIns="91425" lIns="91425" spcFirstLastPara="1" rIns="91425" wrap="square" tIns="91425">
+          <a:bodyPr spcFirstLastPara="1" wrap="square" lIns="91425" tIns="91425" rIns="91425" bIns="91425" anchor="b" anchorCtr="0">
             <a:normAutofit/>
           </a:bodyPr>
           <a:lstStyle/>
           <a:p>
-            <a:pPr indent="0" lvl="0" marL="0" rtl="0" algn="l">
+            <a:pPr marL="0" lvl="0" indent="0" algn="l" rtl="0">
               <a:spcBef>
                 <a:spcPts val="0"/>
               </a:spcBef>
@@ -9563,7 +11307,7 @@
               <a:buNone/>
             </a:pPr>
             <a:r>
-              <a:rPr b="1" lang="en-GB" sz="1620">
+              <a:rPr lang="en-GB" sz="1620" b="1" dirty="0">
                 <a:latin typeface="Poppins"/>
                 <a:ea typeface="Poppins"/>
                 <a:cs typeface="Poppins"/>
@@ -9571,57 +11315,7 @@
               </a:rPr>
               <a:t>Usage of AMD Products/Solutions</a:t>
             </a:r>
-            <a:endParaRPr b="1" sz="1620">
-              <a:latin typeface="Poppins"/>
-              <a:ea typeface="Poppins"/>
-              <a:cs typeface="Poppins"/>
-              <a:sym typeface="Poppins"/>
-            </a:endParaRPr>
-          </a:p>
-        </p:txBody>
-      </p:sp>
-      <p:sp>
-        <p:nvSpPr>
-          <p:cNvPr id="121" name="Google Shape;121;p21"/>
-          <p:cNvSpPr txBox="1"/>
-          <p:nvPr>
-            <p:ph idx="1" type="subTitle"/>
-          </p:nvPr>
-        </p:nvSpPr>
-        <p:spPr>
-          <a:xfrm>
-            <a:off x="311700" y="1249775"/>
-            <a:ext cx="8520600" cy="3525000"/>
-          </a:xfrm>
-          <a:prstGeom prst="rect">
-            <a:avLst/>
-          </a:prstGeom>
-        </p:spPr>
-        <p:txBody>
-          <a:bodyPr anchorCtr="0" anchor="t" bIns="91425" lIns="91425" spcFirstLastPara="1" rIns="91425" wrap="square" tIns="91425">
-            <a:normAutofit/>
-          </a:bodyPr>
-          <a:lstStyle/>
-          <a:p>
-            <a:pPr indent="0" lvl="0" marL="0" rtl="0" algn="l">
-              <a:spcBef>
-                <a:spcPts val="0"/>
-              </a:spcBef>
-              <a:spcAft>
-                <a:spcPts val="0"/>
-              </a:spcAft>
-              <a:buNone/>
-            </a:pPr>
-            <a:r>
-              <a:rPr lang="en-GB" sz="1300">
-                <a:latin typeface="Poppins"/>
-                <a:ea typeface="Poppins"/>
-                <a:cs typeface="Poppins"/>
-                <a:sym typeface="Poppins"/>
-              </a:rPr>
-              <a:t>Type here</a:t>
-            </a:r>
-            <a:endParaRPr sz="1300">
+            <a:endParaRPr sz="1620" b="1" dirty="0">
               <a:latin typeface="Poppins"/>
               <a:ea typeface="Poppins"/>
               <a:cs typeface="Poppins"/>
@@ -9640,7 +11334,7 @@
           <a:blip r:embed="rId3">
             <a:alphaModFix/>
           </a:blip>
-          <a:srcRect b="89082" l="0" r="0" t="0"/>
+          <a:srcRect b="89082"/>
           <a:stretch/>
         </p:blipFill>
         <p:spPr>
@@ -9667,7 +11361,7 @@
           <a:blip r:embed="rId4">
             <a:alphaModFix/>
           </a:blip>
-          <a:srcRect b="0" l="0" r="0" t="98295"/>
+          <a:srcRect t="98295"/>
           <a:stretch/>
         </p:blipFill>
         <p:spPr>
@@ -9684,6 +11378,224 @@
           </a:ln>
         </p:spPr>
       </p:pic>
+      <p:sp>
+        <p:nvSpPr>
+          <p:cNvPr id="4" name="TextBox 3">
+            <a:extLst>
+              <a:ext uri="{FF2B5EF4-FFF2-40B4-BE49-F238E27FC236}">
+                <a16:creationId xmlns:a16="http://schemas.microsoft.com/office/drawing/2014/main" id="{E15AD123-B7A7-FEAA-354D-DA7191336419}"/>
+              </a:ext>
+            </a:extLst>
+          </p:cNvPr>
+          <p:cNvSpPr txBox="1"/>
+          <p:nvPr/>
+        </p:nvSpPr>
+        <p:spPr>
+          <a:xfrm>
+            <a:off x="215590" y="1009124"/>
+            <a:ext cx="8712820" cy="3970318"/>
+          </a:xfrm>
+          <a:prstGeom prst="rect">
+            <a:avLst/>
+          </a:prstGeom>
+          <a:noFill/>
+        </p:spPr>
+        <p:txBody>
+          <a:bodyPr wrap="square" rtlCol="0">
+            <a:spAutoFit/>
+          </a:bodyPr>
+          <a:lstStyle/>
+          <a:p>
+            <a:r>
+              <a:rPr lang="en-IN" sz="1200" dirty="0"/>
+              <a:t>High-Performance ML Training (AMD Instinct &amp; </a:t>
+            </a:r>
+            <a:r>
+              <a:rPr lang="en-IN" sz="1200" dirty="0" err="1"/>
+              <a:t>ROCm</a:t>
+            </a:r>
+            <a:r>
+              <a:rPr lang="en-IN" sz="1200" dirty="0"/>
+              <a:t>)</a:t>
+            </a:r>
+          </a:p>
+          <a:p>
+            <a:r>
+              <a:rPr lang="en-IN" sz="1200" dirty="0"/>
+              <a:t>Hardware: AMD Instinct MI300X/MI350X accelerators with </a:t>
+            </a:r>
+            <a:r>
+              <a:rPr lang="en-IN" sz="1200" dirty="0" err="1"/>
+              <a:t>ROCm</a:t>
+            </a:r>
+            <a:r>
+              <a:rPr lang="en-IN" sz="1200" dirty="0"/>
+              <a:t> 7.x.</a:t>
+            </a:r>
+          </a:p>
+          <a:p>
+            <a:r>
+              <a:rPr lang="en-IN" sz="1200" dirty="0"/>
+              <a:t>Impact: Achieve a 3.6x speedup in model training (18 hours reduced to 5).</a:t>
+            </a:r>
+          </a:p>
+          <a:p>
+            <a:r>
+              <a:rPr lang="en-IN" sz="1200" dirty="0"/>
+              <a:t>Efficiency: </a:t>
+            </a:r>
+            <a:r>
+              <a:rPr lang="en-IN" sz="1200" dirty="0" err="1"/>
+              <a:t>ROCm</a:t>
+            </a:r>
+            <a:r>
+              <a:rPr lang="en-IN" sz="1200" dirty="0"/>
+              <a:t> 7 delivers 3.5x faster inference and supports FP4/FP6 precision to reduce memory footprint.</a:t>
+            </a:r>
+          </a:p>
+          <a:p>
+            <a:r>
+              <a:rPr lang="en-IN" sz="1200" dirty="0"/>
+              <a:t>Value: 40–60% lower TCO compared to NVIDIA solutions for inference workloads.</a:t>
+            </a:r>
+          </a:p>
+          <a:p>
+            <a:endParaRPr lang="en-IN" sz="1200" dirty="0"/>
+          </a:p>
+          <a:p>
+            <a:r>
+              <a:rPr lang="en-IN" sz="1200" dirty="0"/>
+              <a:t>Private On-Premise AI (AMD </a:t>
+            </a:r>
+            <a:r>
+              <a:rPr lang="en-IN" sz="1200" dirty="0" err="1"/>
+              <a:t>Ryzen</a:t>
+            </a:r>
+            <a:r>
+              <a:rPr lang="en-IN" sz="1200" dirty="0"/>
+              <a:t> AI Max+)</a:t>
+            </a:r>
+          </a:p>
+          <a:p>
+            <a:r>
+              <a:rPr lang="en-IN" sz="1200" dirty="0"/>
+              <a:t>Hardware: </a:t>
+            </a:r>
+            <a:r>
+              <a:rPr lang="en-IN" sz="1200" dirty="0" err="1"/>
+              <a:t>Ryzen</a:t>
+            </a:r>
+            <a:r>
+              <a:rPr lang="en-IN" sz="1200" dirty="0"/>
+              <a:t> AI Max+ processors (Strix Halo) featuring integrated NPUs.</a:t>
+            </a:r>
+          </a:p>
+          <a:p>
+            <a:r>
+              <a:rPr lang="en-IN" sz="1200" dirty="0"/>
+              <a:t>Privacy: Enables air-gapped LLM inference (Llama 3.3 70B), ensuring zero cloud data egress.</a:t>
+            </a:r>
+          </a:p>
+          <a:p>
+            <a:r>
+              <a:rPr lang="en-IN" sz="1200" dirty="0"/>
+              <a:t>Performance: Up to 50 TOPS AI performance from the NPU; sub-200ms reasoning latency.</a:t>
+            </a:r>
+          </a:p>
+          <a:p>
+            <a:r>
+              <a:rPr lang="en-IN" sz="1200" dirty="0"/>
+              <a:t>Cost: Eliminates monthly cloud API fees (e.g., OpenAI) for complete data sovereignty.</a:t>
+            </a:r>
+          </a:p>
+          <a:p>
+            <a:endParaRPr lang="en-IN" sz="1200" dirty="0"/>
+          </a:p>
+          <a:p>
+            <a:r>
+              <a:rPr lang="en-IN" sz="1200" dirty="0"/>
+              <a:t>3. Scalable Backend (AMD EPYC Processors)</a:t>
+            </a:r>
+          </a:p>
+          <a:p>
+            <a:r>
+              <a:rPr lang="en-IN" sz="1200" dirty="0"/>
+              <a:t>Hardware: AMD EPYC 9004 (Genoa) or 9005 (Turin) Series.</a:t>
+            </a:r>
+          </a:p>
+          <a:p>
+            <a:r>
+              <a:rPr lang="en-IN" sz="1200" dirty="0"/>
+              <a:t>Capacity: A single 48-core EPYC 9454 can host all 11 backend services, including PostgreSQL, Redis, and ML detection.</a:t>
+            </a:r>
+          </a:p>
+          <a:p>
+            <a:r>
+              <a:rPr lang="en-IN" sz="1200" dirty="0"/>
+              <a:t>Optimization: 12 memory channels and AVX-512 support accelerate data processing and caching.</a:t>
+            </a:r>
+          </a:p>
+          <a:p>
+            <a:r>
+              <a:rPr lang="en-IN" sz="1200" dirty="0"/>
+              <a:t>Value: 30–40% lower cost per core compared to Intel Xeon equivalents.</a:t>
+            </a:r>
+          </a:p>
+          <a:p>
+            <a:endParaRPr lang="en-IN" sz="1200" dirty="0"/>
+          </a:p>
+          <a:p>
+            <a:r>
+              <a:rPr lang="en-IN" sz="1200" dirty="0"/>
+              <a:t>4. Future-Proofing (</a:t>
+            </a:r>
+            <a:r>
+              <a:rPr lang="en-IN" sz="1200" dirty="0" err="1"/>
+              <a:t>ROCm</a:t>
+            </a:r>
+            <a:r>
+              <a:rPr lang="en-IN" sz="1200" dirty="0"/>
+              <a:t> Distributed Training)</a:t>
+            </a:r>
+          </a:p>
+          <a:p>
+            <a:r>
+              <a:rPr lang="en-IN" sz="1200" dirty="0"/>
+              <a:t>Scale: Version 2 will utilize 8-way MI350X clusters to handle 10,000+ events per minute.</a:t>
+            </a:r>
+          </a:p>
+          <a:p>
+            <a:r>
+              <a:rPr lang="en-IN" sz="1200" dirty="0"/>
+              <a:t>Frameworks: Integration with </a:t>
+            </a:r>
+            <a:r>
+              <a:rPr lang="en-IN" sz="1200" dirty="0" err="1"/>
+              <a:t>vLLM</a:t>
+            </a:r>
+            <a:r>
+              <a:rPr lang="en-IN" sz="1200" dirty="0"/>
+              <a:t> and </a:t>
+            </a:r>
+            <a:r>
+              <a:rPr lang="en-IN" sz="1200" dirty="0" err="1"/>
+              <a:t>SGLang</a:t>
+            </a:r>
+            <a:r>
+              <a:rPr lang="en-IN" sz="1200" dirty="0"/>
+              <a:t> via </a:t>
+            </a:r>
+            <a:r>
+              <a:rPr lang="en-IN" sz="1200" dirty="0" err="1"/>
+              <a:t>ROCm</a:t>
+            </a:r>
+            <a:r>
+              <a:rPr lang="en-IN" sz="1200" dirty="0"/>
+              <a:t> 7 for distributed, multi-GPU agent reasoning.</a:t>
+            </a:r>
+          </a:p>
+        </p:txBody>
+      </p:sp>
     </p:spTree>
   </p:cSld>
   <p:clrMapOvr>
@@ -9693,7 +11605,288 @@
 </file>
 
 <file path=ppt/theme/theme1.xml><?xml version="1.0" encoding="utf-8"?>
-<a:theme xmlns:a="http://schemas.openxmlformats.org/drawingml/2006/main" xmlns:r="http://schemas.openxmlformats.org/officeDocument/2006/relationships">
+<a:theme xmlns:a="http://schemas.openxmlformats.org/drawingml/2006/main" name="Simple Light">
+  <a:themeElements>
+    <a:clrScheme name="Simple Light">
+      <a:dk1>
+        <a:srgbClr val="000000"/>
+      </a:dk1>
+      <a:lt1>
+        <a:srgbClr val="FFFFFF"/>
+      </a:lt1>
+      <a:dk2>
+        <a:srgbClr val="595959"/>
+      </a:dk2>
+      <a:lt2>
+        <a:srgbClr val="EEEEEE"/>
+      </a:lt2>
+      <a:accent1>
+        <a:srgbClr val="4285F4"/>
+      </a:accent1>
+      <a:accent2>
+        <a:srgbClr val="212121"/>
+      </a:accent2>
+      <a:accent3>
+        <a:srgbClr val="78909C"/>
+      </a:accent3>
+      <a:accent4>
+        <a:srgbClr val="FFAB40"/>
+      </a:accent4>
+      <a:accent5>
+        <a:srgbClr val="0097A7"/>
+      </a:accent5>
+      <a:accent6>
+        <a:srgbClr val="EEFF41"/>
+      </a:accent6>
+      <a:hlink>
+        <a:srgbClr val="0097A7"/>
+      </a:hlink>
+      <a:folHlink>
+        <a:srgbClr val="0097A7"/>
+      </a:folHlink>
+    </a:clrScheme>
+    <a:fontScheme name="Office">
+      <a:majorFont>
+        <a:latin typeface="Arial"/>
+        <a:ea typeface=""/>
+        <a:cs typeface=""/>
+        <a:font script="Jpan" typeface="ＭＳ Ｐゴシック"/>
+        <a:font script="Hang" typeface="맑은 고딕"/>
+        <a:font script="Hans" typeface="宋体"/>
+        <a:font script="Hant" typeface="新細明體"/>
+        <a:font script="Arab" typeface="Times New Roman"/>
+        <a:font script="Hebr" typeface="Times New Roman"/>
+        <a:font script="Thai" typeface="Angsana New"/>
+        <a:font script="Ethi" typeface="Nyala"/>
+        <a:font script="Beng" typeface="Vrinda"/>
+        <a:font script="Gujr" typeface="Shruti"/>
+        <a:font script="Khmr" typeface="MoolBoran"/>
+        <a:font script="Knda" typeface="Tunga"/>
+        <a:font script="Guru" typeface="Raavi"/>
+        <a:font script="Cans" typeface="Euphemia"/>
+        <a:font script="Cher" typeface="Plantagenet Cherokee"/>
+        <a:font script="Yiii" typeface="Microsoft Yi Baiti"/>
+        <a:font script="Tibt" typeface="Microsoft Himalaya"/>
+        <a:font script="Thaa" typeface="MV Boli"/>
+        <a:font script="Deva" typeface="Mangal"/>
+        <a:font script="Telu" typeface="Gautami"/>
+        <a:font script="Taml" typeface="Latha"/>
+        <a:font script="Syrc" typeface="Estrangelo Edessa"/>
+        <a:font script="Orya" typeface="Kalinga"/>
+        <a:font script="Mlym" typeface="Kartika"/>
+        <a:font script="Laoo" typeface="DokChampa"/>
+        <a:font script="Sinh" typeface="Iskoola Pota"/>
+        <a:font script="Mong" typeface="Mongolian Baiti"/>
+        <a:font script="Viet" typeface="Times New Roman"/>
+        <a:font script="Uigh" typeface="Microsoft Uighur"/>
+        <a:font script="Geor" typeface="Sylfaen"/>
+      </a:majorFont>
+      <a:minorFont>
+        <a:latin typeface="Arial"/>
+        <a:ea typeface=""/>
+        <a:cs typeface=""/>
+        <a:font script="Jpan" typeface="ＭＳ Ｐゴシック"/>
+        <a:font script="Hang" typeface="맑은 고딕"/>
+        <a:font script="Hans" typeface="宋体"/>
+        <a:font script="Hant" typeface="新細明體"/>
+        <a:font script="Arab" typeface="Arial"/>
+        <a:font script="Hebr" typeface="Arial"/>
+        <a:font script="Thai" typeface="Cordia New"/>
+        <a:font script="Ethi" typeface="Nyala"/>
+        <a:font script="Beng" typeface="Vrinda"/>
+        <a:font script="Gujr" typeface="Shruti"/>
+        <a:font script="Khmr" typeface="DaunPenh"/>
+        <a:font script="Knda" typeface="Tunga"/>
+        <a:font script="Guru" typeface="Raavi"/>
+        <a:font script="Cans" typeface="Euphemia"/>
+        <a:font script="Cher" typeface="Plantagenet Cherokee"/>
+        <a:font script="Yiii" typeface="Microsoft Yi Baiti"/>
+        <a:font script="Tibt" typeface="Microsoft Himalaya"/>
+        <a:font script="Thaa" typeface="MV Boli"/>
+        <a:font script="Deva" typeface="Mangal"/>
+        <a:font script="Telu" typeface="Gautami"/>
+        <a:font script="Taml" typeface="Latha"/>
+        <a:font script="Syrc" typeface="Estrangelo Edessa"/>
+        <a:font script="Orya" typeface="Kalinga"/>
+        <a:font script="Mlym" typeface="Kartika"/>
+        <a:font script="Laoo" typeface="DokChampa"/>
+        <a:font script="Sinh" typeface="Iskoola Pota"/>
+        <a:font script="Mong" typeface="Mongolian Baiti"/>
+        <a:font script="Viet" typeface="Arial"/>
+        <a:font script="Uigh" typeface="Microsoft Uighur"/>
+        <a:font script="Geor" typeface="Sylfaen"/>
+      </a:minorFont>
+    </a:fontScheme>
+    <a:fmtScheme name="Office">
+      <a:fillStyleLst>
+        <a:solidFill>
+          <a:schemeClr val="phClr"/>
+        </a:solidFill>
+        <a:gradFill rotWithShape="1">
+          <a:gsLst>
+            <a:gs pos="0">
+              <a:schemeClr val="phClr">
+                <a:tint val="50000"/>
+                <a:satMod val="300000"/>
+              </a:schemeClr>
+            </a:gs>
+            <a:gs pos="35000">
+              <a:schemeClr val="phClr">
+                <a:tint val="37000"/>
+                <a:satMod val="300000"/>
+              </a:schemeClr>
+            </a:gs>
+            <a:gs pos="100000">
+              <a:schemeClr val="phClr">
+                <a:tint val="15000"/>
+                <a:satMod val="350000"/>
+              </a:schemeClr>
+            </a:gs>
+          </a:gsLst>
+          <a:lin ang="16200000" scaled="1"/>
+        </a:gradFill>
+        <a:gradFill rotWithShape="1">
+          <a:gsLst>
+            <a:gs pos="0">
+              <a:schemeClr val="phClr">
+                <a:tint val="100000"/>
+                <a:shade val="100000"/>
+                <a:satMod val="130000"/>
+              </a:schemeClr>
+            </a:gs>
+            <a:gs pos="100000">
+              <a:schemeClr val="phClr">
+                <a:tint val="50000"/>
+                <a:shade val="100000"/>
+                <a:satMod val="350000"/>
+              </a:schemeClr>
+            </a:gs>
+          </a:gsLst>
+          <a:lin ang="16200000" scaled="0"/>
+        </a:gradFill>
+      </a:fillStyleLst>
+      <a:lnStyleLst>
+        <a:ln w="9525" cap="flat" cmpd="sng" algn="ctr">
+          <a:solidFill>
+            <a:schemeClr val="phClr">
+              <a:shade val="95000"/>
+              <a:satMod val="105000"/>
+            </a:schemeClr>
+          </a:solidFill>
+          <a:prstDash val="solid"/>
+        </a:ln>
+        <a:ln w="25400" cap="flat" cmpd="sng" algn="ctr">
+          <a:solidFill>
+            <a:schemeClr val="phClr"/>
+          </a:solidFill>
+          <a:prstDash val="solid"/>
+        </a:ln>
+        <a:ln w="38100" cap="flat" cmpd="sng" algn="ctr">
+          <a:solidFill>
+            <a:schemeClr val="phClr"/>
+          </a:solidFill>
+          <a:prstDash val="solid"/>
+        </a:ln>
+      </a:lnStyleLst>
+      <a:effectStyleLst>
+        <a:effectStyle>
+          <a:effectLst>
+            <a:outerShdw blurRad="40000" dist="20000" dir="5400000" rotWithShape="0">
+              <a:srgbClr val="000000">
+                <a:alpha val="38000"/>
+              </a:srgbClr>
+            </a:outerShdw>
+          </a:effectLst>
+        </a:effectStyle>
+        <a:effectStyle>
+          <a:effectLst>
+            <a:outerShdw blurRad="40000" dist="23000" dir="5400000" rotWithShape="0">
+              <a:srgbClr val="000000">
+                <a:alpha val="35000"/>
+              </a:srgbClr>
+            </a:outerShdw>
+          </a:effectLst>
+        </a:effectStyle>
+        <a:effectStyle>
+          <a:effectLst>
+            <a:outerShdw blurRad="40000" dist="23000" dir="5400000" rotWithShape="0">
+              <a:srgbClr val="000000">
+                <a:alpha val="35000"/>
+              </a:srgbClr>
+            </a:outerShdw>
+          </a:effectLst>
+          <a:scene3d>
+            <a:camera prst="orthographicFront">
+              <a:rot lat="0" lon="0" rev="0"/>
+            </a:camera>
+            <a:lightRig rig="threePt" dir="t">
+              <a:rot lat="0" lon="0" rev="1200000"/>
+            </a:lightRig>
+          </a:scene3d>
+          <a:sp3d>
+            <a:bevelT w="63500" h="25400"/>
+          </a:sp3d>
+        </a:effectStyle>
+      </a:effectStyleLst>
+      <a:bgFillStyleLst>
+        <a:solidFill>
+          <a:schemeClr val="phClr"/>
+        </a:solidFill>
+        <a:gradFill rotWithShape="1">
+          <a:gsLst>
+            <a:gs pos="0">
+              <a:schemeClr val="phClr">
+                <a:tint val="40000"/>
+                <a:satMod val="350000"/>
+              </a:schemeClr>
+            </a:gs>
+            <a:gs pos="40000">
+              <a:schemeClr val="phClr">
+                <a:tint val="45000"/>
+                <a:shade val="99000"/>
+                <a:satMod val="350000"/>
+              </a:schemeClr>
+            </a:gs>
+            <a:gs pos="100000">
+              <a:schemeClr val="phClr">
+                <a:shade val="20000"/>
+                <a:satMod val="255000"/>
+              </a:schemeClr>
+            </a:gs>
+          </a:gsLst>
+          <a:path path="circle">
+            <a:fillToRect l="50000" t="-80000" r="50000" b="180000"/>
+          </a:path>
+        </a:gradFill>
+        <a:gradFill rotWithShape="1">
+          <a:gsLst>
+            <a:gs pos="0">
+              <a:schemeClr val="phClr">
+                <a:tint val="80000"/>
+                <a:satMod val="300000"/>
+              </a:schemeClr>
+            </a:gs>
+            <a:gs pos="100000">
+              <a:schemeClr val="phClr">
+                <a:shade val="30000"/>
+                <a:satMod val="200000"/>
+              </a:schemeClr>
+            </a:gs>
+          </a:gsLst>
+          <a:path path="circle">
+            <a:fillToRect l="50000" t="50000" r="50000" b="50000"/>
+          </a:path>
+        </a:gradFill>
+      </a:bgFillStyleLst>
+    </a:fmtScheme>
+  </a:themeElements>
+  <a:objectDefaults/>
+  <a:extraClrSchemeLst/>
+</a:theme>
+</file>
+
+<file path=ppt/theme/theme2.xml><?xml version="1.0" encoding="utf-8"?>
+<a:theme xmlns:a="http://schemas.openxmlformats.org/drawingml/2006/main">
   <a:themeElements>
     <a:clrScheme name="Default">
       <a:dk1>
@@ -9968,284 +12161,7 @@
       </a:bgFillStyleLst>
     </a:fmtScheme>
   </a:themeElements>
-</a:theme>
-</file>
-
-<file path=ppt/theme/theme2.xml><?xml version="1.0" encoding="utf-8"?>
-<a:theme xmlns:a="http://schemas.openxmlformats.org/drawingml/2006/main" xmlns:r="http://schemas.openxmlformats.org/officeDocument/2006/relationships" name="Simple Light">
-  <a:themeElements>
-    <a:clrScheme name="Simple Light">
-      <a:dk1>
-        <a:srgbClr val="000000"/>
-      </a:dk1>
-      <a:lt1>
-        <a:srgbClr val="FFFFFF"/>
-      </a:lt1>
-      <a:dk2>
-        <a:srgbClr val="595959"/>
-      </a:dk2>
-      <a:lt2>
-        <a:srgbClr val="EEEEEE"/>
-      </a:lt2>
-      <a:accent1>
-        <a:srgbClr val="4285F4"/>
-      </a:accent1>
-      <a:accent2>
-        <a:srgbClr val="212121"/>
-      </a:accent2>
-      <a:accent3>
-        <a:srgbClr val="78909C"/>
-      </a:accent3>
-      <a:accent4>
-        <a:srgbClr val="FFAB40"/>
-      </a:accent4>
-      <a:accent5>
-        <a:srgbClr val="0097A7"/>
-      </a:accent5>
-      <a:accent6>
-        <a:srgbClr val="EEFF41"/>
-      </a:accent6>
-      <a:hlink>
-        <a:srgbClr val="0097A7"/>
-      </a:hlink>
-      <a:folHlink>
-        <a:srgbClr val="0097A7"/>
-      </a:folHlink>
-    </a:clrScheme>
-    <a:fontScheme name="Office">
-      <a:majorFont>
-        <a:latin typeface="Arial"/>
-        <a:ea typeface=""/>
-        <a:cs typeface=""/>
-        <a:font script="Jpan" typeface="ＭＳ Ｐゴシック"/>
-        <a:font script="Hang" typeface="맑은 고딕"/>
-        <a:font script="Hans" typeface="宋体"/>
-        <a:font script="Hant" typeface="新細明體"/>
-        <a:font script="Arab" typeface="Times New Roman"/>
-        <a:font script="Hebr" typeface="Times New Roman"/>
-        <a:font script="Thai" typeface="Angsana New"/>
-        <a:font script="Ethi" typeface="Nyala"/>
-        <a:font script="Beng" typeface="Vrinda"/>
-        <a:font script="Gujr" typeface="Shruti"/>
-        <a:font script="Khmr" typeface="MoolBoran"/>
-        <a:font script="Knda" typeface="Tunga"/>
-        <a:font script="Guru" typeface="Raavi"/>
-        <a:font script="Cans" typeface="Euphemia"/>
-        <a:font script="Cher" typeface="Plantagenet Cherokee"/>
-        <a:font script="Yiii" typeface="Microsoft Yi Baiti"/>
-        <a:font script="Tibt" typeface="Microsoft Himalaya"/>
-        <a:font script="Thaa" typeface="MV Boli"/>
-        <a:font script="Deva" typeface="Mangal"/>
-        <a:font script="Telu" typeface="Gautami"/>
-        <a:font script="Taml" typeface="Latha"/>
-        <a:font script="Syrc" typeface="Estrangelo Edessa"/>
-        <a:font script="Orya" typeface="Kalinga"/>
-        <a:font script="Mlym" typeface="Kartika"/>
-        <a:font script="Laoo" typeface="DokChampa"/>
-        <a:font script="Sinh" typeface="Iskoola Pota"/>
-        <a:font script="Mong" typeface="Mongolian Baiti"/>
-        <a:font script="Viet" typeface="Times New Roman"/>
-        <a:font script="Uigh" typeface="Microsoft Uighur"/>
-        <a:font script="Geor" typeface="Sylfaen"/>
-      </a:majorFont>
-      <a:minorFont>
-        <a:latin typeface="Arial"/>
-        <a:ea typeface=""/>
-        <a:cs typeface=""/>
-        <a:font script="Jpan" typeface="ＭＳ Ｐゴシック"/>
-        <a:font script="Hang" typeface="맑은 고딕"/>
-        <a:font script="Hans" typeface="宋体"/>
-        <a:font script="Hant" typeface="新細明體"/>
-        <a:font script="Arab" typeface="Arial"/>
-        <a:font script="Hebr" typeface="Arial"/>
-        <a:font script="Thai" typeface="Cordia New"/>
-        <a:font script="Ethi" typeface="Nyala"/>
-        <a:font script="Beng" typeface="Vrinda"/>
-        <a:font script="Gujr" typeface="Shruti"/>
-        <a:font script="Khmr" typeface="DaunPenh"/>
-        <a:font script="Knda" typeface="Tunga"/>
-        <a:font script="Guru" typeface="Raavi"/>
-        <a:font script="Cans" typeface="Euphemia"/>
-        <a:font script="Cher" typeface="Plantagenet Cherokee"/>
-        <a:font script="Yiii" typeface="Microsoft Yi Baiti"/>
-        <a:font script="Tibt" typeface="Microsoft Himalaya"/>
-        <a:font script="Thaa" typeface="MV Boli"/>
-        <a:font script="Deva" typeface="Mangal"/>
-        <a:font script="Telu" typeface="Gautami"/>
-        <a:font script="Taml" typeface="Latha"/>
-        <a:font script="Syrc" typeface="Estrangelo Edessa"/>
-        <a:font script="Orya" typeface="Kalinga"/>
-        <a:font script="Mlym" typeface="Kartika"/>
-        <a:font script="Laoo" typeface="DokChampa"/>
-        <a:font script="Sinh" typeface="Iskoola Pota"/>
-        <a:font script="Mong" typeface="Mongolian Baiti"/>
-        <a:font script="Viet" typeface="Arial"/>
-        <a:font script="Uigh" typeface="Microsoft Uighur"/>
-        <a:font script="Geor" typeface="Sylfaen"/>
-      </a:minorFont>
-    </a:fontScheme>
-    <a:fmtScheme name="Office">
-      <a:fillStyleLst>
-        <a:solidFill>
-          <a:schemeClr val="phClr"/>
-        </a:solidFill>
-        <a:gradFill rotWithShape="1">
-          <a:gsLst>
-            <a:gs pos="0">
-              <a:schemeClr val="phClr">
-                <a:tint val="50000"/>
-                <a:satMod val="300000"/>
-              </a:schemeClr>
-            </a:gs>
-            <a:gs pos="35000">
-              <a:schemeClr val="phClr">
-                <a:tint val="37000"/>
-                <a:satMod val="300000"/>
-              </a:schemeClr>
-            </a:gs>
-            <a:gs pos="100000">
-              <a:schemeClr val="phClr">
-                <a:tint val="15000"/>
-                <a:satMod val="350000"/>
-              </a:schemeClr>
-            </a:gs>
-          </a:gsLst>
-          <a:lin ang="16200000" scaled="1"/>
-        </a:gradFill>
-        <a:gradFill rotWithShape="1">
-          <a:gsLst>
-            <a:gs pos="0">
-              <a:schemeClr val="phClr">
-                <a:tint val="100000"/>
-                <a:shade val="100000"/>
-                <a:satMod val="130000"/>
-              </a:schemeClr>
-            </a:gs>
-            <a:gs pos="100000">
-              <a:schemeClr val="phClr">
-                <a:tint val="50000"/>
-                <a:shade val="100000"/>
-                <a:satMod val="350000"/>
-              </a:schemeClr>
-            </a:gs>
-          </a:gsLst>
-          <a:lin ang="16200000" scaled="0"/>
-        </a:gradFill>
-      </a:fillStyleLst>
-      <a:lnStyleLst>
-        <a:ln w="9525" cap="flat" cmpd="sng" algn="ctr">
-          <a:solidFill>
-            <a:schemeClr val="phClr">
-              <a:shade val="95000"/>
-              <a:satMod val="105000"/>
-            </a:schemeClr>
-          </a:solidFill>
-          <a:prstDash val="solid"/>
-        </a:ln>
-        <a:ln w="25400" cap="flat" cmpd="sng" algn="ctr">
-          <a:solidFill>
-            <a:schemeClr val="phClr"/>
-          </a:solidFill>
-          <a:prstDash val="solid"/>
-        </a:ln>
-        <a:ln w="38100" cap="flat" cmpd="sng" algn="ctr">
-          <a:solidFill>
-            <a:schemeClr val="phClr"/>
-          </a:solidFill>
-          <a:prstDash val="solid"/>
-        </a:ln>
-      </a:lnStyleLst>
-      <a:effectStyleLst>
-        <a:effectStyle>
-          <a:effectLst>
-            <a:outerShdw blurRad="40000" dist="20000" dir="5400000" rotWithShape="0">
-              <a:srgbClr val="000000">
-                <a:alpha val="38000"/>
-              </a:srgbClr>
-            </a:outerShdw>
-          </a:effectLst>
-        </a:effectStyle>
-        <a:effectStyle>
-          <a:effectLst>
-            <a:outerShdw blurRad="40000" dist="23000" dir="5400000" rotWithShape="0">
-              <a:srgbClr val="000000">
-                <a:alpha val="35000"/>
-              </a:srgbClr>
-            </a:outerShdw>
-          </a:effectLst>
-        </a:effectStyle>
-        <a:effectStyle>
-          <a:effectLst>
-            <a:outerShdw blurRad="40000" dist="23000" dir="5400000" rotWithShape="0">
-              <a:srgbClr val="000000">
-                <a:alpha val="35000"/>
-              </a:srgbClr>
-            </a:outerShdw>
-          </a:effectLst>
-          <a:scene3d>
-            <a:camera prst="orthographicFront">
-              <a:rot lat="0" lon="0" rev="0"/>
-            </a:camera>
-            <a:lightRig rig="threePt" dir="t">
-              <a:rot lat="0" lon="0" rev="1200000"/>
-            </a:lightRig>
-          </a:scene3d>
-          <a:sp3d>
-            <a:bevelT w="63500" h="25400"/>
-          </a:sp3d>
-        </a:effectStyle>
-      </a:effectStyleLst>
-      <a:bgFillStyleLst>
-        <a:solidFill>
-          <a:schemeClr val="phClr"/>
-        </a:solidFill>
-        <a:gradFill rotWithShape="1">
-          <a:gsLst>
-            <a:gs pos="0">
-              <a:schemeClr val="phClr">
-                <a:tint val="40000"/>
-                <a:satMod val="350000"/>
-              </a:schemeClr>
-            </a:gs>
-            <a:gs pos="40000">
-              <a:schemeClr val="phClr">
-                <a:tint val="45000"/>
-                <a:shade val="99000"/>
-                <a:satMod val="350000"/>
-              </a:schemeClr>
-            </a:gs>
-            <a:gs pos="100000">
-              <a:schemeClr val="phClr">
-                <a:shade val="20000"/>
-                <a:satMod val="255000"/>
-              </a:schemeClr>
-            </a:gs>
-          </a:gsLst>
-          <a:path path="circle">
-            <a:fillToRect l="50000" t="-80000" r="50000" b="180000"/>
-          </a:path>
-        </a:gradFill>
-        <a:gradFill rotWithShape="1">
-          <a:gsLst>
-            <a:gs pos="0">
-              <a:schemeClr val="phClr">
-                <a:tint val="80000"/>
-                <a:satMod val="300000"/>
-              </a:schemeClr>
-            </a:gs>
-            <a:gs pos="100000">
-              <a:schemeClr val="phClr">
-                <a:shade val="30000"/>
-                <a:satMod val="200000"/>
-              </a:schemeClr>
-            </a:gs>
-          </a:gsLst>
-          <a:path path="circle">
-            <a:fillToRect l="50000" t="50000" r="50000" b="50000"/>
-          </a:path>
-        </a:gradFill>
-      </a:bgFillStyleLst>
-    </a:fmtScheme>
-  </a:themeElements>
+  <a:objectDefaults/>
+  <a:extraClrSchemeLst/>
 </a:theme>
 </file>